--- a/decks/Micro_04_Rapid-Diagnostics-Molecular-Microbiology.pptx
+++ b/decks/Micro_04_Rapid-Diagnostics-Molecular-Microbiology.pptx
@@ -25,9 +25,14 @@
     <p:sldId id="273" r:id="rId19"/>
     <p:sldId id="274" r:id="rId20"/>
     <p:sldId id="275" r:id="rId21"/>
+    <p:sldId id="276" r:id="rId22"/>
+    <p:sldId id="277" r:id="rId23"/>
+    <p:sldId id="278" r:id="rId24"/>
+    <p:sldId id="279" r:id="rId25"/>
+    <p:sldId id="280" r:id="rId26"/>
   </p:sldIdLst>
   <p:notesMasterIdLst>
-    <p:notesMasterId r:id="rId22"/>
+    <p:notesMasterId r:id="rId27"/>
   </p:notesMasterIdLst>
   <p:sldSz cx="12191695" cy="6858000"/>
   <p:notesSz cx="6858000" cy="12191695"/>
@@ -1601,6 +1606,446 @@
             <a:fld id="{F7021451-1387-4CA6-816F-3879F97B5CBC}" type="slidenum">
               <a:rPr lang="en-US"/>
               <a:t>20</a:t>
+            </a:fld>
+            <a:endParaRPr lang="en-US"/>
+          </a:p>
+        </p:txBody>
+      </p:sp>
+    </p:spTree>
+    <p:extLst>
+      <p:ext uri="{BB962C8B-B14F-4D97-AF65-F5344CB8AC3E}">
+        <p14:creationId xmlns:p14="http://schemas.microsoft.com/office/powerpoint/2010/main" val="1024086991"/>
+      </p:ext>
+    </p:extLst>
+  </p:cSld>
+  <p:clrMapOvr>
+    <a:masterClrMapping/>
+  </p:clrMapOvr>
+</p:notes>
+</file>
+
+<file path=ppt/notesSlides/notesSlide21.xml><?xml version="1.0" encoding="utf-8"?>
+<p:notes xmlns:a="http://schemas.openxmlformats.org/drawingml/2006/main" xmlns:r="http://schemas.openxmlformats.org/officeDocument/2006/relationships" xmlns:p="http://schemas.openxmlformats.org/presentationml/2006/main">
+  <p:cSld>
+    <p:spTree>
+      <p:nvGrpSpPr>
+        <p:cNvPr id="1" name=""/>
+        <p:cNvGrpSpPr/>
+        <p:nvPr/>
+      </p:nvGrpSpPr>
+      <p:grpSpPr>
+        <a:xfrm>
+          <a:off x="0" y="0"/>
+          <a:ext cx="0" cy="0"/>
+          <a:chOff x="0" y="0"/>
+          <a:chExt cx="0" cy="0"/>
+        </a:xfrm>
+      </p:grpSpPr>
+      <p:sp>
+        <p:nvSpPr>
+          <p:cNvPr id="2" name="Slide Image Placeholder 1"/>
+          <p:cNvSpPr>
+            <a:spLocks noGrp="1" noRot="1" noChangeAspect="1"/>
+          </p:cNvSpPr>
+          <p:nvPr>
+            <p:ph type="sldImg"/>
+          </p:nvPr>
+        </p:nvSpPr>
+        <p:spPr/>
+      </p:sp>
+      <p:sp>
+        <p:nvSpPr>
+          <p:cNvPr id="3" name="Notes Placeholder 2"/>
+          <p:cNvSpPr>
+            <a:spLocks noGrp="1"/>
+          </p:cNvSpPr>
+          <p:nvPr>
+            <p:ph type="body" idx="1"/>
+          </p:nvPr>
+        </p:nvSpPr>
+        <p:spPr/>
+        <p:txBody>
+          <a:bodyPr/>
+          <a:lstStyle/>
+          <a:p>
+            <a:r>
+              <a:rPr lang="en-US" dirty="0"/>
+              <a:t/>
+            </a:r>
+            <a:endParaRPr lang="en-US" dirty="0"/>
+          </a:p>
+        </p:txBody>
+      </p:sp>
+      <p:sp>
+        <p:nvSpPr>
+          <p:cNvPr id="4" name="Slide Number Placeholder 3"/>
+          <p:cNvSpPr>
+            <a:spLocks noGrp="1"/>
+          </p:cNvSpPr>
+          <p:nvPr>
+            <p:ph type="sldNum" sz="quarter" idx="10"/>
+          </p:nvPr>
+        </p:nvSpPr>
+        <p:spPr/>
+        <p:txBody>
+          <a:bodyPr/>
+          <a:lstStyle/>
+          <a:p>
+            <a:fld id="{F7021451-1387-4CA6-816F-3879F97B5CBC}" type="slidenum">
+              <a:rPr lang="en-US"/>
+              <a:t>21</a:t>
+            </a:fld>
+            <a:endParaRPr lang="en-US"/>
+          </a:p>
+        </p:txBody>
+      </p:sp>
+    </p:spTree>
+    <p:extLst>
+      <p:ext uri="{BB962C8B-B14F-4D97-AF65-F5344CB8AC3E}">
+        <p14:creationId xmlns:p14="http://schemas.microsoft.com/office/powerpoint/2010/main" val="1024086991"/>
+      </p:ext>
+    </p:extLst>
+  </p:cSld>
+  <p:clrMapOvr>
+    <a:masterClrMapping/>
+  </p:clrMapOvr>
+</p:notes>
+</file>
+
+<file path=ppt/notesSlides/notesSlide22.xml><?xml version="1.0" encoding="utf-8"?>
+<p:notes xmlns:a="http://schemas.openxmlformats.org/drawingml/2006/main" xmlns:r="http://schemas.openxmlformats.org/officeDocument/2006/relationships" xmlns:p="http://schemas.openxmlformats.org/presentationml/2006/main">
+  <p:cSld>
+    <p:spTree>
+      <p:nvGrpSpPr>
+        <p:cNvPr id="1" name=""/>
+        <p:cNvGrpSpPr/>
+        <p:nvPr/>
+      </p:nvGrpSpPr>
+      <p:grpSpPr>
+        <a:xfrm>
+          <a:off x="0" y="0"/>
+          <a:ext cx="0" cy="0"/>
+          <a:chOff x="0" y="0"/>
+          <a:chExt cx="0" cy="0"/>
+        </a:xfrm>
+      </p:grpSpPr>
+      <p:sp>
+        <p:nvSpPr>
+          <p:cNvPr id="2" name="Slide Image Placeholder 1"/>
+          <p:cNvSpPr>
+            <a:spLocks noGrp="1" noRot="1" noChangeAspect="1"/>
+          </p:cNvSpPr>
+          <p:nvPr>
+            <p:ph type="sldImg"/>
+          </p:nvPr>
+        </p:nvSpPr>
+        <p:spPr/>
+      </p:sp>
+      <p:sp>
+        <p:nvSpPr>
+          <p:cNvPr id="3" name="Notes Placeholder 2"/>
+          <p:cNvSpPr>
+            <a:spLocks noGrp="1"/>
+          </p:cNvSpPr>
+          <p:nvPr>
+            <p:ph type="body" idx="1"/>
+          </p:nvPr>
+        </p:nvSpPr>
+        <p:spPr/>
+        <p:txBody>
+          <a:bodyPr/>
+          <a:lstStyle/>
+          <a:p>
+            <a:r>
+              <a:rPr lang="en-US" dirty="0"/>
+              <a:t/>
+            </a:r>
+            <a:endParaRPr lang="en-US" dirty="0"/>
+          </a:p>
+        </p:txBody>
+      </p:sp>
+      <p:sp>
+        <p:nvSpPr>
+          <p:cNvPr id="4" name="Slide Number Placeholder 3"/>
+          <p:cNvSpPr>
+            <a:spLocks noGrp="1"/>
+          </p:cNvSpPr>
+          <p:nvPr>
+            <p:ph type="sldNum" sz="quarter" idx="10"/>
+          </p:nvPr>
+        </p:nvSpPr>
+        <p:spPr/>
+        <p:txBody>
+          <a:bodyPr/>
+          <a:lstStyle/>
+          <a:p>
+            <a:fld id="{F7021451-1387-4CA6-816F-3879F97B5CBC}" type="slidenum">
+              <a:rPr lang="en-US"/>
+              <a:t>22</a:t>
+            </a:fld>
+            <a:endParaRPr lang="en-US"/>
+          </a:p>
+        </p:txBody>
+      </p:sp>
+    </p:spTree>
+    <p:extLst>
+      <p:ext uri="{BB962C8B-B14F-4D97-AF65-F5344CB8AC3E}">
+        <p14:creationId xmlns:p14="http://schemas.microsoft.com/office/powerpoint/2010/main" val="1024086991"/>
+      </p:ext>
+    </p:extLst>
+  </p:cSld>
+  <p:clrMapOvr>
+    <a:masterClrMapping/>
+  </p:clrMapOvr>
+</p:notes>
+</file>
+
+<file path=ppt/notesSlides/notesSlide23.xml><?xml version="1.0" encoding="utf-8"?>
+<p:notes xmlns:a="http://schemas.openxmlformats.org/drawingml/2006/main" xmlns:r="http://schemas.openxmlformats.org/officeDocument/2006/relationships" xmlns:p="http://schemas.openxmlformats.org/presentationml/2006/main">
+  <p:cSld>
+    <p:spTree>
+      <p:nvGrpSpPr>
+        <p:cNvPr id="1" name=""/>
+        <p:cNvGrpSpPr/>
+        <p:nvPr/>
+      </p:nvGrpSpPr>
+      <p:grpSpPr>
+        <a:xfrm>
+          <a:off x="0" y="0"/>
+          <a:ext cx="0" cy="0"/>
+          <a:chOff x="0" y="0"/>
+          <a:chExt cx="0" cy="0"/>
+        </a:xfrm>
+      </p:grpSpPr>
+      <p:sp>
+        <p:nvSpPr>
+          <p:cNvPr id="2" name="Slide Image Placeholder 1"/>
+          <p:cNvSpPr>
+            <a:spLocks noGrp="1" noRot="1" noChangeAspect="1"/>
+          </p:cNvSpPr>
+          <p:nvPr>
+            <p:ph type="sldImg"/>
+          </p:nvPr>
+        </p:nvSpPr>
+        <p:spPr/>
+      </p:sp>
+      <p:sp>
+        <p:nvSpPr>
+          <p:cNvPr id="3" name="Notes Placeholder 2"/>
+          <p:cNvSpPr>
+            <a:spLocks noGrp="1"/>
+          </p:cNvSpPr>
+          <p:nvPr>
+            <p:ph type="body" idx="1"/>
+          </p:nvPr>
+        </p:nvSpPr>
+        <p:spPr/>
+        <p:txBody>
+          <a:bodyPr/>
+          <a:lstStyle/>
+          <a:p>
+            <a:r>
+              <a:rPr lang="en-US" dirty="0"/>
+              <a:t/>
+            </a:r>
+            <a:endParaRPr lang="en-US" dirty="0"/>
+          </a:p>
+        </p:txBody>
+      </p:sp>
+      <p:sp>
+        <p:nvSpPr>
+          <p:cNvPr id="4" name="Slide Number Placeholder 3"/>
+          <p:cNvSpPr>
+            <a:spLocks noGrp="1"/>
+          </p:cNvSpPr>
+          <p:nvPr>
+            <p:ph type="sldNum" sz="quarter" idx="10"/>
+          </p:nvPr>
+        </p:nvSpPr>
+        <p:spPr/>
+        <p:txBody>
+          <a:bodyPr/>
+          <a:lstStyle/>
+          <a:p>
+            <a:fld id="{F7021451-1387-4CA6-816F-3879F97B5CBC}" type="slidenum">
+              <a:rPr lang="en-US"/>
+              <a:t>23</a:t>
+            </a:fld>
+            <a:endParaRPr lang="en-US"/>
+          </a:p>
+        </p:txBody>
+      </p:sp>
+    </p:spTree>
+    <p:extLst>
+      <p:ext uri="{BB962C8B-B14F-4D97-AF65-F5344CB8AC3E}">
+        <p14:creationId xmlns:p14="http://schemas.microsoft.com/office/powerpoint/2010/main" val="1024086991"/>
+      </p:ext>
+    </p:extLst>
+  </p:cSld>
+  <p:clrMapOvr>
+    <a:masterClrMapping/>
+  </p:clrMapOvr>
+</p:notes>
+</file>
+
+<file path=ppt/notesSlides/notesSlide24.xml><?xml version="1.0" encoding="utf-8"?>
+<p:notes xmlns:a="http://schemas.openxmlformats.org/drawingml/2006/main" xmlns:r="http://schemas.openxmlformats.org/officeDocument/2006/relationships" xmlns:p="http://schemas.openxmlformats.org/presentationml/2006/main">
+  <p:cSld>
+    <p:spTree>
+      <p:nvGrpSpPr>
+        <p:cNvPr id="1" name=""/>
+        <p:cNvGrpSpPr/>
+        <p:nvPr/>
+      </p:nvGrpSpPr>
+      <p:grpSpPr>
+        <a:xfrm>
+          <a:off x="0" y="0"/>
+          <a:ext cx="0" cy="0"/>
+          <a:chOff x="0" y="0"/>
+          <a:chExt cx="0" cy="0"/>
+        </a:xfrm>
+      </p:grpSpPr>
+      <p:sp>
+        <p:nvSpPr>
+          <p:cNvPr id="2" name="Slide Image Placeholder 1"/>
+          <p:cNvSpPr>
+            <a:spLocks noGrp="1" noRot="1" noChangeAspect="1"/>
+          </p:cNvSpPr>
+          <p:nvPr>
+            <p:ph type="sldImg"/>
+          </p:nvPr>
+        </p:nvSpPr>
+        <p:spPr/>
+      </p:sp>
+      <p:sp>
+        <p:nvSpPr>
+          <p:cNvPr id="3" name="Notes Placeholder 2"/>
+          <p:cNvSpPr>
+            <a:spLocks noGrp="1"/>
+          </p:cNvSpPr>
+          <p:nvPr>
+            <p:ph type="body" idx="1"/>
+          </p:nvPr>
+        </p:nvSpPr>
+        <p:spPr/>
+        <p:txBody>
+          <a:bodyPr/>
+          <a:lstStyle/>
+          <a:p>
+            <a:r>
+              <a:rPr lang="en-US" dirty="0"/>
+              <a:t/>
+            </a:r>
+            <a:endParaRPr lang="en-US" dirty="0"/>
+          </a:p>
+        </p:txBody>
+      </p:sp>
+      <p:sp>
+        <p:nvSpPr>
+          <p:cNvPr id="4" name="Slide Number Placeholder 3"/>
+          <p:cNvSpPr>
+            <a:spLocks noGrp="1"/>
+          </p:cNvSpPr>
+          <p:nvPr>
+            <p:ph type="sldNum" sz="quarter" idx="10"/>
+          </p:nvPr>
+        </p:nvSpPr>
+        <p:spPr/>
+        <p:txBody>
+          <a:bodyPr/>
+          <a:lstStyle/>
+          <a:p>
+            <a:fld id="{F7021451-1387-4CA6-816F-3879F97B5CBC}" type="slidenum">
+              <a:rPr lang="en-US"/>
+              <a:t>24</a:t>
+            </a:fld>
+            <a:endParaRPr lang="en-US"/>
+          </a:p>
+        </p:txBody>
+      </p:sp>
+    </p:spTree>
+    <p:extLst>
+      <p:ext uri="{BB962C8B-B14F-4D97-AF65-F5344CB8AC3E}">
+        <p14:creationId xmlns:p14="http://schemas.microsoft.com/office/powerpoint/2010/main" val="1024086991"/>
+      </p:ext>
+    </p:extLst>
+  </p:cSld>
+  <p:clrMapOvr>
+    <a:masterClrMapping/>
+  </p:clrMapOvr>
+</p:notes>
+</file>
+
+<file path=ppt/notesSlides/notesSlide25.xml><?xml version="1.0" encoding="utf-8"?>
+<p:notes xmlns:a="http://schemas.openxmlformats.org/drawingml/2006/main" xmlns:r="http://schemas.openxmlformats.org/officeDocument/2006/relationships" xmlns:p="http://schemas.openxmlformats.org/presentationml/2006/main">
+  <p:cSld>
+    <p:spTree>
+      <p:nvGrpSpPr>
+        <p:cNvPr id="1" name=""/>
+        <p:cNvGrpSpPr/>
+        <p:nvPr/>
+      </p:nvGrpSpPr>
+      <p:grpSpPr>
+        <a:xfrm>
+          <a:off x="0" y="0"/>
+          <a:ext cx="0" cy="0"/>
+          <a:chOff x="0" y="0"/>
+          <a:chExt cx="0" cy="0"/>
+        </a:xfrm>
+      </p:grpSpPr>
+      <p:sp>
+        <p:nvSpPr>
+          <p:cNvPr id="2" name="Slide Image Placeholder 1"/>
+          <p:cNvSpPr>
+            <a:spLocks noGrp="1" noRot="1" noChangeAspect="1"/>
+          </p:cNvSpPr>
+          <p:nvPr>
+            <p:ph type="sldImg"/>
+          </p:nvPr>
+        </p:nvSpPr>
+        <p:spPr/>
+      </p:sp>
+      <p:sp>
+        <p:nvSpPr>
+          <p:cNvPr id="3" name="Notes Placeholder 2"/>
+          <p:cNvSpPr>
+            <a:spLocks noGrp="1"/>
+          </p:cNvSpPr>
+          <p:nvPr>
+            <p:ph type="body" idx="1"/>
+          </p:nvPr>
+        </p:nvSpPr>
+        <p:spPr/>
+        <p:txBody>
+          <a:bodyPr/>
+          <a:lstStyle/>
+          <a:p>
+            <a:r>
+              <a:rPr lang="en-US" dirty="0"/>
+              <a:t/>
+            </a:r>
+            <a:endParaRPr lang="en-US" dirty="0"/>
+          </a:p>
+        </p:txBody>
+      </p:sp>
+      <p:sp>
+        <p:nvSpPr>
+          <p:cNvPr id="4" name="Slide Number Placeholder 3"/>
+          <p:cNvSpPr>
+            <a:spLocks noGrp="1"/>
+          </p:cNvSpPr>
+          <p:nvPr>
+            <p:ph type="sldNum" sz="quarter" idx="10"/>
+          </p:nvPr>
+        </p:nvSpPr>
+        <p:spPr/>
+        <p:txBody>
+          <a:bodyPr/>
+          <a:lstStyle/>
+          <a:p>
+            <a:fld id="{F7021451-1387-4CA6-816F-3879F97B5CBC}" type="slidenum">
+              <a:rPr lang="en-US"/>
+              <a:t>25</a:t>
             </a:fld>
             <a:endParaRPr lang="en-US"/>
           </a:p>
@@ -2804,7 +3249,7 @@
                 <a:ea typeface="Calibri" pitchFamily="34" charset="-122"/>
                 <a:cs typeface="Calibri" pitchFamily="34" charset="-120"/>
               </a:rPr>
-              <a:t>Syndromic Panels, NAATs, and Their Limits</a:t>
+              <a:t>Syndromic Panels, NAAT, and Antigen Testing</a:t>
             </a:r>
             <a:endParaRPr lang="en-US" sz="1900" dirty="0"/>
           </a:p>
@@ -2996,7 +3441,7 @@
                 <a:ea typeface="Calibri" pitchFamily="34" charset="-122"/>
                 <a:cs typeface="Calibri" pitchFamily="34" charset="-120"/>
               </a:rPr>
-              <a:t>MICROBIOLOGY   ·   STEWARDSHIP</a:t>
+              <a:t>MICROBIOLOGY   ·   INTERPRETATION</a:t>
             </a:r>
             <a:endParaRPr lang="en-US" sz="1100" dirty="0"/>
           </a:p>
@@ -3035,7 +3480,7 @@
                 <a:ea typeface="Calibri" pitchFamily="34" charset="-122"/>
                 <a:cs typeface="Calibri" pitchFamily="34" charset="-120"/>
               </a:rPr>
-              <a:t>Making Speed Count</a:t>
+              <a:t>Detection Is Not Always Disease</a:t>
             </a:r>
             <a:endParaRPr lang="en-US" sz="3000" dirty="0"/>
           </a:p>
@@ -3103,7 +3548,7 @@
                 <a:ea typeface="Calibri" pitchFamily="34" charset="-122"/>
                 <a:cs typeface="Calibri" pitchFamily="34" charset="-120"/>
               </a:rPr>
-              <a:t>INTEGRATE WITH STEWARDSHIP</a:t>
+              <a:t>COLONIZATION &amp; SHEDDING</a:t>
             </a:r>
             <a:endParaRPr lang="en-US" sz="1200" dirty="0"/>
           </a:p>
@@ -3146,7 +3591,7 @@
                 <a:ea typeface="Calibri" pitchFamily="34" charset="-122"/>
                 <a:cs typeface="Calibri" pitchFamily="34" charset="-120"/>
               </a:rPr>
-              <a:t>Rapid results help only if they change management — pair with real-time stewardship review.</a:t>
+              <a:t>NAAT can detect colonizing or shed nucleic acid that is not causing current disease.</a:t>
             </a:r>
             <a:endParaRPr lang="en-US" sz="1250" dirty="0"/>
           </a:p>
@@ -3167,7 +3612,7 @@
                 <a:ea typeface="Calibri" pitchFamily="34" charset="-122"/>
                 <a:cs typeface="Calibri" pitchFamily="34" charset="-120"/>
               </a:rPr>
-              <a:t>Rapid blood-culture ID + resistance genes enables earlier de-escalation or escalation.</a:t>
+              <a:t>Prolonged shedding can yield positives after recovery.</a:t>
             </a:r>
             <a:endParaRPr lang="en-US" sz="1250" dirty="0"/>
           </a:p>
@@ -3188,7 +3633,7 @@
                 <a:ea typeface="Calibri" pitchFamily="34" charset="-122"/>
                 <a:cs typeface="Calibri" pitchFamily="34" charset="-120"/>
               </a:rPr>
-              <a:t>Avoid treating colonizers detected on broad panels.</a:t>
+              <a:t>C. difficile NAAT detects the gene, not necessarily active disease — correlate with symptoms.</a:t>
             </a:r>
             <a:endParaRPr lang="en-US" sz="1250" dirty="0"/>
           </a:p>
@@ -3209,7 +3654,7 @@
                 <a:ea typeface="Calibri" pitchFamily="34" charset="-122"/>
                 <a:cs typeface="Calibri" pitchFamily="34" charset="-120"/>
               </a:rPr>
-              <a:t>Build reporting comments that guide action.</a:t>
+              <a:t>Multiplex panels may detect incidental co-targets.</a:t>
             </a:r>
             <a:endParaRPr lang="en-US" sz="1250" dirty="0"/>
           </a:p>
@@ -3232,7 +3677,7 @@
             </a:avLst>
           </a:prstGeom>
           <a:solidFill>
-            <a:srgbClr val="E8F2E9"/>
+            <a:srgbClr val="E9F3EA"/>
           </a:solidFill>
           <a:ln/>
           <a:effectLst>
@@ -3277,7 +3722,7 @@
                 <a:ea typeface="Calibri" pitchFamily="34" charset="-122"/>
                 <a:cs typeface="Calibri" pitchFamily="34" charset="-120"/>
               </a:rPr>
-              <a:t>CHOOSING WISELY</a:t>
+              <a:t>CYCLE THRESHOLD (CT)</a:t>
             </a:r>
             <a:endParaRPr lang="en-US" sz="1200" dirty="0"/>
           </a:p>
@@ -3320,7 +3765,7 @@
                 <a:ea typeface="Calibri" pitchFamily="34" charset="-122"/>
                 <a:cs typeface="Calibri" pitchFamily="34" charset="-120"/>
               </a:rPr>
-              <a:t>Match the panel to the syndrome and pretest probability.</a:t>
+              <a:t>Ct inversely reflects target quantity but is NOT a standardized viral load.</a:t>
             </a:r>
             <a:endParaRPr lang="en-US" sz="1250" dirty="0"/>
           </a:p>
@@ -3341,7 +3786,7 @@
                 <a:ea typeface="Calibri" pitchFamily="34" charset="-122"/>
                 <a:cs typeface="Calibri" pitchFamily="34" charset="-120"/>
               </a:rPr>
-              <a:t>Consider cost and the risk of incidental detections.</a:t>
+              <a:t>Pre-analytic and assay factors affect Ct.</a:t>
             </a:r>
             <a:endParaRPr lang="en-US" sz="1250" dirty="0"/>
           </a:p>
@@ -3362,7 +3807,7 @@
                 <a:ea typeface="Calibri" pitchFamily="34" charset="-122"/>
                 <a:cs typeface="Calibri" pitchFamily="34" charset="-120"/>
               </a:rPr>
-              <a:t>Use targeted single-pathogen NAATs when appropriate.</a:t>
+              <a:t>Use qualitative results unless a validated quantitative assay is used.</a:t>
             </a:r>
             <a:endParaRPr lang="en-US" sz="1250" dirty="0"/>
           </a:p>
@@ -3383,7 +3828,7 @@
                 <a:ea typeface="Calibri" pitchFamily="34" charset="-122"/>
                 <a:cs typeface="Calibri" pitchFamily="34" charset="-120"/>
               </a:rPr>
-              <a:t>Confirm/contextualize unexpected results.</a:t>
+              <a:t>Interpret with the clinical picture.</a:t>
             </a:r>
             <a:endParaRPr lang="en-US" sz="1250" dirty="0"/>
           </a:p>
@@ -3509,7 +3954,7 @@
     <p:bg>
       <p:bgPr>
         <a:solidFill>
-          <a:srgbClr val="1F5722"/>
+          <a:srgbClr val="FFFFFF"/>
         </a:solidFill>
       </p:bgPr>
     </p:bg>
@@ -3529,58 +3974,295 @@
       </p:grpSpPr>
       <p:sp>
         <p:nvSpPr>
-          <p:cNvPr id="2" name="Shape 0"/>
-          <p:cNvSpPr/>
-          <p:nvPr/>
-        </p:nvSpPr>
-        <p:spPr>
-          <a:xfrm>
-            <a:off x="9509760" y="-1280160"/>
-            <a:ext cx="4754880" cy="4754880"/>
-          </a:xfrm>
-          <a:prstGeom prst="ellipse">
-            <a:avLst/>
+          <p:cNvPr id="2" name="Text 0"/>
+          <p:cNvSpPr/>
+          <p:nvPr/>
+        </p:nvSpPr>
+        <p:spPr>
+          <a:xfrm>
+            <a:off x="566928" y="329184"/>
+            <a:ext cx="10515600" cy="310896"/>
+          </a:xfrm>
+          <a:prstGeom prst="rect">
+            <a:avLst/>
+          </a:prstGeom>
+          <a:noFill/>
+          <a:ln/>
+        </p:spPr>
+        <p:txBody>
+          <a:bodyPr wrap="square" lIns="0" tIns="0" rIns="0" bIns="0" rtlCol="0" anchor="ctr"/>
+          <a:lstStyle/>
+          <a:p>
+            <a:pPr algn="l" indent="0" marL="0">
+              <a:buNone/>
+            </a:pPr>
+            <a:r>
+              <a:rPr lang="en-US" sz="1100" b="1" spc="150" kern="0" dirty="0">
+                <a:solidFill>
+                  <a:srgbClr val="2E7D32"/>
+                </a:solidFill>
+                <a:latin typeface="Calibri" pitchFamily="34" charset="0"/>
+                <a:ea typeface="Calibri" pitchFamily="34" charset="-122"/>
+                <a:cs typeface="Calibri" pitchFamily="34" charset="-120"/>
+              </a:rPr>
+              <a:t>MICROBIOLOGY   ·   STEWARDSHIP</a:t>
+            </a:r>
+            <a:endParaRPr lang="en-US" sz="1100" dirty="0"/>
+          </a:p>
+        </p:txBody>
+      </p:sp>
+      <p:sp>
+        <p:nvSpPr>
+          <p:cNvPr id="3" name="Text 1"/>
+          <p:cNvSpPr/>
+          <p:nvPr/>
+        </p:nvSpPr>
+        <p:spPr>
+          <a:xfrm>
+            <a:off x="566928" y="713232"/>
+            <a:ext cx="11064240" cy="749808"/>
+          </a:xfrm>
+          <a:prstGeom prst="rect">
+            <a:avLst/>
+          </a:prstGeom>
+          <a:noFill/>
+          <a:ln/>
+        </p:spPr>
+        <p:txBody>
+          <a:bodyPr wrap="square" lIns="0" tIns="0" rIns="0" bIns="0" rtlCol="0" anchor="ctr"/>
+          <a:lstStyle/>
+          <a:p>
+            <a:pPr algn="l" indent="0" marL="0">
+              <a:buNone/>
+            </a:pPr>
+            <a:r>
+              <a:rPr lang="en-US" sz="3000" b="1" dirty="0">
+                <a:solidFill>
+                  <a:srgbClr val="0E3A5F"/>
+                </a:solidFill>
+                <a:latin typeface="Calibri" pitchFamily="34" charset="0"/>
+                <a:ea typeface="Calibri" pitchFamily="34" charset="-122"/>
+                <a:cs typeface="Calibri" pitchFamily="34" charset="-120"/>
+              </a:rPr>
+              <a:t>Using Panels Wisely</a:t>
+            </a:r>
+            <a:endParaRPr lang="en-US" sz="3000" dirty="0"/>
+          </a:p>
+        </p:txBody>
+      </p:sp>
+      <p:sp>
+        <p:nvSpPr>
+          <p:cNvPr id="4" name="Shape 2"/>
+          <p:cNvSpPr/>
+          <p:nvPr/>
+        </p:nvSpPr>
+        <p:spPr>
+          <a:xfrm>
+            <a:off x="566928" y="1517904"/>
+            <a:ext cx="5346040" cy="4114800"/>
+          </a:xfrm>
+          <a:prstGeom prst="roundRect">
+            <a:avLst>
+              <a:gd name="adj" fmla="val 2000"/>
+            </a:avLst>
           </a:prstGeom>
           <a:solidFill>
-            <a:srgbClr val="FFFFFF">
-              <a:alpha val="8000"/>
-            </a:srgbClr>
+            <a:srgbClr val="E8F2E9"/>
           </a:solidFill>
           <a:ln/>
-        </p:spPr>
-      </p:sp>
-      <p:sp>
-        <p:nvSpPr>
-          <p:cNvPr id="3" name="Shape 1"/>
-          <p:cNvSpPr/>
-          <p:nvPr/>
-        </p:nvSpPr>
-        <p:spPr>
-          <a:xfrm>
-            <a:off x="10607040" y="3931920"/>
-            <a:ext cx="3108960" cy="3108960"/>
-          </a:xfrm>
-          <a:prstGeom prst="ellipse">
-            <a:avLst/>
+          <a:effectLst>
+            <a:outerShdw sx="100000" sy="100000" kx="0" ky="0" algn="bl" rotWithShape="0" blurRad="88900" dist="25400" dir="5400000">
+              <a:srgbClr val="22303C">
+                <a:alpha val="12000"/>
+              </a:srgbClr>
+            </a:outerShdw>
+          </a:effectLst>
+        </p:spPr>
+      </p:sp>
+      <p:sp>
+        <p:nvSpPr>
+          <p:cNvPr id="5" name="Text 3"/>
+          <p:cNvSpPr/>
+          <p:nvPr/>
+        </p:nvSpPr>
+        <p:spPr>
+          <a:xfrm>
+            <a:off x="804672" y="1682496"/>
+            <a:ext cx="4888840" cy="274320"/>
+          </a:xfrm>
+          <a:prstGeom prst="rect">
+            <a:avLst/>
+          </a:prstGeom>
+          <a:noFill/>
+          <a:ln/>
+        </p:spPr>
+        <p:txBody>
+          <a:bodyPr wrap="square" lIns="0" tIns="0" rIns="0" bIns="0" rtlCol="0" anchor="ctr"/>
+          <a:lstStyle/>
+          <a:p>
+            <a:pPr indent="0" marL="0">
+              <a:buNone/>
+            </a:pPr>
+            <a:r>
+              <a:rPr lang="en-US" sz="1200" b="1" spc="100" kern="0" dirty="0">
+                <a:solidFill>
+                  <a:srgbClr val="1F5722"/>
+                </a:solidFill>
+                <a:latin typeface="Calibri" pitchFamily="34" charset="0"/>
+                <a:ea typeface="Calibri" pitchFamily="34" charset="-122"/>
+                <a:cs typeface="Calibri" pitchFamily="34" charset="-120"/>
+              </a:rPr>
+              <a:t>VALUE</a:t>
+            </a:r>
+            <a:endParaRPr lang="en-US" sz="1200" dirty="0"/>
+          </a:p>
+        </p:txBody>
+      </p:sp>
+      <p:sp>
+        <p:nvSpPr>
+          <p:cNvPr id="6" name="Text 4"/>
+          <p:cNvSpPr/>
+          <p:nvPr/>
+        </p:nvSpPr>
+        <p:spPr>
+          <a:xfrm>
+            <a:off x="804672" y="2029968"/>
+            <a:ext cx="4870552" cy="3474720"/>
+          </a:xfrm>
+          <a:prstGeom prst="rect">
+            <a:avLst/>
+          </a:prstGeom>
+          <a:noFill/>
+          <a:ln/>
+        </p:spPr>
+        <p:txBody>
+          <a:bodyPr wrap="square" lIns="0" tIns="0" rIns="0" bIns="0" rtlCol="0" anchor="t"/>
+          <a:lstStyle/>
+          <a:p>
+            <a:pPr algn="l" marL="177800" indent="-177800">
+              <a:spcAft>
+                <a:spcPts val="900"/>
+              </a:spcAft>
+              <a:buSzPct val="100000"/>
+              <a:buChar char="•"/>
+            </a:pPr>
+            <a:r>
+              <a:rPr lang="en-US" sz="1250" b="1" dirty="0">
+                <a:solidFill>
+                  <a:srgbClr val="1B2A38"/>
+                </a:solidFill>
+                <a:latin typeface="Calibri" pitchFamily="34" charset="0"/>
+                <a:ea typeface="Calibri" pitchFamily="34" charset="-122"/>
+                <a:cs typeface="Calibri" pitchFamily="34" charset="-120"/>
+              </a:rPr>
+              <a:t>Rapid pathogen and resistance-marker detection enables earlier targeted therapy and de-escalation.</a:t>
+            </a:r>
+            <a:endParaRPr lang="en-US" sz="1250" dirty="0"/>
+          </a:p>
+          <a:p>
+            <a:pPr algn="l" marL="177800" indent="-177800">
+              <a:spcAft>
+                <a:spcPts val="900"/>
+              </a:spcAft>
+              <a:buSzPct val="100000"/>
+              <a:buChar char="•"/>
+            </a:pPr>
+            <a:r>
+              <a:rPr lang="en-US" sz="1250" dirty="0">
+                <a:solidFill>
+                  <a:srgbClr val="33444F"/>
+                </a:solidFill>
+                <a:latin typeface="Calibri" pitchFamily="34" charset="0"/>
+                <a:ea typeface="Calibri" pitchFamily="34" charset="-122"/>
+                <a:cs typeface="Calibri" pitchFamily="34" charset="-120"/>
+              </a:rPr>
+              <a:t>Blood-culture ID panels report organism + key resistance genes quickly.</a:t>
+            </a:r>
+            <a:endParaRPr lang="en-US" sz="1250" dirty="0"/>
+          </a:p>
+          <a:p>
+            <a:pPr algn="l" marL="177800" indent="-177800">
+              <a:spcAft>
+                <a:spcPts val="900"/>
+              </a:spcAft>
+              <a:buSzPct val="100000"/>
+              <a:buChar char="•"/>
+            </a:pPr>
+            <a:r>
+              <a:rPr lang="en-US" sz="1250" dirty="0">
+                <a:solidFill>
+                  <a:srgbClr val="33444F"/>
+                </a:solidFill>
+                <a:latin typeface="Calibri" pitchFamily="34" charset="0"/>
+                <a:ea typeface="Calibri" pitchFamily="34" charset="-122"/>
+                <a:cs typeface="Calibri" pitchFamily="34" charset="-120"/>
+              </a:rPr>
+              <a:t>Can shorten unnecessary antibiotics and isolation.</a:t>
+            </a:r>
+            <a:endParaRPr lang="en-US" sz="1250" dirty="0"/>
+          </a:p>
+          <a:p>
+            <a:pPr algn="l" marL="177800" indent="-177800">
+              <a:spcAft>
+                <a:spcPts val="900"/>
+              </a:spcAft>
+              <a:buSzPct val="100000"/>
+              <a:buChar char="•"/>
+            </a:pPr>
+            <a:r>
+              <a:rPr lang="en-US" sz="1250" dirty="0">
+                <a:solidFill>
+                  <a:srgbClr val="33444F"/>
+                </a:solidFill>
+                <a:latin typeface="Calibri" pitchFamily="34" charset="0"/>
+                <a:ea typeface="Calibri" pitchFamily="34" charset="-122"/>
+                <a:cs typeface="Calibri" pitchFamily="34" charset="-120"/>
+              </a:rPr>
+              <a:t>Supports outbreak detection.</a:t>
+            </a:r>
+            <a:endParaRPr lang="en-US" sz="1250" dirty="0"/>
+          </a:p>
+        </p:txBody>
+      </p:sp>
+      <p:sp>
+        <p:nvSpPr>
+          <p:cNvPr id="7" name="Shape 5"/>
+          <p:cNvSpPr/>
+          <p:nvPr/>
+        </p:nvSpPr>
+        <p:spPr>
+          <a:xfrm>
+            <a:off x="6278728" y="1517904"/>
+            <a:ext cx="5346040" cy="4114800"/>
+          </a:xfrm>
+          <a:prstGeom prst="roundRect">
+            <a:avLst>
+              <a:gd name="adj" fmla="val 2000"/>
+            </a:avLst>
           </a:prstGeom>
           <a:solidFill>
-            <a:srgbClr val="FFFFFF">
-              <a:alpha val="6000"/>
-            </a:srgbClr>
+            <a:srgbClr val="E9F3EA"/>
           </a:solidFill>
           <a:ln/>
-        </p:spPr>
-      </p:sp>
-      <p:sp>
-        <p:nvSpPr>
-          <p:cNvPr id="4" name="Text 2"/>
-          <p:cNvSpPr/>
-          <p:nvPr/>
-        </p:nvSpPr>
-        <p:spPr>
-          <a:xfrm>
-            <a:off x="566928" y="1783080"/>
-            <a:ext cx="2743200" cy="1463040"/>
+          <a:effectLst>
+            <a:outerShdw sx="100000" sy="100000" kx="0" ky="0" algn="bl" rotWithShape="0" blurRad="88900" dist="25400" dir="5400000">
+              <a:srgbClr val="22303C">
+                <a:alpha val="12000"/>
+              </a:srgbClr>
+            </a:outerShdw>
+          </a:effectLst>
+        </p:spPr>
+      </p:sp>
+      <p:sp>
+        <p:nvSpPr>
+          <p:cNvPr id="8" name="Text 6"/>
+          <p:cNvSpPr/>
+          <p:nvPr/>
+        </p:nvSpPr>
+        <p:spPr>
+          <a:xfrm>
+            <a:off x="6516472" y="1682496"/>
+            <a:ext cx="4888840" cy="274320"/>
           </a:xfrm>
           <a:prstGeom prst="rect">
             <a:avLst/>
@@ -3592,34 +4274,179 @@
           <a:bodyPr wrap="square" lIns="0" tIns="0" rIns="0" bIns="0" rtlCol="0" anchor="ctr"/>
           <a:lstStyle/>
           <a:p>
+            <a:pPr indent="0" marL="0">
+              <a:buNone/>
+            </a:pPr>
+            <a:r>
+              <a:rPr lang="en-US" sz="1200" b="1" spc="100" kern="0" dirty="0">
+                <a:solidFill>
+                  <a:srgbClr val="1F5722"/>
+                </a:solidFill>
+                <a:latin typeface="Calibri" pitchFamily="34" charset="0"/>
+                <a:ea typeface="Calibri" pitchFamily="34" charset="-122"/>
+                <a:cs typeface="Calibri" pitchFamily="34" charset="-120"/>
+              </a:rPr>
+              <a:t>RISKS</a:t>
+            </a:r>
+            <a:endParaRPr lang="en-US" sz="1200" dirty="0"/>
+          </a:p>
+        </p:txBody>
+      </p:sp>
+      <p:sp>
+        <p:nvSpPr>
+          <p:cNvPr id="9" name="Text 7"/>
+          <p:cNvSpPr/>
+          <p:nvPr/>
+        </p:nvSpPr>
+        <p:spPr>
+          <a:xfrm>
+            <a:off x="6516472" y="2029968"/>
+            <a:ext cx="4870552" cy="3474720"/>
+          </a:xfrm>
+          <a:prstGeom prst="rect">
+            <a:avLst/>
+          </a:prstGeom>
+          <a:noFill/>
+          <a:ln/>
+        </p:spPr>
+        <p:txBody>
+          <a:bodyPr wrap="square" lIns="0" tIns="0" rIns="0" bIns="0" rtlCol="0" anchor="t"/>
+          <a:lstStyle/>
+          <a:p>
+            <a:pPr algn="l" marL="177800" indent="-177800">
+              <a:spcAft>
+                <a:spcPts val="900"/>
+              </a:spcAft>
+              <a:buSzPct val="100000"/>
+              <a:buChar char="•"/>
+            </a:pPr>
+            <a:r>
+              <a:rPr lang="en-US" sz="1250" b="1" dirty="0">
+                <a:solidFill>
+                  <a:srgbClr val="1B2A38"/>
+                </a:solidFill>
+                <a:latin typeface="Calibri" pitchFamily="34" charset="0"/>
+                <a:ea typeface="Calibri" pitchFamily="34" charset="-122"/>
+                <a:cs typeface="Calibri" pitchFamily="34" charset="-120"/>
+              </a:rPr>
+              <a:t>Over-testing, incidental detections, and cost can drive unnecessary treatment.</a:t>
+            </a:r>
+            <a:endParaRPr lang="en-US" sz="1250" dirty="0"/>
+          </a:p>
+          <a:p>
+            <a:pPr algn="l" marL="177800" indent="-177800">
+              <a:spcAft>
+                <a:spcPts val="900"/>
+              </a:spcAft>
+              <a:buSzPct val="100000"/>
+              <a:buChar char="•"/>
+            </a:pPr>
+            <a:r>
+              <a:rPr lang="en-US" sz="1250" dirty="0">
+                <a:solidFill>
+                  <a:srgbClr val="33444F"/>
+                </a:solidFill>
+                <a:latin typeface="Calibri" pitchFamily="34" charset="0"/>
+                <a:ea typeface="Calibri" pitchFamily="34" charset="-122"/>
+                <a:cs typeface="Calibri" pitchFamily="34" charset="-120"/>
+              </a:rPr>
+              <a:t>Genotype may not capture all phenotypic resistance.</a:t>
+            </a:r>
+            <a:endParaRPr lang="en-US" sz="1250" dirty="0"/>
+          </a:p>
+          <a:p>
+            <a:pPr algn="l" marL="177800" indent="-177800">
+              <a:spcAft>
+                <a:spcPts val="900"/>
+              </a:spcAft>
+              <a:buSzPct val="100000"/>
+              <a:buChar char="•"/>
+            </a:pPr>
+            <a:r>
+              <a:rPr lang="en-US" sz="1250" dirty="0">
+                <a:solidFill>
+                  <a:srgbClr val="33444F"/>
+                </a:solidFill>
+                <a:latin typeface="Calibri" pitchFamily="34" charset="0"/>
+                <a:ea typeface="Calibri" pitchFamily="34" charset="-122"/>
+                <a:cs typeface="Calibri" pitchFamily="34" charset="-120"/>
+              </a:rPr>
+              <a:t>Confirm with culture/AST when needed.</a:t>
+            </a:r>
+            <a:endParaRPr lang="en-US" sz="1250" dirty="0"/>
+          </a:p>
+          <a:p>
+            <a:pPr algn="l" marL="177800" indent="-177800">
+              <a:spcAft>
+                <a:spcPts val="900"/>
+              </a:spcAft>
+              <a:buSzPct val="100000"/>
+              <a:buChar char="•"/>
+            </a:pPr>
+            <a:r>
+              <a:rPr lang="en-US" sz="1250" dirty="0">
+                <a:solidFill>
+                  <a:srgbClr val="33444F"/>
+                </a:solidFill>
+                <a:latin typeface="Calibri" pitchFamily="34" charset="0"/>
+                <a:ea typeface="Calibri" pitchFamily="34" charset="-122"/>
+                <a:cs typeface="Calibri" pitchFamily="34" charset="-120"/>
+              </a:rPr>
+              <a:t>Pair panels with stewardship guidance.</a:t>
+            </a:r>
+            <a:endParaRPr lang="en-US" sz="1250" dirty="0"/>
+          </a:p>
+        </p:txBody>
+      </p:sp>
+      <p:sp>
+        <p:nvSpPr>
+          <p:cNvPr id="10" name="Text 8"/>
+          <p:cNvSpPr/>
+          <p:nvPr/>
+        </p:nvSpPr>
+        <p:spPr>
+          <a:xfrm>
+            <a:off x="566928" y="6473952"/>
+            <a:ext cx="7772400" cy="274320"/>
+          </a:xfrm>
+          <a:prstGeom prst="rect">
+            <a:avLst/>
+          </a:prstGeom>
+          <a:noFill/>
+          <a:ln/>
+        </p:spPr>
+        <p:txBody>
+          <a:bodyPr wrap="square" lIns="0" tIns="0" rIns="0" bIns="0" rtlCol="0" anchor="ctr"/>
+          <a:lstStyle/>
+          <a:p>
             <a:pPr algn="l" indent="0" marL="0">
               <a:buNone/>
             </a:pPr>
             <a:r>
-              <a:rPr lang="en-US" sz="6400" b="1" dirty="0">
-                <a:solidFill>
-                  <a:srgbClr val="E8F2E9"/>
-                </a:solidFill>
-                <a:latin typeface="Calibri" pitchFamily="34" charset="0"/>
-                <a:ea typeface="Calibri" pitchFamily="34" charset="-122"/>
-                <a:cs typeface="Calibri" pitchFamily="34" charset="-120"/>
-              </a:rPr>
-              <a:t>03</a:t>
-            </a:r>
-            <a:endParaRPr lang="en-US" sz="6400" dirty="0"/>
-          </a:p>
-        </p:txBody>
-      </p:sp>
-      <p:sp>
-        <p:nvSpPr>
-          <p:cNvPr id="5" name="Text 3"/>
-          <p:cNvSpPr/>
-          <p:nvPr/>
-        </p:nvSpPr>
-        <p:spPr>
-          <a:xfrm>
-            <a:off x="566928" y="3246120"/>
-            <a:ext cx="10058400" cy="365760"/>
+              <a:rPr lang="en-US" sz="850" dirty="0">
+                <a:solidFill>
+                  <a:srgbClr val="9AA8B4"/>
+                </a:solidFill>
+                <a:latin typeface="Calibri" pitchFamily="34" charset="0"/>
+                <a:ea typeface="Calibri" pitchFamily="34" charset="-122"/>
+                <a:cs typeface="Calibri" pitchFamily="34" charset="-120"/>
+              </a:rPr>
+              <a:t>Makassed General Hospital  ·  Department of Laboratory Medicine</a:t>
+            </a:r>
+            <a:endParaRPr lang="en-US" sz="850" dirty="0"/>
+          </a:p>
+        </p:txBody>
+      </p:sp>
+      <p:sp>
+        <p:nvSpPr>
+          <p:cNvPr id="11" name="Text 9"/>
+          <p:cNvSpPr/>
+          <p:nvPr/>
+        </p:nvSpPr>
+        <p:spPr>
+          <a:xfrm>
+            <a:off x="9814255" y="6473952"/>
+            <a:ext cx="1828800" cy="274320"/>
           </a:xfrm>
           <a:prstGeom prst="rect">
             <a:avLst/>
@@ -3631,60 +4458,49 @@
           <a:bodyPr wrap="square" lIns="0" tIns="0" rIns="0" bIns="0" rtlCol="0" anchor="ctr"/>
           <a:lstStyle/>
           <a:p>
-            <a:pPr algn="l" indent="0" marL="0">
-              <a:buNone/>
-            </a:pPr>
-            <a:r>
-              <a:rPr lang="en-US" sz="1300" b="1" spc="250" kern="0" dirty="0">
-                <a:solidFill>
-                  <a:srgbClr val="F2C9D9"/>
-                </a:solidFill>
-                <a:latin typeface="Calibri" pitchFamily="34" charset="0"/>
-                <a:ea typeface="Calibri" pitchFamily="34" charset="-122"/>
-                <a:cs typeface="Calibri" pitchFamily="34" charset="-120"/>
-              </a:rPr>
-              <a:t>PART THREE</a:t>
-            </a:r>
-            <a:endParaRPr lang="en-US" sz="1300" dirty="0"/>
-          </a:p>
-        </p:txBody>
-      </p:sp>
-      <p:sp>
-        <p:nvSpPr>
-          <p:cNvPr id="6" name="Text 4"/>
-          <p:cNvSpPr/>
-          <p:nvPr/>
-        </p:nvSpPr>
-        <p:spPr>
-          <a:xfrm>
-            <a:off x="566928" y="3611880"/>
-            <a:ext cx="10607040" cy="1463040"/>
-          </a:xfrm>
-          <a:prstGeom prst="rect">
-            <a:avLst/>
-          </a:prstGeom>
-          <a:noFill/>
-          <a:ln/>
-        </p:spPr>
-        <p:txBody>
-          <a:bodyPr wrap="square" lIns="0" tIns="0" rIns="0" bIns="0" rtlCol="0" anchor="t"/>
-          <a:lstStyle/>
-          <a:p>
-            <a:pPr algn="l" indent="0" marL="0">
-              <a:buNone/>
-            </a:pPr>
-            <a:r>
-              <a:rPr lang="en-US" sz="3800" b="1" dirty="0">
-                <a:solidFill>
-                  <a:srgbClr val="FFFFFF"/>
-                </a:solidFill>
-                <a:latin typeface="Calibri" pitchFamily="34" charset="0"/>
-                <a:ea typeface="Calibri" pitchFamily="34" charset="-122"/>
-                <a:cs typeface="Calibri" pitchFamily="34" charset="-120"/>
-              </a:rPr>
-              <a:t>Cases &amp; Board Review</a:t>
-            </a:r>
-            <a:endParaRPr lang="en-US" sz="3800" dirty="0"/>
+            <a:pPr algn="r" indent="0" marL="0">
+              <a:buNone/>
+            </a:pPr>
+            <a:r>
+              <a:rPr lang="en-US" sz="850" dirty="0">
+                <a:solidFill>
+                  <a:srgbClr val="9AA8B4"/>
+                </a:solidFill>
+                <a:latin typeface="Calibri" pitchFamily="34" charset="0"/>
+                <a:ea typeface="Calibri" pitchFamily="34" charset="-122"/>
+                <a:cs typeface="Calibri" pitchFamily="34" charset="-120"/>
+              </a:rPr>
+              <a:t>CP Lecture Series</a:t>
+            </a:r>
+            <a:pPr algn="r" indent="0" marL="0">
+              <a:buNone/>
+            </a:pPr>
+            <a:r>
+              <a:rPr lang="en-US" sz="850" dirty="0">
+                <a:solidFill>
+                  <a:srgbClr val="DCE4EC"/>
+                </a:solidFill>
+                <a:latin typeface="Calibri" pitchFamily="34" charset="0"/>
+                <a:ea typeface="Calibri" pitchFamily="34" charset="-122"/>
+                <a:cs typeface="Calibri" pitchFamily="34" charset="-120"/>
+              </a:rPr>
+              <a:t>   ·   </a:t>
+            </a:r>
+            <a:pPr algn="r" indent="0" marL="0">
+              <a:buNone/>
+            </a:pPr>
+            <a:r>
+              <a:rPr lang="en-US" sz="850" b="1" dirty="0">
+                <a:solidFill>
+                  <a:srgbClr val="2E7D32"/>
+                </a:solidFill>
+                <a:latin typeface="Calibri" pitchFamily="34" charset="0"/>
+                <a:ea typeface="Calibri" pitchFamily="34" charset="-122"/>
+                <a:cs typeface="Calibri" pitchFamily="34" charset="-120"/>
+              </a:rPr>
+              <a:t>9</a:t>
+            </a:r>
+            <a:endParaRPr lang="en-US" sz="850" dirty="0"/>
           </a:p>
         </p:txBody>
       </p:sp>
@@ -3753,7 +4569,7 @@
                 <a:ea typeface="Calibri" pitchFamily="34" charset="-122"/>
                 <a:cs typeface="Calibri" pitchFamily="34" charset="-120"/>
               </a:rPr>
-              <a:t>MICROBIOLOGY   ·   CASE 1</a:t>
+              <a:t>MICROBIOLOGY   ·   ALGORITHMS</a:t>
             </a:r>
             <a:endParaRPr lang="en-US" sz="1100" dirty="0"/>
           </a:p>
@@ -3792,7 +4608,7 @@
                 <a:ea typeface="Calibri" pitchFamily="34" charset="-122"/>
                 <a:cs typeface="Calibri" pitchFamily="34" charset="-120"/>
               </a:rPr>
-              <a:t>Case 1</a:t>
+              <a:t>Placing Rapid Tests in Algorithms</a:t>
             </a:r>
             <a:endParaRPr lang="en-US" sz="3000" dirty="0"/>
           </a:p>
@@ -3807,11 +4623,11 @@
         <p:spPr>
           <a:xfrm>
             <a:off x="566928" y="1517904"/>
-            <a:ext cx="11057839" cy="2788920"/>
+            <a:ext cx="5346040" cy="4114800"/>
           </a:xfrm>
           <a:prstGeom prst="roundRect">
             <a:avLst>
-              <a:gd name="adj" fmla="val 2951"/>
+              <a:gd name="adj" fmla="val 2000"/>
             </a:avLst>
           </a:prstGeom>
           <a:solidFill>
@@ -3835,8 +4651,8 @@
         </p:nvSpPr>
         <p:spPr>
           <a:xfrm>
-            <a:off x="841248" y="1700784"/>
-            <a:ext cx="5486400" cy="292608"/>
+            <a:off x="804672" y="1682496"/>
+            <a:ext cx="4888840" cy="274320"/>
           </a:xfrm>
           <a:prstGeom prst="rect">
             <a:avLst/>
@@ -3852,17 +4668,17 @@
               <a:buNone/>
             </a:pPr>
             <a:r>
-              <a:rPr lang="en-US" sz="1100" b="1" spc="150" kern="0" dirty="0">
-                <a:solidFill>
-                  <a:srgbClr val="2E7D32"/>
-                </a:solidFill>
-                <a:latin typeface="Calibri" pitchFamily="34" charset="0"/>
-                <a:ea typeface="Calibri" pitchFamily="34" charset="-122"/>
-                <a:cs typeface="Calibri" pitchFamily="34" charset="-120"/>
-              </a:rPr>
-              <a:t>CLINICAL VIGNETTE</a:t>
-            </a:r>
-            <a:endParaRPr lang="en-US" sz="1100" dirty="0"/>
+              <a:rPr lang="en-US" sz="1200" b="1" spc="100" kern="0" dirty="0">
+                <a:solidFill>
+                  <a:srgbClr val="1F5722"/>
+                </a:solidFill>
+                <a:latin typeface="Calibri" pitchFamily="34" charset="0"/>
+                <a:ea typeface="Calibri" pitchFamily="34" charset="-122"/>
+                <a:cs typeface="Calibri" pitchFamily="34" charset="-120"/>
+              </a:rPr>
+              <a:t>TRIAGE AND REFLEX</a:t>
+            </a:r>
+            <a:endParaRPr lang="en-US" sz="1200" dirty="0"/>
           </a:p>
         </p:txBody>
       </p:sp>
@@ -3874,8 +4690,8 @@
         </p:nvSpPr>
         <p:spPr>
           <a:xfrm>
-            <a:off x="841248" y="2029968"/>
-            <a:ext cx="10509199" cy="2148840"/>
+            <a:off x="804672" y="2029968"/>
+            <a:ext cx="4870552" cy="3474720"/>
           </a:xfrm>
           <a:prstGeom prst="rect">
             <a:avLst/>
@@ -3887,14 +4703,36 @@
           <a:bodyPr wrap="square" lIns="0" tIns="0" rIns="0" bIns="0" rtlCol="0" anchor="t"/>
           <a:lstStyle/>
           <a:p>
-            <a:pPr algn="l" indent="0" marL="0">
-              <a:lnSpc>
-                <a:spcPct val="108000"/>
-              </a:lnSpc>
-              <a:buNone/>
-            </a:pPr>
-            <a:r>
-              <a:rPr lang="en-US" sz="1450" dirty="0">
+            <a:pPr algn="l" marL="177800" indent="-177800">
+              <a:spcAft>
+                <a:spcPts val="900"/>
+              </a:spcAft>
+              <a:buSzPct val="100000"/>
+              <a:buChar char="•"/>
+            </a:pPr>
+            <a:r>
+              <a:rPr lang="en-US" sz="1250" b="1" dirty="0">
+                <a:solidFill>
+                  <a:srgbClr val="1B2A38"/>
+                </a:solidFill>
+                <a:latin typeface="Calibri" pitchFamily="34" charset="0"/>
+                <a:ea typeface="Calibri" pitchFamily="34" charset="-122"/>
+                <a:cs typeface="Calibri" pitchFamily="34" charset="-120"/>
+              </a:rPr>
+              <a:t>Use rapid tests where speed changes management (sepsis, meningitis, respiratory season).</a:t>
+            </a:r>
+            <a:endParaRPr lang="en-US" sz="1250" dirty="0"/>
+          </a:p>
+          <a:p>
+            <a:pPr algn="l" marL="177800" indent="-177800">
+              <a:spcAft>
+                <a:spcPts val="900"/>
+              </a:spcAft>
+              <a:buSzPct val="100000"/>
+              <a:buChar char="•"/>
+            </a:pPr>
+            <a:r>
+              <a:rPr lang="en-US" sz="1250" dirty="0">
                 <a:solidFill>
                   <a:srgbClr val="33444F"/>
                 </a:solidFill>
@@ -3902,9 +4740,51 @@
                 <a:ea typeface="Calibri" pitchFamily="34" charset="-122"/>
                 <a:cs typeface="Calibri" pitchFamily="34" charset="-120"/>
               </a:rPr>
-              <a:t>A child treated for confirmed influenza last week is re-tested by respiratory panel for an unrelated visit and is again 'detected' for influenza, though clinically improved.</a:t>
-            </a:r>
-            <a:endParaRPr lang="en-US" sz="1450" dirty="0"/>
+              <a:t>Reflex from screen to confirmatory test when indicated.</a:t>
+            </a:r>
+            <a:endParaRPr lang="en-US" sz="1250" dirty="0"/>
+          </a:p>
+          <a:p>
+            <a:pPr algn="l" marL="177800" indent="-177800">
+              <a:spcAft>
+                <a:spcPts val="900"/>
+              </a:spcAft>
+              <a:buSzPct val="100000"/>
+              <a:buChar char="•"/>
+            </a:pPr>
+            <a:r>
+              <a:rPr lang="en-US" sz="1250" dirty="0">
+                <a:solidFill>
+                  <a:srgbClr val="33444F"/>
+                </a:solidFill>
+                <a:latin typeface="Calibri" pitchFamily="34" charset="0"/>
+                <a:ea typeface="Calibri" pitchFamily="34" charset="-122"/>
+                <a:cs typeface="Calibri" pitchFamily="34" charset="-120"/>
+              </a:rPr>
+              <a:t>Define who can order high-cost panels.</a:t>
+            </a:r>
+            <a:endParaRPr lang="en-US" sz="1250" dirty="0"/>
+          </a:p>
+          <a:p>
+            <a:pPr algn="l" marL="177800" indent="-177800">
+              <a:spcAft>
+                <a:spcPts val="900"/>
+              </a:spcAft>
+              <a:buSzPct val="100000"/>
+              <a:buChar char="•"/>
+            </a:pPr>
+            <a:r>
+              <a:rPr lang="en-US" sz="1250" dirty="0">
+                <a:solidFill>
+                  <a:srgbClr val="33444F"/>
+                </a:solidFill>
+                <a:latin typeface="Calibri" pitchFamily="34" charset="0"/>
+                <a:ea typeface="Calibri" pitchFamily="34" charset="-122"/>
+                <a:cs typeface="Calibri" pitchFamily="34" charset="-120"/>
+              </a:rPr>
+              <a:t>Align with empiric-therapy pathways.</a:t>
+            </a:r>
+            <a:endParaRPr lang="en-US" sz="1250" dirty="0"/>
           </a:p>
         </p:txBody>
       </p:sp>
@@ -3916,16 +4796,16 @@
         </p:nvSpPr>
         <p:spPr>
           <a:xfrm>
-            <a:off x="566928" y="4553712"/>
-            <a:ext cx="11057839" cy="1325880"/>
+            <a:off x="6278728" y="1517904"/>
+            <a:ext cx="5346040" cy="4114800"/>
           </a:xfrm>
           <a:prstGeom prst="roundRect">
             <a:avLst>
-              <a:gd name="adj" fmla="val 6207"/>
+              <a:gd name="adj" fmla="val 2000"/>
             </a:avLst>
           </a:prstGeom>
           <a:solidFill>
-            <a:srgbClr val="0E3A5F"/>
+            <a:srgbClr val="E9F3EA"/>
           </a:solidFill>
           <a:ln/>
           <a:effectLst>
@@ -3945,8 +4825,8 @@
         </p:nvSpPr>
         <p:spPr>
           <a:xfrm>
-            <a:off x="822960" y="4681728"/>
-            <a:ext cx="640080" cy="960120"/>
+            <a:off x="6516472" y="1682496"/>
+            <a:ext cx="4888840" cy="274320"/>
           </a:xfrm>
           <a:prstGeom prst="rect">
             <a:avLst/>
@@ -3958,21 +4838,21 @@
           <a:bodyPr wrap="square" lIns="0" tIns="0" rIns="0" bIns="0" rtlCol="0" anchor="ctr"/>
           <a:lstStyle/>
           <a:p>
-            <a:pPr algn="ctr" indent="0" marL="0">
-              <a:buNone/>
-            </a:pPr>
-            <a:r>
-              <a:rPr lang="en-US" sz="4000" b="1" dirty="0">
-                <a:solidFill>
-                  <a:srgbClr val="2E7D32"/>
-                </a:solidFill>
-                <a:latin typeface="Calibri" pitchFamily="34" charset="0"/>
-                <a:ea typeface="Calibri" pitchFamily="34" charset="-122"/>
-                <a:cs typeface="Calibri" pitchFamily="34" charset="-120"/>
-              </a:rPr>
-              <a:t>?</a:t>
-            </a:r>
-            <a:endParaRPr lang="en-US" sz="4000" dirty="0"/>
+            <a:pPr indent="0" marL="0">
+              <a:buNone/>
+            </a:pPr>
+            <a:r>
+              <a:rPr lang="en-US" sz="1200" b="1" spc="100" kern="0" dirty="0">
+                <a:solidFill>
+                  <a:srgbClr val="1F5722"/>
+                </a:solidFill>
+                <a:latin typeface="Calibri" pitchFamily="34" charset="0"/>
+                <a:ea typeface="Calibri" pitchFamily="34" charset="-122"/>
+                <a:cs typeface="Calibri" pitchFamily="34" charset="-120"/>
+              </a:rPr>
+              <a:t>LIMITS TO REMEMBER</a:t>
+            </a:r>
+            <a:endParaRPr lang="en-US" sz="1200" dirty="0"/>
           </a:p>
         </p:txBody>
       </p:sp>
@@ -3984,34 +4864,101 @@
         </p:nvSpPr>
         <p:spPr>
           <a:xfrm>
-            <a:off x="1618488" y="4553712"/>
-            <a:ext cx="9686239" cy="1325880"/>
-          </a:xfrm>
-          <a:prstGeom prst="rect">
-            <a:avLst/>
-          </a:prstGeom>
-          <a:noFill/>
-          <a:ln/>
-        </p:spPr>
-        <p:txBody>
-          <a:bodyPr wrap="square" lIns="0" tIns="0" rIns="0" bIns="0" rtlCol="0" anchor="ctr"/>
-          <a:lstStyle/>
-          <a:p>
-            <a:pPr algn="l" indent="0" marL="0">
-              <a:buNone/>
-            </a:pPr>
-            <a:r>
-              <a:rPr lang="en-US" sz="1500" b="1" dirty="0">
-                <a:solidFill>
-                  <a:srgbClr val="FFFFFF"/>
-                </a:solidFill>
-                <a:latin typeface="Calibri" pitchFamily="34" charset="0"/>
-                <a:ea typeface="Calibri" pitchFamily="34" charset="-122"/>
-                <a:cs typeface="Calibri" pitchFamily="34" charset="-120"/>
-              </a:rPr>
-              <a:t>How do you interpret the repeat positive?</a:t>
-            </a:r>
-            <a:endParaRPr lang="en-US" sz="1500" dirty="0"/>
+            <a:off x="6516472" y="2029968"/>
+            <a:ext cx="4870552" cy="3474720"/>
+          </a:xfrm>
+          <a:prstGeom prst="rect">
+            <a:avLst/>
+          </a:prstGeom>
+          <a:noFill/>
+          <a:ln/>
+        </p:spPr>
+        <p:txBody>
+          <a:bodyPr wrap="square" lIns="0" tIns="0" rIns="0" bIns="0" rtlCol="0" anchor="t"/>
+          <a:lstStyle/>
+          <a:p>
+            <a:pPr algn="l" marL="177800" indent="-177800">
+              <a:spcAft>
+                <a:spcPts val="900"/>
+              </a:spcAft>
+              <a:buSzPct val="100000"/>
+              <a:buChar char="•"/>
+            </a:pPr>
+            <a:r>
+              <a:rPr lang="en-US" sz="1250" b="1" dirty="0">
+                <a:solidFill>
+                  <a:srgbClr val="1B2A38"/>
+                </a:solidFill>
+                <a:latin typeface="Calibri" pitchFamily="34" charset="0"/>
+                <a:ea typeface="Calibri" pitchFamily="34" charset="-122"/>
+                <a:cs typeface="Calibri" pitchFamily="34" charset="-120"/>
+              </a:rPr>
+              <a:t>A panel only detects its designed targets — a negative panel does not exclude an off-panel pathogen.</a:t>
+            </a:r>
+            <a:endParaRPr lang="en-US" sz="1250" dirty="0"/>
+          </a:p>
+          <a:p>
+            <a:pPr algn="l" marL="177800" indent="-177800">
+              <a:spcAft>
+                <a:spcPts val="900"/>
+              </a:spcAft>
+              <a:buSzPct val="100000"/>
+              <a:buChar char="•"/>
+            </a:pPr>
+            <a:r>
+              <a:rPr lang="en-US" sz="1250" dirty="0">
+                <a:solidFill>
+                  <a:srgbClr val="33444F"/>
+                </a:solidFill>
+                <a:latin typeface="Calibri" pitchFamily="34" charset="0"/>
+                <a:ea typeface="Calibri" pitchFamily="34" charset="-122"/>
+                <a:cs typeface="Calibri" pitchFamily="34" charset="-120"/>
+              </a:rPr>
+              <a:t>Culture still needed for full AST and novel resistance.</a:t>
+            </a:r>
+            <a:endParaRPr lang="en-US" sz="1250" dirty="0"/>
+          </a:p>
+          <a:p>
+            <a:pPr algn="l" marL="177800" indent="-177800">
+              <a:spcAft>
+                <a:spcPts val="900"/>
+              </a:spcAft>
+              <a:buSzPct val="100000"/>
+              <a:buChar char="•"/>
+            </a:pPr>
+            <a:r>
+              <a:rPr lang="en-US" sz="1250" dirty="0">
+                <a:solidFill>
+                  <a:srgbClr val="33444F"/>
+                </a:solidFill>
+                <a:latin typeface="Calibri" pitchFamily="34" charset="0"/>
+                <a:ea typeface="Calibri" pitchFamily="34" charset="-122"/>
+                <a:cs typeface="Calibri" pitchFamily="34" charset="-120"/>
+              </a:rPr>
+              <a:t>Pre-analytic quality still governs accuracy.</a:t>
+            </a:r>
+            <a:endParaRPr lang="en-US" sz="1250" dirty="0"/>
+          </a:p>
+          <a:p>
+            <a:pPr algn="l" marL="177800" indent="-177800">
+              <a:spcAft>
+                <a:spcPts val="900"/>
+              </a:spcAft>
+              <a:buSzPct val="100000"/>
+              <a:buChar char="•"/>
+            </a:pPr>
+            <a:r>
+              <a:rPr lang="en-US" sz="1250" dirty="0">
+                <a:solidFill>
+                  <a:srgbClr val="33444F"/>
+                </a:solidFill>
+                <a:latin typeface="Calibri" pitchFamily="34" charset="0"/>
+                <a:ea typeface="Calibri" pitchFamily="34" charset="-122"/>
+                <a:cs typeface="Calibri" pitchFamily="34" charset="-120"/>
+              </a:rPr>
+              <a:t>Document interpretation for the team.</a:t>
+            </a:r>
+            <a:endParaRPr lang="en-US" sz="1250" dirty="0"/>
           </a:p>
         </p:txBody>
       </p:sp>
@@ -4115,7 +5062,7 @@
                 <a:ea typeface="Calibri" pitchFamily="34" charset="-122"/>
                 <a:cs typeface="Calibri" pitchFamily="34" charset="-120"/>
               </a:rPr>
-              <a:t>9</a:t>
+              <a:t>10</a:t>
             </a:r>
             <a:endParaRPr lang="en-US" sz="850" dirty="0"/>
           </a:p>
@@ -4135,7 +5082,7 @@
     <p:bg>
       <p:bgPr>
         <a:solidFill>
-          <a:srgbClr val="FFFFFF"/>
+          <a:srgbClr val="1F5722"/>
         </a:solidFill>
       </p:bgPr>
     </p:bg>
@@ -4155,14 +5102,58 @@
       </p:grpSpPr>
       <p:sp>
         <p:nvSpPr>
-          <p:cNvPr id="2" name="Text 0"/>
-          <p:cNvSpPr/>
-          <p:nvPr/>
-        </p:nvSpPr>
-        <p:spPr>
-          <a:xfrm>
-            <a:off x="566928" y="329184"/>
-            <a:ext cx="10515600" cy="310896"/>
+          <p:cNvPr id="2" name="Shape 0"/>
+          <p:cNvSpPr/>
+          <p:nvPr/>
+        </p:nvSpPr>
+        <p:spPr>
+          <a:xfrm>
+            <a:off x="9509760" y="-1280160"/>
+            <a:ext cx="4754880" cy="4754880"/>
+          </a:xfrm>
+          <a:prstGeom prst="ellipse">
+            <a:avLst/>
+          </a:prstGeom>
+          <a:solidFill>
+            <a:srgbClr val="FFFFFF">
+              <a:alpha val="8000"/>
+            </a:srgbClr>
+          </a:solidFill>
+          <a:ln/>
+        </p:spPr>
+      </p:sp>
+      <p:sp>
+        <p:nvSpPr>
+          <p:cNvPr id="3" name="Shape 1"/>
+          <p:cNvSpPr/>
+          <p:nvPr/>
+        </p:nvSpPr>
+        <p:spPr>
+          <a:xfrm>
+            <a:off x="10607040" y="3931920"/>
+            <a:ext cx="3108960" cy="3108960"/>
+          </a:xfrm>
+          <a:prstGeom prst="ellipse">
+            <a:avLst/>
+          </a:prstGeom>
+          <a:solidFill>
+            <a:srgbClr val="FFFFFF">
+              <a:alpha val="6000"/>
+            </a:srgbClr>
+          </a:solidFill>
+          <a:ln/>
+        </p:spPr>
+      </p:sp>
+      <p:sp>
+        <p:nvSpPr>
+          <p:cNvPr id="4" name="Text 2"/>
+          <p:cNvSpPr/>
+          <p:nvPr/>
+        </p:nvSpPr>
+        <p:spPr>
+          <a:xfrm>
+            <a:off x="566928" y="1783080"/>
+            <a:ext cx="2743200" cy="1463040"/>
           </a:xfrm>
           <a:prstGeom prst="rect">
             <a:avLst/>
@@ -4178,30 +5169,30 @@
               <a:buNone/>
             </a:pPr>
             <a:r>
-              <a:rPr lang="en-US" sz="1100" b="1" spc="150" kern="0" dirty="0">
-                <a:solidFill>
-                  <a:srgbClr val="2E7D32"/>
-                </a:solidFill>
-                <a:latin typeface="Calibri" pitchFamily="34" charset="0"/>
-                <a:ea typeface="Calibri" pitchFamily="34" charset="-122"/>
-                <a:cs typeface="Calibri" pitchFamily="34" charset="-120"/>
-              </a:rPr>
-              <a:t>MICROBIOLOGY   ·   CASE 1  ·  RESOLUTION</a:t>
-            </a:r>
-            <a:endParaRPr lang="en-US" sz="1100" dirty="0"/>
-          </a:p>
-        </p:txBody>
-      </p:sp>
-      <p:sp>
-        <p:nvSpPr>
-          <p:cNvPr id="3" name="Text 1"/>
-          <p:cNvSpPr/>
-          <p:nvPr/>
-        </p:nvSpPr>
-        <p:spPr>
-          <a:xfrm>
-            <a:off x="566928" y="713232"/>
-            <a:ext cx="11064240" cy="749808"/>
+              <a:rPr lang="en-US" sz="6400" b="1" dirty="0">
+                <a:solidFill>
+                  <a:srgbClr val="E8F2E9"/>
+                </a:solidFill>
+                <a:latin typeface="Calibri" pitchFamily="34" charset="0"/>
+                <a:ea typeface="Calibri" pitchFamily="34" charset="-122"/>
+                <a:cs typeface="Calibri" pitchFamily="34" charset="-120"/>
+              </a:rPr>
+              <a:t>03</a:t>
+            </a:r>
+            <a:endParaRPr lang="en-US" sz="6400" dirty="0"/>
+          </a:p>
+        </p:txBody>
+      </p:sp>
+      <p:sp>
+        <p:nvSpPr>
+          <p:cNvPr id="5" name="Text 3"/>
+          <p:cNvSpPr/>
+          <p:nvPr/>
+        </p:nvSpPr>
+        <p:spPr>
+          <a:xfrm>
+            <a:off x="566928" y="3246120"/>
+            <a:ext cx="10058400" cy="365760"/>
           </a:xfrm>
           <a:prstGeom prst="rect">
             <a:avLst/>
@@ -4217,30 +5208,30 @@
               <a:buNone/>
             </a:pPr>
             <a:r>
-              <a:rPr lang="en-US" sz="3000" b="1" dirty="0">
-                <a:solidFill>
-                  <a:srgbClr val="0E3A5F"/>
-                </a:solidFill>
-                <a:latin typeface="Calibri" pitchFamily="34" charset="0"/>
-                <a:ea typeface="Calibri" pitchFamily="34" charset="-122"/>
-                <a:cs typeface="Calibri" pitchFamily="34" charset="-120"/>
-              </a:rPr>
-              <a:t>Case 1: Detection After Treatment</a:t>
-            </a:r>
-            <a:endParaRPr lang="en-US" sz="3000" dirty="0"/>
-          </a:p>
-        </p:txBody>
-      </p:sp>
-      <p:sp>
-        <p:nvSpPr>
-          <p:cNvPr id="4" name="Text 2"/>
-          <p:cNvSpPr/>
-          <p:nvPr/>
-        </p:nvSpPr>
-        <p:spPr>
-          <a:xfrm>
-            <a:off x="566928" y="1554480"/>
-            <a:ext cx="6413547" cy="4023360"/>
+              <a:rPr lang="en-US" sz="1300" b="1" spc="250" kern="0" dirty="0">
+                <a:solidFill>
+                  <a:srgbClr val="F2C9D9"/>
+                </a:solidFill>
+                <a:latin typeface="Calibri" pitchFamily="34" charset="0"/>
+                <a:ea typeface="Calibri" pitchFamily="34" charset="-122"/>
+                <a:cs typeface="Calibri" pitchFamily="34" charset="-120"/>
+              </a:rPr>
+              <a:t>PART THREE</a:t>
+            </a:r>
+            <a:endParaRPr lang="en-US" sz="1300" dirty="0"/>
+          </a:p>
+        </p:txBody>
+      </p:sp>
+      <p:sp>
+        <p:nvSpPr>
+          <p:cNvPr id="6" name="Text 4"/>
+          <p:cNvSpPr/>
+          <p:nvPr/>
+        </p:nvSpPr>
+        <p:spPr>
+          <a:xfrm>
+            <a:off x="566928" y="3611880"/>
+            <a:ext cx="10607040" cy="1463040"/>
           </a:xfrm>
           <a:prstGeom prst="rect">
             <a:avLst/>
@@ -4252,304 +5243,21 @@
           <a:bodyPr wrap="square" lIns="0" tIns="0" rIns="0" bIns="0" rtlCol="0" anchor="t"/>
           <a:lstStyle/>
           <a:p>
-            <a:pPr algn="l" marL="177800" indent="-177800">
-              <a:spcAft>
-                <a:spcPts val="900"/>
-              </a:spcAft>
-              <a:buSzPct val="100000"/>
-              <a:buChar char="•"/>
-            </a:pPr>
-            <a:r>
-              <a:rPr lang="en-US" sz="1400" b="1" dirty="0">
-                <a:solidFill>
-                  <a:srgbClr val="1B2A38"/>
-                </a:solidFill>
-                <a:latin typeface="Calibri" pitchFamily="34" charset="0"/>
-                <a:ea typeface="Calibri" pitchFamily="34" charset="-122"/>
-                <a:cs typeface="Calibri" pitchFamily="34" charset="-120"/>
-              </a:rPr>
-              <a:t>NAATs can remain positive for days to weeks after clinical recovery — residual nucleic acid, not necessarily active infection.</a:t>
-            </a:r>
-            <a:endParaRPr lang="en-US" sz="1400" dirty="0"/>
-          </a:p>
-          <a:p>
-            <a:pPr algn="l" marL="177800" indent="-177800">
-              <a:spcAft>
-                <a:spcPts val="900"/>
-              </a:spcAft>
-              <a:buSzPct val="100000"/>
-              <a:buChar char="•"/>
-            </a:pPr>
-            <a:r>
-              <a:rPr lang="en-US" sz="1400" dirty="0">
-                <a:solidFill>
-                  <a:srgbClr val="33444F"/>
-                </a:solidFill>
-                <a:latin typeface="Calibri" pitchFamily="34" charset="0"/>
-                <a:ea typeface="Calibri" pitchFamily="34" charset="-122"/>
-                <a:cs typeface="Calibri" pitchFamily="34" charset="-120"/>
-              </a:rPr>
-              <a:t>Detection does not equal viable, transmissible, or clinically active virus.</a:t>
-            </a:r>
-            <a:endParaRPr lang="en-US" sz="1400" dirty="0"/>
-          </a:p>
-          <a:p>
-            <a:pPr algn="l" marL="177800" indent="-177800">
-              <a:spcAft>
-                <a:spcPts val="900"/>
-              </a:spcAft>
-              <a:buSzPct val="100000"/>
-              <a:buChar char="•"/>
-            </a:pPr>
-            <a:r>
-              <a:rPr lang="en-US" sz="1400" dirty="0">
-                <a:solidFill>
-                  <a:srgbClr val="33444F"/>
-                </a:solidFill>
-                <a:latin typeface="Calibri" pitchFamily="34" charset="0"/>
-                <a:ea typeface="Calibri" pitchFamily="34" charset="-122"/>
-                <a:cs typeface="Calibri" pitchFamily="34" charset="-120"/>
-              </a:rPr>
-              <a:t>Interpret with the clinical course; avoid re-treating a recovering patient.</a:t>
-            </a:r>
-            <a:endParaRPr lang="en-US" sz="1400" dirty="0"/>
-          </a:p>
-          <a:p>
-            <a:pPr algn="l" marL="177800" indent="-177800">
-              <a:spcAft>
-                <a:spcPts val="900"/>
-              </a:spcAft>
-              <a:buSzPct val="100000"/>
-              <a:buChar char="•"/>
-            </a:pPr>
-            <a:r>
-              <a:rPr lang="en-US" sz="1400" dirty="0">
-                <a:solidFill>
-                  <a:srgbClr val="33444F"/>
-                </a:solidFill>
-                <a:latin typeface="Calibri" pitchFamily="34" charset="0"/>
-                <a:ea typeface="Calibri" pitchFamily="34" charset="-122"/>
-                <a:cs typeface="Calibri" pitchFamily="34" charset="-120"/>
-              </a:rPr>
-              <a:t>Reserve repeat testing for situations where it changes management.</a:t>
-            </a:r>
-            <a:endParaRPr lang="en-US" sz="1400" dirty="0"/>
-          </a:p>
-        </p:txBody>
-      </p:sp>
-      <p:sp>
-        <p:nvSpPr>
-          <p:cNvPr id="5" name="Shape 3"/>
-          <p:cNvSpPr/>
-          <p:nvPr/>
-        </p:nvSpPr>
-        <p:spPr>
-          <a:xfrm>
-            <a:off x="7422788" y="1554480"/>
-            <a:ext cx="4201979" cy="3977640"/>
-          </a:xfrm>
-          <a:prstGeom prst="roundRect">
-            <a:avLst>
-              <a:gd name="adj" fmla="val 2069"/>
-            </a:avLst>
-          </a:prstGeom>
-          <a:solidFill>
-            <a:srgbClr val="E8F2E9"/>
-          </a:solidFill>
-          <a:ln/>
-          <a:effectLst>
-            <a:outerShdw sx="100000" sy="100000" kx="0" ky="0" algn="bl" rotWithShape="0" blurRad="88900" dist="25400" dir="5400000">
-              <a:srgbClr val="22303C">
-                <a:alpha val="12000"/>
-              </a:srgbClr>
-            </a:outerShdw>
-          </a:effectLst>
-        </p:spPr>
-      </p:sp>
-      <p:sp>
-        <p:nvSpPr>
-          <p:cNvPr id="6" name="Text 4"/>
-          <p:cNvSpPr/>
-          <p:nvPr/>
-        </p:nvSpPr>
-        <p:spPr>
-          <a:xfrm>
-            <a:off x="7660532" y="1755648"/>
-            <a:ext cx="3744779" cy="310896"/>
-          </a:xfrm>
-          <a:prstGeom prst="rect">
-            <a:avLst/>
-          </a:prstGeom>
-          <a:noFill/>
-          <a:ln/>
-        </p:spPr>
-        <p:txBody>
-          <a:bodyPr wrap="square" lIns="0" tIns="0" rIns="0" bIns="0" rtlCol="0" anchor="ctr"/>
-          <a:lstStyle/>
-          <a:p>
-            <a:pPr indent="0" marL="0">
-              <a:buNone/>
-            </a:pPr>
-            <a:r>
-              <a:rPr lang="en-US" sz="1100" b="1" spc="140" kern="0" dirty="0">
-                <a:solidFill>
-                  <a:srgbClr val="2E7D32"/>
-                </a:solidFill>
-                <a:latin typeface="Calibri" pitchFamily="34" charset="0"/>
-                <a:ea typeface="Calibri" pitchFamily="34" charset="-122"/>
-                <a:cs typeface="Calibri" pitchFamily="34" charset="-120"/>
-              </a:rPr>
-              <a:t>TEACHING POINT</a:t>
-            </a:r>
-            <a:endParaRPr lang="en-US" sz="1100" dirty="0"/>
-          </a:p>
-        </p:txBody>
-      </p:sp>
-      <p:sp>
-        <p:nvSpPr>
-          <p:cNvPr id="7" name="Text 5"/>
-          <p:cNvSpPr/>
-          <p:nvPr/>
-        </p:nvSpPr>
-        <p:spPr>
-          <a:xfrm>
-            <a:off x="7660532" y="2121408"/>
-            <a:ext cx="3726491" cy="3291840"/>
-          </a:xfrm>
-          <a:prstGeom prst="rect">
-            <a:avLst/>
-          </a:prstGeom>
-          <a:noFill/>
-          <a:ln/>
-        </p:spPr>
-        <p:txBody>
-          <a:bodyPr wrap="square" lIns="0" tIns="0" rIns="0" bIns="0" rtlCol="0" anchor="t"/>
-          <a:lstStyle/>
-          <a:p>
             <a:pPr algn="l" indent="0" marL="0">
-              <a:lnSpc>
-                <a:spcPct val="110000"/>
-              </a:lnSpc>
-              <a:buNone/>
-            </a:pPr>
-            <a:r>
-              <a:rPr lang="en-US" sz="1350" dirty="0">
-                <a:solidFill>
-                  <a:srgbClr val="33444F"/>
-                </a:solidFill>
-                <a:latin typeface="Calibri" pitchFamily="34" charset="0"/>
-                <a:ea typeface="Calibri" pitchFamily="34" charset="-122"/>
-                <a:cs typeface="Calibri" pitchFamily="34" charset="-120"/>
-              </a:rPr>
-              <a:t>A persistent molecular 'detected' after treatment usually reflects residual nucleic acid — correlate clinically rather than re-treating.</a:t>
-            </a:r>
-            <a:endParaRPr lang="en-US" sz="1350" dirty="0"/>
-          </a:p>
-        </p:txBody>
-      </p:sp>
-      <p:sp>
-        <p:nvSpPr>
-          <p:cNvPr id="8" name="Text 6"/>
-          <p:cNvSpPr/>
-          <p:nvPr/>
-        </p:nvSpPr>
-        <p:spPr>
-          <a:xfrm>
-            <a:off x="566928" y="6473952"/>
-            <a:ext cx="7772400" cy="274320"/>
-          </a:xfrm>
-          <a:prstGeom prst="rect">
-            <a:avLst/>
-          </a:prstGeom>
-          <a:noFill/>
-          <a:ln/>
-        </p:spPr>
-        <p:txBody>
-          <a:bodyPr wrap="square" lIns="0" tIns="0" rIns="0" bIns="0" rtlCol="0" anchor="ctr"/>
-          <a:lstStyle/>
-          <a:p>
-            <a:pPr algn="l" indent="0" marL="0">
-              <a:buNone/>
-            </a:pPr>
-            <a:r>
-              <a:rPr lang="en-US" sz="850" dirty="0">
-                <a:solidFill>
-                  <a:srgbClr val="9AA8B4"/>
-                </a:solidFill>
-                <a:latin typeface="Calibri" pitchFamily="34" charset="0"/>
-                <a:ea typeface="Calibri" pitchFamily="34" charset="-122"/>
-                <a:cs typeface="Calibri" pitchFamily="34" charset="-120"/>
-              </a:rPr>
-              <a:t>Makassed General Hospital  ·  Department of Laboratory Medicine</a:t>
-            </a:r>
-            <a:endParaRPr lang="en-US" sz="850" dirty="0"/>
-          </a:p>
-        </p:txBody>
-      </p:sp>
-      <p:sp>
-        <p:nvSpPr>
-          <p:cNvPr id="9" name="Text 7"/>
-          <p:cNvSpPr/>
-          <p:nvPr/>
-        </p:nvSpPr>
-        <p:spPr>
-          <a:xfrm>
-            <a:off x="9814255" y="6473952"/>
-            <a:ext cx="1828800" cy="274320"/>
-          </a:xfrm>
-          <a:prstGeom prst="rect">
-            <a:avLst/>
-          </a:prstGeom>
-          <a:noFill/>
-          <a:ln/>
-        </p:spPr>
-        <p:txBody>
-          <a:bodyPr wrap="square" lIns="0" tIns="0" rIns="0" bIns="0" rtlCol="0" anchor="ctr"/>
-          <a:lstStyle/>
-          <a:p>
-            <a:pPr algn="r" indent="0" marL="0">
-              <a:buNone/>
-            </a:pPr>
-            <a:r>
-              <a:rPr lang="en-US" sz="850" dirty="0">
-                <a:solidFill>
-                  <a:srgbClr val="9AA8B4"/>
-                </a:solidFill>
-                <a:latin typeface="Calibri" pitchFamily="34" charset="0"/>
-                <a:ea typeface="Calibri" pitchFamily="34" charset="-122"/>
-                <a:cs typeface="Calibri" pitchFamily="34" charset="-120"/>
-              </a:rPr>
-              <a:t>CP Lecture Series</a:t>
-            </a:r>
-            <a:pPr algn="r" indent="0" marL="0">
-              <a:buNone/>
-            </a:pPr>
-            <a:r>
-              <a:rPr lang="en-US" sz="850" dirty="0">
-                <a:solidFill>
-                  <a:srgbClr val="DCE4EC"/>
-                </a:solidFill>
-                <a:latin typeface="Calibri" pitchFamily="34" charset="0"/>
-                <a:ea typeface="Calibri" pitchFamily="34" charset="-122"/>
-                <a:cs typeface="Calibri" pitchFamily="34" charset="-120"/>
-              </a:rPr>
-              <a:t>   ·   </a:t>
-            </a:r>
-            <a:pPr algn="r" indent="0" marL="0">
-              <a:buNone/>
-            </a:pPr>
-            <a:r>
-              <a:rPr lang="en-US" sz="850" b="1" dirty="0">
-                <a:solidFill>
-                  <a:srgbClr val="2E7D32"/>
-                </a:solidFill>
-                <a:latin typeface="Calibri" pitchFamily="34" charset="0"/>
-                <a:ea typeface="Calibri" pitchFamily="34" charset="-122"/>
-                <a:cs typeface="Calibri" pitchFamily="34" charset="-120"/>
-              </a:rPr>
-              <a:t>10</a:t>
-            </a:r>
-            <a:endParaRPr lang="en-US" sz="850" dirty="0"/>
+              <a:buNone/>
+            </a:pPr>
+            <a:r>
+              <a:rPr lang="en-US" sz="3800" b="1" dirty="0">
+                <a:solidFill>
+                  <a:srgbClr val="FFFFFF"/>
+                </a:solidFill>
+                <a:latin typeface="Calibri" pitchFamily="34" charset="0"/>
+                <a:ea typeface="Calibri" pitchFamily="34" charset="-122"/>
+                <a:cs typeface="Calibri" pitchFamily="34" charset="-120"/>
+              </a:rPr>
+              <a:t>Cases &amp; Board Review</a:t>
+            </a:r>
+            <a:endParaRPr lang="en-US" sz="3800" dirty="0"/>
           </a:p>
         </p:txBody>
       </p:sp>
@@ -4618,7 +5326,7 @@
                 <a:ea typeface="Calibri" pitchFamily="34" charset="-122"/>
                 <a:cs typeface="Calibri" pitchFamily="34" charset="-120"/>
               </a:rPr>
-              <a:t>MICROBIOLOGY   ·   CASE 2</a:t>
+              <a:t>MICROBIOLOGY   ·   CASE 1</a:t>
             </a:r>
             <a:endParaRPr lang="en-US" sz="1100" dirty="0"/>
           </a:p>
@@ -4657,7 +5365,7 @@
                 <a:ea typeface="Calibri" pitchFamily="34" charset="-122"/>
                 <a:cs typeface="Calibri" pitchFamily="34" charset="-120"/>
               </a:rPr>
-              <a:t>Case 2</a:t>
+              <a:t>Case 1</a:t>
             </a:r>
             <a:endParaRPr lang="en-US" sz="3000" dirty="0"/>
           </a:p>
@@ -4767,7 +5475,7 @@
                 <a:ea typeface="Calibri" pitchFamily="34" charset="-122"/>
                 <a:cs typeface="Calibri" pitchFamily="34" charset="-120"/>
               </a:rPr>
-              <a:t>A positive blood culture bottle returns a rapid molecular result identifying Staphylococcus aureus with mecA detected, hours before conventional ID/AST.</a:t>
+              <a:t>A C. difficile NAAT is positive in a patient on laxatives with formed stools and no leukocytosis.</a:t>
             </a:r>
             <a:endParaRPr lang="en-US" sz="1450" dirty="0"/>
           </a:p>
@@ -4874,7 +5582,7 @@
                 <a:ea typeface="Calibri" pitchFamily="34" charset="-122"/>
                 <a:cs typeface="Calibri" pitchFamily="34" charset="-120"/>
               </a:rPr>
-              <a:t>What does this enable, and what still must be confirmed?</a:t>
+              <a:t>Does the positive NAAT establish C. difficile infection?</a:t>
             </a:r>
             <a:endParaRPr lang="en-US" sz="1500" dirty="0"/>
           </a:p>
@@ -5051,7 +5759,7 @@
                 <a:ea typeface="Calibri" pitchFamily="34" charset="-122"/>
                 <a:cs typeface="Calibri" pitchFamily="34" charset="-120"/>
               </a:rPr>
-              <a:t>MICROBIOLOGY   ·   CASE 2  ·  RESOLUTION</a:t>
+              <a:t>MICROBIOLOGY   ·   CASE 1  ·  RESOLUTION</a:t>
             </a:r>
             <a:endParaRPr lang="en-US" sz="1100" dirty="0"/>
           </a:p>
@@ -5090,7 +5798,7 @@
                 <a:ea typeface="Calibri" pitchFamily="34" charset="-122"/>
                 <a:cs typeface="Calibri" pitchFamily="34" charset="-120"/>
               </a:rPr>
-              <a:t>Case 2: Rapid Blood-Culture ID + Resistance Gene</a:t>
+              <a:t>Case 1: NAAT-Positive C. difficile</a:t>
             </a:r>
             <a:endParaRPr lang="en-US" sz="3000" dirty="0"/>
           </a:p>
@@ -5133,7 +5841,7 @@
                 <a:ea typeface="Calibri" pitchFamily="34" charset="-122"/>
                 <a:cs typeface="Calibri" pitchFamily="34" charset="-120"/>
               </a:rPr>
-              <a:t>Rapid ID of S. aureus with mecA indicates likely MRSA — enabling earlier appropriate anti-MRSA therapy.</a:t>
+              <a:t>NAAT detects the toxin gene, indicating carriage — not necessarily active disease.</a:t>
             </a:r>
             <a:endParaRPr lang="en-US" sz="1400" dirty="0"/>
           </a:p>
@@ -5154,7 +5862,7 @@
                 <a:ea typeface="Calibri" pitchFamily="34" charset="-122"/>
                 <a:cs typeface="Calibri" pitchFamily="34" charset="-120"/>
               </a:rPr>
-              <a:t>This shortens time to effective treatment and supports stewardship.</a:t>
+              <a:t>In a patient with formed stool and no clinical signs, this likely reflects colonization.</a:t>
             </a:r>
             <a:endParaRPr lang="en-US" sz="1400" dirty="0"/>
           </a:p>
@@ -5175,7 +5883,7 @@
                 <a:ea typeface="Calibri" pitchFamily="34" charset="-122"/>
                 <a:cs typeface="Calibri" pitchFamily="34" charset="-120"/>
               </a:rPr>
-              <a:t>Confirm with conventional/automated AST for the full susceptibility profile.</a:t>
+              <a:t>Testing should be limited to patients with clinically significant diarrhea.</a:t>
             </a:r>
             <a:endParaRPr lang="en-US" sz="1400" dirty="0"/>
           </a:p>
@@ -5196,7 +5904,7 @@
                 <a:ea typeface="Calibri" pitchFamily="34" charset="-122"/>
                 <a:cs typeface="Calibri" pitchFamily="34" charset="-120"/>
               </a:rPr>
-              <a:t>Communicate promptly with the team/stewardship.</a:t>
+              <a:t>Correlate with symptoms; consider toxin EIA in algorithms.</a:t>
             </a:r>
             <a:endParaRPr lang="en-US" sz="1400" dirty="0"/>
           </a:p>
@@ -5306,7 +6014,7 @@
                 <a:ea typeface="Calibri" pitchFamily="34" charset="-122"/>
                 <a:cs typeface="Calibri" pitchFamily="34" charset="-120"/>
               </a:rPr>
-              <a:t>Rapid bottle ID + resistance genes accelerates correct therapy, but confirmatory phenotypic AST still defines the complete profile.</a:t>
+              <a:t>Only test for C. difficile in patients with unexplained, clinically significant diarrhea — a positive NAAT in a colonized patient causes overtreatment.</a:t>
             </a:r>
             <a:endParaRPr lang="en-US" sz="1350" dirty="0"/>
           </a:p>
@@ -5483,7 +6191,7 @@
                 <a:ea typeface="Calibri" pitchFamily="34" charset="-122"/>
                 <a:cs typeface="Calibri" pitchFamily="34" charset="-120"/>
               </a:rPr>
-              <a:t>MICROBIOLOGY   ·   BOARD REVIEW  ·  Q1</a:t>
+              <a:t>MICROBIOLOGY   ·   CASE 2</a:t>
             </a:r>
             <a:endParaRPr lang="en-US" sz="1100" dirty="0"/>
           </a:p>
@@ -5514,7 +6222,7 @@
               <a:buNone/>
             </a:pPr>
             <a:r>
-              <a:rPr lang="en-US" sz="2600" b="1" dirty="0">
+              <a:rPr lang="en-US" sz="3000" b="1" dirty="0">
                 <a:solidFill>
                   <a:srgbClr val="0E3A5F"/>
                 </a:solidFill>
@@ -5522,190 +6230,26 @@
                 <a:ea typeface="Calibri" pitchFamily="34" charset="-122"/>
                 <a:cs typeface="Calibri" pitchFamily="34" charset="-120"/>
               </a:rPr>
-              <a:t>Board-Style Review</a:t>
-            </a:r>
-            <a:endParaRPr lang="en-US" sz="2600" dirty="0"/>
-          </a:p>
-        </p:txBody>
-      </p:sp>
-      <p:sp>
-        <p:nvSpPr>
-          <p:cNvPr id="4" name="Text 2"/>
-          <p:cNvSpPr/>
-          <p:nvPr/>
-        </p:nvSpPr>
-        <p:spPr>
-          <a:xfrm>
-            <a:off x="566928" y="1417320"/>
-            <a:ext cx="11057839" cy="914400"/>
-          </a:xfrm>
-          <a:prstGeom prst="rect">
-            <a:avLst/>
-          </a:prstGeom>
-          <a:noFill/>
-          <a:ln/>
-        </p:spPr>
-        <p:txBody>
-          <a:bodyPr wrap="square" lIns="0" tIns="0" rIns="0" bIns="0" rtlCol="0" anchor="t"/>
-          <a:lstStyle/>
-          <a:p>
-            <a:pPr algn="l" indent="0" marL="0">
-              <a:lnSpc>
-                <a:spcPct val="105000"/>
-              </a:lnSpc>
-              <a:buNone/>
-            </a:pPr>
-            <a:r>
-              <a:rPr lang="en-US" sz="1450" b="1" dirty="0">
-                <a:solidFill>
-                  <a:srgbClr val="1B2A38"/>
-                </a:solidFill>
-                <a:latin typeface="Calibri" pitchFamily="34" charset="0"/>
-                <a:ea typeface="Calibri" pitchFamily="34" charset="-122"/>
-                <a:cs typeface="Calibri" pitchFamily="34" charset="-120"/>
-              </a:rPr>
-              <a:t>A respiratory pathogen is 'detected' by NAAT in a patient who finished therapy and is clinically well. The best interpretation is:</a:t>
-            </a:r>
-            <a:endParaRPr lang="en-US" sz="1450" dirty="0"/>
-          </a:p>
-        </p:txBody>
-      </p:sp>
-      <p:sp>
-        <p:nvSpPr>
-          <p:cNvPr id="5" name="Text 3"/>
-          <p:cNvSpPr/>
-          <p:nvPr/>
-        </p:nvSpPr>
-        <p:spPr>
-          <a:xfrm>
-            <a:off x="658368" y="2395728"/>
-            <a:ext cx="6192390" cy="3017520"/>
-          </a:xfrm>
-          <a:prstGeom prst="rect">
-            <a:avLst/>
-          </a:prstGeom>
-          <a:noFill/>
-          <a:ln/>
-        </p:spPr>
-        <p:txBody>
-          <a:bodyPr wrap="square" lIns="0" tIns="0" rIns="0" bIns="0" rtlCol="0" anchor="t"/>
-          <a:lstStyle/>
-          <a:p>
-            <a:pPr algn="l" indent="0" marL="0">
-              <a:spcAft>
-                <a:spcPts val="600"/>
-              </a:spcAft>
-              <a:buNone/>
-            </a:pPr>
-            <a:r>
-              <a:rPr lang="en-US" sz="1350" dirty="0">
-                <a:solidFill>
-                  <a:srgbClr val="33444F"/>
-                </a:solidFill>
-                <a:latin typeface="Calibri" pitchFamily="34" charset="0"/>
-                <a:ea typeface="Calibri" pitchFamily="34" charset="-122"/>
-                <a:cs typeface="Calibri" pitchFamily="34" charset="-120"/>
-              </a:rPr>
-              <a:t>A. Active infection requiring re-treatment</a:t>
-            </a:r>
-            <a:endParaRPr lang="en-US" sz="1350" dirty="0"/>
-          </a:p>
-          <a:p>
-            <a:pPr algn="l" indent="0" marL="0">
-              <a:spcAft>
-                <a:spcPts val="600"/>
-              </a:spcAft>
-              <a:buNone/>
-            </a:pPr>
-            <a:r>
-              <a:rPr lang="en-US" sz="1350" b="1" dirty="0">
-                <a:solidFill>
-                  <a:srgbClr val="1F5722"/>
-                </a:solidFill>
-                <a:latin typeface="Calibri" pitchFamily="34" charset="0"/>
-                <a:ea typeface="Calibri" pitchFamily="34" charset="-122"/>
-                <a:cs typeface="Calibri" pitchFamily="34" charset="-120"/>
-              </a:rPr>
-              <a:t>B. Likely residual nucleic acid; correlate clinically</a:t>
-            </a:r>
-            <a:endParaRPr lang="en-US" sz="1350" dirty="0"/>
-          </a:p>
-          <a:p>
-            <a:pPr algn="l" indent="0" marL="0">
-              <a:spcAft>
-                <a:spcPts val="600"/>
-              </a:spcAft>
-              <a:buNone/>
-            </a:pPr>
-            <a:r>
-              <a:rPr lang="en-US" sz="1350" dirty="0">
-                <a:solidFill>
-                  <a:srgbClr val="33444F"/>
-                </a:solidFill>
-                <a:latin typeface="Calibri" pitchFamily="34" charset="0"/>
-                <a:ea typeface="Calibri" pitchFamily="34" charset="-122"/>
-                <a:cs typeface="Calibri" pitchFamily="34" charset="-120"/>
-              </a:rPr>
-              <a:t>C. Laboratory error always</a:t>
-            </a:r>
-            <a:endParaRPr lang="en-US" sz="1350" dirty="0"/>
-          </a:p>
-          <a:p>
-            <a:pPr algn="l" indent="0" marL="0">
-              <a:spcAft>
-                <a:spcPts val="600"/>
-              </a:spcAft>
-              <a:buNone/>
-            </a:pPr>
-            <a:r>
-              <a:rPr lang="en-US" sz="1350" dirty="0">
-                <a:solidFill>
-                  <a:srgbClr val="33444F"/>
-                </a:solidFill>
-                <a:latin typeface="Calibri" pitchFamily="34" charset="0"/>
-                <a:ea typeface="Calibri" pitchFamily="34" charset="-122"/>
-                <a:cs typeface="Calibri" pitchFamily="34" charset="-120"/>
-              </a:rPr>
-              <a:t>D. Definite reinfection</a:t>
-            </a:r>
-            <a:endParaRPr lang="en-US" sz="1350" dirty="0"/>
-          </a:p>
-          <a:p>
-            <a:pPr algn="l" indent="0" marL="0">
-              <a:spcAft>
-                <a:spcPts val="600"/>
-              </a:spcAft>
-              <a:buNone/>
-            </a:pPr>
-            <a:r>
-              <a:rPr lang="en-US" sz="1350" dirty="0">
-                <a:solidFill>
-                  <a:srgbClr val="33444F"/>
-                </a:solidFill>
-                <a:latin typeface="Calibri" pitchFamily="34" charset="0"/>
-                <a:ea typeface="Calibri" pitchFamily="34" charset="-122"/>
-                <a:cs typeface="Calibri" pitchFamily="34" charset="-120"/>
-              </a:rPr>
-              <a:t>E. Contamination always</a:t>
-            </a:r>
-            <a:endParaRPr lang="en-US" sz="1350" dirty="0"/>
-          </a:p>
-        </p:txBody>
-      </p:sp>
-      <p:sp>
-        <p:nvSpPr>
-          <p:cNvPr id="6" name="Shape 4"/>
-          <p:cNvSpPr/>
-          <p:nvPr/>
-        </p:nvSpPr>
-        <p:spPr>
-          <a:xfrm>
-            <a:off x="7201632" y="2395728"/>
-            <a:ext cx="4423136" cy="3246120"/>
+              <a:t>Case 2</a:t>
+            </a:r>
+            <a:endParaRPr lang="en-US" sz="3000" dirty="0"/>
+          </a:p>
+        </p:txBody>
+      </p:sp>
+      <p:sp>
+        <p:nvSpPr>
+          <p:cNvPr id="4" name="Shape 2"/>
+          <p:cNvSpPr/>
+          <p:nvPr/>
+        </p:nvSpPr>
+        <p:spPr>
+          <a:xfrm>
+            <a:off x="566928" y="1517904"/>
+            <a:ext cx="11057839" cy="2788920"/>
           </a:xfrm>
           <a:prstGeom prst="roundRect">
             <a:avLst>
-              <a:gd name="adj" fmla="val 2535"/>
+              <a:gd name="adj" fmla="val 2951"/>
             </a:avLst>
           </a:prstGeom>
           <a:solidFill>
@@ -5723,14 +6267,14 @@
       </p:sp>
       <p:sp>
         <p:nvSpPr>
-          <p:cNvPr id="7" name="Text 5"/>
-          <p:cNvSpPr/>
-          <p:nvPr/>
-        </p:nvSpPr>
-        <p:spPr>
-          <a:xfrm>
-            <a:off x="7439376" y="2578608"/>
-            <a:ext cx="3965936" cy="457200"/>
+          <p:cNvPr id="5" name="Text 3"/>
+          <p:cNvSpPr/>
+          <p:nvPr/>
+        </p:nvSpPr>
+        <p:spPr>
+          <a:xfrm>
+            <a:off x="841248" y="1700784"/>
+            <a:ext cx="5486400" cy="292608"/>
           </a:xfrm>
           <a:prstGeom prst="rect">
             <a:avLst/>
@@ -5746,7 +6290,7 @@
               <a:buNone/>
             </a:pPr>
             <a:r>
-              <a:rPr lang="en-US" sz="1500" b="1" dirty="0">
+              <a:rPr lang="en-US" sz="1100" b="1" spc="150" kern="0" dirty="0">
                 <a:solidFill>
                   <a:srgbClr val="2E7D32"/>
                 </a:solidFill>
@@ -5754,36 +6298,22 @@
                 <a:ea typeface="Calibri" pitchFamily="34" charset="-122"/>
                 <a:cs typeface="Calibri" pitchFamily="34" charset="-120"/>
               </a:rPr>
-              <a:t>ANSWER  </a:t>
-            </a:r>
-            <a:pPr indent="0" marL="0">
-              <a:buNone/>
-            </a:pPr>
-            <a:r>
-              <a:rPr lang="en-US" sz="1500" b="1" dirty="0">
-                <a:solidFill>
-                  <a:srgbClr val="1B2A38"/>
-                </a:solidFill>
-                <a:latin typeface="Calibri" pitchFamily="34" charset="0"/>
-                <a:ea typeface="Calibri" pitchFamily="34" charset="-122"/>
-                <a:cs typeface="Calibri" pitchFamily="34" charset="-120"/>
-              </a:rPr>
-              <a:t>B — Likely residual nucleic acid; correlate clinically</a:t>
-            </a:r>
-            <a:endParaRPr lang="en-US" sz="1500" dirty="0"/>
-          </a:p>
-        </p:txBody>
-      </p:sp>
-      <p:sp>
-        <p:nvSpPr>
-          <p:cNvPr id="8" name="Text 6"/>
-          <p:cNvSpPr/>
-          <p:nvPr/>
-        </p:nvSpPr>
-        <p:spPr>
-          <a:xfrm>
-            <a:off x="7439376" y="3127248"/>
-            <a:ext cx="3947648" cy="2377440"/>
+              <a:t>CLINICAL VIGNETTE</a:t>
+            </a:r>
+            <a:endParaRPr lang="en-US" sz="1100" dirty="0"/>
+          </a:p>
+        </p:txBody>
+      </p:sp>
+      <p:sp>
+        <p:nvSpPr>
+          <p:cNvPr id="6" name="Text 4"/>
+          <p:cNvSpPr/>
+          <p:nvPr/>
+        </p:nvSpPr>
+        <p:spPr>
+          <a:xfrm>
+            <a:off x="841248" y="2029968"/>
+            <a:ext cx="10509199" cy="2148840"/>
           </a:xfrm>
           <a:prstGeom prst="rect">
             <a:avLst/>
@@ -5802,7 +6332,7 @@
               <a:buNone/>
             </a:pPr>
             <a:r>
-              <a:rPr lang="en-US" sz="1250" dirty="0">
+              <a:rPr lang="en-US" sz="1450" dirty="0">
                 <a:solidFill>
                   <a:srgbClr val="33444F"/>
                 </a:solidFill>
@@ -5810,15 +6340,122 @@
                 <a:ea typeface="Calibri" pitchFamily="34" charset="-122"/>
                 <a:cs typeface="Calibri" pitchFamily="34" charset="-120"/>
               </a:rPr>
-              <a:t>NAATs can stay positive after recovery because they detect nucleic acid, not viability; interpret with the clinical course.</a:t>
-            </a:r>
-            <a:endParaRPr lang="en-US" sz="1250" dirty="0"/>
+              <a:t>A rapid influenza antigen test is negative during peak season in a symptomatic patient.</a:t>
+            </a:r>
+            <a:endParaRPr lang="en-US" sz="1450" dirty="0"/>
+          </a:p>
+        </p:txBody>
+      </p:sp>
+      <p:sp>
+        <p:nvSpPr>
+          <p:cNvPr id="7" name="Shape 5"/>
+          <p:cNvSpPr/>
+          <p:nvPr/>
+        </p:nvSpPr>
+        <p:spPr>
+          <a:xfrm>
+            <a:off x="566928" y="4553712"/>
+            <a:ext cx="11057839" cy="1325880"/>
+          </a:xfrm>
+          <a:prstGeom prst="roundRect">
+            <a:avLst>
+              <a:gd name="adj" fmla="val 6207"/>
+            </a:avLst>
+          </a:prstGeom>
+          <a:solidFill>
+            <a:srgbClr val="0E3A5F"/>
+          </a:solidFill>
+          <a:ln/>
+          <a:effectLst>
+            <a:outerShdw sx="100000" sy="100000" kx="0" ky="0" algn="bl" rotWithShape="0" blurRad="88900" dist="25400" dir="5400000">
+              <a:srgbClr val="22303C">
+                <a:alpha val="12000"/>
+              </a:srgbClr>
+            </a:outerShdw>
+          </a:effectLst>
+        </p:spPr>
+      </p:sp>
+      <p:sp>
+        <p:nvSpPr>
+          <p:cNvPr id="8" name="Text 6"/>
+          <p:cNvSpPr/>
+          <p:nvPr/>
+        </p:nvSpPr>
+        <p:spPr>
+          <a:xfrm>
+            <a:off x="822960" y="4681728"/>
+            <a:ext cx="640080" cy="960120"/>
+          </a:xfrm>
+          <a:prstGeom prst="rect">
+            <a:avLst/>
+          </a:prstGeom>
+          <a:noFill/>
+          <a:ln/>
+        </p:spPr>
+        <p:txBody>
+          <a:bodyPr wrap="square" lIns="0" tIns="0" rIns="0" bIns="0" rtlCol="0" anchor="ctr"/>
+          <a:lstStyle/>
+          <a:p>
+            <a:pPr algn="ctr" indent="0" marL="0">
+              <a:buNone/>
+            </a:pPr>
+            <a:r>
+              <a:rPr lang="en-US" sz="4000" b="1" dirty="0">
+                <a:solidFill>
+                  <a:srgbClr val="2E7D32"/>
+                </a:solidFill>
+                <a:latin typeface="Calibri" pitchFamily="34" charset="0"/>
+                <a:ea typeface="Calibri" pitchFamily="34" charset="-122"/>
+                <a:cs typeface="Calibri" pitchFamily="34" charset="-120"/>
+              </a:rPr>
+              <a:t>?</a:t>
+            </a:r>
+            <a:endParaRPr lang="en-US" sz="4000" dirty="0"/>
           </a:p>
         </p:txBody>
       </p:sp>
       <p:sp>
         <p:nvSpPr>
           <p:cNvPr id="9" name="Text 7"/>
+          <p:cNvSpPr/>
+          <p:nvPr/>
+        </p:nvSpPr>
+        <p:spPr>
+          <a:xfrm>
+            <a:off x="1618488" y="4553712"/>
+            <a:ext cx="9686239" cy="1325880"/>
+          </a:xfrm>
+          <a:prstGeom prst="rect">
+            <a:avLst/>
+          </a:prstGeom>
+          <a:noFill/>
+          <a:ln/>
+        </p:spPr>
+        <p:txBody>
+          <a:bodyPr wrap="square" lIns="0" tIns="0" rIns="0" bIns="0" rtlCol="0" anchor="ctr"/>
+          <a:lstStyle/>
+          <a:p>
+            <a:pPr algn="l" indent="0" marL="0">
+              <a:buNone/>
+            </a:pPr>
+            <a:r>
+              <a:rPr lang="en-US" sz="1500" b="1" dirty="0">
+                <a:solidFill>
+                  <a:srgbClr val="FFFFFF"/>
+                </a:solidFill>
+                <a:latin typeface="Calibri" pitchFamily="34" charset="0"/>
+                <a:ea typeface="Calibri" pitchFamily="34" charset="-122"/>
+                <a:cs typeface="Calibri" pitchFamily="34" charset="-120"/>
+              </a:rPr>
+              <a:t>How should this negative result be interpreted and managed?</a:t>
+            </a:r>
+            <a:endParaRPr lang="en-US" sz="1500" dirty="0"/>
+          </a:p>
+        </p:txBody>
+      </p:sp>
+      <p:sp>
+        <p:nvSpPr>
+          <p:cNvPr id="10" name="Text 8"/>
           <p:cNvSpPr/>
           <p:nvPr/>
         </p:nvSpPr>
@@ -5857,7 +6494,7 @@
       </p:sp>
       <p:sp>
         <p:nvSpPr>
-          <p:cNvPr id="10" name="Text 8"/>
+          <p:cNvPr id="11" name="Text 9"/>
           <p:cNvSpPr/>
           <p:nvPr/>
         </p:nvSpPr>
@@ -5987,7 +6624,7 @@
                 <a:ea typeface="Calibri" pitchFamily="34" charset="-122"/>
                 <a:cs typeface="Calibri" pitchFamily="34" charset="-120"/>
               </a:rPr>
-              <a:t>MICROBIOLOGY   ·   BOARD REVIEW  ·  Q2</a:t>
+              <a:t>MICROBIOLOGY   ·   CASE 2  ·  RESOLUTION</a:t>
             </a:r>
             <a:endParaRPr lang="en-US" sz="1100" dirty="0"/>
           </a:p>
@@ -6018,7 +6655,7 @@
               <a:buNone/>
             </a:pPr>
             <a:r>
-              <a:rPr lang="en-US" sz="2600" b="1" dirty="0">
+              <a:rPr lang="en-US" sz="3000" b="1" dirty="0">
                 <a:solidFill>
                   <a:srgbClr val="0E3A5F"/>
                 </a:solidFill>
@@ -6026,9 +6663,9 @@
                 <a:ea typeface="Calibri" pitchFamily="34" charset="-122"/>
                 <a:cs typeface="Calibri" pitchFamily="34" charset="-120"/>
               </a:rPr>
-              <a:t>Board-Style Review</a:t>
-            </a:r>
-            <a:endParaRPr lang="en-US" sz="2600" dirty="0"/>
+              <a:t>Case 2: Negative Antigen in High Prevalence</a:t>
+            </a:r>
+            <a:endParaRPr lang="en-US" sz="3000" dirty="0"/>
           </a:p>
         </p:txBody>
       </p:sp>
@@ -6040,8 +6677,8 @@
         </p:nvSpPr>
         <p:spPr>
           <a:xfrm>
-            <a:off x="566928" y="1417320"/>
-            <a:ext cx="11057839" cy="914400"/>
+            <a:off x="566928" y="1554480"/>
+            <a:ext cx="6413547" cy="4023360"/>
           </a:xfrm>
           <a:prstGeom prst="rect">
             <a:avLst/>
@@ -6053,14 +6690,15 @@
           <a:bodyPr wrap="square" lIns="0" tIns="0" rIns="0" bIns="0" rtlCol="0" anchor="t"/>
           <a:lstStyle/>
           <a:p>
-            <a:pPr algn="l" indent="0" marL="0">
-              <a:lnSpc>
-                <a:spcPct val="105000"/>
-              </a:lnSpc>
-              <a:buNone/>
-            </a:pPr>
-            <a:r>
-              <a:rPr lang="en-US" sz="1450" b="1" dirty="0">
+            <a:pPr algn="l" marL="177800" indent="-177800">
+              <a:spcAft>
+                <a:spcPts val="900"/>
+              </a:spcAft>
+              <a:buSzPct val="100000"/>
+              <a:buChar char="•"/>
+            </a:pPr>
+            <a:r>
+              <a:rPr lang="en-US" sz="1400" b="1" dirty="0">
                 <a:solidFill>
                   <a:srgbClr val="1B2A38"/>
                 </a:solidFill>
@@ -6068,41 +6706,20 @@
                 <a:ea typeface="Calibri" pitchFamily="34" charset="-122"/>
                 <a:cs typeface="Calibri" pitchFamily="34" charset="-120"/>
               </a:rPr>
-              <a:t>A key limitation of multiplex syndromic panels is that:</a:t>
-            </a:r>
-            <a:endParaRPr lang="en-US" sz="1450" dirty="0"/>
-          </a:p>
-        </p:txBody>
-      </p:sp>
-      <p:sp>
-        <p:nvSpPr>
-          <p:cNvPr id="5" name="Text 3"/>
-          <p:cNvSpPr/>
-          <p:nvPr/>
-        </p:nvSpPr>
-        <p:spPr>
-          <a:xfrm>
-            <a:off x="658368" y="2395728"/>
-            <a:ext cx="6192390" cy="3017520"/>
-          </a:xfrm>
-          <a:prstGeom prst="rect">
-            <a:avLst/>
-          </a:prstGeom>
-          <a:noFill/>
-          <a:ln/>
-        </p:spPr>
-        <p:txBody>
-          <a:bodyPr wrap="square" lIns="0" tIns="0" rIns="0" bIns="0" rtlCol="0" anchor="t"/>
-          <a:lstStyle/>
-          <a:p>
-            <a:pPr algn="l" indent="0" marL="0">
+              <a:t>Antigen tests are less sensitive than NAAT; a negative result during high prevalence has a meaningful false-negative rate.</a:t>
+            </a:r>
+            <a:endParaRPr lang="en-US" sz="1400" dirty="0"/>
+          </a:p>
+          <a:p>
+            <a:pPr algn="l" marL="177800" indent="-177800">
               <a:spcAft>
-                <a:spcPts val="600"/>
+                <a:spcPts val="900"/>
               </a:spcAft>
-              <a:buNone/>
-            </a:pPr>
-            <a:r>
-              <a:rPr lang="en-US" sz="1350" dirty="0">
+              <a:buSzPct val="100000"/>
+              <a:buChar char="•"/>
+            </a:pPr>
+            <a:r>
+              <a:rPr lang="en-US" sz="1400" dirty="0">
                 <a:solidFill>
                   <a:srgbClr val="33444F"/>
                 </a:solidFill>
@@ -6110,19 +6727,20 @@
                 <a:ea typeface="Calibri" pitchFamily="34" charset="-122"/>
                 <a:cs typeface="Calibri" pitchFamily="34" charset="-120"/>
               </a:rPr>
-              <a:t>A. They are too slow</a:t>
-            </a:r>
-            <a:endParaRPr lang="en-US" sz="1350" dirty="0"/>
-          </a:p>
-          <a:p>
-            <a:pPr algn="l" indent="0" marL="0">
+              <a:t>Confirm with influenza NAAT when the result will change management.</a:t>
+            </a:r>
+            <a:endParaRPr lang="en-US" sz="1400" dirty="0"/>
+          </a:p>
+          <a:p>
+            <a:pPr algn="l" marL="177800" indent="-177800">
               <a:spcAft>
-                <a:spcPts val="600"/>
+                <a:spcPts val="900"/>
               </a:spcAft>
-              <a:buNone/>
-            </a:pPr>
-            <a:r>
-              <a:rPr lang="en-US" sz="1350" dirty="0">
+              <a:buSzPct val="100000"/>
+              <a:buChar char="•"/>
+            </a:pPr>
+            <a:r>
+              <a:rPr lang="en-US" sz="1400" dirty="0">
                 <a:solidFill>
                   <a:srgbClr val="33444F"/>
                 </a:solidFill>
@@ -6130,39 +6748,20 @@
                 <a:ea typeface="Calibri" pitchFamily="34" charset="-122"/>
                 <a:cs typeface="Calibri" pitchFamily="34" charset="-120"/>
               </a:rPr>
-              <a:t>B. A negative result excludes all possible pathogens</a:t>
-            </a:r>
-            <a:endParaRPr lang="en-US" sz="1350" dirty="0"/>
-          </a:p>
-          <a:p>
-            <a:pPr algn="l" indent="0" marL="0">
+              <a:t>Pretest probability is high in peak season.</a:t>
+            </a:r>
+            <a:endParaRPr lang="en-US" sz="1400" dirty="0"/>
+          </a:p>
+          <a:p>
+            <a:pPr algn="l" marL="177800" indent="-177800">
               <a:spcAft>
-                <a:spcPts val="600"/>
+                <a:spcPts val="900"/>
               </a:spcAft>
-              <a:buNone/>
-            </a:pPr>
-            <a:r>
-              <a:rPr lang="en-US" sz="1350" b="1" dirty="0">
-                <a:solidFill>
-                  <a:srgbClr val="1F5722"/>
-                </a:solidFill>
-                <a:latin typeface="Calibri" pitchFamily="34" charset="0"/>
-                <a:ea typeface="Calibri" pitchFamily="34" charset="-122"/>
-                <a:cs typeface="Calibri" pitchFamily="34" charset="-120"/>
-              </a:rPr>
-              <a:t>C. They detect only their fixed targets; off-panel organisms are missed</a:t>
-            </a:r>
-            <a:endParaRPr lang="en-US" sz="1350" dirty="0"/>
-          </a:p>
-          <a:p>
-            <a:pPr algn="l" indent="0" marL="0">
-              <a:spcAft>
-                <a:spcPts val="600"/>
-              </a:spcAft>
-              <a:buNone/>
-            </a:pPr>
-            <a:r>
-              <a:rPr lang="en-US" sz="1350" dirty="0">
+              <a:buSzPct val="100000"/>
+              <a:buChar char="•"/>
+            </a:pPr>
+            <a:r>
+              <a:rPr lang="en-US" sz="1400" dirty="0">
                 <a:solidFill>
                   <a:srgbClr val="33444F"/>
                 </a:solidFill>
@@ -6170,46 +6769,26 @@
                 <a:ea typeface="Calibri" pitchFamily="34" charset="-122"/>
                 <a:cs typeface="Calibri" pitchFamily="34" charset="-120"/>
               </a:rPr>
-              <a:t>D. They cannot detect viruses</a:t>
-            </a:r>
-            <a:endParaRPr lang="en-US" sz="1350" dirty="0"/>
-          </a:p>
-          <a:p>
-            <a:pPr algn="l" indent="0" marL="0">
-              <a:spcAft>
-                <a:spcPts val="600"/>
-              </a:spcAft>
-              <a:buNone/>
-            </a:pPr>
-            <a:r>
-              <a:rPr lang="en-US" sz="1350" dirty="0">
-                <a:solidFill>
-                  <a:srgbClr val="33444F"/>
-                </a:solidFill>
-                <a:latin typeface="Calibri" pitchFamily="34" charset="0"/>
-                <a:ea typeface="Calibri" pitchFamily="34" charset="-122"/>
-                <a:cs typeface="Calibri" pitchFamily="34" charset="-120"/>
-              </a:rPr>
-              <a:t>E. They provide full susceptibility profiles</a:t>
-            </a:r>
-            <a:endParaRPr lang="en-US" sz="1350" dirty="0"/>
-          </a:p>
-        </p:txBody>
-      </p:sp>
-      <p:sp>
-        <p:nvSpPr>
-          <p:cNvPr id="6" name="Shape 4"/>
-          <p:cNvSpPr/>
-          <p:nvPr/>
-        </p:nvSpPr>
-        <p:spPr>
-          <a:xfrm>
-            <a:off x="7201632" y="2395728"/>
-            <a:ext cx="4423136" cy="3246120"/>
+              <a:t>Do not exclude influenza on a single negative antigen test.</a:t>
+            </a:r>
+            <a:endParaRPr lang="en-US" sz="1400" dirty="0"/>
+          </a:p>
+        </p:txBody>
+      </p:sp>
+      <p:sp>
+        <p:nvSpPr>
+          <p:cNvPr id="5" name="Shape 3"/>
+          <p:cNvSpPr/>
+          <p:nvPr/>
+        </p:nvSpPr>
+        <p:spPr>
+          <a:xfrm>
+            <a:off x="7422788" y="1554480"/>
+            <a:ext cx="4201979" cy="3977640"/>
           </a:xfrm>
           <a:prstGeom prst="roundRect">
             <a:avLst>
-              <a:gd name="adj" fmla="val 2535"/>
+              <a:gd name="adj" fmla="val 2069"/>
             </a:avLst>
           </a:prstGeom>
           <a:solidFill>
@@ -6227,67 +6806,53 @@
       </p:sp>
       <p:sp>
         <p:nvSpPr>
+          <p:cNvPr id="6" name="Text 4"/>
+          <p:cNvSpPr/>
+          <p:nvPr/>
+        </p:nvSpPr>
+        <p:spPr>
+          <a:xfrm>
+            <a:off x="7660532" y="1755648"/>
+            <a:ext cx="3744779" cy="310896"/>
+          </a:xfrm>
+          <a:prstGeom prst="rect">
+            <a:avLst/>
+          </a:prstGeom>
+          <a:noFill/>
+          <a:ln/>
+        </p:spPr>
+        <p:txBody>
+          <a:bodyPr wrap="square" lIns="0" tIns="0" rIns="0" bIns="0" rtlCol="0" anchor="ctr"/>
+          <a:lstStyle/>
+          <a:p>
+            <a:pPr indent="0" marL="0">
+              <a:buNone/>
+            </a:pPr>
+            <a:r>
+              <a:rPr lang="en-US" sz="1100" b="1" spc="140" kern="0" dirty="0">
+                <a:solidFill>
+                  <a:srgbClr val="2E7D32"/>
+                </a:solidFill>
+                <a:latin typeface="Calibri" pitchFamily="34" charset="0"/>
+                <a:ea typeface="Calibri" pitchFamily="34" charset="-122"/>
+                <a:cs typeface="Calibri" pitchFamily="34" charset="-120"/>
+              </a:rPr>
+              <a:t>TEACHING POINT</a:t>
+            </a:r>
+            <a:endParaRPr lang="en-US" sz="1100" dirty="0"/>
+          </a:p>
+        </p:txBody>
+      </p:sp>
+      <p:sp>
+        <p:nvSpPr>
           <p:cNvPr id="7" name="Text 5"/>
           <p:cNvSpPr/>
           <p:nvPr/>
         </p:nvSpPr>
         <p:spPr>
           <a:xfrm>
-            <a:off x="7439376" y="2578608"/>
-            <a:ext cx="3965936" cy="457200"/>
-          </a:xfrm>
-          <a:prstGeom prst="rect">
-            <a:avLst/>
-          </a:prstGeom>
-          <a:noFill/>
-          <a:ln/>
-        </p:spPr>
-        <p:txBody>
-          <a:bodyPr wrap="square" lIns="0" tIns="0" rIns="0" bIns="0" rtlCol="0" anchor="ctr"/>
-          <a:lstStyle/>
-          <a:p>
-            <a:pPr indent="0" marL="0">
-              <a:buNone/>
-            </a:pPr>
-            <a:r>
-              <a:rPr lang="en-US" sz="1500" b="1" dirty="0">
-                <a:solidFill>
-                  <a:srgbClr val="2E7D32"/>
-                </a:solidFill>
-                <a:latin typeface="Calibri" pitchFamily="34" charset="0"/>
-                <a:ea typeface="Calibri" pitchFamily="34" charset="-122"/>
-                <a:cs typeface="Calibri" pitchFamily="34" charset="-120"/>
-              </a:rPr>
-              <a:t>ANSWER  </a:t>
-            </a:r>
-            <a:pPr indent="0" marL="0">
-              <a:buNone/>
-            </a:pPr>
-            <a:r>
-              <a:rPr lang="en-US" sz="1500" b="1" dirty="0">
-                <a:solidFill>
-                  <a:srgbClr val="1B2A38"/>
-                </a:solidFill>
-                <a:latin typeface="Calibri" pitchFamily="34" charset="0"/>
-                <a:ea typeface="Calibri" pitchFamily="34" charset="-122"/>
-                <a:cs typeface="Calibri" pitchFamily="34" charset="-120"/>
-              </a:rPr>
-              <a:t>C — Only fixed targets; off-panel missed</a:t>
-            </a:r>
-            <a:endParaRPr lang="en-US" sz="1500" dirty="0"/>
-          </a:p>
-        </p:txBody>
-      </p:sp>
-      <p:sp>
-        <p:nvSpPr>
-          <p:cNvPr id="8" name="Text 6"/>
-          <p:cNvSpPr/>
-          <p:nvPr/>
-        </p:nvSpPr>
-        <p:spPr>
-          <a:xfrm>
-            <a:off x="7439376" y="3127248"/>
-            <a:ext cx="3947648" cy="2377440"/>
+            <a:off x="7660532" y="2121408"/>
+            <a:ext cx="3726491" cy="3291840"/>
           </a:xfrm>
           <a:prstGeom prst="rect">
             <a:avLst/>
@@ -6301,12 +6866,12 @@
           <a:p>
             <a:pPr algn="l" indent="0" marL="0">
               <a:lnSpc>
-                <a:spcPct val="108000"/>
+                <a:spcPct val="110000"/>
               </a:lnSpc>
               <a:buNone/>
             </a:pPr>
             <a:r>
-              <a:rPr lang="en-US" sz="1250" dirty="0">
+              <a:rPr lang="en-US" sz="1350" dirty="0">
                 <a:solidFill>
                   <a:srgbClr val="33444F"/>
                 </a:solidFill>
@@ -6314,15 +6879,15 @@
                 <a:ea typeface="Calibri" pitchFamily="34" charset="-122"/>
                 <a:cs typeface="Calibri" pitchFamily="34" charset="-120"/>
               </a:rPr>
-              <a:t>Panels test a predefined set of targets; a negative panel does not exclude pathogens not included, and detection does not confirm causation.</a:t>
-            </a:r>
-            <a:endParaRPr lang="en-US" sz="1250" dirty="0"/>
-          </a:p>
-        </p:txBody>
-      </p:sp>
-      <p:sp>
-        <p:nvSpPr>
-          <p:cNvPr id="9" name="Text 7"/>
+              <a:t>In high-prevalence settings, confirm a negative rapid antigen test with NAAT — sensitivity limits make a single negative unreliable.</a:t>
+            </a:r>
+            <a:endParaRPr lang="en-US" sz="1350" dirty="0"/>
+          </a:p>
+        </p:txBody>
+      </p:sp>
+      <p:sp>
+        <p:nvSpPr>
+          <p:cNvPr id="8" name="Text 6"/>
           <p:cNvSpPr/>
           <p:nvPr/>
         </p:nvSpPr>
@@ -6361,7 +6926,7 @@
       </p:sp>
       <p:sp>
         <p:nvSpPr>
-          <p:cNvPr id="10" name="Text 8"/>
+          <p:cNvPr id="9" name="Text 7"/>
           <p:cNvSpPr/>
           <p:nvPr/>
         </p:nvSpPr>
@@ -6491,7 +7056,7 @@
                 <a:ea typeface="Calibri" pitchFamily="34" charset="-122"/>
                 <a:cs typeface="Calibri" pitchFamily="34" charset="-120"/>
               </a:rPr>
-              <a:t>MICROBIOLOGY   ·   BOARD REVIEW  ·  Q3</a:t>
+              <a:t>MICROBIOLOGY   ·   CASE 3</a:t>
             </a:r>
             <a:endParaRPr lang="en-US" sz="1100" dirty="0"/>
           </a:p>
@@ -6522,7 +7087,7 @@
               <a:buNone/>
             </a:pPr>
             <a:r>
-              <a:rPr lang="en-US" sz="2600" b="1" dirty="0">
+              <a:rPr lang="en-US" sz="3000" b="1" dirty="0">
                 <a:solidFill>
                   <a:srgbClr val="0E3A5F"/>
                 </a:solidFill>
@@ -6530,190 +7095,26 @@
                 <a:ea typeface="Calibri" pitchFamily="34" charset="-122"/>
                 <a:cs typeface="Calibri" pitchFamily="34" charset="-120"/>
               </a:rPr>
-              <a:t>Board-Style Review</a:t>
-            </a:r>
-            <a:endParaRPr lang="en-US" sz="2600" dirty="0"/>
-          </a:p>
-        </p:txBody>
-      </p:sp>
-      <p:sp>
-        <p:nvSpPr>
-          <p:cNvPr id="4" name="Text 2"/>
-          <p:cNvSpPr/>
-          <p:nvPr/>
-        </p:nvSpPr>
-        <p:spPr>
-          <a:xfrm>
-            <a:off x="566928" y="1417320"/>
-            <a:ext cx="11057839" cy="914400"/>
-          </a:xfrm>
-          <a:prstGeom prst="rect">
-            <a:avLst/>
-          </a:prstGeom>
-          <a:noFill/>
-          <a:ln/>
-        </p:spPr>
-        <p:txBody>
-          <a:bodyPr wrap="square" lIns="0" tIns="0" rIns="0" bIns="0" rtlCol="0" anchor="t"/>
-          <a:lstStyle/>
-          <a:p>
-            <a:pPr algn="l" indent="0" marL="0">
-              <a:lnSpc>
-                <a:spcPct val="105000"/>
-              </a:lnSpc>
-              <a:buNone/>
-            </a:pPr>
-            <a:r>
-              <a:rPr lang="en-US" sz="1450" b="1" dirty="0">
-                <a:solidFill>
-                  <a:srgbClr val="1B2A38"/>
-                </a:solidFill>
-                <a:latin typeface="Calibri" pitchFamily="34" charset="0"/>
-                <a:ea typeface="Calibri" pitchFamily="34" charset="-122"/>
-                <a:cs typeface="Calibri" pitchFamily="34" charset="-120"/>
-              </a:rPr>
-              <a:t>Rapid molecular detection of mecA from a positive blood culture allows the team to:</a:t>
-            </a:r>
-            <a:endParaRPr lang="en-US" sz="1450" dirty="0"/>
-          </a:p>
-        </p:txBody>
-      </p:sp>
-      <p:sp>
-        <p:nvSpPr>
-          <p:cNvPr id="5" name="Text 3"/>
-          <p:cNvSpPr/>
-          <p:nvPr/>
-        </p:nvSpPr>
-        <p:spPr>
-          <a:xfrm>
-            <a:off x="658368" y="2395728"/>
-            <a:ext cx="6192390" cy="3017520"/>
-          </a:xfrm>
-          <a:prstGeom prst="rect">
-            <a:avLst/>
-          </a:prstGeom>
-          <a:noFill/>
-          <a:ln/>
-        </p:spPr>
-        <p:txBody>
-          <a:bodyPr wrap="square" lIns="0" tIns="0" rIns="0" bIns="0" rtlCol="0" anchor="t"/>
-          <a:lstStyle/>
-          <a:p>
-            <a:pPr algn="l" indent="0" marL="0">
-              <a:spcAft>
-                <a:spcPts val="600"/>
-              </a:spcAft>
-              <a:buNone/>
-            </a:pPr>
-            <a:r>
-              <a:rPr lang="en-US" sz="1350" dirty="0">
-                <a:solidFill>
-                  <a:srgbClr val="33444F"/>
-                </a:solidFill>
-                <a:latin typeface="Calibri" pitchFamily="34" charset="0"/>
-                <a:ea typeface="Calibri" pitchFamily="34" charset="-122"/>
-                <a:cs typeface="Calibri" pitchFamily="34" charset="-120"/>
-              </a:rPr>
-              <a:t>A. Stop all antibiotics</a:t>
-            </a:r>
-            <a:endParaRPr lang="en-US" sz="1350" dirty="0"/>
-          </a:p>
-          <a:p>
-            <a:pPr algn="l" indent="0" marL="0">
-              <a:spcAft>
-                <a:spcPts val="600"/>
-              </a:spcAft>
-              <a:buNone/>
-            </a:pPr>
-            <a:r>
-              <a:rPr lang="en-US" sz="1350" b="1" dirty="0">
-                <a:solidFill>
-                  <a:srgbClr val="1F5722"/>
-                </a:solidFill>
-                <a:latin typeface="Calibri" pitchFamily="34" charset="0"/>
-                <a:ea typeface="Calibri" pitchFamily="34" charset="-122"/>
-                <a:cs typeface="Calibri" pitchFamily="34" charset="-120"/>
-              </a:rPr>
-              <a:t>B. Start appropriate anti-MRSA therapy earlier, pending confirmatory AST</a:t>
-            </a:r>
-            <a:endParaRPr lang="en-US" sz="1350" dirty="0"/>
-          </a:p>
-          <a:p>
-            <a:pPr algn="l" indent="0" marL="0">
-              <a:spcAft>
-                <a:spcPts val="600"/>
-              </a:spcAft>
-              <a:buNone/>
-            </a:pPr>
-            <a:r>
-              <a:rPr lang="en-US" sz="1350" dirty="0">
-                <a:solidFill>
-                  <a:srgbClr val="33444F"/>
-                </a:solidFill>
-                <a:latin typeface="Calibri" pitchFamily="34" charset="0"/>
-                <a:ea typeface="Calibri" pitchFamily="34" charset="-122"/>
-                <a:cs typeface="Calibri" pitchFamily="34" charset="-120"/>
-              </a:rPr>
-              <a:t>C. Ignore susceptibility testing</a:t>
-            </a:r>
-            <a:endParaRPr lang="en-US" sz="1350" dirty="0"/>
-          </a:p>
-          <a:p>
-            <a:pPr algn="l" indent="0" marL="0">
-              <a:spcAft>
-                <a:spcPts val="600"/>
-              </a:spcAft>
-              <a:buNone/>
-            </a:pPr>
-            <a:r>
-              <a:rPr lang="en-US" sz="1350" dirty="0">
-                <a:solidFill>
-                  <a:srgbClr val="33444F"/>
-                </a:solidFill>
-                <a:latin typeface="Calibri" pitchFamily="34" charset="0"/>
-                <a:ea typeface="Calibri" pitchFamily="34" charset="-122"/>
-                <a:cs typeface="Calibri" pitchFamily="34" charset="-120"/>
-              </a:rPr>
-              <a:t>D. Diagnose contamination</a:t>
-            </a:r>
-            <a:endParaRPr lang="en-US" sz="1350" dirty="0"/>
-          </a:p>
-          <a:p>
-            <a:pPr algn="l" indent="0" marL="0">
-              <a:spcAft>
-                <a:spcPts val="600"/>
-              </a:spcAft>
-              <a:buNone/>
-            </a:pPr>
-            <a:r>
-              <a:rPr lang="en-US" sz="1350" dirty="0">
-                <a:solidFill>
-                  <a:srgbClr val="33444F"/>
-                </a:solidFill>
-                <a:latin typeface="Calibri" pitchFamily="34" charset="0"/>
-                <a:ea typeface="Calibri" pitchFamily="34" charset="-122"/>
-                <a:cs typeface="Calibri" pitchFamily="34" charset="-120"/>
-              </a:rPr>
-              <a:t>E. Replace the antibiogram</a:t>
-            </a:r>
-            <a:endParaRPr lang="en-US" sz="1350" dirty="0"/>
-          </a:p>
-        </p:txBody>
-      </p:sp>
-      <p:sp>
-        <p:nvSpPr>
-          <p:cNvPr id="6" name="Shape 4"/>
-          <p:cNvSpPr/>
-          <p:nvPr/>
-        </p:nvSpPr>
-        <p:spPr>
-          <a:xfrm>
-            <a:off x="7201632" y="2395728"/>
-            <a:ext cx="4423136" cy="3246120"/>
+              <a:t>Case 3</a:t>
+            </a:r>
+            <a:endParaRPr lang="en-US" sz="3000" dirty="0"/>
+          </a:p>
+        </p:txBody>
+      </p:sp>
+      <p:sp>
+        <p:nvSpPr>
+          <p:cNvPr id="4" name="Shape 2"/>
+          <p:cNvSpPr/>
+          <p:nvPr/>
+        </p:nvSpPr>
+        <p:spPr>
+          <a:xfrm>
+            <a:off x="566928" y="1517904"/>
+            <a:ext cx="11057839" cy="2788920"/>
           </a:xfrm>
           <a:prstGeom prst="roundRect">
             <a:avLst>
-              <a:gd name="adj" fmla="val 2535"/>
+              <a:gd name="adj" fmla="val 2951"/>
             </a:avLst>
           </a:prstGeom>
           <a:solidFill>
@@ -6731,14 +7132,14 @@
       </p:sp>
       <p:sp>
         <p:nvSpPr>
-          <p:cNvPr id="7" name="Text 5"/>
-          <p:cNvSpPr/>
-          <p:nvPr/>
-        </p:nvSpPr>
-        <p:spPr>
-          <a:xfrm>
-            <a:off x="7439376" y="2578608"/>
-            <a:ext cx="3965936" cy="457200"/>
+          <p:cNvPr id="5" name="Text 3"/>
+          <p:cNvSpPr/>
+          <p:nvPr/>
+        </p:nvSpPr>
+        <p:spPr>
+          <a:xfrm>
+            <a:off x="841248" y="1700784"/>
+            <a:ext cx="5486400" cy="292608"/>
           </a:xfrm>
           <a:prstGeom prst="rect">
             <a:avLst/>
@@ -6754,7 +7155,7 @@
               <a:buNone/>
             </a:pPr>
             <a:r>
-              <a:rPr lang="en-US" sz="1500" b="1" dirty="0">
+              <a:rPr lang="en-US" sz="1100" b="1" spc="150" kern="0" dirty="0">
                 <a:solidFill>
                   <a:srgbClr val="2E7D32"/>
                 </a:solidFill>
@@ -6762,36 +7163,22 @@
                 <a:ea typeface="Calibri" pitchFamily="34" charset="-122"/>
                 <a:cs typeface="Calibri" pitchFamily="34" charset="-120"/>
               </a:rPr>
-              <a:t>ANSWER  </a:t>
-            </a:r>
-            <a:pPr indent="0" marL="0">
-              <a:buNone/>
-            </a:pPr>
-            <a:r>
-              <a:rPr lang="en-US" sz="1500" b="1" dirty="0">
-                <a:solidFill>
-                  <a:srgbClr val="1B2A38"/>
-                </a:solidFill>
-                <a:latin typeface="Calibri" pitchFamily="34" charset="0"/>
-                <a:ea typeface="Calibri" pitchFamily="34" charset="-122"/>
-                <a:cs typeface="Calibri" pitchFamily="34" charset="-120"/>
-              </a:rPr>
-              <a:t>B — Earlier anti-MRSA therapy, pending AST</a:t>
-            </a:r>
-            <a:endParaRPr lang="en-US" sz="1500" dirty="0"/>
-          </a:p>
-        </p:txBody>
-      </p:sp>
-      <p:sp>
-        <p:nvSpPr>
-          <p:cNvPr id="8" name="Text 6"/>
-          <p:cNvSpPr/>
-          <p:nvPr/>
-        </p:nvSpPr>
-        <p:spPr>
-          <a:xfrm>
-            <a:off x="7439376" y="3127248"/>
-            <a:ext cx="3947648" cy="2377440"/>
+              <a:t>CLINICAL VIGNETTE</a:t>
+            </a:r>
+            <a:endParaRPr lang="en-US" sz="1100" dirty="0"/>
+          </a:p>
+        </p:txBody>
+      </p:sp>
+      <p:sp>
+        <p:nvSpPr>
+          <p:cNvPr id="6" name="Text 4"/>
+          <p:cNvSpPr/>
+          <p:nvPr/>
+        </p:nvSpPr>
+        <p:spPr>
+          <a:xfrm>
+            <a:off x="841248" y="2029968"/>
+            <a:ext cx="10509199" cy="2148840"/>
           </a:xfrm>
           <a:prstGeom prst="rect">
             <a:avLst/>
@@ -6810,7 +7197,7 @@
               <a:buNone/>
             </a:pPr>
             <a:r>
-              <a:rPr lang="en-US" sz="1250" dirty="0">
+              <a:rPr lang="en-US" sz="1450" dirty="0">
                 <a:solidFill>
                   <a:srgbClr val="33444F"/>
                 </a:solidFill>
@@ -6818,15 +7205,122 @@
                 <a:ea typeface="Calibri" pitchFamily="34" charset="-122"/>
                 <a:cs typeface="Calibri" pitchFamily="34" charset="-120"/>
               </a:rPr>
-              <a:t>Detecting mecA predicts methicillin resistance, enabling earlier correct therapy; confirmatory phenotypic AST still completes the profile.</a:t>
-            </a:r>
-            <a:endParaRPr lang="en-US" sz="1250" dirty="0"/>
+              <a:t>A blood-culture molecular panel reports an organism plus a mecA gene within an hour of positivity.</a:t>
+            </a:r>
+            <a:endParaRPr lang="en-US" sz="1450" dirty="0"/>
+          </a:p>
+        </p:txBody>
+      </p:sp>
+      <p:sp>
+        <p:nvSpPr>
+          <p:cNvPr id="7" name="Shape 5"/>
+          <p:cNvSpPr/>
+          <p:nvPr/>
+        </p:nvSpPr>
+        <p:spPr>
+          <a:xfrm>
+            <a:off x="566928" y="4553712"/>
+            <a:ext cx="11057839" cy="1325880"/>
+          </a:xfrm>
+          <a:prstGeom prst="roundRect">
+            <a:avLst>
+              <a:gd name="adj" fmla="val 6207"/>
+            </a:avLst>
+          </a:prstGeom>
+          <a:solidFill>
+            <a:srgbClr val="0E3A5F"/>
+          </a:solidFill>
+          <a:ln/>
+          <a:effectLst>
+            <a:outerShdw sx="100000" sy="100000" kx="0" ky="0" algn="bl" rotWithShape="0" blurRad="88900" dist="25400" dir="5400000">
+              <a:srgbClr val="22303C">
+                <a:alpha val="12000"/>
+              </a:srgbClr>
+            </a:outerShdw>
+          </a:effectLst>
+        </p:spPr>
+      </p:sp>
+      <p:sp>
+        <p:nvSpPr>
+          <p:cNvPr id="8" name="Text 6"/>
+          <p:cNvSpPr/>
+          <p:nvPr/>
+        </p:nvSpPr>
+        <p:spPr>
+          <a:xfrm>
+            <a:off x="822960" y="4681728"/>
+            <a:ext cx="640080" cy="960120"/>
+          </a:xfrm>
+          <a:prstGeom prst="rect">
+            <a:avLst/>
+          </a:prstGeom>
+          <a:noFill/>
+          <a:ln/>
+        </p:spPr>
+        <p:txBody>
+          <a:bodyPr wrap="square" lIns="0" tIns="0" rIns="0" bIns="0" rtlCol="0" anchor="ctr"/>
+          <a:lstStyle/>
+          <a:p>
+            <a:pPr algn="ctr" indent="0" marL="0">
+              <a:buNone/>
+            </a:pPr>
+            <a:r>
+              <a:rPr lang="en-US" sz="4000" b="1" dirty="0">
+                <a:solidFill>
+                  <a:srgbClr val="2E7D32"/>
+                </a:solidFill>
+                <a:latin typeface="Calibri" pitchFamily="34" charset="0"/>
+                <a:ea typeface="Calibri" pitchFamily="34" charset="-122"/>
+                <a:cs typeface="Calibri" pitchFamily="34" charset="-120"/>
+              </a:rPr>
+              <a:t>?</a:t>
+            </a:r>
+            <a:endParaRPr lang="en-US" sz="4000" dirty="0"/>
           </a:p>
         </p:txBody>
       </p:sp>
       <p:sp>
         <p:nvSpPr>
           <p:cNvPr id="9" name="Text 7"/>
+          <p:cNvSpPr/>
+          <p:nvPr/>
+        </p:nvSpPr>
+        <p:spPr>
+          <a:xfrm>
+            <a:off x="1618488" y="4553712"/>
+            <a:ext cx="9686239" cy="1325880"/>
+          </a:xfrm>
+          <a:prstGeom prst="rect">
+            <a:avLst/>
+          </a:prstGeom>
+          <a:noFill/>
+          <a:ln/>
+        </p:spPr>
+        <p:txBody>
+          <a:bodyPr wrap="square" lIns="0" tIns="0" rIns="0" bIns="0" rtlCol="0" anchor="ctr"/>
+          <a:lstStyle/>
+          <a:p>
+            <a:pPr algn="l" indent="0" marL="0">
+              <a:buNone/>
+            </a:pPr>
+            <a:r>
+              <a:rPr lang="en-US" sz="1500" b="1" dirty="0">
+                <a:solidFill>
+                  <a:srgbClr val="FFFFFF"/>
+                </a:solidFill>
+                <a:latin typeface="Calibri" pitchFamily="34" charset="0"/>
+                <a:ea typeface="Calibri" pitchFamily="34" charset="-122"/>
+                <a:cs typeface="Calibri" pitchFamily="34" charset="-120"/>
+              </a:rPr>
+              <a:t>How does this change management compared with waiting for culture-based AST?</a:t>
+            </a:r>
+            <a:endParaRPr lang="en-US" sz="1500" dirty="0"/>
+          </a:p>
+        </p:txBody>
+      </p:sp>
+      <p:sp>
+        <p:nvSpPr>
+          <p:cNvPr id="10" name="Text 8"/>
           <p:cNvSpPr/>
           <p:nvPr/>
         </p:nvSpPr>
@@ -6865,7 +7359,7 @@
       </p:sp>
       <p:sp>
         <p:nvSpPr>
-          <p:cNvPr id="10" name="Text 8"/>
+          <p:cNvPr id="11" name="Text 9"/>
           <p:cNvSpPr/>
           <p:nvPr/>
         </p:nvSpPr>
@@ -6944,7 +7438,7 @@
     <p:bg>
       <p:bgPr>
         <a:solidFill>
-          <a:srgbClr val="0A2A45"/>
+          <a:srgbClr val="FFFFFF"/>
         </a:solidFill>
       </p:bgPr>
     </p:bg>
@@ -6971,7 +7465,7 @@
         <p:spPr>
           <a:xfrm>
             <a:off x="566928" y="329184"/>
-            <a:ext cx="10058400" cy="310896"/>
+            <a:ext cx="10515600" cy="310896"/>
           </a:xfrm>
           <a:prstGeom prst="rect">
             <a:avLst/>
@@ -6983,7 +7477,7 @@
           <a:bodyPr wrap="square" lIns="0" tIns="0" rIns="0" bIns="0" rtlCol="0" anchor="ctr"/>
           <a:lstStyle/>
           <a:p>
-            <a:pPr indent="0" marL="0">
+            <a:pPr algn="l" indent="0" marL="0">
               <a:buNone/>
             </a:pPr>
             <a:r>
@@ -6995,7 +7489,7 @@
                 <a:ea typeface="Calibri" pitchFamily="34" charset="-122"/>
                 <a:cs typeface="Calibri" pitchFamily="34" charset="-120"/>
               </a:rPr>
-              <a:t>MICROBIOLOGY</a:t>
+              <a:t>MICROBIOLOGY   ·   CASE 3  ·  RESOLUTION</a:t>
             </a:r>
             <a:endParaRPr lang="en-US" sz="1100" dirty="0"/>
           </a:p>
@@ -7009,8 +7503,8 @@
         </p:nvSpPr>
         <p:spPr>
           <a:xfrm>
-            <a:off x="566928" y="676656"/>
-            <a:ext cx="10972800" cy="749808"/>
+            <a:off x="566928" y="713232"/>
+            <a:ext cx="11064240" cy="749808"/>
           </a:xfrm>
           <a:prstGeom prst="rect">
             <a:avLst/>
@@ -7022,19 +7516,19 @@
           <a:bodyPr wrap="square" lIns="0" tIns="0" rIns="0" bIns="0" rtlCol="0" anchor="ctr"/>
           <a:lstStyle/>
           <a:p>
-            <a:pPr indent="0" marL="0">
+            <a:pPr algn="l" indent="0" marL="0">
               <a:buNone/>
             </a:pPr>
             <a:r>
               <a:rPr lang="en-US" sz="3000" b="1" dirty="0">
                 <a:solidFill>
-                  <a:srgbClr val="FFFFFF"/>
-                </a:solidFill>
-                <a:latin typeface="Calibri" pitchFamily="34" charset="0"/>
-                <a:ea typeface="Calibri" pitchFamily="34" charset="-122"/>
-                <a:cs typeface="Calibri" pitchFamily="34" charset="-120"/>
-              </a:rPr>
-              <a:t>Key Take-Home Points</a:t>
+                  <a:srgbClr val="0E3A5F"/>
+                </a:solidFill>
+                <a:latin typeface="Calibri" pitchFamily="34" charset="0"/>
+                <a:ea typeface="Calibri" pitchFamily="34" charset="-122"/>
+                <a:cs typeface="Calibri" pitchFamily="34" charset="-120"/>
+              </a:rPr>
+              <a:t>Case 3: Rapid Blood-Culture Panel</a:t>
             </a:r>
             <a:endParaRPr lang="en-US" sz="3000" dirty="0"/>
           </a:p>
@@ -7042,42 +7536,128 @@
       </p:sp>
       <p:sp>
         <p:nvSpPr>
-          <p:cNvPr id="4" name="Shape 2"/>
-          <p:cNvSpPr/>
-          <p:nvPr/>
-        </p:nvSpPr>
-        <p:spPr>
-          <a:xfrm>
-            <a:off x="566928" y="1517904"/>
-            <a:ext cx="11057839" cy="841248"/>
+          <p:cNvPr id="4" name="Text 2"/>
+          <p:cNvSpPr/>
+          <p:nvPr/>
+        </p:nvSpPr>
+        <p:spPr>
+          <a:xfrm>
+            <a:off x="566928" y="1554480"/>
+            <a:ext cx="6413547" cy="4023360"/>
+          </a:xfrm>
+          <a:prstGeom prst="rect">
+            <a:avLst/>
+          </a:prstGeom>
+          <a:noFill/>
+          <a:ln/>
+        </p:spPr>
+        <p:txBody>
+          <a:bodyPr wrap="square" lIns="0" tIns="0" rIns="0" bIns="0" rtlCol="0" anchor="t"/>
+          <a:lstStyle/>
+          <a:p>
+            <a:pPr algn="l" marL="177800" indent="-177800">
+              <a:spcAft>
+                <a:spcPts val="900"/>
+              </a:spcAft>
+              <a:buSzPct val="100000"/>
+              <a:buChar char="•"/>
+            </a:pPr>
+            <a:r>
+              <a:rPr lang="en-US" sz="1400" b="1" dirty="0">
+                <a:solidFill>
+                  <a:srgbClr val="1B2A38"/>
+                </a:solidFill>
+                <a:latin typeface="Calibri" pitchFamily="34" charset="0"/>
+                <a:ea typeface="Calibri" pitchFamily="34" charset="-122"/>
+                <a:cs typeface="Calibri" pitchFamily="34" charset="-120"/>
+              </a:rPr>
+              <a:t>Rapid organism + resistance-marker detection enables earlier appropriate therapy (e.g., recognizing methicillin resistance) and de-escalation.</a:t>
+            </a:r>
+            <a:endParaRPr lang="en-US" sz="1400" dirty="0"/>
+          </a:p>
+          <a:p>
+            <a:pPr algn="l" marL="177800" indent="-177800">
+              <a:spcAft>
+                <a:spcPts val="900"/>
+              </a:spcAft>
+              <a:buSzPct val="100000"/>
+              <a:buChar char="•"/>
+            </a:pPr>
+            <a:r>
+              <a:rPr lang="en-US" sz="1400" dirty="0">
+                <a:solidFill>
+                  <a:srgbClr val="33444F"/>
+                </a:solidFill>
+                <a:latin typeface="Calibri" pitchFamily="34" charset="0"/>
+                <a:ea typeface="Calibri" pitchFamily="34" charset="-122"/>
+                <a:cs typeface="Calibri" pitchFamily="34" charset="-120"/>
+              </a:rPr>
+              <a:t>Confirm with culture-based AST for full susceptibility.</a:t>
+            </a:r>
+            <a:endParaRPr lang="en-US" sz="1400" dirty="0"/>
+          </a:p>
+          <a:p>
+            <a:pPr algn="l" marL="177800" indent="-177800">
+              <a:spcAft>
+                <a:spcPts val="900"/>
+              </a:spcAft>
+              <a:buSzPct val="100000"/>
+              <a:buChar char="•"/>
+            </a:pPr>
+            <a:r>
+              <a:rPr lang="en-US" sz="1400" dirty="0">
+                <a:solidFill>
+                  <a:srgbClr val="33444F"/>
+                </a:solidFill>
+                <a:latin typeface="Calibri" pitchFamily="34" charset="0"/>
+                <a:ea typeface="Calibri" pitchFamily="34" charset="-122"/>
+                <a:cs typeface="Calibri" pitchFamily="34" charset="-120"/>
+              </a:rPr>
+              <a:t>Pair results with stewardship guidance.</a:t>
+            </a:r>
+            <a:endParaRPr lang="en-US" sz="1400" dirty="0"/>
+          </a:p>
+          <a:p>
+            <a:pPr algn="l" marL="177800" indent="-177800">
+              <a:spcAft>
+                <a:spcPts val="900"/>
+              </a:spcAft>
+              <a:buSzPct val="100000"/>
+              <a:buChar char="•"/>
+            </a:pPr>
+            <a:r>
+              <a:rPr lang="en-US" sz="1400" dirty="0">
+                <a:solidFill>
+                  <a:srgbClr val="33444F"/>
+                </a:solidFill>
+                <a:latin typeface="Calibri" pitchFamily="34" charset="0"/>
+                <a:ea typeface="Calibri" pitchFamily="34" charset="-122"/>
+                <a:cs typeface="Calibri" pitchFamily="34" charset="-120"/>
+              </a:rPr>
+              <a:t>Time saved can improve outcomes in bacteremia.</a:t>
+            </a:r>
+            <a:endParaRPr lang="en-US" sz="1400" dirty="0"/>
+          </a:p>
+        </p:txBody>
+      </p:sp>
+      <p:sp>
+        <p:nvSpPr>
+          <p:cNvPr id="5" name="Shape 3"/>
+          <p:cNvSpPr/>
+          <p:nvPr/>
+        </p:nvSpPr>
+        <p:spPr>
+          <a:xfrm>
+            <a:off x="7422788" y="1554480"/>
+            <a:ext cx="4201979" cy="3977640"/>
           </a:xfrm>
           <a:prstGeom prst="roundRect">
             <a:avLst>
-              <a:gd name="adj" fmla="val 7609"/>
+              <a:gd name="adj" fmla="val 2069"/>
             </a:avLst>
           </a:prstGeom>
           <a:solidFill>
-            <a:srgbClr val="143651"/>
-          </a:solidFill>
-          <a:ln/>
-        </p:spPr>
-      </p:sp>
-      <p:sp>
-        <p:nvSpPr>
-          <p:cNvPr id="5" name="Shape 3"/>
-          <p:cNvSpPr/>
-          <p:nvPr/>
-        </p:nvSpPr>
-        <p:spPr>
-          <a:xfrm>
-            <a:off x="749808" y="1755648"/>
-            <a:ext cx="365760" cy="365760"/>
-          </a:xfrm>
-          <a:prstGeom prst="ellipse">
-            <a:avLst/>
-          </a:prstGeom>
-          <a:solidFill>
-            <a:srgbClr val="2E7D32"/>
+            <a:srgbClr val="E8F2E9"/>
           </a:solidFill>
           <a:ln/>
           <a:effectLst>
@@ -7097,8 +7677,8 @@
         </p:nvSpPr>
         <p:spPr>
           <a:xfrm>
-            <a:off x="749808" y="1755648"/>
-            <a:ext cx="365760" cy="365760"/>
+            <a:off x="7660532" y="1755648"/>
+            <a:ext cx="3744779" cy="310896"/>
           </a:xfrm>
           <a:prstGeom prst="rect">
             <a:avLst/>
@@ -7110,21 +7690,21 @@
           <a:bodyPr wrap="square" lIns="0" tIns="0" rIns="0" bIns="0" rtlCol="0" anchor="ctr"/>
           <a:lstStyle/>
           <a:p>
-            <a:pPr algn="ctr" indent="0" marL="0">
-              <a:buNone/>
-            </a:pPr>
-            <a:r>
-              <a:rPr lang="en-US" sz="1500" b="1" dirty="0">
-                <a:solidFill>
-                  <a:srgbClr val="FFFFFF"/>
-                </a:solidFill>
-                <a:latin typeface="Calibri" pitchFamily="34" charset="0"/>
-                <a:ea typeface="Calibri" pitchFamily="34" charset="-122"/>
-                <a:cs typeface="Calibri" pitchFamily="34" charset="-120"/>
-              </a:rPr>
-              <a:t>1</a:t>
-            </a:r>
-            <a:endParaRPr lang="en-US" sz="1500" dirty="0"/>
+            <a:pPr indent="0" marL="0">
+              <a:buNone/>
+            </a:pPr>
+            <a:r>
+              <a:rPr lang="en-US" sz="1100" b="1" spc="140" kern="0" dirty="0">
+                <a:solidFill>
+                  <a:srgbClr val="2E7D32"/>
+                </a:solidFill>
+                <a:latin typeface="Calibri" pitchFamily="34" charset="0"/>
+                <a:ea typeface="Calibri" pitchFamily="34" charset="-122"/>
+                <a:cs typeface="Calibri" pitchFamily="34" charset="-120"/>
+              </a:rPr>
+              <a:t>TEACHING POINT</a:t>
+            </a:r>
+            <a:endParaRPr lang="en-US" sz="1100" dirty="0"/>
           </a:p>
         </p:txBody>
       </p:sp>
@@ -7136,8 +7716,50 @@
         </p:nvSpPr>
         <p:spPr>
           <a:xfrm>
-            <a:off x="1280160" y="1517904"/>
-            <a:ext cx="10143439" cy="841248"/>
+            <a:off x="7660532" y="2121408"/>
+            <a:ext cx="3726491" cy="3291840"/>
+          </a:xfrm>
+          <a:prstGeom prst="rect">
+            <a:avLst/>
+          </a:prstGeom>
+          <a:noFill/>
+          <a:ln/>
+        </p:spPr>
+        <p:txBody>
+          <a:bodyPr wrap="square" lIns="0" tIns="0" rIns="0" bIns="0" rtlCol="0" anchor="t"/>
+          <a:lstStyle/>
+          <a:p>
+            <a:pPr algn="l" indent="0" marL="0">
+              <a:lnSpc>
+                <a:spcPct val="110000"/>
+              </a:lnSpc>
+              <a:buNone/>
+            </a:pPr>
+            <a:r>
+              <a:rPr lang="en-US" sz="1350" dirty="0">
+                <a:solidFill>
+                  <a:srgbClr val="33444F"/>
+                </a:solidFill>
+                <a:latin typeface="Calibri" pitchFamily="34" charset="0"/>
+                <a:ea typeface="Calibri" pitchFamily="34" charset="-122"/>
+                <a:cs typeface="Calibri" pitchFamily="34" charset="-120"/>
+              </a:rPr>
+              <a:t>Rapid blood-culture panels accelerate both escalation and de-escalation — but culture-based AST still confirms the full susceptibility profile.</a:t>
+            </a:r>
+            <a:endParaRPr lang="en-US" sz="1350" dirty="0"/>
+          </a:p>
+        </p:txBody>
+      </p:sp>
+      <p:sp>
+        <p:nvSpPr>
+          <p:cNvPr id="8" name="Text 6"/>
+          <p:cNvSpPr/>
+          <p:nvPr/>
+        </p:nvSpPr>
+        <p:spPr>
+          <a:xfrm>
+            <a:off x="566928" y="6473952"/>
+            <a:ext cx="7772400" cy="274320"/>
           </a:xfrm>
           <a:prstGeom prst="rect">
             <a:avLst/>
@@ -7153,79 +7775,30 @@
               <a:buNone/>
             </a:pPr>
             <a:r>
-              <a:rPr lang="en-US" sz="1350" dirty="0">
-                <a:solidFill>
-                  <a:srgbClr val="E7EEF4"/>
-                </a:solidFill>
-                <a:latin typeface="Calibri" pitchFamily="34" charset="0"/>
-                <a:ea typeface="Calibri" pitchFamily="34" charset="-122"/>
-                <a:cs typeface="Calibri" pitchFamily="34" charset="-120"/>
-              </a:rPr>
-              <a:t>Multiplex NAATs deliver many pathogens fast but detect nucleic acid — not viability or causation.</a:t>
-            </a:r>
-            <a:endParaRPr lang="en-US" sz="1350" dirty="0"/>
-          </a:p>
-        </p:txBody>
-      </p:sp>
-      <p:sp>
-        <p:nvSpPr>
-          <p:cNvPr id="8" name="Shape 6"/>
-          <p:cNvSpPr/>
-          <p:nvPr/>
-        </p:nvSpPr>
-        <p:spPr>
-          <a:xfrm>
-            <a:off x="566928" y="2505456"/>
-            <a:ext cx="11057839" cy="841248"/>
-          </a:xfrm>
-          <a:prstGeom prst="roundRect">
-            <a:avLst>
-              <a:gd name="adj" fmla="val 7609"/>
-            </a:avLst>
-          </a:prstGeom>
-          <a:solidFill>
-            <a:srgbClr val="143651"/>
-          </a:solidFill>
-          <a:ln/>
-        </p:spPr>
-      </p:sp>
-      <p:sp>
-        <p:nvSpPr>
-          <p:cNvPr id="9" name="Shape 7"/>
-          <p:cNvSpPr/>
-          <p:nvPr/>
-        </p:nvSpPr>
-        <p:spPr>
-          <a:xfrm>
-            <a:off x="749808" y="2743200"/>
-            <a:ext cx="365760" cy="365760"/>
-          </a:xfrm>
-          <a:prstGeom prst="ellipse">
-            <a:avLst/>
-          </a:prstGeom>
-          <a:solidFill>
-            <a:srgbClr val="2E7D32"/>
-          </a:solidFill>
-          <a:ln/>
-          <a:effectLst>
-            <a:outerShdw sx="100000" sy="100000" kx="0" ky="0" algn="bl" rotWithShape="0" blurRad="88900" dist="25400" dir="5400000">
-              <a:srgbClr val="22303C">
-                <a:alpha val="12000"/>
-              </a:srgbClr>
-            </a:outerShdw>
-          </a:effectLst>
-        </p:spPr>
-      </p:sp>
-      <p:sp>
-        <p:nvSpPr>
-          <p:cNvPr id="10" name="Text 8"/>
-          <p:cNvSpPr/>
-          <p:nvPr/>
-        </p:nvSpPr>
-        <p:spPr>
-          <a:xfrm>
-            <a:off x="749808" y="2743200"/>
-            <a:ext cx="365760" cy="365760"/>
+              <a:rPr lang="en-US" sz="850" dirty="0">
+                <a:solidFill>
+                  <a:srgbClr val="9AA8B4"/>
+                </a:solidFill>
+                <a:latin typeface="Calibri" pitchFamily="34" charset="0"/>
+                <a:ea typeface="Calibri" pitchFamily="34" charset="-122"/>
+                <a:cs typeface="Calibri" pitchFamily="34" charset="-120"/>
+              </a:rPr>
+              <a:t>Makassed General Hospital  ·  Department of Laboratory Medicine</a:t>
+            </a:r>
+            <a:endParaRPr lang="en-US" sz="850" dirty="0"/>
+          </a:p>
+        </p:txBody>
+      </p:sp>
+      <p:sp>
+        <p:nvSpPr>
+          <p:cNvPr id="9" name="Text 7"/>
+          <p:cNvSpPr/>
+          <p:nvPr/>
+        </p:nvSpPr>
+        <p:spPr>
+          <a:xfrm>
+            <a:off x="9814255" y="6473952"/>
+            <a:ext cx="1828800" cy="274320"/>
           </a:xfrm>
           <a:prstGeom prst="rect">
             <a:avLst/>
@@ -7237,504 +7810,34 @@
           <a:bodyPr wrap="square" lIns="0" tIns="0" rIns="0" bIns="0" rtlCol="0" anchor="ctr"/>
           <a:lstStyle/>
           <a:p>
-            <a:pPr algn="ctr" indent="0" marL="0">
-              <a:buNone/>
-            </a:pPr>
-            <a:r>
-              <a:rPr lang="en-US" sz="1500" b="1" dirty="0">
-                <a:solidFill>
-                  <a:srgbClr val="FFFFFF"/>
-                </a:solidFill>
-                <a:latin typeface="Calibri" pitchFamily="34" charset="0"/>
-                <a:ea typeface="Calibri" pitchFamily="34" charset="-122"/>
-                <a:cs typeface="Calibri" pitchFamily="34" charset="-120"/>
-              </a:rPr>
-              <a:t>2</a:t>
-            </a:r>
-            <a:endParaRPr lang="en-US" sz="1500" dirty="0"/>
-          </a:p>
-        </p:txBody>
-      </p:sp>
-      <p:sp>
-        <p:nvSpPr>
-          <p:cNvPr id="11" name="Text 9"/>
-          <p:cNvSpPr/>
-          <p:nvPr/>
-        </p:nvSpPr>
-        <p:spPr>
-          <a:xfrm>
-            <a:off x="1280160" y="2505456"/>
-            <a:ext cx="10143439" cy="841248"/>
-          </a:xfrm>
-          <a:prstGeom prst="rect">
-            <a:avLst/>
-          </a:prstGeom>
-          <a:noFill/>
-          <a:ln/>
-        </p:spPr>
-        <p:txBody>
-          <a:bodyPr wrap="square" lIns="0" tIns="0" rIns="0" bIns="0" rtlCol="0" anchor="ctr"/>
-          <a:lstStyle/>
-          <a:p>
-            <a:pPr algn="l" indent="0" marL="0">
-              <a:buNone/>
-            </a:pPr>
-            <a:r>
-              <a:rPr lang="en-US" sz="1350" dirty="0">
-                <a:solidFill>
-                  <a:srgbClr val="E7EEF4"/>
-                </a:solidFill>
-                <a:latin typeface="Calibri" pitchFamily="34" charset="0"/>
-                <a:ea typeface="Calibri" pitchFamily="34" charset="-122"/>
-                <a:cs typeface="Calibri" pitchFamily="34" charset="-120"/>
-              </a:rPr>
-              <a:t>A negative panel excludes only its targets; off-panel organisms can be missed.</a:t>
-            </a:r>
-            <a:endParaRPr lang="en-US" sz="1350" dirty="0"/>
-          </a:p>
-        </p:txBody>
-      </p:sp>
-      <p:sp>
-        <p:nvSpPr>
-          <p:cNvPr id="12" name="Shape 10"/>
-          <p:cNvSpPr/>
-          <p:nvPr/>
-        </p:nvSpPr>
-        <p:spPr>
-          <a:xfrm>
-            <a:off x="566928" y="3493008"/>
-            <a:ext cx="11057839" cy="841248"/>
-          </a:xfrm>
-          <a:prstGeom prst="roundRect">
-            <a:avLst>
-              <a:gd name="adj" fmla="val 7609"/>
-            </a:avLst>
-          </a:prstGeom>
-          <a:solidFill>
-            <a:srgbClr val="143651"/>
-          </a:solidFill>
-          <a:ln/>
-        </p:spPr>
-      </p:sp>
-      <p:sp>
-        <p:nvSpPr>
-          <p:cNvPr id="13" name="Shape 11"/>
-          <p:cNvSpPr/>
-          <p:nvPr/>
-        </p:nvSpPr>
-        <p:spPr>
-          <a:xfrm>
-            <a:off x="749808" y="3730752"/>
-            <a:ext cx="365760" cy="365760"/>
-          </a:xfrm>
-          <a:prstGeom prst="ellipse">
-            <a:avLst/>
-          </a:prstGeom>
-          <a:solidFill>
-            <a:srgbClr val="2E7D32"/>
-          </a:solidFill>
-          <a:ln/>
-          <a:effectLst>
-            <a:outerShdw sx="100000" sy="100000" kx="0" ky="0" algn="bl" rotWithShape="0" blurRad="88900" dist="25400" dir="5400000">
-              <a:srgbClr val="22303C">
-                <a:alpha val="12000"/>
-              </a:srgbClr>
-            </a:outerShdw>
-          </a:effectLst>
-        </p:spPr>
-      </p:sp>
-      <p:sp>
-        <p:nvSpPr>
-          <p:cNvPr id="14" name="Text 12"/>
-          <p:cNvSpPr/>
-          <p:nvPr/>
-        </p:nvSpPr>
-        <p:spPr>
-          <a:xfrm>
-            <a:off x="749808" y="3730752"/>
-            <a:ext cx="365760" cy="365760"/>
-          </a:xfrm>
-          <a:prstGeom prst="rect">
-            <a:avLst/>
-          </a:prstGeom>
-          <a:noFill/>
-          <a:ln/>
-        </p:spPr>
-        <p:txBody>
-          <a:bodyPr wrap="square" lIns="0" tIns="0" rIns="0" bIns="0" rtlCol="0" anchor="ctr"/>
-          <a:lstStyle/>
-          <a:p>
-            <a:pPr algn="ctr" indent="0" marL="0">
-              <a:buNone/>
-            </a:pPr>
-            <a:r>
-              <a:rPr lang="en-US" sz="1500" b="1" dirty="0">
-                <a:solidFill>
-                  <a:srgbClr val="FFFFFF"/>
-                </a:solidFill>
-                <a:latin typeface="Calibri" pitchFamily="34" charset="0"/>
-                <a:ea typeface="Calibri" pitchFamily="34" charset="-122"/>
-                <a:cs typeface="Calibri" pitchFamily="34" charset="-120"/>
-              </a:rPr>
-              <a:t>3</a:t>
-            </a:r>
-            <a:endParaRPr lang="en-US" sz="1500" dirty="0"/>
-          </a:p>
-        </p:txBody>
-      </p:sp>
-      <p:sp>
-        <p:nvSpPr>
-          <p:cNvPr id="15" name="Text 13"/>
-          <p:cNvSpPr/>
-          <p:nvPr/>
-        </p:nvSpPr>
-        <p:spPr>
-          <a:xfrm>
-            <a:off x="1280160" y="3493008"/>
-            <a:ext cx="10143439" cy="841248"/>
-          </a:xfrm>
-          <a:prstGeom prst="rect">
-            <a:avLst/>
-          </a:prstGeom>
-          <a:noFill/>
-          <a:ln/>
-        </p:spPr>
-        <p:txBody>
-          <a:bodyPr wrap="square" lIns="0" tIns="0" rIns="0" bIns="0" rtlCol="0" anchor="ctr"/>
-          <a:lstStyle/>
-          <a:p>
-            <a:pPr algn="l" indent="0" marL="0">
-              <a:buNone/>
-            </a:pPr>
-            <a:r>
-              <a:rPr lang="en-US" sz="1350" dirty="0">
-                <a:solidFill>
-                  <a:srgbClr val="E7EEF4"/>
-                </a:solidFill>
-                <a:latin typeface="Calibri" pitchFamily="34" charset="0"/>
-                <a:ea typeface="Calibri" pitchFamily="34" charset="-122"/>
-                <a:cs typeface="Calibri" pitchFamily="34" charset="-120"/>
-              </a:rPr>
-              <a:t>Beware persistent positivity after treatment and incidental detection of colonizers.</a:t>
-            </a:r>
-            <a:endParaRPr lang="en-US" sz="1350" dirty="0"/>
-          </a:p>
-        </p:txBody>
-      </p:sp>
-      <p:sp>
-        <p:nvSpPr>
-          <p:cNvPr id="16" name="Shape 14"/>
-          <p:cNvSpPr/>
-          <p:nvPr/>
-        </p:nvSpPr>
-        <p:spPr>
-          <a:xfrm>
-            <a:off x="566928" y="4480560"/>
-            <a:ext cx="11057839" cy="841248"/>
-          </a:xfrm>
-          <a:prstGeom prst="roundRect">
-            <a:avLst>
-              <a:gd name="adj" fmla="val 7609"/>
-            </a:avLst>
-          </a:prstGeom>
-          <a:solidFill>
-            <a:srgbClr val="143651"/>
-          </a:solidFill>
-          <a:ln/>
-        </p:spPr>
-      </p:sp>
-      <p:sp>
-        <p:nvSpPr>
-          <p:cNvPr id="17" name="Shape 15"/>
-          <p:cNvSpPr/>
-          <p:nvPr/>
-        </p:nvSpPr>
-        <p:spPr>
-          <a:xfrm>
-            <a:off x="749808" y="4718304"/>
-            <a:ext cx="365760" cy="365760"/>
-          </a:xfrm>
-          <a:prstGeom prst="ellipse">
-            <a:avLst/>
-          </a:prstGeom>
-          <a:solidFill>
-            <a:srgbClr val="2E7D32"/>
-          </a:solidFill>
-          <a:ln/>
-          <a:effectLst>
-            <a:outerShdw sx="100000" sy="100000" kx="0" ky="0" algn="bl" rotWithShape="0" blurRad="88900" dist="25400" dir="5400000">
-              <a:srgbClr val="22303C">
-                <a:alpha val="12000"/>
-              </a:srgbClr>
-            </a:outerShdw>
-          </a:effectLst>
-        </p:spPr>
-      </p:sp>
-      <p:sp>
-        <p:nvSpPr>
-          <p:cNvPr id="18" name="Text 16"/>
-          <p:cNvSpPr/>
-          <p:nvPr/>
-        </p:nvSpPr>
-        <p:spPr>
-          <a:xfrm>
-            <a:off x="749808" y="4718304"/>
-            <a:ext cx="365760" cy="365760"/>
-          </a:xfrm>
-          <a:prstGeom prst="rect">
-            <a:avLst/>
-          </a:prstGeom>
-          <a:noFill/>
-          <a:ln/>
-        </p:spPr>
-        <p:txBody>
-          <a:bodyPr wrap="square" lIns="0" tIns="0" rIns="0" bIns="0" rtlCol="0" anchor="ctr"/>
-          <a:lstStyle/>
-          <a:p>
-            <a:pPr algn="ctr" indent="0" marL="0">
-              <a:buNone/>
-            </a:pPr>
-            <a:r>
-              <a:rPr lang="en-US" sz="1500" b="1" dirty="0">
-                <a:solidFill>
-                  <a:srgbClr val="FFFFFF"/>
-                </a:solidFill>
-                <a:latin typeface="Calibri" pitchFamily="34" charset="0"/>
-                <a:ea typeface="Calibri" pitchFamily="34" charset="-122"/>
-                <a:cs typeface="Calibri" pitchFamily="34" charset="-120"/>
-              </a:rPr>
-              <a:t>4</a:t>
-            </a:r>
-            <a:endParaRPr lang="en-US" sz="1500" dirty="0"/>
-          </a:p>
-        </p:txBody>
-      </p:sp>
-      <p:sp>
-        <p:nvSpPr>
-          <p:cNvPr id="19" name="Text 17"/>
-          <p:cNvSpPr/>
-          <p:nvPr/>
-        </p:nvSpPr>
-        <p:spPr>
-          <a:xfrm>
-            <a:off x="1280160" y="4480560"/>
-            <a:ext cx="10143439" cy="841248"/>
-          </a:xfrm>
-          <a:prstGeom prst="rect">
-            <a:avLst/>
-          </a:prstGeom>
-          <a:noFill/>
-          <a:ln/>
-        </p:spPr>
-        <p:txBody>
-          <a:bodyPr wrap="square" lIns="0" tIns="0" rIns="0" bIns="0" rtlCol="0" anchor="ctr"/>
-          <a:lstStyle/>
-          <a:p>
-            <a:pPr algn="l" indent="0" marL="0">
-              <a:buNone/>
-            </a:pPr>
-            <a:r>
-              <a:rPr lang="en-US" sz="1350" dirty="0">
-                <a:solidFill>
-                  <a:srgbClr val="E7EEF4"/>
-                </a:solidFill>
-                <a:latin typeface="Calibri" pitchFamily="34" charset="0"/>
-                <a:ea typeface="Calibri" pitchFamily="34" charset="-122"/>
-                <a:cs typeface="Calibri" pitchFamily="34" charset="-120"/>
-              </a:rPr>
-              <a:t>Rapid blood-culture ID + resistance genes accelerates correct therapy; confirm with phenotypic AST.</a:t>
-            </a:r>
-            <a:endParaRPr lang="en-US" sz="1350" dirty="0"/>
-          </a:p>
-        </p:txBody>
-      </p:sp>
-      <p:sp>
-        <p:nvSpPr>
-          <p:cNvPr id="20" name="Shape 18"/>
-          <p:cNvSpPr/>
-          <p:nvPr/>
-        </p:nvSpPr>
-        <p:spPr>
-          <a:xfrm>
-            <a:off x="566928" y="5468112"/>
-            <a:ext cx="11057839" cy="841248"/>
-          </a:xfrm>
-          <a:prstGeom prst="roundRect">
-            <a:avLst>
-              <a:gd name="adj" fmla="val 7609"/>
-            </a:avLst>
-          </a:prstGeom>
-          <a:solidFill>
-            <a:srgbClr val="143651"/>
-          </a:solidFill>
-          <a:ln/>
-        </p:spPr>
-      </p:sp>
-      <p:sp>
-        <p:nvSpPr>
-          <p:cNvPr id="21" name="Shape 19"/>
-          <p:cNvSpPr/>
-          <p:nvPr/>
-        </p:nvSpPr>
-        <p:spPr>
-          <a:xfrm>
-            <a:off x="749808" y="5705856"/>
-            <a:ext cx="365760" cy="365760"/>
-          </a:xfrm>
-          <a:prstGeom prst="ellipse">
-            <a:avLst/>
-          </a:prstGeom>
-          <a:solidFill>
-            <a:srgbClr val="2E7D32"/>
-          </a:solidFill>
-          <a:ln/>
-          <a:effectLst>
-            <a:outerShdw sx="100000" sy="100000" kx="0" ky="0" algn="bl" rotWithShape="0" blurRad="88900" dist="25400" dir="5400000">
-              <a:srgbClr val="22303C">
-                <a:alpha val="12000"/>
-              </a:srgbClr>
-            </a:outerShdw>
-          </a:effectLst>
-        </p:spPr>
-      </p:sp>
-      <p:sp>
-        <p:nvSpPr>
-          <p:cNvPr id="22" name="Text 20"/>
-          <p:cNvSpPr/>
-          <p:nvPr/>
-        </p:nvSpPr>
-        <p:spPr>
-          <a:xfrm>
-            <a:off x="749808" y="5705856"/>
-            <a:ext cx="365760" cy="365760"/>
-          </a:xfrm>
-          <a:prstGeom prst="rect">
-            <a:avLst/>
-          </a:prstGeom>
-          <a:noFill/>
-          <a:ln/>
-        </p:spPr>
-        <p:txBody>
-          <a:bodyPr wrap="square" lIns="0" tIns="0" rIns="0" bIns="0" rtlCol="0" anchor="ctr"/>
-          <a:lstStyle/>
-          <a:p>
-            <a:pPr algn="ctr" indent="0" marL="0">
-              <a:buNone/>
-            </a:pPr>
-            <a:r>
-              <a:rPr lang="en-US" sz="1500" b="1" dirty="0">
-                <a:solidFill>
-                  <a:srgbClr val="FFFFFF"/>
-                </a:solidFill>
-                <a:latin typeface="Calibri" pitchFamily="34" charset="0"/>
-                <a:ea typeface="Calibri" pitchFamily="34" charset="-122"/>
-                <a:cs typeface="Calibri" pitchFamily="34" charset="-120"/>
-              </a:rPr>
-              <a:t>5</a:t>
-            </a:r>
-            <a:endParaRPr lang="en-US" sz="1500" dirty="0"/>
-          </a:p>
-        </p:txBody>
-      </p:sp>
-      <p:sp>
-        <p:nvSpPr>
-          <p:cNvPr id="23" name="Text 21"/>
-          <p:cNvSpPr/>
-          <p:nvPr/>
-        </p:nvSpPr>
-        <p:spPr>
-          <a:xfrm>
-            <a:off x="1280160" y="5468112"/>
-            <a:ext cx="10143439" cy="841248"/>
-          </a:xfrm>
-          <a:prstGeom prst="rect">
-            <a:avLst/>
-          </a:prstGeom>
-          <a:noFill/>
-          <a:ln/>
-        </p:spPr>
-        <p:txBody>
-          <a:bodyPr wrap="square" lIns="0" tIns="0" rIns="0" bIns="0" rtlCol="0" anchor="ctr"/>
-          <a:lstStyle/>
-          <a:p>
-            <a:pPr algn="l" indent="0" marL="0">
-              <a:buNone/>
-            </a:pPr>
-            <a:r>
-              <a:rPr lang="en-US" sz="1350" dirty="0">
-                <a:solidFill>
-                  <a:srgbClr val="E7EEF4"/>
-                </a:solidFill>
-                <a:latin typeface="Calibri" pitchFamily="34" charset="0"/>
-                <a:ea typeface="Calibri" pitchFamily="34" charset="-122"/>
-                <a:cs typeface="Calibri" pitchFamily="34" charset="-120"/>
-              </a:rPr>
-              <a:t>Pair rapid diagnostics with stewardship — speed only helps if it changes management.</a:t>
-            </a:r>
-            <a:endParaRPr lang="en-US" sz="1350" dirty="0"/>
-          </a:p>
-        </p:txBody>
-      </p:sp>
-      <p:sp>
-        <p:nvSpPr>
-          <p:cNvPr id="24" name="Text 22"/>
-          <p:cNvSpPr/>
-          <p:nvPr/>
-        </p:nvSpPr>
-        <p:spPr>
-          <a:xfrm>
-            <a:off x="566928" y="6473952"/>
-            <a:ext cx="8229600" cy="274320"/>
-          </a:xfrm>
-          <a:prstGeom prst="rect">
-            <a:avLst/>
-          </a:prstGeom>
-          <a:noFill/>
-          <a:ln/>
-        </p:spPr>
-        <p:txBody>
-          <a:bodyPr wrap="square" lIns="0" tIns="0" rIns="0" bIns="0" rtlCol="0" anchor="ctr"/>
-          <a:lstStyle/>
-          <a:p>
-            <a:pPr indent="0" marL="0">
+            <a:pPr algn="r" indent="0" marL="0">
               <a:buNone/>
             </a:pPr>
             <a:r>
               <a:rPr lang="en-US" sz="850" dirty="0">
                 <a:solidFill>
-                  <a:srgbClr val="5E7488"/>
-                </a:solidFill>
-                <a:latin typeface="Calibri" pitchFamily="34" charset="0"/>
-                <a:ea typeface="Calibri" pitchFamily="34" charset="-122"/>
-                <a:cs typeface="Calibri" pitchFamily="34" charset="-120"/>
-              </a:rPr>
-              <a:t>Makassed General Hospital  ·  Department of Laboratory Medicine</a:t>
-            </a:r>
-            <a:endParaRPr lang="en-US" sz="850" dirty="0"/>
-          </a:p>
-        </p:txBody>
-      </p:sp>
-      <p:sp>
-        <p:nvSpPr>
-          <p:cNvPr id="25" name="Text 23"/>
-          <p:cNvSpPr/>
-          <p:nvPr/>
-        </p:nvSpPr>
-        <p:spPr>
-          <a:xfrm>
-            <a:off x="11002975" y="6473952"/>
-            <a:ext cx="640080" cy="274320"/>
-          </a:xfrm>
-          <a:prstGeom prst="rect">
-            <a:avLst/>
-          </a:prstGeom>
-          <a:noFill/>
-          <a:ln/>
-        </p:spPr>
-        <p:txBody>
-          <a:bodyPr wrap="square" lIns="0" tIns="0" rIns="0" bIns="0" rtlCol="0" anchor="ctr"/>
-          <a:lstStyle/>
-          <a:p>
+                  <a:srgbClr val="9AA8B4"/>
+                </a:solidFill>
+                <a:latin typeface="Calibri" pitchFamily="34" charset="0"/>
+                <a:ea typeface="Calibri" pitchFamily="34" charset="-122"/>
+                <a:cs typeface="Calibri" pitchFamily="34" charset="-120"/>
+              </a:rPr>
+              <a:t>CP Lecture Series</a:t>
+            </a:r>
+            <a:pPr algn="r" indent="0" marL="0">
+              <a:buNone/>
+            </a:pPr>
+            <a:r>
+              <a:rPr lang="en-US" sz="850" dirty="0">
+                <a:solidFill>
+                  <a:srgbClr val="DCE4EC"/>
+                </a:solidFill>
+                <a:latin typeface="Calibri" pitchFamily="34" charset="0"/>
+                <a:ea typeface="Calibri" pitchFamily="34" charset="-122"/>
+                <a:cs typeface="Calibri" pitchFamily="34" charset="-120"/>
+              </a:rPr>
+              <a:t>   ·   </a:t>
+            </a:r>
             <a:pPr algn="r" indent="0" marL="0">
               <a:buNone/>
             </a:pPr>
@@ -7925,7 +8028,7 @@
                 <a:ea typeface="Calibri" pitchFamily="34" charset="-122"/>
                 <a:cs typeface="Calibri" pitchFamily="34" charset="-120"/>
               </a:rPr>
-              <a:t>~1 h</a:t>
+              <a:t>Hours</a:t>
             </a:r>
             <a:endParaRPr lang="en-US" sz="3600" dirty="0"/>
           </a:p>
@@ -7964,7 +8067,7 @@
                 <a:ea typeface="Calibri" pitchFamily="34" charset="-122"/>
                 <a:cs typeface="Calibri" pitchFamily="34" charset="-120"/>
               </a:rPr>
-              <a:t>Syndromic panels return many pathogens in about an hour</a:t>
+              <a:t>Molecular panels deliver answers in 1–2 hours</a:t>
             </a:r>
             <a:endParaRPr lang="en-US" sz="1150" dirty="0"/>
           </a:p>
@@ -8032,7 +8135,7 @@
                 <a:ea typeface="Calibri" pitchFamily="34" charset="-122"/>
                 <a:cs typeface="Calibri" pitchFamily="34" charset="-120"/>
               </a:rPr>
-              <a:t>Detect</a:t>
+              <a:t>Panels</a:t>
             </a:r>
             <a:endParaRPr lang="en-US" sz="3600" dirty="0"/>
           </a:p>
@@ -8071,7 +8174,7 @@
                 <a:ea typeface="Calibri" pitchFamily="34" charset="-122"/>
                 <a:cs typeface="Calibri" pitchFamily="34" charset="-120"/>
               </a:rPr>
-              <a:t>Detection is not the same as viability or causation</a:t>
+              <a:t>Syndromic testing detects many targets at once</a:t>
             </a:r>
             <a:endParaRPr lang="en-US" sz="1150" dirty="0"/>
           </a:p>
@@ -8139,7 +8242,7 @@
                 <a:ea typeface="Calibri" pitchFamily="34" charset="-122"/>
                 <a:cs typeface="Calibri" pitchFamily="34" charset="-120"/>
               </a:rPr>
-              <a:t>Steward</a:t>
+              <a:t>Context</a:t>
             </a:r>
             <a:endParaRPr lang="en-US" sz="3600" dirty="0"/>
           </a:p>
@@ -8178,7 +8281,7 @@
                 <a:ea typeface="Calibri" pitchFamily="34" charset="-122"/>
                 <a:cs typeface="Calibri" pitchFamily="34" charset="-120"/>
               </a:rPr>
-              <a:t>Speed only helps if it changes management</a:t>
+              <a:t>Detection is not always the same as disease</a:t>
             </a:r>
             <a:endParaRPr lang="en-US" sz="1150" dirty="0"/>
           </a:p>
@@ -8249,7 +8352,7 @@
                 <a:ea typeface="Calibri" pitchFamily="34" charset="-122"/>
                 <a:cs typeface="Calibri" pitchFamily="34" charset="-120"/>
               </a:rPr>
-              <a:t>Molecular diagnostics have transformed turnaround for respiratory, GI, CNS, and bloodstream infections. The skill is interpretation: knowing what a positive (and a negative) truly means and pairing speed with stewardship.</a:t>
+              <a:t>Rapid antigen and molecular methods compress diagnosis from days to hours, but they shift the interpretive burden: detecting nucleic acid is not the same as proving active, causative infection.</a:t>
             </a:r>
             <a:endParaRPr lang="en-US" sz="1450" dirty="0"/>
           </a:p>
@@ -8292,7 +8395,7 @@
                 <a:ea typeface="Calibri" pitchFamily="34" charset="-122"/>
                 <a:cs typeface="Calibri" pitchFamily="34" charset="-120"/>
               </a:rPr>
-              <a:t>A molecular 'detected' can represent colonization, residual nucleic acid after treatment, or a true pathogen — context decides.</a:t>
+              <a:t>Faster is only better when paired with stewardship and interpretation — a positive NAAT must be read in clinical context.</a:t>
             </a:r>
             <a:endParaRPr lang="en-US" sz="1300" dirty="0"/>
           </a:p>
@@ -8469,6 +8572,2845 @@
                 <a:ea typeface="Calibri" pitchFamily="34" charset="-122"/>
                 <a:cs typeface="Calibri" pitchFamily="34" charset="-120"/>
               </a:rPr>
+              <a:t>MICROBIOLOGY   ·   BOARD REVIEW  ·  Q1</a:t>
+            </a:r>
+            <a:endParaRPr lang="en-US" sz="1100" dirty="0"/>
+          </a:p>
+        </p:txBody>
+      </p:sp>
+      <p:sp>
+        <p:nvSpPr>
+          <p:cNvPr id="3" name="Text 1"/>
+          <p:cNvSpPr/>
+          <p:nvPr/>
+        </p:nvSpPr>
+        <p:spPr>
+          <a:xfrm>
+            <a:off x="566928" y="713232"/>
+            <a:ext cx="11064240" cy="749808"/>
+          </a:xfrm>
+          <a:prstGeom prst="rect">
+            <a:avLst/>
+          </a:prstGeom>
+          <a:noFill/>
+          <a:ln/>
+        </p:spPr>
+        <p:txBody>
+          <a:bodyPr wrap="square" lIns="0" tIns="0" rIns="0" bIns="0" rtlCol="0" anchor="ctr"/>
+          <a:lstStyle/>
+          <a:p>
+            <a:pPr algn="l" indent="0" marL="0">
+              <a:buNone/>
+            </a:pPr>
+            <a:r>
+              <a:rPr lang="en-US" sz="2600" b="1" dirty="0">
+                <a:solidFill>
+                  <a:srgbClr val="0E3A5F"/>
+                </a:solidFill>
+                <a:latin typeface="Calibri" pitchFamily="34" charset="0"/>
+                <a:ea typeface="Calibri" pitchFamily="34" charset="-122"/>
+                <a:cs typeface="Calibri" pitchFamily="34" charset="-120"/>
+              </a:rPr>
+              <a:t>Board-Style Review</a:t>
+            </a:r>
+            <a:endParaRPr lang="en-US" sz="2600" dirty="0"/>
+          </a:p>
+        </p:txBody>
+      </p:sp>
+      <p:sp>
+        <p:nvSpPr>
+          <p:cNvPr id="4" name="Text 2"/>
+          <p:cNvSpPr/>
+          <p:nvPr/>
+        </p:nvSpPr>
+        <p:spPr>
+          <a:xfrm>
+            <a:off x="566928" y="1417320"/>
+            <a:ext cx="11057839" cy="914400"/>
+          </a:xfrm>
+          <a:prstGeom prst="rect">
+            <a:avLst/>
+          </a:prstGeom>
+          <a:noFill/>
+          <a:ln/>
+        </p:spPr>
+        <p:txBody>
+          <a:bodyPr wrap="square" lIns="0" tIns="0" rIns="0" bIns="0" rtlCol="0" anchor="t"/>
+          <a:lstStyle/>
+          <a:p>
+            <a:pPr algn="l" indent="0" marL="0">
+              <a:lnSpc>
+                <a:spcPct val="105000"/>
+              </a:lnSpc>
+              <a:buNone/>
+            </a:pPr>
+            <a:r>
+              <a:rPr lang="en-US" sz="1450" b="1" dirty="0">
+                <a:solidFill>
+                  <a:srgbClr val="1B2A38"/>
+                </a:solidFill>
+                <a:latin typeface="Calibri" pitchFamily="34" charset="0"/>
+                <a:ea typeface="Calibri" pitchFamily="34" charset="-122"/>
+                <a:cs typeface="Calibri" pitchFamily="34" charset="-120"/>
+              </a:rPr>
+              <a:t>The main interpretive caution with a positive C. difficile NAAT is that it:</a:t>
+            </a:r>
+            <a:endParaRPr lang="en-US" sz="1450" dirty="0"/>
+          </a:p>
+        </p:txBody>
+      </p:sp>
+      <p:sp>
+        <p:nvSpPr>
+          <p:cNvPr id="5" name="Text 3"/>
+          <p:cNvSpPr/>
+          <p:nvPr/>
+        </p:nvSpPr>
+        <p:spPr>
+          <a:xfrm>
+            <a:off x="658368" y="2395728"/>
+            <a:ext cx="6192390" cy="3017520"/>
+          </a:xfrm>
+          <a:prstGeom prst="rect">
+            <a:avLst/>
+          </a:prstGeom>
+          <a:noFill/>
+          <a:ln/>
+        </p:spPr>
+        <p:txBody>
+          <a:bodyPr wrap="square" lIns="0" tIns="0" rIns="0" bIns="0" rtlCol="0" anchor="t"/>
+          <a:lstStyle/>
+          <a:p>
+            <a:pPr algn="l" indent="0" marL="0">
+              <a:spcAft>
+                <a:spcPts val="600"/>
+              </a:spcAft>
+              <a:buNone/>
+            </a:pPr>
+            <a:r>
+              <a:rPr lang="en-US" sz="1350" dirty="0">
+                <a:solidFill>
+                  <a:srgbClr val="33444F"/>
+                </a:solidFill>
+                <a:latin typeface="Calibri" pitchFamily="34" charset="0"/>
+                <a:ea typeface="Calibri" pitchFamily="34" charset="-122"/>
+                <a:cs typeface="Calibri" pitchFamily="34" charset="-120"/>
+              </a:rPr>
+              <a:t>A. Is highly insensitive</a:t>
+            </a:r>
+            <a:endParaRPr lang="en-US" sz="1350" dirty="0"/>
+          </a:p>
+          <a:p>
+            <a:pPr algn="l" indent="0" marL="0">
+              <a:spcAft>
+                <a:spcPts val="600"/>
+              </a:spcAft>
+              <a:buNone/>
+            </a:pPr>
+            <a:r>
+              <a:rPr lang="en-US" sz="1350" b="1" dirty="0">
+                <a:solidFill>
+                  <a:srgbClr val="1F5722"/>
+                </a:solidFill>
+                <a:latin typeface="Calibri" pitchFamily="34" charset="0"/>
+                <a:ea typeface="Calibri" pitchFamily="34" charset="-122"/>
+                <a:cs typeface="Calibri" pitchFamily="34" charset="-120"/>
+              </a:rPr>
+              <a:t>B. Detects the toxin gene and may reflect colonization</a:t>
+            </a:r>
+            <a:endParaRPr lang="en-US" sz="1350" dirty="0"/>
+          </a:p>
+          <a:p>
+            <a:pPr algn="l" indent="0" marL="0">
+              <a:spcAft>
+                <a:spcPts val="600"/>
+              </a:spcAft>
+              <a:buNone/>
+            </a:pPr>
+            <a:r>
+              <a:rPr lang="en-US" sz="1350" dirty="0">
+                <a:solidFill>
+                  <a:srgbClr val="33444F"/>
+                </a:solidFill>
+                <a:latin typeface="Calibri" pitchFamily="34" charset="0"/>
+                <a:ea typeface="Calibri" pitchFamily="34" charset="-122"/>
+                <a:cs typeface="Calibri" pitchFamily="34" charset="-120"/>
+              </a:rPr>
+              <a:t>C. Cannot detect toxigenic strains</a:t>
+            </a:r>
+            <a:endParaRPr lang="en-US" sz="1350" dirty="0"/>
+          </a:p>
+          <a:p>
+            <a:pPr algn="l" indent="0" marL="0">
+              <a:spcAft>
+                <a:spcPts val="600"/>
+              </a:spcAft>
+              <a:buNone/>
+            </a:pPr>
+            <a:r>
+              <a:rPr lang="en-US" sz="1350" dirty="0">
+                <a:solidFill>
+                  <a:srgbClr val="33444F"/>
+                </a:solidFill>
+                <a:latin typeface="Calibri" pitchFamily="34" charset="0"/>
+                <a:ea typeface="Calibri" pitchFamily="34" charset="-122"/>
+                <a:cs typeface="Calibri" pitchFamily="34" charset="-120"/>
+              </a:rPr>
+              <a:t>D. Requires culture confirmation always</a:t>
+            </a:r>
+            <a:endParaRPr lang="en-US" sz="1350" dirty="0"/>
+          </a:p>
+          <a:p>
+            <a:pPr algn="l" indent="0" marL="0">
+              <a:spcAft>
+                <a:spcPts val="600"/>
+              </a:spcAft>
+              <a:buNone/>
+            </a:pPr>
+            <a:r>
+              <a:rPr lang="en-US" sz="1350" dirty="0">
+                <a:solidFill>
+                  <a:srgbClr val="33444F"/>
+                </a:solidFill>
+                <a:latin typeface="Calibri" pitchFamily="34" charset="0"/>
+                <a:ea typeface="Calibri" pitchFamily="34" charset="-122"/>
+                <a:cs typeface="Calibri" pitchFamily="34" charset="-120"/>
+              </a:rPr>
+              <a:t>E. Is quantitative</a:t>
+            </a:r>
+            <a:endParaRPr lang="en-US" sz="1350" dirty="0"/>
+          </a:p>
+        </p:txBody>
+      </p:sp>
+      <p:sp>
+        <p:nvSpPr>
+          <p:cNvPr id="6" name="Shape 4"/>
+          <p:cNvSpPr/>
+          <p:nvPr/>
+        </p:nvSpPr>
+        <p:spPr>
+          <a:xfrm>
+            <a:off x="7201632" y="2395728"/>
+            <a:ext cx="4423136" cy="3246120"/>
+          </a:xfrm>
+          <a:prstGeom prst="roundRect">
+            <a:avLst>
+              <a:gd name="adj" fmla="val 2535"/>
+            </a:avLst>
+          </a:prstGeom>
+          <a:solidFill>
+            <a:srgbClr val="E8F2E9"/>
+          </a:solidFill>
+          <a:ln/>
+          <a:effectLst>
+            <a:outerShdw sx="100000" sy="100000" kx="0" ky="0" algn="bl" rotWithShape="0" blurRad="88900" dist="25400" dir="5400000">
+              <a:srgbClr val="22303C">
+                <a:alpha val="12000"/>
+              </a:srgbClr>
+            </a:outerShdw>
+          </a:effectLst>
+        </p:spPr>
+      </p:sp>
+      <p:sp>
+        <p:nvSpPr>
+          <p:cNvPr id="7" name="Text 5"/>
+          <p:cNvSpPr/>
+          <p:nvPr/>
+        </p:nvSpPr>
+        <p:spPr>
+          <a:xfrm>
+            <a:off x="7439376" y="2578608"/>
+            <a:ext cx="3965936" cy="457200"/>
+          </a:xfrm>
+          <a:prstGeom prst="rect">
+            <a:avLst/>
+          </a:prstGeom>
+          <a:noFill/>
+          <a:ln/>
+        </p:spPr>
+        <p:txBody>
+          <a:bodyPr wrap="square" lIns="0" tIns="0" rIns="0" bIns="0" rtlCol="0" anchor="ctr"/>
+          <a:lstStyle/>
+          <a:p>
+            <a:pPr indent="0" marL="0">
+              <a:buNone/>
+            </a:pPr>
+            <a:r>
+              <a:rPr lang="en-US" sz="1500" b="1" dirty="0">
+                <a:solidFill>
+                  <a:srgbClr val="2E7D32"/>
+                </a:solidFill>
+                <a:latin typeface="Calibri" pitchFamily="34" charset="0"/>
+                <a:ea typeface="Calibri" pitchFamily="34" charset="-122"/>
+                <a:cs typeface="Calibri" pitchFamily="34" charset="-120"/>
+              </a:rPr>
+              <a:t>ANSWER  </a:t>
+            </a:r>
+            <a:pPr indent="0" marL="0">
+              <a:buNone/>
+            </a:pPr>
+            <a:r>
+              <a:rPr lang="en-US" sz="1500" b="1" dirty="0">
+                <a:solidFill>
+                  <a:srgbClr val="1B2A38"/>
+                </a:solidFill>
+                <a:latin typeface="Calibri" pitchFamily="34" charset="0"/>
+                <a:ea typeface="Calibri" pitchFamily="34" charset="-122"/>
+                <a:cs typeface="Calibri" pitchFamily="34" charset="-120"/>
+              </a:rPr>
+              <a:t>B — Detects gene; may reflect colonization</a:t>
+            </a:r>
+            <a:endParaRPr lang="en-US" sz="1500" dirty="0"/>
+          </a:p>
+        </p:txBody>
+      </p:sp>
+      <p:sp>
+        <p:nvSpPr>
+          <p:cNvPr id="8" name="Text 6"/>
+          <p:cNvSpPr/>
+          <p:nvPr/>
+        </p:nvSpPr>
+        <p:spPr>
+          <a:xfrm>
+            <a:off x="7439376" y="3127248"/>
+            <a:ext cx="3947648" cy="2377440"/>
+          </a:xfrm>
+          <a:prstGeom prst="rect">
+            <a:avLst/>
+          </a:prstGeom>
+          <a:noFill/>
+          <a:ln/>
+        </p:spPr>
+        <p:txBody>
+          <a:bodyPr wrap="square" lIns="0" tIns="0" rIns="0" bIns="0" rtlCol="0" anchor="t"/>
+          <a:lstStyle/>
+          <a:p>
+            <a:pPr algn="l" indent="0" marL="0">
+              <a:lnSpc>
+                <a:spcPct val="108000"/>
+              </a:lnSpc>
+              <a:buNone/>
+            </a:pPr>
+            <a:r>
+              <a:rPr lang="en-US" sz="1250" dirty="0">
+                <a:solidFill>
+                  <a:srgbClr val="33444F"/>
+                </a:solidFill>
+                <a:latin typeface="Calibri" pitchFamily="34" charset="0"/>
+                <a:ea typeface="Calibri" pitchFamily="34" charset="-122"/>
+                <a:cs typeface="Calibri" pitchFamily="34" charset="-120"/>
+              </a:rPr>
+              <a:t>NAAT detects the toxin gene; in patients without clinically significant diarrhea it may indicate carriage, leading to overtreatment.</a:t>
+            </a:r>
+            <a:endParaRPr lang="en-US" sz="1250" dirty="0"/>
+          </a:p>
+        </p:txBody>
+      </p:sp>
+      <p:sp>
+        <p:nvSpPr>
+          <p:cNvPr id="9" name="Text 7"/>
+          <p:cNvSpPr/>
+          <p:nvPr/>
+        </p:nvSpPr>
+        <p:spPr>
+          <a:xfrm>
+            <a:off x="566928" y="6473952"/>
+            <a:ext cx="7772400" cy="274320"/>
+          </a:xfrm>
+          <a:prstGeom prst="rect">
+            <a:avLst/>
+          </a:prstGeom>
+          <a:noFill/>
+          <a:ln/>
+        </p:spPr>
+        <p:txBody>
+          <a:bodyPr wrap="square" lIns="0" tIns="0" rIns="0" bIns="0" rtlCol="0" anchor="ctr"/>
+          <a:lstStyle/>
+          <a:p>
+            <a:pPr algn="l" indent="0" marL="0">
+              <a:buNone/>
+            </a:pPr>
+            <a:r>
+              <a:rPr lang="en-US" sz="850" dirty="0">
+                <a:solidFill>
+                  <a:srgbClr val="9AA8B4"/>
+                </a:solidFill>
+                <a:latin typeface="Calibri" pitchFamily="34" charset="0"/>
+                <a:ea typeface="Calibri" pitchFamily="34" charset="-122"/>
+                <a:cs typeface="Calibri" pitchFamily="34" charset="-120"/>
+              </a:rPr>
+              <a:t>Makassed General Hospital  ·  Department of Laboratory Medicine</a:t>
+            </a:r>
+            <a:endParaRPr lang="en-US" sz="850" dirty="0"/>
+          </a:p>
+        </p:txBody>
+      </p:sp>
+      <p:sp>
+        <p:nvSpPr>
+          <p:cNvPr id="10" name="Text 8"/>
+          <p:cNvSpPr/>
+          <p:nvPr/>
+        </p:nvSpPr>
+        <p:spPr>
+          <a:xfrm>
+            <a:off x="9814255" y="6473952"/>
+            <a:ext cx="1828800" cy="274320"/>
+          </a:xfrm>
+          <a:prstGeom prst="rect">
+            <a:avLst/>
+          </a:prstGeom>
+          <a:noFill/>
+          <a:ln/>
+        </p:spPr>
+        <p:txBody>
+          <a:bodyPr wrap="square" lIns="0" tIns="0" rIns="0" bIns="0" rtlCol="0" anchor="ctr"/>
+          <a:lstStyle/>
+          <a:p>
+            <a:pPr algn="r" indent="0" marL="0">
+              <a:buNone/>
+            </a:pPr>
+            <a:r>
+              <a:rPr lang="en-US" sz="850" dirty="0">
+                <a:solidFill>
+                  <a:srgbClr val="9AA8B4"/>
+                </a:solidFill>
+                <a:latin typeface="Calibri" pitchFamily="34" charset="0"/>
+                <a:ea typeface="Calibri" pitchFamily="34" charset="-122"/>
+                <a:cs typeface="Calibri" pitchFamily="34" charset="-120"/>
+              </a:rPr>
+              <a:t>CP Lecture Series</a:t>
+            </a:r>
+            <a:pPr algn="r" indent="0" marL="0">
+              <a:buNone/>
+            </a:pPr>
+            <a:r>
+              <a:rPr lang="en-US" sz="850" dirty="0">
+                <a:solidFill>
+                  <a:srgbClr val="DCE4EC"/>
+                </a:solidFill>
+                <a:latin typeface="Calibri" pitchFamily="34" charset="0"/>
+                <a:ea typeface="Calibri" pitchFamily="34" charset="-122"/>
+                <a:cs typeface="Calibri" pitchFamily="34" charset="-120"/>
+              </a:rPr>
+              <a:t>   ·   </a:t>
+            </a:r>
+            <a:pPr algn="r" indent="0" marL="0">
+              <a:buNone/>
+            </a:pPr>
+            <a:r>
+              <a:rPr lang="en-US" sz="850" b="1" dirty="0">
+                <a:solidFill>
+                  <a:srgbClr val="2E7D32"/>
+                </a:solidFill>
+                <a:latin typeface="Calibri" pitchFamily="34" charset="0"/>
+                <a:ea typeface="Calibri" pitchFamily="34" charset="-122"/>
+                <a:cs typeface="Calibri" pitchFamily="34" charset="-120"/>
+              </a:rPr>
+              <a:t>17</a:t>
+            </a:r>
+            <a:endParaRPr lang="en-US" sz="850" dirty="0"/>
+          </a:p>
+        </p:txBody>
+      </p:sp>
+    </p:spTree>
+  </p:cSld>
+  <p:clrMapOvr>
+    <a:masterClrMapping/>
+  </p:clrMapOvr>
+</p:sld>
+</file>
+
+<file path=ppt/slides/slide21.xml><?xml version="1.0" encoding="utf-8"?>
+<p:sld xmlns:a="http://schemas.openxmlformats.org/drawingml/2006/main" xmlns:r="http://schemas.openxmlformats.org/officeDocument/2006/relationships" xmlns:p="http://schemas.openxmlformats.org/presentationml/2006/main">
+  <p:cSld name="Slide 21">
+    <p:bg>
+      <p:bgPr>
+        <a:solidFill>
+          <a:srgbClr val="FFFFFF"/>
+        </a:solidFill>
+      </p:bgPr>
+    </p:bg>
+    <p:spTree>
+      <p:nvGrpSpPr>
+        <p:cNvPr id="1" name=""/>
+        <p:cNvGrpSpPr/>
+        <p:nvPr/>
+      </p:nvGrpSpPr>
+      <p:grpSpPr>
+        <a:xfrm>
+          <a:off x="0" y="0"/>
+          <a:ext cx="0" cy="0"/>
+          <a:chOff x="0" y="0"/>
+          <a:chExt cx="0" cy="0"/>
+        </a:xfrm>
+      </p:grpSpPr>
+      <p:sp>
+        <p:nvSpPr>
+          <p:cNvPr id="2" name="Text 0"/>
+          <p:cNvSpPr/>
+          <p:nvPr/>
+        </p:nvSpPr>
+        <p:spPr>
+          <a:xfrm>
+            <a:off x="566928" y="329184"/>
+            <a:ext cx="10515600" cy="310896"/>
+          </a:xfrm>
+          <a:prstGeom prst="rect">
+            <a:avLst/>
+          </a:prstGeom>
+          <a:noFill/>
+          <a:ln/>
+        </p:spPr>
+        <p:txBody>
+          <a:bodyPr wrap="square" lIns="0" tIns="0" rIns="0" bIns="0" rtlCol="0" anchor="ctr"/>
+          <a:lstStyle/>
+          <a:p>
+            <a:pPr algn="l" indent="0" marL="0">
+              <a:buNone/>
+            </a:pPr>
+            <a:r>
+              <a:rPr lang="en-US" sz="1100" b="1" spc="150" kern="0" dirty="0">
+                <a:solidFill>
+                  <a:srgbClr val="2E7D32"/>
+                </a:solidFill>
+                <a:latin typeface="Calibri" pitchFamily="34" charset="0"/>
+                <a:ea typeface="Calibri" pitchFamily="34" charset="-122"/>
+                <a:cs typeface="Calibri" pitchFamily="34" charset="-120"/>
+              </a:rPr>
+              <a:t>MICROBIOLOGY   ·   BOARD REVIEW  ·  Q2</a:t>
+            </a:r>
+            <a:endParaRPr lang="en-US" sz="1100" dirty="0"/>
+          </a:p>
+        </p:txBody>
+      </p:sp>
+      <p:sp>
+        <p:nvSpPr>
+          <p:cNvPr id="3" name="Text 1"/>
+          <p:cNvSpPr/>
+          <p:nvPr/>
+        </p:nvSpPr>
+        <p:spPr>
+          <a:xfrm>
+            <a:off x="566928" y="713232"/>
+            <a:ext cx="11064240" cy="749808"/>
+          </a:xfrm>
+          <a:prstGeom prst="rect">
+            <a:avLst/>
+          </a:prstGeom>
+          <a:noFill/>
+          <a:ln/>
+        </p:spPr>
+        <p:txBody>
+          <a:bodyPr wrap="square" lIns="0" tIns="0" rIns="0" bIns="0" rtlCol="0" anchor="ctr"/>
+          <a:lstStyle/>
+          <a:p>
+            <a:pPr algn="l" indent="0" marL="0">
+              <a:buNone/>
+            </a:pPr>
+            <a:r>
+              <a:rPr lang="en-US" sz="2600" b="1" dirty="0">
+                <a:solidFill>
+                  <a:srgbClr val="0E3A5F"/>
+                </a:solidFill>
+                <a:latin typeface="Calibri" pitchFamily="34" charset="0"/>
+                <a:ea typeface="Calibri" pitchFamily="34" charset="-122"/>
+                <a:cs typeface="Calibri" pitchFamily="34" charset="-120"/>
+              </a:rPr>
+              <a:t>Board-Style Review</a:t>
+            </a:r>
+            <a:endParaRPr lang="en-US" sz="2600" dirty="0"/>
+          </a:p>
+        </p:txBody>
+      </p:sp>
+      <p:sp>
+        <p:nvSpPr>
+          <p:cNvPr id="4" name="Text 2"/>
+          <p:cNvSpPr/>
+          <p:nvPr/>
+        </p:nvSpPr>
+        <p:spPr>
+          <a:xfrm>
+            <a:off x="566928" y="1417320"/>
+            <a:ext cx="11057839" cy="914400"/>
+          </a:xfrm>
+          <a:prstGeom prst="rect">
+            <a:avLst/>
+          </a:prstGeom>
+          <a:noFill/>
+          <a:ln/>
+        </p:spPr>
+        <p:txBody>
+          <a:bodyPr wrap="square" lIns="0" tIns="0" rIns="0" bIns="0" rtlCol="0" anchor="t"/>
+          <a:lstStyle/>
+          <a:p>
+            <a:pPr algn="l" indent="0" marL="0">
+              <a:lnSpc>
+                <a:spcPct val="105000"/>
+              </a:lnSpc>
+              <a:buNone/>
+            </a:pPr>
+            <a:r>
+              <a:rPr lang="en-US" sz="1450" b="1" dirty="0">
+                <a:solidFill>
+                  <a:srgbClr val="1B2A38"/>
+                </a:solidFill>
+                <a:latin typeface="Calibri" pitchFamily="34" charset="0"/>
+                <a:ea typeface="Calibri" pitchFamily="34" charset="-122"/>
+                <a:cs typeface="Calibri" pitchFamily="34" charset="-120"/>
+              </a:rPr>
+              <a:t>Compared with NAAT, rapid antigen tests are generally:</a:t>
+            </a:r>
+            <a:endParaRPr lang="en-US" sz="1450" dirty="0"/>
+          </a:p>
+        </p:txBody>
+      </p:sp>
+      <p:sp>
+        <p:nvSpPr>
+          <p:cNvPr id="5" name="Text 3"/>
+          <p:cNvSpPr/>
+          <p:nvPr/>
+        </p:nvSpPr>
+        <p:spPr>
+          <a:xfrm>
+            <a:off x="658368" y="2395728"/>
+            <a:ext cx="6192390" cy="3017520"/>
+          </a:xfrm>
+          <a:prstGeom prst="rect">
+            <a:avLst/>
+          </a:prstGeom>
+          <a:noFill/>
+          <a:ln/>
+        </p:spPr>
+        <p:txBody>
+          <a:bodyPr wrap="square" lIns="0" tIns="0" rIns="0" bIns="0" rtlCol="0" anchor="t"/>
+          <a:lstStyle/>
+          <a:p>
+            <a:pPr algn="l" indent="0" marL="0">
+              <a:spcAft>
+                <a:spcPts val="600"/>
+              </a:spcAft>
+              <a:buNone/>
+            </a:pPr>
+            <a:r>
+              <a:rPr lang="en-US" sz="1350" dirty="0">
+                <a:solidFill>
+                  <a:srgbClr val="33444F"/>
+                </a:solidFill>
+                <a:latin typeface="Calibri" pitchFamily="34" charset="0"/>
+                <a:ea typeface="Calibri" pitchFamily="34" charset="-122"/>
+                <a:cs typeface="Calibri" pitchFamily="34" charset="-120"/>
+              </a:rPr>
+              <a:t>A. More sensitive</a:t>
+            </a:r>
+            <a:endParaRPr lang="en-US" sz="1350" dirty="0"/>
+          </a:p>
+          <a:p>
+            <a:pPr algn="l" indent="0" marL="0">
+              <a:spcAft>
+                <a:spcPts val="600"/>
+              </a:spcAft>
+              <a:buNone/>
+            </a:pPr>
+            <a:r>
+              <a:rPr lang="en-US" sz="1350" b="1" dirty="0">
+                <a:solidFill>
+                  <a:srgbClr val="1F5722"/>
+                </a:solidFill>
+                <a:latin typeface="Calibri" pitchFamily="34" charset="0"/>
+                <a:ea typeface="Calibri" pitchFamily="34" charset="-122"/>
+                <a:cs typeface="Calibri" pitchFamily="34" charset="-120"/>
+              </a:rPr>
+              <a:t>B. Less sensitive</a:t>
+            </a:r>
+            <a:endParaRPr lang="en-US" sz="1350" dirty="0"/>
+          </a:p>
+          <a:p>
+            <a:pPr algn="l" indent="0" marL="0">
+              <a:spcAft>
+                <a:spcPts val="600"/>
+              </a:spcAft>
+              <a:buNone/>
+            </a:pPr>
+            <a:r>
+              <a:rPr lang="en-US" sz="1350" dirty="0">
+                <a:solidFill>
+                  <a:srgbClr val="33444F"/>
+                </a:solidFill>
+                <a:latin typeface="Calibri" pitchFamily="34" charset="0"/>
+                <a:ea typeface="Calibri" pitchFamily="34" charset="-122"/>
+                <a:cs typeface="Calibri" pitchFamily="34" charset="-120"/>
+              </a:rPr>
+              <a:t>C. Equally sensitive</a:t>
+            </a:r>
+            <a:endParaRPr lang="en-US" sz="1350" dirty="0"/>
+          </a:p>
+          <a:p>
+            <a:pPr algn="l" indent="0" marL="0">
+              <a:spcAft>
+                <a:spcPts val="600"/>
+              </a:spcAft>
+              <a:buNone/>
+            </a:pPr>
+            <a:r>
+              <a:rPr lang="en-US" sz="1350" dirty="0">
+                <a:solidFill>
+                  <a:srgbClr val="33444F"/>
+                </a:solidFill>
+                <a:latin typeface="Calibri" pitchFamily="34" charset="0"/>
+                <a:ea typeface="Calibri" pitchFamily="34" charset="-122"/>
+                <a:cs typeface="Calibri" pitchFamily="34" charset="-120"/>
+              </a:rPr>
+              <a:t>D. Quantitative</a:t>
+            </a:r>
+            <a:endParaRPr lang="en-US" sz="1350" dirty="0"/>
+          </a:p>
+          <a:p>
+            <a:pPr algn="l" indent="0" marL="0">
+              <a:spcAft>
+                <a:spcPts val="600"/>
+              </a:spcAft>
+              <a:buNone/>
+            </a:pPr>
+            <a:r>
+              <a:rPr lang="en-US" sz="1350" dirty="0">
+                <a:solidFill>
+                  <a:srgbClr val="33444F"/>
+                </a:solidFill>
+                <a:latin typeface="Calibri" pitchFamily="34" charset="0"/>
+                <a:ea typeface="Calibri" pitchFamily="34" charset="-122"/>
+                <a:cs typeface="Calibri" pitchFamily="34" charset="-120"/>
+              </a:rPr>
+              <a:t>E. Slower</a:t>
+            </a:r>
+            <a:endParaRPr lang="en-US" sz="1350" dirty="0"/>
+          </a:p>
+        </p:txBody>
+      </p:sp>
+      <p:sp>
+        <p:nvSpPr>
+          <p:cNvPr id="6" name="Shape 4"/>
+          <p:cNvSpPr/>
+          <p:nvPr/>
+        </p:nvSpPr>
+        <p:spPr>
+          <a:xfrm>
+            <a:off x="7201632" y="2395728"/>
+            <a:ext cx="4423136" cy="3246120"/>
+          </a:xfrm>
+          <a:prstGeom prst="roundRect">
+            <a:avLst>
+              <a:gd name="adj" fmla="val 2535"/>
+            </a:avLst>
+          </a:prstGeom>
+          <a:solidFill>
+            <a:srgbClr val="E8F2E9"/>
+          </a:solidFill>
+          <a:ln/>
+          <a:effectLst>
+            <a:outerShdw sx="100000" sy="100000" kx="0" ky="0" algn="bl" rotWithShape="0" blurRad="88900" dist="25400" dir="5400000">
+              <a:srgbClr val="22303C">
+                <a:alpha val="12000"/>
+              </a:srgbClr>
+            </a:outerShdw>
+          </a:effectLst>
+        </p:spPr>
+      </p:sp>
+      <p:sp>
+        <p:nvSpPr>
+          <p:cNvPr id="7" name="Text 5"/>
+          <p:cNvSpPr/>
+          <p:nvPr/>
+        </p:nvSpPr>
+        <p:spPr>
+          <a:xfrm>
+            <a:off x="7439376" y="2578608"/>
+            <a:ext cx="3965936" cy="457200"/>
+          </a:xfrm>
+          <a:prstGeom prst="rect">
+            <a:avLst/>
+          </a:prstGeom>
+          <a:noFill/>
+          <a:ln/>
+        </p:spPr>
+        <p:txBody>
+          <a:bodyPr wrap="square" lIns="0" tIns="0" rIns="0" bIns="0" rtlCol="0" anchor="ctr"/>
+          <a:lstStyle/>
+          <a:p>
+            <a:pPr indent="0" marL="0">
+              <a:buNone/>
+            </a:pPr>
+            <a:r>
+              <a:rPr lang="en-US" sz="1500" b="1" dirty="0">
+                <a:solidFill>
+                  <a:srgbClr val="2E7D32"/>
+                </a:solidFill>
+                <a:latin typeface="Calibri" pitchFamily="34" charset="0"/>
+                <a:ea typeface="Calibri" pitchFamily="34" charset="-122"/>
+                <a:cs typeface="Calibri" pitchFamily="34" charset="-120"/>
+              </a:rPr>
+              <a:t>ANSWER  </a:t>
+            </a:r>
+            <a:pPr indent="0" marL="0">
+              <a:buNone/>
+            </a:pPr>
+            <a:r>
+              <a:rPr lang="en-US" sz="1500" b="1" dirty="0">
+                <a:solidFill>
+                  <a:srgbClr val="1B2A38"/>
+                </a:solidFill>
+                <a:latin typeface="Calibri" pitchFamily="34" charset="0"/>
+                <a:ea typeface="Calibri" pitchFamily="34" charset="-122"/>
+                <a:cs typeface="Calibri" pitchFamily="34" charset="-120"/>
+              </a:rPr>
+              <a:t>B — Less sensitive</a:t>
+            </a:r>
+            <a:endParaRPr lang="en-US" sz="1500" dirty="0"/>
+          </a:p>
+        </p:txBody>
+      </p:sp>
+      <p:sp>
+        <p:nvSpPr>
+          <p:cNvPr id="8" name="Text 6"/>
+          <p:cNvSpPr/>
+          <p:nvPr/>
+        </p:nvSpPr>
+        <p:spPr>
+          <a:xfrm>
+            <a:off x="7439376" y="3127248"/>
+            <a:ext cx="3947648" cy="2377440"/>
+          </a:xfrm>
+          <a:prstGeom prst="rect">
+            <a:avLst/>
+          </a:prstGeom>
+          <a:noFill/>
+          <a:ln/>
+        </p:spPr>
+        <p:txBody>
+          <a:bodyPr wrap="square" lIns="0" tIns="0" rIns="0" bIns="0" rtlCol="0" anchor="t"/>
+          <a:lstStyle/>
+          <a:p>
+            <a:pPr algn="l" indent="0" marL="0">
+              <a:lnSpc>
+                <a:spcPct val="108000"/>
+              </a:lnSpc>
+              <a:buNone/>
+            </a:pPr>
+            <a:r>
+              <a:rPr lang="en-US" sz="1250" dirty="0">
+                <a:solidFill>
+                  <a:srgbClr val="33444F"/>
+                </a:solidFill>
+                <a:latin typeface="Calibri" pitchFamily="34" charset="0"/>
+                <a:ea typeface="Calibri" pitchFamily="34" charset="-122"/>
+                <a:cs typeface="Calibri" pitchFamily="34" charset="-120"/>
+              </a:rPr>
+              <a:t>Antigen tests trade sensitivity for speed/simplicity; negatives often need molecular confirmation when prevalence or stakes are high.</a:t>
+            </a:r>
+            <a:endParaRPr lang="en-US" sz="1250" dirty="0"/>
+          </a:p>
+        </p:txBody>
+      </p:sp>
+      <p:sp>
+        <p:nvSpPr>
+          <p:cNvPr id="9" name="Text 7"/>
+          <p:cNvSpPr/>
+          <p:nvPr/>
+        </p:nvSpPr>
+        <p:spPr>
+          <a:xfrm>
+            <a:off x="566928" y="6473952"/>
+            <a:ext cx="7772400" cy="274320"/>
+          </a:xfrm>
+          <a:prstGeom prst="rect">
+            <a:avLst/>
+          </a:prstGeom>
+          <a:noFill/>
+          <a:ln/>
+        </p:spPr>
+        <p:txBody>
+          <a:bodyPr wrap="square" lIns="0" tIns="0" rIns="0" bIns="0" rtlCol="0" anchor="ctr"/>
+          <a:lstStyle/>
+          <a:p>
+            <a:pPr algn="l" indent="0" marL="0">
+              <a:buNone/>
+            </a:pPr>
+            <a:r>
+              <a:rPr lang="en-US" sz="850" dirty="0">
+                <a:solidFill>
+                  <a:srgbClr val="9AA8B4"/>
+                </a:solidFill>
+                <a:latin typeface="Calibri" pitchFamily="34" charset="0"/>
+                <a:ea typeface="Calibri" pitchFamily="34" charset="-122"/>
+                <a:cs typeface="Calibri" pitchFamily="34" charset="-120"/>
+              </a:rPr>
+              <a:t>Makassed General Hospital  ·  Department of Laboratory Medicine</a:t>
+            </a:r>
+            <a:endParaRPr lang="en-US" sz="850" dirty="0"/>
+          </a:p>
+        </p:txBody>
+      </p:sp>
+      <p:sp>
+        <p:nvSpPr>
+          <p:cNvPr id="10" name="Text 8"/>
+          <p:cNvSpPr/>
+          <p:nvPr/>
+        </p:nvSpPr>
+        <p:spPr>
+          <a:xfrm>
+            <a:off x="9814255" y="6473952"/>
+            <a:ext cx="1828800" cy="274320"/>
+          </a:xfrm>
+          <a:prstGeom prst="rect">
+            <a:avLst/>
+          </a:prstGeom>
+          <a:noFill/>
+          <a:ln/>
+        </p:spPr>
+        <p:txBody>
+          <a:bodyPr wrap="square" lIns="0" tIns="0" rIns="0" bIns="0" rtlCol="0" anchor="ctr"/>
+          <a:lstStyle/>
+          <a:p>
+            <a:pPr algn="r" indent="0" marL="0">
+              <a:buNone/>
+            </a:pPr>
+            <a:r>
+              <a:rPr lang="en-US" sz="850" dirty="0">
+                <a:solidFill>
+                  <a:srgbClr val="9AA8B4"/>
+                </a:solidFill>
+                <a:latin typeface="Calibri" pitchFamily="34" charset="0"/>
+                <a:ea typeface="Calibri" pitchFamily="34" charset="-122"/>
+                <a:cs typeface="Calibri" pitchFamily="34" charset="-120"/>
+              </a:rPr>
+              <a:t>CP Lecture Series</a:t>
+            </a:r>
+            <a:pPr algn="r" indent="0" marL="0">
+              <a:buNone/>
+            </a:pPr>
+            <a:r>
+              <a:rPr lang="en-US" sz="850" dirty="0">
+                <a:solidFill>
+                  <a:srgbClr val="DCE4EC"/>
+                </a:solidFill>
+                <a:latin typeface="Calibri" pitchFamily="34" charset="0"/>
+                <a:ea typeface="Calibri" pitchFamily="34" charset="-122"/>
+                <a:cs typeface="Calibri" pitchFamily="34" charset="-120"/>
+              </a:rPr>
+              <a:t>   ·   </a:t>
+            </a:r>
+            <a:pPr algn="r" indent="0" marL="0">
+              <a:buNone/>
+            </a:pPr>
+            <a:r>
+              <a:rPr lang="en-US" sz="850" b="1" dirty="0">
+                <a:solidFill>
+                  <a:srgbClr val="2E7D32"/>
+                </a:solidFill>
+                <a:latin typeface="Calibri" pitchFamily="34" charset="0"/>
+                <a:ea typeface="Calibri" pitchFamily="34" charset="-122"/>
+                <a:cs typeface="Calibri" pitchFamily="34" charset="-120"/>
+              </a:rPr>
+              <a:t>18</a:t>
+            </a:r>
+            <a:endParaRPr lang="en-US" sz="850" dirty="0"/>
+          </a:p>
+        </p:txBody>
+      </p:sp>
+    </p:spTree>
+  </p:cSld>
+  <p:clrMapOvr>
+    <a:masterClrMapping/>
+  </p:clrMapOvr>
+</p:sld>
+</file>
+
+<file path=ppt/slides/slide22.xml><?xml version="1.0" encoding="utf-8"?>
+<p:sld xmlns:a="http://schemas.openxmlformats.org/drawingml/2006/main" xmlns:r="http://schemas.openxmlformats.org/officeDocument/2006/relationships" xmlns:p="http://schemas.openxmlformats.org/presentationml/2006/main">
+  <p:cSld name="Slide 22">
+    <p:bg>
+      <p:bgPr>
+        <a:solidFill>
+          <a:srgbClr val="FFFFFF"/>
+        </a:solidFill>
+      </p:bgPr>
+    </p:bg>
+    <p:spTree>
+      <p:nvGrpSpPr>
+        <p:cNvPr id="1" name=""/>
+        <p:cNvGrpSpPr/>
+        <p:nvPr/>
+      </p:nvGrpSpPr>
+      <p:grpSpPr>
+        <a:xfrm>
+          <a:off x="0" y="0"/>
+          <a:ext cx="0" cy="0"/>
+          <a:chOff x="0" y="0"/>
+          <a:chExt cx="0" cy="0"/>
+        </a:xfrm>
+      </p:grpSpPr>
+      <p:sp>
+        <p:nvSpPr>
+          <p:cNvPr id="2" name="Text 0"/>
+          <p:cNvSpPr/>
+          <p:nvPr/>
+        </p:nvSpPr>
+        <p:spPr>
+          <a:xfrm>
+            <a:off x="566928" y="329184"/>
+            <a:ext cx="10515600" cy="310896"/>
+          </a:xfrm>
+          <a:prstGeom prst="rect">
+            <a:avLst/>
+          </a:prstGeom>
+          <a:noFill/>
+          <a:ln/>
+        </p:spPr>
+        <p:txBody>
+          <a:bodyPr wrap="square" lIns="0" tIns="0" rIns="0" bIns="0" rtlCol="0" anchor="ctr"/>
+          <a:lstStyle/>
+          <a:p>
+            <a:pPr algn="l" indent="0" marL="0">
+              <a:buNone/>
+            </a:pPr>
+            <a:r>
+              <a:rPr lang="en-US" sz="1100" b="1" spc="150" kern="0" dirty="0">
+                <a:solidFill>
+                  <a:srgbClr val="2E7D32"/>
+                </a:solidFill>
+                <a:latin typeface="Calibri" pitchFamily="34" charset="0"/>
+                <a:ea typeface="Calibri" pitchFamily="34" charset="-122"/>
+                <a:cs typeface="Calibri" pitchFamily="34" charset="-120"/>
+              </a:rPr>
+              <a:t>MICROBIOLOGY   ·   BOARD REVIEW  ·  Q3</a:t>
+            </a:r>
+            <a:endParaRPr lang="en-US" sz="1100" dirty="0"/>
+          </a:p>
+        </p:txBody>
+      </p:sp>
+      <p:sp>
+        <p:nvSpPr>
+          <p:cNvPr id="3" name="Text 1"/>
+          <p:cNvSpPr/>
+          <p:nvPr/>
+        </p:nvSpPr>
+        <p:spPr>
+          <a:xfrm>
+            <a:off x="566928" y="713232"/>
+            <a:ext cx="11064240" cy="749808"/>
+          </a:xfrm>
+          <a:prstGeom prst="rect">
+            <a:avLst/>
+          </a:prstGeom>
+          <a:noFill/>
+          <a:ln/>
+        </p:spPr>
+        <p:txBody>
+          <a:bodyPr wrap="square" lIns="0" tIns="0" rIns="0" bIns="0" rtlCol="0" anchor="ctr"/>
+          <a:lstStyle/>
+          <a:p>
+            <a:pPr algn="l" indent="0" marL="0">
+              <a:buNone/>
+            </a:pPr>
+            <a:r>
+              <a:rPr lang="en-US" sz="2600" b="1" dirty="0">
+                <a:solidFill>
+                  <a:srgbClr val="0E3A5F"/>
+                </a:solidFill>
+                <a:latin typeface="Calibri" pitchFamily="34" charset="0"/>
+                <a:ea typeface="Calibri" pitchFamily="34" charset="-122"/>
+                <a:cs typeface="Calibri" pitchFamily="34" charset="-120"/>
+              </a:rPr>
+              <a:t>Board-Style Review</a:t>
+            </a:r>
+            <a:endParaRPr lang="en-US" sz="2600" dirty="0"/>
+          </a:p>
+        </p:txBody>
+      </p:sp>
+      <p:sp>
+        <p:nvSpPr>
+          <p:cNvPr id="4" name="Text 2"/>
+          <p:cNvSpPr/>
+          <p:nvPr/>
+        </p:nvSpPr>
+        <p:spPr>
+          <a:xfrm>
+            <a:off x="566928" y="1417320"/>
+            <a:ext cx="11057839" cy="914400"/>
+          </a:xfrm>
+          <a:prstGeom prst="rect">
+            <a:avLst/>
+          </a:prstGeom>
+          <a:noFill/>
+          <a:ln/>
+        </p:spPr>
+        <p:txBody>
+          <a:bodyPr wrap="square" lIns="0" tIns="0" rIns="0" bIns="0" rtlCol="0" anchor="t"/>
+          <a:lstStyle/>
+          <a:p>
+            <a:pPr algn="l" indent="0" marL="0">
+              <a:lnSpc>
+                <a:spcPct val="105000"/>
+              </a:lnSpc>
+              <a:buNone/>
+            </a:pPr>
+            <a:r>
+              <a:rPr lang="en-US" sz="1450" b="1" dirty="0">
+                <a:solidFill>
+                  <a:srgbClr val="1B2A38"/>
+                </a:solidFill>
+                <a:latin typeface="Calibri" pitchFamily="34" charset="0"/>
+                <a:ea typeface="Calibri" pitchFamily="34" charset="-122"/>
+                <a:cs typeface="Calibri" pitchFamily="34" charset="-120"/>
+              </a:rPr>
+              <a:t>A key limitation of any syndromic molecular panel is that it:</a:t>
+            </a:r>
+            <a:endParaRPr lang="en-US" sz="1450" dirty="0"/>
+          </a:p>
+        </p:txBody>
+      </p:sp>
+      <p:sp>
+        <p:nvSpPr>
+          <p:cNvPr id="5" name="Text 3"/>
+          <p:cNvSpPr/>
+          <p:nvPr/>
+        </p:nvSpPr>
+        <p:spPr>
+          <a:xfrm>
+            <a:off x="658368" y="2395728"/>
+            <a:ext cx="6192390" cy="3017520"/>
+          </a:xfrm>
+          <a:prstGeom prst="rect">
+            <a:avLst/>
+          </a:prstGeom>
+          <a:noFill/>
+          <a:ln/>
+        </p:spPr>
+        <p:txBody>
+          <a:bodyPr wrap="square" lIns="0" tIns="0" rIns="0" bIns="0" rtlCol="0" anchor="t"/>
+          <a:lstStyle/>
+          <a:p>
+            <a:pPr algn="l" indent="0" marL="0">
+              <a:spcAft>
+                <a:spcPts val="600"/>
+              </a:spcAft>
+              <a:buNone/>
+            </a:pPr>
+            <a:r>
+              <a:rPr lang="en-US" sz="1350" b="1" dirty="0">
+                <a:solidFill>
+                  <a:srgbClr val="1F5722"/>
+                </a:solidFill>
+                <a:latin typeface="Calibri" pitchFamily="34" charset="0"/>
+                <a:ea typeface="Calibri" pitchFamily="34" charset="-122"/>
+                <a:cs typeface="Calibri" pitchFamily="34" charset="-120"/>
+              </a:rPr>
+              <a:t>A. Detects only its designed targets</a:t>
+            </a:r>
+            <a:endParaRPr lang="en-US" sz="1350" dirty="0"/>
+          </a:p>
+          <a:p>
+            <a:pPr algn="l" indent="0" marL="0">
+              <a:spcAft>
+                <a:spcPts val="600"/>
+              </a:spcAft>
+              <a:buNone/>
+            </a:pPr>
+            <a:r>
+              <a:rPr lang="en-US" sz="1350" dirty="0">
+                <a:solidFill>
+                  <a:srgbClr val="33444F"/>
+                </a:solidFill>
+                <a:latin typeface="Calibri" pitchFamily="34" charset="0"/>
+                <a:ea typeface="Calibri" pitchFamily="34" charset="-122"/>
+                <a:cs typeface="Calibri" pitchFamily="34" charset="-120"/>
+              </a:rPr>
+              <a:t>B. Always overcalls disease</a:t>
+            </a:r>
+            <a:endParaRPr lang="en-US" sz="1350" dirty="0"/>
+          </a:p>
+          <a:p>
+            <a:pPr algn="l" indent="0" marL="0">
+              <a:spcAft>
+                <a:spcPts val="600"/>
+              </a:spcAft>
+              <a:buNone/>
+            </a:pPr>
+            <a:r>
+              <a:rPr lang="en-US" sz="1350" dirty="0">
+                <a:solidFill>
+                  <a:srgbClr val="33444F"/>
+                </a:solidFill>
+                <a:latin typeface="Calibri" pitchFamily="34" charset="0"/>
+                <a:ea typeface="Calibri" pitchFamily="34" charset="-122"/>
+                <a:cs typeface="Calibri" pitchFamily="34" charset="-120"/>
+              </a:rPr>
+              <a:t>C. Cannot detect resistance genes</a:t>
+            </a:r>
+            <a:endParaRPr lang="en-US" sz="1350" dirty="0"/>
+          </a:p>
+          <a:p>
+            <a:pPr algn="l" indent="0" marL="0">
+              <a:spcAft>
+                <a:spcPts val="600"/>
+              </a:spcAft>
+              <a:buNone/>
+            </a:pPr>
+            <a:r>
+              <a:rPr lang="en-US" sz="1350" dirty="0">
+                <a:solidFill>
+                  <a:srgbClr val="33444F"/>
+                </a:solidFill>
+                <a:latin typeface="Calibri" pitchFamily="34" charset="0"/>
+                <a:ea typeface="Calibri" pitchFamily="34" charset="-122"/>
+                <a:cs typeface="Calibri" pitchFamily="34" charset="-120"/>
+              </a:rPr>
+              <a:t>D. Replaces culture entirely</a:t>
+            </a:r>
+            <a:endParaRPr lang="en-US" sz="1350" dirty="0"/>
+          </a:p>
+          <a:p>
+            <a:pPr algn="l" indent="0" marL="0">
+              <a:spcAft>
+                <a:spcPts val="600"/>
+              </a:spcAft>
+              <a:buNone/>
+            </a:pPr>
+            <a:r>
+              <a:rPr lang="en-US" sz="1350" dirty="0">
+                <a:solidFill>
+                  <a:srgbClr val="33444F"/>
+                </a:solidFill>
+                <a:latin typeface="Calibri" pitchFamily="34" charset="0"/>
+                <a:ea typeface="Calibri" pitchFamily="34" charset="-122"/>
+                <a:cs typeface="Calibri" pitchFamily="34" charset="-120"/>
+              </a:rPr>
+              <a:t>E. Provides full AST</a:t>
+            </a:r>
+            <a:endParaRPr lang="en-US" sz="1350" dirty="0"/>
+          </a:p>
+        </p:txBody>
+      </p:sp>
+      <p:sp>
+        <p:nvSpPr>
+          <p:cNvPr id="6" name="Shape 4"/>
+          <p:cNvSpPr/>
+          <p:nvPr/>
+        </p:nvSpPr>
+        <p:spPr>
+          <a:xfrm>
+            <a:off x="7201632" y="2395728"/>
+            <a:ext cx="4423136" cy="3246120"/>
+          </a:xfrm>
+          <a:prstGeom prst="roundRect">
+            <a:avLst>
+              <a:gd name="adj" fmla="val 2535"/>
+            </a:avLst>
+          </a:prstGeom>
+          <a:solidFill>
+            <a:srgbClr val="E8F2E9"/>
+          </a:solidFill>
+          <a:ln/>
+          <a:effectLst>
+            <a:outerShdw sx="100000" sy="100000" kx="0" ky="0" algn="bl" rotWithShape="0" blurRad="88900" dist="25400" dir="5400000">
+              <a:srgbClr val="22303C">
+                <a:alpha val="12000"/>
+              </a:srgbClr>
+            </a:outerShdw>
+          </a:effectLst>
+        </p:spPr>
+      </p:sp>
+      <p:sp>
+        <p:nvSpPr>
+          <p:cNvPr id="7" name="Text 5"/>
+          <p:cNvSpPr/>
+          <p:nvPr/>
+        </p:nvSpPr>
+        <p:spPr>
+          <a:xfrm>
+            <a:off x="7439376" y="2578608"/>
+            <a:ext cx="3965936" cy="457200"/>
+          </a:xfrm>
+          <a:prstGeom prst="rect">
+            <a:avLst/>
+          </a:prstGeom>
+          <a:noFill/>
+          <a:ln/>
+        </p:spPr>
+        <p:txBody>
+          <a:bodyPr wrap="square" lIns="0" tIns="0" rIns="0" bIns="0" rtlCol="0" anchor="ctr"/>
+          <a:lstStyle/>
+          <a:p>
+            <a:pPr indent="0" marL="0">
+              <a:buNone/>
+            </a:pPr>
+            <a:r>
+              <a:rPr lang="en-US" sz="1500" b="1" dirty="0">
+                <a:solidFill>
+                  <a:srgbClr val="2E7D32"/>
+                </a:solidFill>
+                <a:latin typeface="Calibri" pitchFamily="34" charset="0"/>
+                <a:ea typeface="Calibri" pitchFamily="34" charset="-122"/>
+                <a:cs typeface="Calibri" pitchFamily="34" charset="-120"/>
+              </a:rPr>
+              <a:t>ANSWER  </a:t>
+            </a:r>
+            <a:pPr indent="0" marL="0">
+              <a:buNone/>
+            </a:pPr>
+            <a:r>
+              <a:rPr lang="en-US" sz="1500" b="1" dirty="0">
+                <a:solidFill>
+                  <a:srgbClr val="1B2A38"/>
+                </a:solidFill>
+                <a:latin typeface="Calibri" pitchFamily="34" charset="0"/>
+                <a:ea typeface="Calibri" pitchFamily="34" charset="-122"/>
+                <a:cs typeface="Calibri" pitchFamily="34" charset="-120"/>
+              </a:rPr>
+              <a:t>A — Detects only designed targets</a:t>
+            </a:r>
+            <a:endParaRPr lang="en-US" sz="1500" dirty="0"/>
+          </a:p>
+        </p:txBody>
+      </p:sp>
+      <p:sp>
+        <p:nvSpPr>
+          <p:cNvPr id="8" name="Text 6"/>
+          <p:cNvSpPr/>
+          <p:nvPr/>
+        </p:nvSpPr>
+        <p:spPr>
+          <a:xfrm>
+            <a:off x="7439376" y="3127248"/>
+            <a:ext cx="3947648" cy="2377440"/>
+          </a:xfrm>
+          <a:prstGeom prst="rect">
+            <a:avLst/>
+          </a:prstGeom>
+          <a:noFill/>
+          <a:ln/>
+        </p:spPr>
+        <p:txBody>
+          <a:bodyPr wrap="square" lIns="0" tIns="0" rIns="0" bIns="0" rtlCol="0" anchor="t"/>
+          <a:lstStyle/>
+          <a:p>
+            <a:pPr algn="l" indent="0" marL="0">
+              <a:lnSpc>
+                <a:spcPct val="108000"/>
+              </a:lnSpc>
+              <a:buNone/>
+            </a:pPr>
+            <a:r>
+              <a:rPr lang="en-US" sz="1250" dirty="0">
+                <a:solidFill>
+                  <a:srgbClr val="33444F"/>
+                </a:solidFill>
+                <a:latin typeface="Calibri" pitchFamily="34" charset="0"/>
+                <a:ea typeface="Calibri" pitchFamily="34" charset="-122"/>
+                <a:cs typeface="Calibri" pitchFamily="34" charset="-120"/>
+              </a:rPr>
+              <a:t>A negative panel does not exclude off-panel pathogens, and culture is still needed for full susceptibility and novel resistance.</a:t>
+            </a:r>
+            <a:endParaRPr lang="en-US" sz="1250" dirty="0"/>
+          </a:p>
+        </p:txBody>
+      </p:sp>
+      <p:sp>
+        <p:nvSpPr>
+          <p:cNvPr id="9" name="Text 7"/>
+          <p:cNvSpPr/>
+          <p:nvPr/>
+        </p:nvSpPr>
+        <p:spPr>
+          <a:xfrm>
+            <a:off x="566928" y="6473952"/>
+            <a:ext cx="7772400" cy="274320"/>
+          </a:xfrm>
+          <a:prstGeom prst="rect">
+            <a:avLst/>
+          </a:prstGeom>
+          <a:noFill/>
+          <a:ln/>
+        </p:spPr>
+        <p:txBody>
+          <a:bodyPr wrap="square" lIns="0" tIns="0" rIns="0" bIns="0" rtlCol="0" anchor="ctr"/>
+          <a:lstStyle/>
+          <a:p>
+            <a:pPr algn="l" indent="0" marL="0">
+              <a:buNone/>
+            </a:pPr>
+            <a:r>
+              <a:rPr lang="en-US" sz="850" dirty="0">
+                <a:solidFill>
+                  <a:srgbClr val="9AA8B4"/>
+                </a:solidFill>
+                <a:latin typeface="Calibri" pitchFamily="34" charset="0"/>
+                <a:ea typeface="Calibri" pitchFamily="34" charset="-122"/>
+                <a:cs typeface="Calibri" pitchFamily="34" charset="-120"/>
+              </a:rPr>
+              <a:t>Makassed General Hospital  ·  Department of Laboratory Medicine</a:t>
+            </a:r>
+            <a:endParaRPr lang="en-US" sz="850" dirty="0"/>
+          </a:p>
+        </p:txBody>
+      </p:sp>
+      <p:sp>
+        <p:nvSpPr>
+          <p:cNvPr id="10" name="Text 8"/>
+          <p:cNvSpPr/>
+          <p:nvPr/>
+        </p:nvSpPr>
+        <p:spPr>
+          <a:xfrm>
+            <a:off x="9814255" y="6473952"/>
+            <a:ext cx="1828800" cy="274320"/>
+          </a:xfrm>
+          <a:prstGeom prst="rect">
+            <a:avLst/>
+          </a:prstGeom>
+          <a:noFill/>
+          <a:ln/>
+        </p:spPr>
+        <p:txBody>
+          <a:bodyPr wrap="square" lIns="0" tIns="0" rIns="0" bIns="0" rtlCol="0" anchor="ctr"/>
+          <a:lstStyle/>
+          <a:p>
+            <a:pPr algn="r" indent="0" marL="0">
+              <a:buNone/>
+            </a:pPr>
+            <a:r>
+              <a:rPr lang="en-US" sz="850" dirty="0">
+                <a:solidFill>
+                  <a:srgbClr val="9AA8B4"/>
+                </a:solidFill>
+                <a:latin typeface="Calibri" pitchFamily="34" charset="0"/>
+                <a:ea typeface="Calibri" pitchFamily="34" charset="-122"/>
+                <a:cs typeface="Calibri" pitchFamily="34" charset="-120"/>
+              </a:rPr>
+              <a:t>CP Lecture Series</a:t>
+            </a:r>
+            <a:pPr algn="r" indent="0" marL="0">
+              <a:buNone/>
+            </a:pPr>
+            <a:r>
+              <a:rPr lang="en-US" sz="850" dirty="0">
+                <a:solidFill>
+                  <a:srgbClr val="DCE4EC"/>
+                </a:solidFill>
+                <a:latin typeface="Calibri" pitchFamily="34" charset="0"/>
+                <a:ea typeface="Calibri" pitchFamily="34" charset="-122"/>
+                <a:cs typeface="Calibri" pitchFamily="34" charset="-120"/>
+              </a:rPr>
+              <a:t>   ·   </a:t>
+            </a:r>
+            <a:pPr algn="r" indent="0" marL="0">
+              <a:buNone/>
+            </a:pPr>
+            <a:r>
+              <a:rPr lang="en-US" sz="850" b="1" dirty="0">
+                <a:solidFill>
+                  <a:srgbClr val="2E7D32"/>
+                </a:solidFill>
+                <a:latin typeface="Calibri" pitchFamily="34" charset="0"/>
+                <a:ea typeface="Calibri" pitchFamily="34" charset="-122"/>
+                <a:cs typeface="Calibri" pitchFamily="34" charset="-120"/>
+              </a:rPr>
+              <a:t>19</a:t>
+            </a:r>
+            <a:endParaRPr lang="en-US" sz="850" dirty="0"/>
+          </a:p>
+        </p:txBody>
+      </p:sp>
+    </p:spTree>
+  </p:cSld>
+  <p:clrMapOvr>
+    <a:masterClrMapping/>
+  </p:clrMapOvr>
+</p:sld>
+</file>
+
+<file path=ppt/slides/slide23.xml><?xml version="1.0" encoding="utf-8"?>
+<p:sld xmlns:a="http://schemas.openxmlformats.org/drawingml/2006/main" xmlns:r="http://schemas.openxmlformats.org/officeDocument/2006/relationships" xmlns:p="http://schemas.openxmlformats.org/presentationml/2006/main">
+  <p:cSld name="Slide 23">
+    <p:bg>
+      <p:bgPr>
+        <a:solidFill>
+          <a:srgbClr val="FFFFFF"/>
+        </a:solidFill>
+      </p:bgPr>
+    </p:bg>
+    <p:spTree>
+      <p:nvGrpSpPr>
+        <p:cNvPr id="1" name=""/>
+        <p:cNvGrpSpPr/>
+        <p:nvPr/>
+      </p:nvGrpSpPr>
+      <p:grpSpPr>
+        <a:xfrm>
+          <a:off x="0" y="0"/>
+          <a:ext cx="0" cy="0"/>
+          <a:chOff x="0" y="0"/>
+          <a:chExt cx="0" cy="0"/>
+        </a:xfrm>
+      </p:grpSpPr>
+      <p:sp>
+        <p:nvSpPr>
+          <p:cNvPr id="2" name="Text 0"/>
+          <p:cNvSpPr/>
+          <p:nvPr/>
+        </p:nvSpPr>
+        <p:spPr>
+          <a:xfrm>
+            <a:off x="566928" y="329184"/>
+            <a:ext cx="10515600" cy="310896"/>
+          </a:xfrm>
+          <a:prstGeom prst="rect">
+            <a:avLst/>
+          </a:prstGeom>
+          <a:noFill/>
+          <a:ln/>
+        </p:spPr>
+        <p:txBody>
+          <a:bodyPr wrap="square" lIns="0" tIns="0" rIns="0" bIns="0" rtlCol="0" anchor="ctr"/>
+          <a:lstStyle/>
+          <a:p>
+            <a:pPr algn="l" indent="0" marL="0">
+              <a:buNone/>
+            </a:pPr>
+            <a:r>
+              <a:rPr lang="en-US" sz="1100" b="1" spc="150" kern="0" dirty="0">
+                <a:solidFill>
+                  <a:srgbClr val="2E7D32"/>
+                </a:solidFill>
+                <a:latin typeface="Calibri" pitchFamily="34" charset="0"/>
+                <a:ea typeface="Calibri" pitchFamily="34" charset="-122"/>
+                <a:cs typeface="Calibri" pitchFamily="34" charset="-120"/>
+              </a:rPr>
+              <a:t>MICROBIOLOGY   ·   BOARD REVIEW  ·  Q4</a:t>
+            </a:r>
+            <a:endParaRPr lang="en-US" sz="1100" dirty="0"/>
+          </a:p>
+        </p:txBody>
+      </p:sp>
+      <p:sp>
+        <p:nvSpPr>
+          <p:cNvPr id="3" name="Text 1"/>
+          <p:cNvSpPr/>
+          <p:nvPr/>
+        </p:nvSpPr>
+        <p:spPr>
+          <a:xfrm>
+            <a:off x="566928" y="713232"/>
+            <a:ext cx="11064240" cy="749808"/>
+          </a:xfrm>
+          <a:prstGeom prst="rect">
+            <a:avLst/>
+          </a:prstGeom>
+          <a:noFill/>
+          <a:ln/>
+        </p:spPr>
+        <p:txBody>
+          <a:bodyPr wrap="square" lIns="0" tIns="0" rIns="0" bIns="0" rtlCol="0" anchor="ctr"/>
+          <a:lstStyle/>
+          <a:p>
+            <a:pPr algn="l" indent="0" marL="0">
+              <a:buNone/>
+            </a:pPr>
+            <a:r>
+              <a:rPr lang="en-US" sz="2600" b="1" dirty="0">
+                <a:solidFill>
+                  <a:srgbClr val="0E3A5F"/>
+                </a:solidFill>
+                <a:latin typeface="Calibri" pitchFamily="34" charset="0"/>
+                <a:ea typeface="Calibri" pitchFamily="34" charset="-122"/>
+                <a:cs typeface="Calibri" pitchFamily="34" charset="-120"/>
+              </a:rPr>
+              <a:t>Board-Style Review</a:t>
+            </a:r>
+            <a:endParaRPr lang="en-US" sz="2600" dirty="0"/>
+          </a:p>
+        </p:txBody>
+      </p:sp>
+      <p:sp>
+        <p:nvSpPr>
+          <p:cNvPr id="4" name="Text 2"/>
+          <p:cNvSpPr/>
+          <p:nvPr/>
+        </p:nvSpPr>
+        <p:spPr>
+          <a:xfrm>
+            <a:off x="566928" y="1417320"/>
+            <a:ext cx="11057839" cy="914400"/>
+          </a:xfrm>
+          <a:prstGeom prst="rect">
+            <a:avLst/>
+          </a:prstGeom>
+          <a:noFill/>
+          <a:ln/>
+        </p:spPr>
+        <p:txBody>
+          <a:bodyPr wrap="square" lIns="0" tIns="0" rIns="0" bIns="0" rtlCol="0" anchor="t"/>
+          <a:lstStyle/>
+          <a:p>
+            <a:pPr algn="l" indent="0" marL="0">
+              <a:lnSpc>
+                <a:spcPct val="105000"/>
+              </a:lnSpc>
+              <a:buNone/>
+            </a:pPr>
+            <a:r>
+              <a:rPr lang="en-US" sz="1450" b="1" dirty="0">
+                <a:solidFill>
+                  <a:srgbClr val="1B2A38"/>
+                </a:solidFill>
+                <a:latin typeface="Calibri" pitchFamily="34" charset="0"/>
+                <a:ea typeface="Calibri" pitchFamily="34" charset="-122"/>
+                <a:cs typeface="Calibri" pitchFamily="34" charset="-120"/>
+              </a:rPr>
+              <a:t>Cycle threshold (Ct) values should be interpreted as:</a:t>
+            </a:r>
+            <a:endParaRPr lang="en-US" sz="1450" dirty="0"/>
+          </a:p>
+        </p:txBody>
+      </p:sp>
+      <p:sp>
+        <p:nvSpPr>
+          <p:cNvPr id="5" name="Text 3"/>
+          <p:cNvSpPr/>
+          <p:nvPr/>
+        </p:nvSpPr>
+        <p:spPr>
+          <a:xfrm>
+            <a:off x="658368" y="2395728"/>
+            <a:ext cx="6192390" cy="3017520"/>
+          </a:xfrm>
+          <a:prstGeom prst="rect">
+            <a:avLst/>
+          </a:prstGeom>
+          <a:noFill/>
+          <a:ln/>
+        </p:spPr>
+        <p:txBody>
+          <a:bodyPr wrap="square" lIns="0" tIns="0" rIns="0" bIns="0" rtlCol="0" anchor="t"/>
+          <a:lstStyle/>
+          <a:p>
+            <a:pPr algn="l" indent="0" marL="0">
+              <a:spcAft>
+                <a:spcPts val="600"/>
+              </a:spcAft>
+              <a:buNone/>
+            </a:pPr>
+            <a:r>
+              <a:rPr lang="en-US" sz="1350" dirty="0">
+                <a:solidFill>
+                  <a:srgbClr val="33444F"/>
+                </a:solidFill>
+                <a:latin typeface="Calibri" pitchFamily="34" charset="0"/>
+                <a:ea typeface="Calibri" pitchFamily="34" charset="-122"/>
+                <a:cs typeface="Calibri" pitchFamily="34" charset="-120"/>
+              </a:rPr>
+              <a:t>A. A standardized viral load</a:t>
+            </a:r>
+            <a:endParaRPr lang="en-US" sz="1350" dirty="0"/>
+          </a:p>
+          <a:p>
+            <a:pPr algn="l" indent="0" marL="0">
+              <a:spcAft>
+                <a:spcPts val="600"/>
+              </a:spcAft>
+              <a:buNone/>
+            </a:pPr>
+            <a:r>
+              <a:rPr lang="en-US" sz="1350" b="1" dirty="0">
+                <a:solidFill>
+                  <a:srgbClr val="1F5722"/>
+                </a:solidFill>
+                <a:latin typeface="Calibri" pitchFamily="34" charset="0"/>
+                <a:ea typeface="Calibri" pitchFamily="34" charset="-122"/>
+                <a:cs typeface="Calibri" pitchFamily="34" charset="-120"/>
+              </a:rPr>
+              <a:t>B. Inversely related to target amount but not a standardized quantitation</a:t>
+            </a:r>
+            <a:endParaRPr lang="en-US" sz="1350" dirty="0"/>
+          </a:p>
+          <a:p>
+            <a:pPr algn="l" indent="0" marL="0">
+              <a:spcAft>
+                <a:spcPts val="600"/>
+              </a:spcAft>
+              <a:buNone/>
+            </a:pPr>
+            <a:r>
+              <a:rPr lang="en-US" sz="1350" dirty="0">
+                <a:solidFill>
+                  <a:srgbClr val="33444F"/>
+                </a:solidFill>
+                <a:latin typeface="Calibri" pitchFamily="34" charset="0"/>
+                <a:ea typeface="Calibri" pitchFamily="34" charset="-122"/>
+                <a:cs typeface="Calibri" pitchFamily="34" charset="-120"/>
+              </a:rPr>
+              <a:t>C. Directly proportional to target amount</a:t>
+            </a:r>
+            <a:endParaRPr lang="en-US" sz="1350" dirty="0"/>
+          </a:p>
+          <a:p>
+            <a:pPr algn="l" indent="0" marL="0">
+              <a:spcAft>
+                <a:spcPts val="600"/>
+              </a:spcAft>
+              <a:buNone/>
+            </a:pPr>
+            <a:r>
+              <a:rPr lang="en-US" sz="1350" dirty="0">
+                <a:solidFill>
+                  <a:srgbClr val="33444F"/>
+                </a:solidFill>
+                <a:latin typeface="Calibri" pitchFamily="34" charset="0"/>
+                <a:ea typeface="Calibri" pitchFamily="34" charset="-122"/>
+                <a:cs typeface="Calibri" pitchFamily="34" charset="-120"/>
+              </a:rPr>
+              <a:t>D. Irrelevant to target quantity</a:t>
+            </a:r>
+            <a:endParaRPr lang="en-US" sz="1350" dirty="0"/>
+          </a:p>
+          <a:p>
+            <a:pPr algn="l" indent="0" marL="0">
+              <a:spcAft>
+                <a:spcPts val="600"/>
+              </a:spcAft>
+              <a:buNone/>
+            </a:pPr>
+            <a:r>
+              <a:rPr lang="en-US" sz="1350" dirty="0">
+                <a:solidFill>
+                  <a:srgbClr val="33444F"/>
+                </a:solidFill>
+                <a:latin typeface="Calibri" pitchFamily="34" charset="0"/>
+                <a:ea typeface="Calibri" pitchFamily="34" charset="-122"/>
+                <a:cs typeface="Calibri" pitchFamily="34" charset="-120"/>
+              </a:rPr>
+              <a:t>E. A susceptibility measure</a:t>
+            </a:r>
+            <a:endParaRPr lang="en-US" sz="1350" dirty="0"/>
+          </a:p>
+        </p:txBody>
+      </p:sp>
+      <p:sp>
+        <p:nvSpPr>
+          <p:cNvPr id="6" name="Shape 4"/>
+          <p:cNvSpPr/>
+          <p:nvPr/>
+        </p:nvSpPr>
+        <p:spPr>
+          <a:xfrm>
+            <a:off x="7201632" y="2395728"/>
+            <a:ext cx="4423136" cy="3246120"/>
+          </a:xfrm>
+          <a:prstGeom prst="roundRect">
+            <a:avLst>
+              <a:gd name="adj" fmla="val 2535"/>
+            </a:avLst>
+          </a:prstGeom>
+          <a:solidFill>
+            <a:srgbClr val="E8F2E9"/>
+          </a:solidFill>
+          <a:ln/>
+          <a:effectLst>
+            <a:outerShdw sx="100000" sy="100000" kx="0" ky="0" algn="bl" rotWithShape="0" blurRad="88900" dist="25400" dir="5400000">
+              <a:srgbClr val="22303C">
+                <a:alpha val="12000"/>
+              </a:srgbClr>
+            </a:outerShdw>
+          </a:effectLst>
+        </p:spPr>
+      </p:sp>
+      <p:sp>
+        <p:nvSpPr>
+          <p:cNvPr id="7" name="Text 5"/>
+          <p:cNvSpPr/>
+          <p:nvPr/>
+        </p:nvSpPr>
+        <p:spPr>
+          <a:xfrm>
+            <a:off x="7439376" y="2578608"/>
+            <a:ext cx="3965936" cy="457200"/>
+          </a:xfrm>
+          <a:prstGeom prst="rect">
+            <a:avLst/>
+          </a:prstGeom>
+          <a:noFill/>
+          <a:ln/>
+        </p:spPr>
+        <p:txBody>
+          <a:bodyPr wrap="square" lIns="0" tIns="0" rIns="0" bIns="0" rtlCol="0" anchor="ctr"/>
+          <a:lstStyle/>
+          <a:p>
+            <a:pPr indent="0" marL="0">
+              <a:buNone/>
+            </a:pPr>
+            <a:r>
+              <a:rPr lang="en-US" sz="1500" b="1" dirty="0">
+                <a:solidFill>
+                  <a:srgbClr val="2E7D32"/>
+                </a:solidFill>
+                <a:latin typeface="Calibri" pitchFamily="34" charset="0"/>
+                <a:ea typeface="Calibri" pitchFamily="34" charset="-122"/>
+                <a:cs typeface="Calibri" pitchFamily="34" charset="-120"/>
+              </a:rPr>
+              <a:t>ANSWER  </a:t>
+            </a:r>
+            <a:pPr indent="0" marL="0">
+              <a:buNone/>
+            </a:pPr>
+            <a:r>
+              <a:rPr lang="en-US" sz="1500" b="1" dirty="0">
+                <a:solidFill>
+                  <a:srgbClr val="1B2A38"/>
+                </a:solidFill>
+                <a:latin typeface="Calibri" pitchFamily="34" charset="0"/>
+                <a:ea typeface="Calibri" pitchFamily="34" charset="-122"/>
+                <a:cs typeface="Calibri" pitchFamily="34" charset="-120"/>
+              </a:rPr>
+              <a:t>B — Inversely related, not standardized</a:t>
+            </a:r>
+            <a:endParaRPr lang="en-US" sz="1500" dirty="0"/>
+          </a:p>
+        </p:txBody>
+      </p:sp>
+      <p:sp>
+        <p:nvSpPr>
+          <p:cNvPr id="8" name="Text 6"/>
+          <p:cNvSpPr/>
+          <p:nvPr/>
+        </p:nvSpPr>
+        <p:spPr>
+          <a:xfrm>
+            <a:off x="7439376" y="3127248"/>
+            <a:ext cx="3947648" cy="2377440"/>
+          </a:xfrm>
+          <a:prstGeom prst="rect">
+            <a:avLst/>
+          </a:prstGeom>
+          <a:noFill/>
+          <a:ln/>
+        </p:spPr>
+        <p:txBody>
+          <a:bodyPr wrap="square" lIns="0" tIns="0" rIns="0" bIns="0" rtlCol="0" anchor="t"/>
+          <a:lstStyle/>
+          <a:p>
+            <a:pPr algn="l" indent="0" marL="0">
+              <a:lnSpc>
+                <a:spcPct val="108000"/>
+              </a:lnSpc>
+              <a:buNone/>
+            </a:pPr>
+            <a:r>
+              <a:rPr lang="en-US" sz="1250" dirty="0">
+                <a:solidFill>
+                  <a:srgbClr val="33444F"/>
+                </a:solidFill>
+                <a:latin typeface="Calibri" pitchFamily="34" charset="0"/>
+                <a:ea typeface="Calibri" pitchFamily="34" charset="-122"/>
+                <a:cs typeface="Calibri" pitchFamily="34" charset="-120"/>
+              </a:rPr>
+              <a:t>Ct inversely reflects target quantity but is affected by pre-analytic/assay factors and is not a validated quantitative viral load.</a:t>
+            </a:r>
+            <a:endParaRPr lang="en-US" sz="1250" dirty="0"/>
+          </a:p>
+        </p:txBody>
+      </p:sp>
+      <p:sp>
+        <p:nvSpPr>
+          <p:cNvPr id="9" name="Text 7"/>
+          <p:cNvSpPr/>
+          <p:nvPr/>
+        </p:nvSpPr>
+        <p:spPr>
+          <a:xfrm>
+            <a:off x="566928" y="6473952"/>
+            <a:ext cx="7772400" cy="274320"/>
+          </a:xfrm>
+          <a:prstGeom prst="rect">
+            <a:avLst/>
+          </a:prstGeom>
+          <a:noFill/>
+          <a:ln/>
+        </p:spPr>
+        <p:txBody>
+          <a:bodyPr wrap="square" lIns="0" tIns="0" rIns="0" bIns="0" rtlCol="0" anchor="ctr"/>
+          <a:lstStyle/>
+          <a:p>
+            <a:pPr algn="l" indent="0" marL="0">
+              <a:buNone/>
+            </a:pPr>
+            <a:r>
+              <a:rPr lang="en-US" sz="850" dirty="0">
+                <a:solidFill>
+                  <a:srgbClr val="9AA8B4"/>
+                </a:solidFill>
+                <a:latin typeface="Calibri" pitchFamily="34" charset="0"/>
+                <a:ea typeface="Calibri" pitchFamily="34" charset="-122"/>
+                <a:cs typeface="Calibri" pitchFamily="34" charset="-120"/>
+              </a:rPr>
+              <a:t>Makassed General Hospital  ·  Department of Laboratory Medicine</a:t>
+            </a:r>
+            <a:endParaRPr lang="en-US" sz="850" dirty="0"/>
+          </a:p>
+        </p:txBody>
+      </p:sp>
+      <p:sp>
+        <p:nvSpPr>
+          <p:cNvPr id="10" name="Text 8"/>
+          <p:cNvSpPr/>
+          <p:nvPr/>
+        </p:nvSpPr>
+        <p:spPr>
+          <a:xfrm>
+            <a:off x="9814255" y="6473952"/>
+            <a:ext cx="1828800" cy="274320"/>
+          </a:xfrm>
+          <a:prstGeom prst="rect">
+            <a:avLst/>
+          </a:prstGeom>
+          <a:noFill/>
+          <a:ln/>
+        </p:spPr>
+        <p:txBody>
+          <a:bodyPr wrap="square" lIns="0" tIns="0" rIns="0" bIns="0" rtlCol="0" anchor="ctr"/>
+          <a:lstStyle/>
+          <a:p>
+            <a:pPr algn="r" indent="0" marL="0">
+              <a:buNone/>
+            </a:pPr>
+            <a:r>
+              <a:rPr lang="en-US" sz="850" dirty="0">
+                <a:solidFill>
+                  <a:srgbClr val="9AA8B4"/>
+                </a:solidFill>
+                <a:latin typeface="Calibri" pitchFamily="34" charset="0"/>
+                <a:ea typeface="Calibri" pitchFamily="34" charset="-122"/>
+                <a:cs typeface="Calibri" pitchFamily="34" charset="-120"/>
+              </a:rPr>
+              <a:t>CP Lecture Series</a:t>
+            </a:r>
+            <a:pPr algn="r" indent="0" marL="0">
+              <a:buNone/>
+            </a:pPr>
+            <a:r>
+              <a:rPr lang="en-US" sz="850" dirty="0">
+                <a:solidFill>
+                  <a:srgbClr val="DCE4EC"/>
+                </a:solidFill>
+                <a:latin typeface="Calibri" pitchFamily="34" charset="0"/>
+                <a:ea typeface="Calibri" pitchFamily="34" charset="-122"/>
+                <a:cs typeface="Calibri" pitchFamily="34" charset="-120"/>
+              </a:rPr>
+              <a:t>   ·   </a:t>
+            </a:r>
+            <a:pPr algn="r" indent="0" marL="0">
+              <a:buNone/>
+            </a:pPr>
+            <a:r>
+              <a:rPr lang="en-US" sz="850" b="1" dirty="0">
+                <a:solidFill>
+                  <a:srgbClr val="2E7D32"/>
+                </a:solidFill>
+                <a:latin typeface="Calibri" pitchFamily="34" charset="0"/>
+                <a:ea typeface="Calibri" pitchFamily="34" charset="-122"/>
+                <a:cs typeface="Calibri" pitchFamily="34" charset="-120"/>
+              </a:rPr>
+              <a:t>20</a:t>
+            </a:r>
+            <a:endParaRPr lang="en-US" sz="850" dirty="0"/>
+          </a:p>
+        </p:txBody>
+      </p:sp>
+    </p:spTree>
+  </p:cSld>
+  <p:clrMapOvr>
+    <a:masterClrMapping/>
+  </p:clrMapOvr>
+</p:sld>
+</file>
+
+<file path=ppt/slides/slide24.xml><?xml version="1.0" encoding="utf-8"?>
+<p:sld xmlns:a="http://schemas.openxmlformats.org/drawingml/2006/main" xmlns:r="http://schemas.openxmlformats.org/officeDocument/2006/relationships" xmlns:p="http://schemas.openxmlformats.org/presentationml/2006/main">
+  <p:cSld name="Slide 24">
+    <p:bg>
+      <p:bgPr>
+        <a:solidFill>
+          <a:srgbClr val="0A2A45"/>
+        </a:solidFill>
+      </p:bgPr>
+    </p:bg>
+    <p:spTree>
+      <p:nvGrpSpPr>
+        <p:cNvPr id="1" name=""/>
+        <p:cNvGrpSpPr/>
+        <p:nvPr/>
+      </p:nvGrpSpPr>
+      <p:grpSpPr>
+        <a:xfrm>
+          <a:off x="0" y="0"/>
+          <a:ext cx="0" cy="0"/>
+          <a:chOff x="0" y="0"/>
+          <a:chExt cx="0" cy="0"/>
+        </a:xfrm>
+      </p:grpSpPr>
+      <p:sp>
+        <p:nvSpPr>
+          <p:cNvPr id="2" name="Text 0"/>
+          <p:cNvSpPr/>
+          <p:nvPr/>
+        </p:nvSpPr>
+        <p:spPr>
+          <a:xfrm>
+            <a:off x="566928" y="329184"/>
+            <a:ext cx="10058400" cy="310896"/>
+          </a:xfrm>
+          <a:prstGeom prst="rect">
+            <a:avLst/>
+          </a:prstGeom>
+          <a:noFill/>
+          <a:ln/>
+        </p:spPr>
+        <p:txBody>
+          <a:bodyPr wrap="square" lIns="0" tIns="0" rIns="0" bIns="0" rtlCol="0" anchor="ctr"/>
+          <a:lstStyle/>
+          <a:p>
+            <a:pPr indent="0" marL="0">
+              <a:buNone/>
+            </a:pPr>
+            <a:r>
+              <a:rPr lang="en-US" sz="1100" b="1" spc="150" kern="0" dirty="0">
+                <a:solidFill>
+                  <a:srgbClr val="2E7D32"/>
+                </a:solidFill>
+                <a:latin typeface="Calibri" pitchFamily="34" charset="0"/>
+                <a:ea typeface="Calibri" pitchFamily="34" charset="-122"/>
+                <a:cs typeface="Calibri" pitchFamily="34" charset="-120"/>
+              </a:rPr>
+              <a:t>MICROBIOLOGY</a:t>
+            </a:r>
+            <a:endParaRPr lang="en-US" sz="1100" dirty="0"/>
+          </a:p>
+        </p:txBody>
+      </p:sp>
+      <p:sp>
+        <p:nvSpPr>
+          <p:cNvPr id="3" name="Text 1"/>
+          <p:cNvSpPr/>
+          <p:nvPr/>
+        </p:nvSpPr>
+        <p:spPr>
+          <a:xfrm>
+            <a:off x="566928" y="676656"/>
+            <a:ext cx="10972800" cy="749808"/>
+          </a:xfrm>
+          <a:prstGeom prst="rect">
+            <a:avLst/>
+          </a:prstGeom>
+          <a:noFill/>
+          <a:ln/>
+        </p:spPr>
+        <p:txBody>
+          <a:bodyPr wrap="square" lIns="0" tIns="0" rIns="0" bIns="0" rtlCol="0" anchor="ctr"/>
+          <a:lstStyle/>
+          <a:p>
+            <a:pPr indent="0" marL="0">
+              <a:buNone/>
+            </a:pPr>
+            <a:r>
+              <a:rPr lang="en-US" sz="3000" b="1" dirty="0">
+                <a:solidFill>
+                  <a:srgbClr val="FFFFFF"/>
+                </a:solidFill>
+                <a:latin typeface="Calibri" pitchFamily="34" charset="0"/>
+                <a:ea typeface="Calibri" pitchFamily="34" charset="-122"/>
+                <a:cs typeface="Calibri" pitchFamily="34" charset="-120"/>
+              </a:rPr>
+              <a:t>Key Take-Home Points</a:t>
+            </a:r>
+            <a:endParaRPr lang="en-US" sz="3000" dirty="0"/>
+          </a:p>
+        </p:txBody>
+      </p:sp>
+      <p:sp>
+        <p:nvSpPr>
+          <p:cNvPr id="4" name="Shape 2"/>
+          <p:cNvSpPr/>
+          <p:nvPr/>
+        </p:nvSpPr>
+        <p:spPr>
+          <a:xfrm>
+            <a:off x="566928" y="1517904"/>
+            <a:ext cx="11057839" cy="841248"/>
+          </a:xfrm>
+          <a:prstGeom prst="roundRect">
+            <a:avLst>
+              <a:gd name="adj" fmla="val 7609"/>
+            </a:avLst>
+          </a:prstGeom>
+          <a:solidFill>
+            <a:srgbClr val="143651"/>
+          </a:solidFill>
+          <a:ln/>
+        </p:spPr>
+      </p:sp>
+      <p:sp>
+        <p:nvSpPr>
+          <p:cNvPr id="5" name="Shape 3"/>
+          <p:cNvSpPr/>
+          <p:nvPr/>
+        </p:nvSpPr>
+        <p:spPr>
+          <a:xfrm>
+            <a:off x="749808" y="1755648"/>
+            <a:ext cx="365760" cy="365760"/>
+          </a:xfrm>
+          <a:prstGeom prst="ellipse">
+            <a:avLst/>
+          </a:prstGeom>
+          <a:solidFill>
+            <a:srgbClr val="2E7D32"/>
+          </a:solidFill>
+          <a:ln/>
+          <a:effectLst>
+            <a:outerShdw sx="100000" sy="100000" kx="0" ky="0" algn="bl" rotWithShape="0" blurRad="88900" dist="25400" dir="5400000">
+              <a:srgbClr val="22303C">
+                <a:alpha val="12000"/>
+              </a:srgbClr>
+            </a:outerShdw>
+          </a:effectLst>
+        </p:spPr>
+      </p:sp>
+      <p:sp>
+        <p:nvSpPr>
+          <p:cNvPr id="6" name="Text 4"/>
+          <p:cNvSpPr/>
+          <p:nvPr/>
+        </p:nvSpPr>
+        <p:spPr>
+          <a:xfrm>
+            <a:off x="749808" y="1755648"/>
+            <a:ext cx="365760" cy="365760"/>
+          </a:xfrm>
+          <a:prstGeom prst="rect">
+            <a:avLst/>
+          </a:prstGeom>
+          <a:noFill/>
+          <a:ln/>
+        </p:spPr>
+        <p:txBody>
+          <a:bodyPr wrap="square" lIns="0" tIns="0" rIns="0" bIns="0" rtlCol="0" anchor="ctr"/>
+          <a:lstStyle/>
+          <a:p>
+            <a:pPr algn="ctr" indent="0" marL="0">
+              <a:buNone/>
+            </a:pPr>
+            <a:r>
+              <a:rPr lang="en-US" sz="1500" b="1" dirty="0">
+                <a:solidFill>
+                  <a:srgbClr val="FFFFFF"/>
+                </a:solidFill>
+                <a:latin typeface="Calibri" pitchFamily="34" charset="0"/>
+                <a:ea typeface="Calibri" pitchFamily="34" charset="-122"/>
+                <a:cs typeface="Calibri" pitchFamily="34" charset="-120"/>
+              </a:rPr>
+              <a:t>1</a:t>
+            </a:r>
+            <a:endParaRPr lang="en-US" sz="1500" dirty="0"/>
+          </a:p>
+        </p:txBody>
+      </p:sp>
+      <p:sp>
+        <p:nvSpPr>
+          <p:cNvPr id="7" name="Text 5"/>
+          <p:cNvSpPr/>
+          <p:nvPr/>
+        </p:nvSpPr>
+        <p:spPr>
+          <a:xfrm>
+            <a:off x="1280160" y="1517904"/>
+            <a:ext cx="10143439" cy="841248"/>
+          </a:xfrm>
+          <a:prstGeom prst="rect">
+            <a:avLst/>
+          </a:prstGeom>
+          <a:noFill/>
+          <a:ln/>
+        </p:spPr>
+        <p:txBody>
+          <a:bodyPr wrap="square" lIns="0" tIns="0" rIns="0" bIns="0" rtlCol="0" anchor="ctr"/>
+          <a:lstStyle/>
+          <a:p>
+            <a:pPr algn="l" indent="0" marL="0">
+              <a:buNone/>
+            </a:pPr>
+            <a:r>
+              <a:rPr lang="en-US" sz="1350" dirty="0">
+                <a:solidFill>
+                  <a:srgbClr val="E7EEF4"/>
+                </a:solidFill>
+                <a:latin typeface="Calibri" pitchFamily="34" charset="0"/>
+                <a:ea typeface="Calibri" pitchFamily="34" charset="-122"/>
+                <a:cs typeface="Calibri" pitchFamily="34" charset="-120"/>
+              </a:rPr>
+              <a:t>Antigen tests are fast but less sensitive; NAAT and syndromic panels are highly sensitive and quick (~1–2 h) but costlier.</a:t>
+            </a:r>
+            <a:endParaRPr lang="en-US" sz="1350" dirty="0"/>
+          </a:p>
+        </p:txBody>
+      </p:sp>
+      <p:sp>
+        <p:nvSpPr>
+          <p:cNvPr id="8" name="Shape 6"/>
+          <p:cNvSpPr/>
+          <p:nvPr/>
+        </p:nvSpPr>
+        <p:spPr>
+          <a:xfrm>
+            <a:off x="566928" y="2505456"/>
+            <a:ext cx="11057839" cy="841248"/>
+          </a:xfrm>
+          <a:prstGeom prst="roundRect">
+            <a:avLst>
+              <a:gd name="adj" fmla="val 7609"/>
+            </a:avLst>
+          </a:prstGeom>
+          <a:solidFill>
+            <a:srgbClr val="143651"/>
+          </a:solidFill>
+          <a:ln/>
+        </p:spPr>
+      </p:sp>
+      <p:sp>
+        <p:nvSpPr>
+          <p:cNvPr id="9" name="Shape 7"/>
+          <p:cNvSpPr/>
+          <p:nvPr/>
+        </p:nvSpPr>
+        <p:spPr>
+          <a:xfrm>
+            <a:off x="749808" y="2743200"/>
+            <a:ext cx="365760" cy="365760"/>
+          </a:xfrm>
+          <a:prstGeom prst="ellipse">
+            <a:avLst/>
+          </a:prstGeom>
+          <a:solidFill>
+            <a:srgbClr val="2E7D32"/>
+          </a:solidFill>
+          <a:ln/>
+          <a:effectLst>
+            <a:outerShdw sx="100000" sy="100000" kx="0" ky="0" algn="bl" rotWithShape="0" blurRad="88900" dist="25400" dir="5400000">
+              <a:srgbClr val="22303C">
+                <a:alpha val="12000"/>
+              </a:srgbClr>
+            </a:outerShdw>
+          </a:effectLst>
+        </p:spPr>
+      </p:sp>
+      <p:sp>
+        <p:nvSpPr>
+          <p:cNvPr id="10" name="Text 8"/>
+          <p:cNvSpPr/>
+          <p:nvPr/>
+        </p:nvSpPr>
+        <p:spPr>
+          <a:xfrm>
+            <a:off x="749808" y="2743200"/>
+            <a:ext cx="365760" cy="365760"/>
+          </a:xfrm>
+          <a:prstGeom prst="rect">
+            <a:avLst/>
+          </a:prstGeom>
+          <a:noFill/>
+          <a:ln/>
+        </p:spPr>
+        <p:txBody>
+          <a:bodyPr wrap="square" lIns="0" tIns="0" rIns="0" bIns="0" rtlCol="0" anchor="ctr"/>
+          <a:lstStyle/>
+          <a:p>
+            <a:pPr algn="ctr" indent="0" marL="0">
+              <a:buNone/>
+            </a:pPr>
+            <a:r>
+              <a:rPr lang="en-US" sz="1500" b="1" dirty="0">
+                <a:solidFill>
+                  <a:srgbClr val="FFFFFF"/>
+                </a:solidFill>
+                <a:latin typeface="Calibri" pitchFamily="34" charset="0"/>
+                <a:ea typeface="Calibri" pitchFamily="34" charset="-122"/>
+                <a:cs typeface="Calibri" pitchFamily="34" charset="-120"/>
+              </a:rPr>
+              <a:t>2</a:t>
+            </a:r>
+            <a:endParaRPr lang="en-US" sz="1500" dirty="0"/>
+          </a:p>
+        </p:txBody>
+      </p:sp>
+      <p:sp>
+        <p:nvSpPr>
+          <p:cNvPr id="11" name="Text 9"/>
+          <p:cNvSpPr/>
+          <p:nvPr/>
+        </p:nvSpPr>
+        <p:spPr>
+          <a:xfrm>
+            <a:off x="1280160" y="2505456"/>
+            <a:ext cx="10143439" cy="841248"/>
+          </a:xfrm>
+          <a:prstGeom prst="rect">
+            <a:avLst/>
+          </a:prstGeom>
+          <a:noFill/>
+          <a:ln/>
+        </p:spPr>
+        <p:txBody>
+          <a:bodyPr wrap="square" lIns="0" tIns="0" rIns="0" bIns="0" rtlCol="0" anchor="ctr"/>
+          <a:lstStyle/>
+          <a:p>
+            <a:pPr algn="l" indent="0" marL="0">
+              <a:buNone/>
+            </a:pPr>
+            <a:r>
+              <a:rPr lang="en-US" sz="1350" dirty="0">
+                <a:solidFill>
+                  <a:srgbClr val="E7EEF4"/>
+                </a:solidFill>
+                <a:latin typeface="Calibri" pitchFamily="34" charset="0"/>
+                <a:ea typeface="Calibri" pitchFamily="34" charset="-122"/>
+                <a:cs typeface="Calibri" pitchFamily="34" charset="-120"/>
+              </a:rPr>
+              <a:t>Detection ≠ disease: account for colonization and shedding (e.g., C. difficile NAAT) and correlate clinically.</a:t>
+            </a:r>
+            <a:endParaRPr lang="en-US" sz="1350" dirty="0"/>
+          </a:p>
+        </p:txBody>
+      </p:sp>
+      <p:sp>
+        <p:nvSpPr>
+          <p:cNvPr id="12" name="Shape 10"/>
+          <p:cNvSpPr/>
+          <p:nvPr/>
+        </p:nvSpPr>
+        <p:spPr>
+          <a:xfrm>
+            <a:off x="566928" y="3493008"/>
+            <a:ext cx="11057839" cy="841248"/>
+          </a:xfrm>
+          <a:prstGeom prst="roundRect">
+            <a:avLst>
+              <a:gd name="adj" fmla="val 7609"/>
+            </a:avLst>
+          </a:prstGeom>
+          <a:solidFill>
+            <a:srgbClr val="143651"/>
+          </a:solidFill>
+          <a:ln/>
+        </p:spPr>
+      </p:sp>
+      <p:sp>
+        <p:nvSpPr>
+          <p:cNvPr id="13" name="Shape 11"/>
+          <p:cNvSpPr/>
+          <p:nvPr/>
+        </p:nvSpPr>
+        <p:spPr>
+          <a:xfrm>
+            <a:off x="749808" y="3730752"/>
+            <a:ext cx="365760" cy="365760"/>
+          </a:xfrm>
+          <a:prstGeom prst="ellipse">
+            <a:avLst/>
+          </a:prstGeom>
+          <a:solidFill>
+            <a:srgbClr val="2E7D32"/>
+          </a:solidFill>
+          <a:ln/>
+          <a:effectLst>
+            <a:outerShdw sx="100000" sy="100000" kx="0" ky="0" algn="bl" rotWithShape="0" blurRad="88900" dist="25400" dir="5400000">
+              <a:srgbClr val="22303C">
+                <a:alpha val="12000"/>
+              </a:srgbClr>
+            </a:outerShdw>
+          </a:effectLst>
+        </p:spPr>
+      </p:sp>
+      <p:sp>
+        <p:nvSpPr>
+          <p:cNvPr id="14" name="Text 12"/>
+          <p:cNvSpPr/>
+          <p:nvPr/>
+        </p:nvSpPr>
+        <p:spPr>
+          <a:xfrm>
+            <a:off x="749808" y="3730752"/>
+            <a:ext cx="365760" cy="365760"/>
+          </a:xfrm>
+          <a:prstGeom prst="rect">
+            <a:avLst/>
+          </a:prstGeom>
+          <a:noFill/>
+          <a:ln/>
+        </p:spPr>
+        <p:txBody>
+          <a:bodyPr wrap="square" lIns="0" tIns="0" rIns="0" bIns="0" rtlCol="0" anchor="ctr"/>
+          <a:lstStyle/>
+          <a:p>
+            <a:pPr algn="ctr" indent="0" marL="0">
+              <a:buNone/>
+            </a:pPr>
+            <a:r>
+              <a:rPr lang="en-US" sz="1500" b="1" dirty="0">
+                <a:solidFill>
+                  <a:srgbClr val="FFFFFF"/>
+                </a:solidFill>
+                <a:latin typeface="Calibri" pitchFamily="34" charset="0"/>
+                <a:ea typeface="Calibri" pitchFamily="34" charset="-122"/>
+                <a:cs typeface="Calibri" pitchFamily="34" charset="-120"/>
+              </a:rPr>
+              <a:t>3</a:t>
+            </a:r>
+            <a:endParaRPr lang="en-US" sz="1500" dirty="0"/>
+          </a:p>
+        </p:txBody>
+      </p:sp>
+      <p:sp>
+        <p:nvSpPr>
+          <p:cNvPr id="15" name="Text 13"/>
+          <p:cNvSpPr/>
+          <p:nvPr/>
+        </p:nvSpPr>
+        <p:spPr>
+          <a:xfrm>
+            <a:off x="1280160" y="3493008"/>
+            <a:ext cx="10143439" cy="841248"/>
+          </a:xfrm>
+          <a:prstGeom prst="rect">
+            <a:avLst/>
+          </a:prstGeom>
+          <a:noFill/>
+          <a:ln/>
+        </p:spPr>
+        <p:txBody>
+          <a:bodyPr wrap="square" lIns="0" tIns="0" rIns="0" bIns="0" rtlCol="0" anchor="ctr"/>
+          <a:lstStyle/>
+          <a:p>
+            <a:pPr algn="l" indent="0" marL="0">
+              <a:buNone/>
+            </a:pPr>
+            <a:r>
+              <a:rPr lang="en-US" sz="1350" dirty="0">
+                <a:solidFill>
+                  <a:srgbClr val="E7EEF4"/>
+                </a:solidFill>
+                <a:latin typeface="Calibri" pitchFamily="34" charset="0"/>
+                <a:ea typeface="Calibri" pitchFamily="34" charset="-122"/>
+                <a:cs typeface="Calibri" pitchFamily="34" charset="-120"/>
+              </a:rPr>
+              <a:t>Ct inversely reflects target amount but is not a standardized viral load.</a:t>
+            </a:r>
+            <a:endParaRPr lang="en-US" sz="1350" dirty="0"/>
+          </a:p>
+        </p:txBody>
+      </p:sp>
+      <p:sp>
+        <p:nvSpPr>
+          <p:cNvPr id="16" name="Shape 14"/>
+          <p:cNvSpPr/>
+          <p:nvPr/>
+        </p:nvSpPr>
+        <p:spPr>
+          <a:xfrm>
+            <a:off x="566928" y="4480560"/>
+            <a:ext cx="11057839" cy="841248"/>
+          </a:xfrm>
+          <a:prstGeom prst="roundRect">
+            <a:avLst>
+              <a:gd name="adj" fmla="val 7609"/>
+            </a:avLst>
+          </a:prstGeom>
+          <a:solidFill>
+            <a:srgbClr val="143651"/>
+          </a:solidFill>
+          <a:ln/>
+        </p:spPr>
+      </p:sp>
+      <p:sp>
+        <p:nvSpPr>
+          <p:cNvPr id="17" name="Shape 15"/>
+          <p:cNvSpPr/>
+          <p:nvPr/>
+        </p:nvSpPr>
+        <p:spPr>
+          <a:xfrm>
+            <a:off x="749808" y="4718304"/>
+            <a:ext cx="365760" cy="365760"/>
+          </a:xfrm>
+          <a:prstGeom prst="ellipse">
+            <a:avLst/>
+          </a:prstGeom>
+          <a:solidFill>
+            <a:srgbClr val="2E7D32"/>
+          </a:solidFill>
+          <a:ln/>
+          <a:effectLst>
+            <a:outerShdw sx="100000" sy="100000" kx="0" ky="0" algn="bl" rotWithShape="0" blurRad="88900" dist="25400" dir="5400000">
+              <a:srgbClr val="22303C">
+                <a:alpha val="12000"/>
+              </a:srgbClr>
+            </a:outerShdw>
+          </a:effectLst>
+        </p:spPr>
+      </p:sp>
+      <p:sp>
+        <p:nvSpPr>
+          <p:cNvPr id="18" name="Text 16"/>
+          <p:cNvSpPr/>
+          <p:nvPr/>
+        </p:nvSpPr>
+        <p:spPr>
+          <a:xfrm>
+            <a:off x="749808" y="4718304"/>
+            <a:ext cx="365760" cy="365760"/>
+          </a:xfrm>
+          <a:prstGeom prst="rect">
+            <a:avLst/>
+          </a:prstGeom>
+          <a:noFill/>
+          <a:ln/>
+        </p:spPr>
+        <p:txBody>
+          <a:bodyPr wrap="square" lIns="0" tIns="0" rIns="0" bIns="0" rtlCol="0" anchor="ctr"/>
+          <a:lstStyle/>
+          <a:p>
+            <a:pPr algn="ctr" indent="0" marL="0">
+              <a:buNone/>
+            </a:pPr>
+            <a:r>
+              <a:rPr lang="en-US" sz="1500" b="1" dirty="0">
+                <a:solidFill>
+                  <a:srgbClr val="FFFFFF"/>
+                </a:solidFill>
+                <a:latin typeface="Calibri" pitchFamily="34" charset="0"/>
+                <a:ea typeface="Calibri" pitchFamily="34" charset="-122"/>
+                <a:cs typeface="Calibri" pitchFamily="34" charset="-120"/>
+              </a:rPr>
+              <a:t>4</a:t>
+            </a:r>
+            <a:endParaRPr lang="en-US" sz="1500" dirty="0"/>
+          </a:p>
+        </p:txBody>
+      </p:sp>
+      <p:sp>
+        <p:nvSpPr>
+          <p:cNvPr id="19" name="Text 17"/>
+          <p:cNvSpPr/>
+          <p:nvPr/>
+        </p:nvSpPr>
+        <p:spPr>
+          <a:xfrm>
+            <a:off x="1280160" y="4480560"/>
+            <a:ext cx="10143439" cy="841248"/>
+          </a:xfrm>
+          <a:prstGeom prst="rect">
+            <a:avLst/>
+          </a:prstGeom>
+          <a:noFill/>
+          <a:ln/>
+        </p:spPr>
+        <p:txBody>
+          <a:bodyPr wrap="square" lIns="0" tIns="0" rIns="0" bIns="0" rtlCol="0" anchor="ctr"/>
+          <a:lstStyle/>
+          <a:p>
+            <a:pPr algn="l" indent="0" marL="0">
+              <a:buNone/>
+            </a:pPr>
+            <a:r>
+              <a:rPr lang="en-US" sz="1350" dirty="0">
+                <a:solidFill>
+                  <a:srgbClr val="E7EEF4"/>
+                </a:solidFill>
+                <a:latin typeface="Calibri" pitchFamily="34" charset="0"/>
+                <a:ea typeface="Calibri" pitchFamily="34" charset="-122"/>
+                <a:cs typeface="Calibri" pitchFamily="34" charset="-120"/>
+              </a:rPr>
+              <a:t>Rapid blood-culture panels speed targeted therapy and de-escalation; confirm with culture-based AST.</a:t>
+            </a:r>
+            <a:endParaRPr lang="en-US" sz="1350" dirty="0"/>
+          </a:p>
+        </p:txBody>
+      </p:sp>
+      <p:sp>
+        <p:nvSpPr>
+          <p:cNvPr id="20" name="Shape 18"/>
+          <p:cNvSpPr/>
+          <p:nvPr/>
+        </p:nvSpPr>
+        <p:spPr>
+          <a:xfrm>
+            <a:off x="566928" y="5468112"/>
+            <a:ext cx="11057839" cy="841248"/>
+          </a:xfrm>
+          <a:prstGeom prst="roundRect">
+            <a:avLst>
+              <a:gd name="adj" fmla="val 7609"/>
+            </a:avLst>
+          </a:prstGeom>
+          <a:solidFill>
+            <a:srgbClr val="143651"/>
+          </a:solidFill>
+          <a:ln/>
+        </p:spPr>
+      </p:sp>
+      <p:sp>
+        <p:nvSpPr>
+          <p:cNvPr id="21" name="Shape 19"/>
+          <p:cNvSpPr/>
+          <p:nvPr/>
+        </p:nvSpPr>
+        <p:spPr>
+          <a:xfrm>
+            <a:off x="749808" y="5705856"/>
+            <a:ext cx="365760" cy="365760"/>
+          </a:xfrm>
+          <a:prstGeom prst="ellipse">
+            <a:avLst/>
+          </a:prstGeom>
+          <a:solidFill>
+            <a:srgbClr val="2E7D32"/>
+          </a:solidFill>
+          <a:ln/>
+          <a:effectLst>
+            <a:outerShdw sx="100000" sy="100000" kx="0" ky="0" algn="bl" rotWithShape="0" blurRad="88900" dist="25400" dir="5400000">
+              <a:srgbClr val="22303C">
+                <a:alpha val="12000"/>
+              </a:srgbClr>
+            </a:outerShdw>
+          </a:effectLst>
+        </p:spPr>
+      </p:sp>
+      <p:sp>
+        <p:nvSpPr>
+          <p:cNvPr id="22" name="Text 20"/>
+          <p:cNvSpPr/>
+          <p:nvPr/>
+        </p:nvSpPr>
+        <p:spPr>
+          <a:xfrm>
+            <a:off x="749808" y="5705856"/>
+            <a:ext cx="365760" cy="365760"/>
+          </a:xfrm>
+          <a:prstGeom prst="rect">
+            <a:avLst/>
+          </a:prstGeom>
+          <a:noFill/>
+          <a:ln/>
+        </p:spPr>
+        <p:txBody>
+          <a:bodyPr wrap="square" lIns="0" tIns="0" rIns="0" bIns="0" rtlCol="0" anchor="ctr"/>
+          <a:lstStyle/>
+          <a:p>
+            <a:pPr algn="ctr" indent="0" marL="0">
+              <a:buNone/>
+            </a:pPr>
+            <a:r>
+              <a:rPr lang="en-US" sz="1500" b="1" dirty="0">
+                <a:solidFill>
+                  <a:srgbClr val="FFFFFF"/>
+                </a:solidFill>
+                <a:latin typeface="Calibri" pitchFamily="34" charset="0"/>
+                <a:ea typeface="Calibri" pitchFamily="34" charset="-122"/>
+                <a:cs typeface="Calibri" pitchFamily="34" charset="-120"/>
+              </a:rPr>
+              <a:t>5</a:t>
+            </a:r>
+            <a:endParaRPr lang="en-US" sz="1500" dirty="0"/>
+          </a:p>
+        </p:txBody>
+      </p:sp>
+      <p:sp>
+        <p:nvSpPr>
+          <p:cNvPr id="23" name="Text 21"/>
+          <p:cNvSpPr/>
+          <p:nvPr/>
+        </p:nvSpPr>
+        <p:spPr>
+          <a:xfrm>
+            <a:off x="1280160" y="5468112"/>
+            <a:ext cx="10143439" cy="841248"/>
+          </a:xfrm>
+          <a:prstGeom prst="rect">
+            <a:avLst/>
+          </a:prstGeom>
+          <a:noFill/>
+          <a:ln/>
+        </p:spPr>
+        <p:txBody>
+          <a:bodyPr wrap="square" lIns="0" tIns="0" rIns="0" bIns="0" rtlCol="0" anchor="ctr"/>
+          <a:lstStyle/>
+          <a:p>
+            <a:pPr algn="l" indent="0" marL="0">
+              <a:buNone/>
+            </a:pPr>
+            <a:r>
+              <a:rPr lang="en-US" sz="1350" dirty="0">
+                <a:solidFill>
+                  <a:srgbClr val="E7EEF4"/>
+                </a:solidFill>
+                <a:latin typeface="Calibri" pitchFamily="34" charset="0"/>
+                <a:ea typeface="Calibri" pitchFamily="34" charset="-122"/>
+                <a:cs typeface="Calibri" pitchFamily="34" charset="-120"/>
+              </a:rPr>
+              <a:t>Place rapid tests in stewardship-aligned algorithms; a negative panel does not exclude off-panel pathogens.</a:t>
+            </a:r>
+            <a:endParaRPr lang="en-US" sz="1350" dirty="0"/>
+          </a:p>
+        </p:txBody>
+      </p:sp>
+      <p:sp>
+        <p:nvSpPr>
+          <p:cNvPr id="24" name="Text 22"/>
+          <p:cNvSpPr/>
+          <p:nvPr/>
+        </p:nvSpPr>
+        <p:spPr>
+          <a:xfrm>
+            <a:off x="566928" y="6473952"/>
+            <a:ext cx="8229600" cy="274320"/>
+          </a:xfrm>
+          <a:prstGeom prst="rect">
+            <a:avLst/>
+          </a:prstGeom>
+          <a:noFill/>
+          <a:ln/>
+        </p:spPr>
+        <p:txBody>
+          <a:bodyPr wrap="square" lIns="0" tIns="0" rIns="0" bIns="0" rtlCol="0" anchor="ctr"/>
+          <a:lstStyle/>
+          <a:p>
+            <a:pPr indent="0" marL="0">
+              <a:buNone/>
+            </a:pPr>
+            <a:r>
+              <a:rPr lang="en-US" sz="850" dirty="0">
+                <a:solidFill>
+                  <a:srgbClr val="5E7488"/>
+                </a:solidFill>
+                <a:latin typeface="Calibri" pitchFamily="34" charset="0"/>
+                <a:ea typeface="Calibri" pitchFamily="34" charset="-122"/>
+                <a:cs typeface="Calibri" pitchFamily="34" charset="-120"/>
+              </a:rPr>
+              <a:t>Makassed General Hospital  ·  Department of Laboratory Medicine</a:t>
+            </a:r>
+            <a:endParaRPr lang="en-US" sz="850" dirty="0"/>
+          </a:p>
+        </p:txBody>
+      </p:sp>
+      <p:sp>
+        <p:nvSpPr>
+          <p:cNvPr id="25" name="Text 23"/>
+          <p:cNvSpPr/>
+          <p:nvPr/>
+        </p:nvSpPr>
+        <p:spPr>
+          <a:xfrm>
+            <a:off x="11002975" y="6473952"/>
+            <a:ext cx="640080" cy="274320"/>
+          </a:xfrm>
+          <a:prstGeom prst="rect">
+            <a:avLst/>
+          </a:prstGeom>
+          <a:noFill/>
+          <a:ln/>
+        </p:spPr>
+        <p:txBody>
+          <a:bodyPr wrap="square" lIns="0" tIns="0" rIns="0" bIns="0" rtlCol="0" anchor="ctr"/>
+          <a:lstStyle/>
+          <a:p>
+            <a:pPr algn="r" indent="0" marL="0">
+              <a:buNone/>
+            </a:pPr>
+            <a:r>
+              <a:rPr lang="en-US" sz="850" b="1" dirty="0">
+                <a:solidFill>
+                  <a:srgbClr val="2E7D32"/>
+                </a:solidFill>
+                <a:latin typeface="Calibri" pitchFamily="34" charset="0"/>
+                <a:ea typeface="Calibri" pitchFamily="34" charset="-122"/>
+                <a:cs typeface="Calibri" pitchFamily="34" charset="-120"/>
+              </a:rPr>
+              <a:t>21</a:t>
+            </a:r>
+            <a:endParaRPr lang="en-US" sz="850" dirty="0"/>
+          </a:p>
+        </p:txBody>
+      </p:sp>
+    </p:spTree>
+  </p:cSld>
+  <p:clrMapOvr>
+    <a:masterClrMapping/>
+  </p:clrMapOvr>
+</p:sld>
+</file>
+
+<file path=ppt/slides/slide25.xml><?xml version="1.0" encoding="utf-8"?>
+<p:sld xmlns:a="http://schemas.openxmlformats.org/drawingml/2006/main" xmlns:r="http://schemas.openxmlformats.org/officeDocument/2006/relationships" xmlns:p="http://schemas.openxmlformats.org/presentationml/2006/main">
+  <p:cSld name="Slide 25">
+    <p:bg>
+      <p:bgPr>
+        <a:solidFill>
+          <a:srgbClr val="FFFFFF"/>
+        </a:solidFill>
+      </p:bgPr>
+    </p:bg>
+    <p:spTree>
+      <p:nvGrpSpPr>
+        <p:cNvPr id="1" name=""/>
+        <p:cNvGrpSpPr/>
+        <p:nvPr/>
+      </p:nvGrpSpPr>
+      <p:grpSpPr>
+        <a:xfrm>
+          <a:off x="0" y="0"/>
+          <a:ext cx="0" cy="0"/>
+          <a:chOff x="0" y="0"/>
+          <a:chExt cx="0" cy="0"/>
+        </a:xfrm>
+      </p:grpSpPr>
+      <p:sp>
+        <p:nvSpPr>
+          <p:cNvPr id="2" name="Text 0"/>
+          <p:cNvSpPr/>
+          <p:nvPr/>
+        </p:nvSpPr>
+        <p:spPr>
+          <a:xfrm>
+            <a:off x="566928" y="329184"/>
+            <a:ext cx="10515600" cy="310896"/>
+          </a:xfrm>
+          <a:prstGeom prst="rect">
+            <a:avLst/>
+          </a:prstGeom>
+          <a:noFill/>
+          <a:ln/>
+        </p:spPr>
+        <p:txBody>
+          <a:bodyPr wrap="square" lIns="0" tIns="0" rIns="0" bIns="0" rtlCol="0" anchor="ctr"/>
+          <a:lstStyle/>
+          <a:p>
+            <a:pPr algn="l" indent="0" marL="0">
+              <a:buNone/>
+            </a:pPr>
+            <a:r>
+              <a:rPr lang="en-US" sz="1100" b="1" spc="150" kern="0" dirty="0">
+                <a:solidFill>
+                  <a:srgbClr val="2E7D32"/>
+                </a:solidFill>
+                <a:latin typeface="Calibri" pitchFamily="34" charset="0"/>
+                <a:ea typeface="Calibri" pitchFamily="34" charset="-122"/>
+                <a:cs typeface="Calibri" pitchFamily="34" charset="-120"/>
+              </a:rPr>
               <a:t>MICROBIOLOGY   ·   REFERENCES &amp; FURTHER READING</a:t>
             </a:r>
             <a:endParaRPr lang="en-US" sz="1100" dirty="0"/>
@@ -8550,7 +11492,7 @@
                 <a:ea typeface="Calibri" pitchFamily="34" charset="-122"/>
                 <a:cs typeface="Calibri" pitchFamily="34" charset="-120"/>
               </a:rPr>
-              <a:t>1.   Carroll KC, et al. Manual of Clinical Microbiology, 12th ed. ASM Press, 2019.</a:t>
+              <a:t>1.   Carroll KC, et al. Manual of Clinical Microbiology, 12th ed. ASM Press.</a:t>
             </a:r>
             <a:endParaRPr lang="en-US" sz="1150" dirty="0"/>
           </a:p>
@@ -8570,7 +11512,7 @@
                 <a:ea typeface="Calibri" pitchFamily="34" charset="-122"/>
                 <a:cs typeface="Calibri" pitchFamily="34" charset="-120"/>
               </a:rPr>
-              <a:t>2.   Ramanan P, et al. Syndromic panel-based testing in clinical microbiology. Clin Microbiol Rev. 2018.</a:t>
+              <a:t>2.   IDSA C. difficile clinical practice guidelines.</a:t>
             </a:r>
             <a:endParaRPr lang="en-US" sz="1150" dirty="0"/>
           </a:p>
@@ -8590,7 +11532,7 @@
                 <a:ea typeface="Calibri" pitchFamily="34" charset="-122"/>
                 <a:cs typeface="Calibri" pitchFamily="34" charset="-120"/>
               </a:rPr>
-              <a:t>3.   Miller JM, et al. IDSA/ASM Guide to Utilization of the Microbiology Laboratory. Clin Infect Dis.</a:t>
+              <a:t>3.   Ramanan P, et al. Syndromic panel-based testing. Clin Microbiol Rev.</a:t>
             </a:r>
             <a:endParaRPr lang="en-US" sz="1150" dirty="0"/>
           </a:p>
@@ -8610,7 +11552,7 @@
                 <a:ea typeface="Calibri" pitchFamily="34" charset="-122"/>
                 <a:cs typeface="Calibri" pitchFamily="34" charset="-120"/>
               </a:rPr>
-              <a:t>4.   Messacar K, et al. Diagnostic stewardship of molecular tests. J Clin Microbiol. 2017.</a:t>
+              <a:t>4.   CLSI molecular methods guidance.</a:t>
             </a:r>
             <a:endParaRPr lang="en-US" sz="1150" dirty="0"/>
           </a:p>
@@ -8716,7 +11658,7 @@
                 <a:ea typeface="Calibri" pitchFamily="34" charset="-122"/>
                 <a:cs typeface="Calibri" pitchFamily="34" charset="-120"/>
               </a:rPr>
-              <a:t>17</a:t>
+              <a:t>22</a:t>
             </a:r>
             <a:endParaRPr lang="en-US" sz="850" dirty="0"/>
           </a:p>
@@ -8960,7 +11902,7 @@
                 <a:ea typeface="Calibri" pitchFamily="34" charset="-122"/>
                 <a:cs typeface="Calibri" pitchFamily="34" charset="-120"/>
               </a:rPr>
-              <a:t>Describe nucleic acid amplification and multiplex syndromic panels.</a:t>
+              <a:t>Compare antigen, NAAT, and syndromic panel methods.</a:t>
             </a:r>
             <a:endParaRPr lang="en-US" sz="1350" dirty="0"/>
           </a:p>
@@ -9094,7 +12036,7 @@
                 <a:ea typeface="Calibri" pitchFamily="34" charset="-122"/>
                 <a:cs typeface="Calibri" pitchFamily="34" charset="-120"/>
               </a:rPr>
-              <a:t>Match rapid tests to the right clinical use case.</a:t>
+              <a:t>Explain the speed/throughput/cost trade-offs of rapid testing.</a:t>
             </a:r>
             <a:endParaRPr lang="en-US" sz="1350" dirty="0"/>
           </a:p>
@@ -9228,7 +12170,7 @@
                 <a:ea typeface="Calibri" pitchFamily="34" charset="-122"/>
                 <a:cs typeface="Calibri" pitchFamily="34" charset="-120"/>
               </a:rPr>
-              <a:t>Build a framework for false positives and false negatives.</a:t>
+              <a:t>Interpret detection vs colonization vs disease.</a:t>
             </a:r>
             <a:endParaRPr lang="en-US" sz="1350" dirty="0"/>
           </a:p>
@@ -9362,7 +12304,7 @@
                 <a:ea typeface="Calibri" pitchFamily="34" charset="-122"/>
                 <a:cs typeface="Calibri" pitchFamily="34" charset="-120"/>
               </a:rPr>
-              <a:t>State the limitations of molecular detection.</a:t>
+              <a:t>Apply cycle-threshold and qualitative-vs-quantitative concepts.</a:t>
             </a:r>
             <a:endParaRPr lang="en-US" sz="1350" dirty="0"/>
           </a:p>
@@ -9496,7 +12438,7 @@
                 <a:ea typeface="Calibri" pitchFamily="34" charset="-122"/>
                 <a:cs typeface="Calibri" pitchFamily="34" charset="-120"/>
               </a:rPr>
-              <a:t>Integrate rapid results with antimicrobial stewardship.</a:t>
+              <a:t>Recognize the stewardship value and risks of syndromic panels.</a:t>
             </a:r>
             <a:endParaRPr lang="en-US" sz="1350" dirty="0"/>
           </a:p>
@@ -9630,7 +12572,7 @@
                 <a:ea typeface="Calibri" pitchFamily="34" charset="-122"/>
                 <a:cs typeface="Calibri" pitchFamily="34" charset="-120"/>
               </a:rPr>
-              <a:t>Interpret resistance-gene detection (e.g., mecA, KPC).</a:t>
+              <a:t>Use rapid diagnostics appropriately within testing algorithms.</a:t>
             </a:r>
             <a:endParaRPr lang="en-US" sz="1350" dirty="0"/>
           </a:p>
@@ -9980,7 +12922,7 @@
                 <a:ea typeface="Calibri" pitchFamily="34" charset="-122"/>
                 <a:cs typeface="Calibri" pitchFamily="34" charset="-120"/>
               </a:rPr>
-              <a:t>Molecular methods</a:t>
+              <a:t>Methods</a:t>
             </a:r>
             <a:pPr algn="l" indent="0" marL="0">
               <a:buNone/>
@@ -9994,7 +12936,7 @@
                 <a:ea typeface="Calibri" pitchFamily="34" charset="-122"/>
                 <a:cs typeface="Calibri" pitchFamily="34" charset="-120"/>
               </a:rPr>
-              <a:t>   —  NAAT and multiplex panels</a:t>
+              <a:t>   —  antigen, NAAT, syndromic panels</a:t>
             </a:r>
             <a:endParaRPr lang="en-US" sz="1400" dirty="0"/>
           </a:p>
@@ -10121,7 +13063,7 @@
                 <a:ea typeface="Calibri" pitchFamily="34" charset="-122"/>
                 <a:cs typeface="Calibri" pitchFamily="34" charset="-120"/>
               </a:rPr>
-              <a:t>Use cases</a:t>
+              <a:t>Speed vs interpretation</a:t>
             </a:r>
             <a:pPr algn="l" indent="0" marL="0">
               <a:buNone/>
@@ -10135,7 +13077,7 @@
                 <a:ea typeface="Calibri" pitchFamily="34" charset="-122"/>
                 <a:cs typeface="Calibri" pitchFamily="34" charset="-120"/>
               </a:rPr>
-              <a:t>   —  respiratory, GI, CNS, blood</a:t>
+              <a:t>   —  trade-offs</a:t>
             </a:r>
             <a:endParaRPr lang="en-US" sz="1400" dirty="0"/>
           </a:p>
@@ -10269,7 +13211,7 @@
                 <a:ea typeface="Calibri" pitchFamily="34" charset="-122"/>
                 <a:cs typeface="Calibri" pitchFamily="34" charset="-120"/>
               </a:rPr>
-              <a:t>Interpretation framework</a:t>
+              <a:t>Detection vs disease</a:t>
             </a:r>
             <a:pPr algn="l" indent="0" marL="0">
               <a:buNone/>
@@ -10283,7 +13225,7 @@
                 <a:ea typeface="Calibri" pitchFamily="34" charset="-122"/>
                 <a:cs typeface="Calibri" pitchFamily="34" charset="-120"/>
               </a:rPr>
-              <a:t>   —  detection vs causation</a:t>
+              <a:t>   —  colonization, shedding</a:t>
             </a:r>
             <a:endParaRPr lang="en-US" sz="1400" dirty="0"/>
           </a:p>
@@ -10410,7 +13352,7 @@
                 <a:ea typeface="Calibri" pitchFamily="34" charset="-122"/>
                 <a:cs typeface="Calibri" pitchFamily="34" charset="-120"/>
               </a:rPr>
-              <a:t>Stewardship integration</a:t>
+              <a:t>Stewardship</a:t>
             </a:r>
             <a:pPr algn="l" indent="0" marL="0">
               <a:buNone/>
@@ -10424,7 +13366,7 @@
                 <a:ea typeface="Calibri" pitchFamily="34" charset="-122"/>
                 <a:cs typeface="Calibri" pitchFamily="34" charset="-120"/>
               </a:rPr>
-              <a:t>   —  making speed count</a:t>
+              <a:t>   —  using panels wisely</a:t>
             </a:r>
             <a:endParaRPr lang="en-US" sz="1400" dirty="0"/>
           </a:p>
@@ -10558,7 +13500,7 @@
                 <a:ea typeface="Calibri" pitchFamily="34" charset="-122"/>
                 <a:cs typeface="Calibri" pitchFamily="34" charset="-120"/>
               </a:rPr>
-              <a:t>Cases &amp; board</a:t>
+              <a:t>Cases &amp; board review</a:t>
             </a:r>
             <a:endParaRPr lang="en-US" sz="1400" dirty="0"/>
           </a:p>
@@ -10857,7 +13799,7 @@
                 <a:ea typeface="Calibri" pitchFamily="34" charset="-122"/>
                 <a:cs typeface="Calibri" pitchFamily="34" charset="-120"/>
               </a:rPr>
-              <a:t>Methods &amp; Use Cases</a:t>
+              <a:t>Rapid &amp; Molecular Methods</a:t>
             </a:r>
             <a:endParaRPr lang="en-US" sz="3800" dirty="0"/>
           </a:p>
@@ -10928,7 +13870,7 @@
                 <a:ea typeface="Calibri" pitchFamily="34" charset="-122"/>
                 <a:cs typeface="Calibri" pitchFamily="34" charset="-120"/>
               </a:rPr>
-              <a:t>MICROBIOLOGY   ·   MOLECULAR</a:t>
+              <a:t>MICROBIOLOGY   ·   SYNDROMIC</a:t>
             </a:r>
             <a:endParaRPr lang="en-US" sz="1100" dirty="0"/>
           </a:p>
@@ -10967,7 +13909,7 @@
                 <a:ea typeface="Calibri" pitchFamily="34" charset="-122"/>
                 <a:cs typeface="Calibri" pitchFamily="34" charset="-120"/>
               </a:rPr>
-              <a:t>Rapid Syndromic Panels</a:t>
+              <a:t>How Syndromic Panels Fit the Workflow</a:t>
             </a:r>
             <a:endParaRPr lang="en-US" sz="3000" dirty="0"/>
           </a:p>
@@ -10981,12 +13923,12 @@
         </p:nvSpPr>
         <p:spPr>
           <a:xfrm>
-            <a:off x="1066648" y="1481328"/>
-            <a:ext cx="10058400" cy="4023360"/>
+            <a:off x="883768" y="1481328"/>
+            <a:ext cx="10424160" cy="4297680"/>
           </a:xfrm>
           <a:prstGeom prst="roundRect">
             <a:avLst>
-              <a:gd name="adj" fmla="val 2045"/>
+              <a:gd name="adj" fmla="val 1915"/>
             </a:avLst>
           </a:prstGeom>
           <a:solidFill>
@@ -11023,8 +13965,8 @@
         </p:blipFill>
         <p:spPr>
           <a:xfrm>
-            <a:off x="1194664" y="1609344"/>
-            <a:ext cx="9802368" cy="3767328"/>
+            <a:off x="1011784" y="1609344"/>
+            <a:ext cx="10168128" cy="4041648"/>
           </a:xfrm>
           <a:prstGeom prst="rect">
             <a:avLst/>
@@ -11039,7 +13981,7 @@
         </p:nvSpPr>
         <p:spPr>
           <a:xfrm>
-            <a:off x="566928" y="5577840"/>
+            <a:off x="566928" y="5852160"/>
             <a:ext cx="11057839" cy="365760"/>
           </a:xfrm>
           <a:prstGeom prst="rect">
@@ -11064,7 +14006,7 @@
                 <a:ea typeface="Calibri" pitchFamily="34" charset="-122"/>
                 <a:cs typeface="Calibri" pitchFamily="34" charset="-120"/>
               </a:rPr>
-              <a:t>Original schematic. Multiplex NAATs detect many targets quickly — but detection must be interpreted, not acted on blindly.</a:t>
+              <a:t>Original schematic. Multiplex panels detect many pathogens from one specimen, compressing time-to-result.</a:t>
             </a:r>
             <a:endParaRPr lang="en-US" sz="1150" dirty="0"/>
           </a:p>
@@ -11241,7 +14183,7 @@
                 <a:ea typeface="Calibri" pitchFamily="34" charset="-122"/>
                 <a:cs typeface="Calibri" pitchFamily="34" charset="-120"/>
               </a:rPr>
-              <a:t>MICROBIOLOGY   ·   METHODS</a:t>
+              <a:t>MICROBIOLOGY   ·   TURNAROUND</a:t>
             </a:r>
             <a:endParaRPr lang="en-US" sz="1100" dirty="0"/>
           </a:p>
@@ -11280,7 +14222,7 @@
                 <a:ea typeface="Calibri" pitchFamily="34" charset="-122"/>
                 <a:cs typeface="Calibri" pitchFamily="34" charset="-120"/>
               </a:rPr>
-              <a:t>NAATs and Multiplex Panels</a:t>
+              <a:t>Time to Result Across Methods</a:t>
             </a:r>
             <a:endParaRPr lang="en-US" sz="3000" dirty="0"/>
           </a:p>
@@ -11294,18 +14236,23 @@
         </p:nvSpPr>
         <p:spPr>
           <a:xfrm>
-            <a:off x="566928" y="1517904"/>
-            <a:ext cx="5346040" cy="4114800"/>
+            <a:off x="1066648" y="1481328"/>
+            <a:ext cx="10058400" cy="4023360"/>
           </a:xfrm>
           <a:prstGeom prst="roundRect">
             <a:avLst>
-              <a:gd name="adj" fmla="val 2000"/>
+              <a:gd name="adj" fmla="val 2045"/>
             </a:avLst>
           </a:prstGeom>
           <a:solidFill>
-            <a:srgbClr val="E8F2E9"/>
+            <a:srgbClr val="FFFFFF"/>
           </a:solidFill>
-          <a:ln/>
+          <a:ln w="12700">
+            <a:solidFill>
+              <a:srgbClr val="DCE4EC"/>
+            </a:solidFill>
+            <a:prstDash val="solid"/>
+          </a:ln>
           <a:effectLst>
             <a:outerShdw sx="100000" sy="100000" kx="0" ky="0" algn="bl" rotWithShape="0" blurRad="88900" dist="25400" dir="5400000">
               <a:srgbClr val="22303C">
@@ -11315,55 +14262,40 @@
           </a:effectLst>
         </p:spPr>
       </p:sp>
-      <p:sp>
-        <p:nvSpPr>
-          <p:cNvPr id="5" name="Text 3"/>
-          <p:cNvSpPr/>
-          <p:nvPr/>
-        </p:nvSpPr>
-        <p:spPr>
-          <a:xfrm>
-            <a:off x="804672" y="1682496"/>
-            <a:ext cx="4888840" cy="274320"/>
-          </a:xfrm>
-          <a:prstGeom prst="rect">
-            <a:avLst/>
-          </a:prstGeom>
-          <a:noFill/>
-          <a:ln/>
-        </p:spPr>
-        <p:txBody>
-          <a:bodyPr wrap="square" lIns="0" tIns="0" rIns="0" bIns="0" rtlCol="0" anchor="ctr"/>
-          <a:lstStyle/>
-          <a:p>
-            <a:pPr indent="0" marL="0">
-              <a:buNone/>
-            </a:pPr>
-            <a:r>
-              <a:rPr lang="en-US" sz="1200" b="1" spc="100" kern="0" dirty="0">
-                <a:solidFill>
-                  <a:srgbClr val="1F5722"/>
-                </a:solidFill>
-                <a:latin typeface="Calibri" pitchFamily="34" charset="0"/>
-                <a:ea typeface="Calibri" pitchFamily="34" charset="-122"/>
-                <a:cs typeface="Calibri" pitchFamily="34" charset="-120"/>
-              </a:rPr>
-              <a:t>HOW THEY WORK</a:t>
-            </a:r>
-            <a:endParaRPr lang="en-US" sz="1200" dirty="0"/>
-          </a:p>
-        </p:txBody>
-      </p:sp>
-      <p:sp>
-        <p:nvSpPr>
-          <p:cNvPr id="6" name="Text 4"/>
-          <p:cNvSpPr/>
-          <p:nvPr/>
-        </p:nvSpPr>
-        <p:spPr>
-          <a:xfrm>
-            <a:off x="804672" y="2029968"/>
-            <a:ext cx="4870552" cy="3474720"/>
+      <p:pic>
+        <p:nvPicPr>
+          <p:cNvPr id="5" name="Image 0" descr="/tmp/cp_work2/art/micro_tat.png">    </p:cNvPr>
+          <p:cNvPicPr>
+            <a:picLocks noChangeAspect="1"/>
+          </p:cNvPicPr>
+          <p:nvPr/>
+        </p:nvPicPr>
+        <p:blipFill>
+          <a:blip r:embed="rId1"/>
+          <a:stretch>
+            <a:fillRect/>
+          </a:stretch>
+        </p:blipFill>
+        <p:spPr>
+          <a:xfrm>
+            <a:off x="1194664" y="1609344"/>
+            <a:ext cx="9802368" cy="3767328"/>
+          </a:xfrm>
+          <a:prstGeom prst="rect">
+            <a:avLst/>
+          </a:prstGeom>
+        </p:spPr>
+      </p:pic>
+      <p:sp>
+        <p:nvSpPr>
+          <p:cNvPr id="6" name="Text 3"/>
+          <p:cNvSpPr/>
+          <p:nvPr/>
+        </p:nvSpPr>
+        <p:spPr>
+          <a:xfrm>
+            <a:off x="566928" y="5577840"/>
+            <a:ext cx="11057839" cy="365760"/>
           </a:xfrm>
           <a:prstGeom prst="rect">
             <a:avLst/>
@@ -11375,268 +14307,27 @@
           <a:bodyPr wrap="square" lIns="0" tIns="0" rIns="0" bIns="0" rtlCol="0" anchor="t"/>
           <a:lstStyle/>
           <a:p>
-            <a:pPr algn="l" marL="177800" indent="-177800">
-              <a:spcAft>
-                <a:spcPts val="900"/>
-              </a:spcAft>
-              <a:buSzPct val="100000"/>
-              <a:buChar char="•"/>
-            </a:pPr>
-            <a:r>
-              <a:rPr lang="en-US" sz="1250" b="1" dirty="0">
-                <a:solidFill>
-                  <a:srgbClr val="1B2A38"/>
-                </a:solidFill>
-                <a:latin typeface="Calibri" pitchFamily="34" charset="0"/>
-                <a:ea typeface="Calibri" pitchFamily="34" charset="-122"/>
-                <a:cs typeface="Calibri" pitchFamily="34" charset="-120"/>
-              </a:rPr>
-              <a:t>Nucleic acid amplification (PCR and variants) detects pathogen-specific sequences.</a:t>
-            </a:r>
-            <a:endParaRPr lang="en-US" sz="1250" dirty="0"/>
-          </a:p>
-          <a:p>
-            <a:pPr algn="l" marL="177800" indent="-177800">
-              <a:spcAft>
-                <a:spcPts val="900"/>
-              </a:spcAft>
-              <a:buSzPct val="100000"/>
-              <a:buChar char="•"/>
-            </a:pPr>
-            <a:r>
-              <a:rPr lang="en-US" sz="1250" dirty="0">
-                <a:solidFill>
-                  <a:srgbClr val="33444F"/>
-                </a:solidFill>
-                <a:latin typeface="Calibri" pitchFamily="34" charset="0"/>
-                <a:ea typeface="Calibri" pitchFamily="34" charset="-122"/>
-                <a:cs typeface="Calibri" pitchFamily="34" charset="-120"/>
-              </a:rPr>
-              <a:t>Multiplex panels test many targets simultaneously (respiratory, GI, meningitis/encephalitis, blood-culture ID).</a:t>
-            </a:r>
-            <a:endParaRPr lang="en-US" sz="1250" dirty="0"/>
-          </a:p>
-          <a:p>
-            <a:pPr algn="l" marL="177800" indent="-177800">
-              <a:spcAft>
-                <a:spcPts val="900"/>
-              </a:spcAft>
-              <a:buSzPct val="100000"/>
-              <a:buChar char="•"/>
-            </a:pPr>
-            <a:r>
-              <a:rPr lang="en-US" sz="1250" dirty="0">
-                <a:solidFill>
-                  <a:srgbClr val="33444F"/>
-                </a:solidFill>
-                <a:latin typeface="Calibri" pitchFamily="34" charset="0"/>
-                <a:ea typeface="Calibri" pitchFamily="34" charset="-122"/>
-                <a:cs typeface="Calibri" pitchFamily="34" charset="-120"/>
-              </a:rPr>
-              <a:t>High analytic sensitivity and rapid turnaround.</a:t>
-            </a:r>
-            <a:endParaRPr lang="en-US" sz="1250" dirty="0"/>
-          </a:p>
-          <a:p>
-            <a:pPr algn="l" marL="177800" indent="-177800">
-              <a:spcAft>
-                <a:spcPts val="900"/>
-              </a:spcAft>
-              <a:buSzPct val="100000"/>
-              <a:buChar char="•"/>
-            </a:pPr>
-            <a:r>
-              <a:rPr lang="en-US" sz="1250" dirty="0">
-                <a:solidFill>
-                  <a:srgbClr val="33444F"/>
-                </a:solidFill>
-                <a:latin typeface="Calibri" pitchFamily="34" charset="0"/>
-                <a:ea typeface="Calibri" pitchFamily="34" charset="-122"/>
-                <a:cs typeface="Calibri" pitchFamily="34" charset="-120"/>
-              </a:rPr>
-              <a:t>Some report resistance genes (mecA, vanA, KPC) from the sample/bottle.</a:t>
-            </a:r>
-            <a:endParaRPr lang="en-US" sz="1250" dirty="0"/>
-          </a:p>
-        </p:txBody>
-      </p:sp>
-      <p:sp>
-        <p:nvSpPr>
-          <p:cNvPr id="7" name="Shape 5"/>
-          <p:cNvSpPr/>
-          <p:nvPr/>
-        </p:nvSpPr>
-        <p:spPr>
-          <a:xfrm>
-            <a:off x="6278728" y="1517904"/>
-            <a:ext cx="5346040" cy="4114800"/>
-          </a:xfrm>
-          <a:prstGeom prst="roundRect">
-            <a:avLst>
-              <a:gd name="adj" fmla="val 2000"/>
-            </a:avLst>
-          </a:prstGeom>
-          <a:solidFill>
-            <a:srgbClr val="E8F2E9"/>
-          </a:solidFill>
-          <a:ln/>
-          <a:effectLst>
-            <a:outerShdw sx="100000" sy="100000" kx="0" ky="0" algn="bl" rotWithShape="0" blurRad="88900" dist="25400" dir="5400000">
-              <a:srgbClr val="22303C">
-                <a:alpha val="12000"/>
-              </a:srgbClr>
-            </a:outerShdw>
-          </a:effectLst>
-        </p:spPr>
-      </p:sp>
-      <p:sp>
-        <p:nvSpPr>
-          <p:cNvPr id="8" name="Text 6"/>
-          <p:cNvSpPr/>
-          <p:nvPr/>
-        </p:nvSpPr>
-        <p:spPr>
-          <a:xfrm>
-            <a:off x="6516472" y="1682496"/>
-            <a:ext cx="4888840" cy="274320"/>
-          </a:xfrm>
-          <a:prstGeom prst="rect">
-            <a:avLst/>
-          </a:prstGeom>
-          <a:noFill/>
-          <a:ln/>
-        </p:spPr>
-        <p:txBody>
-          <a:bodyPr wrap="square" lIns="0" tIns="0" rIns="0" bIns="0" rtlCol="0" anchor="ctr"/>
-          <a:lstStyle/>
-          <a:p>
-            <a:pPr indent="0" marL="0">
-              <a:buNone/>
-            </a:pPr>
-            <a:r>
-              <a:rPr lang="en-US" sz="1200" b="1" spc="100" kern="0" dirty="0">
-                <a:solidFill>
-                  <a:srgbClr val="1F5722"/>
-                </a:solidFill>
-                <a:latin typeface="Calibri" pitchFamily="34" charset="0"/>
-                <a:ea typeface="Calibri" pitchFamily="34" charset="-122"/>
-                <a:cs typeface="Calibri" pitchFamily="34" charset="-120"/>
-              </a:rPr>
-              <a:t>WHERE THEY HELP MOST</a:t>
-            </a:r>
-            <a:endParaRPr lang="en-US" sz="1200" dirty="0"/>
-          </a:p>
-        </p:txBody>
-      </p:sp>
-      <p:sp>
-        <p:nvSpPr>
-          <p:cNvPr id="9" name="Text 7"/>
-          <p:cNvSpPr/>
-          <p:nvPr/>
-        </p:nvSpPr>
-        <p:spPr>
-          <a:xfrm>
-            <a:off x="6516472" y="2029968"/>
-            <a:ext cx="4870552" cy="3474720"/>
-          </a:xfrm>
-          <a:prstGeom prst="rect">
-            <a:avLst/>
-          </a:prstGeom>
-          <a:noFill/>
-          <a:ln/>
-        </p:spPr>
-        <p:txBody>
-          <a:bodyPr wrap="square" lIns="0" tIns="0" rIns="0" bIns="0" rtlCol="0" anchor="t"/>
-          <a:lstStyle/>
-          <a:p>
-            <a:pPr algn="l" marL="177800" indent="-177800">
-              <a:spcAft>
-                <a:spcPts val="900"/>
-              </a:spcAft>
-              <a:buSzPct val="100000"/>
-              <a:buChar char="•"/>
-            </a:pPr>
-            <a:r>
-              <a:rPr lang="en-US" sz="1250" b="1" dirty="0">
-                <a:solidFill>
-                  <a:srgbClr val="1B2A38"/>
-                </a:solidFill>
-                <a:latin typeface="Calibri" pitchFamily="34" charset="0"/>
-                <a:ea typeface="Calibri" pitchFamily="34" charset="-122"/>
-                <a:cs typeface="Calibri" pitchFamily="34" charset="-120"/>
-              </a:rPr>
-              <a:t>Positive blood-culture ID + resistance markers hours before culture.</a:t>
-            </a:r>
-            <a:endParaRPr lang="en-US" sz="1250" dirty="0"/>
-          </a:p>
-          <a:p>
-            <a:pPr algn="l" marL="177800" indent="-177800">
-              <a:spcAft>
-                <a:spcPts val="900"/>
-              </a:spcAft>
-              <a:buSzPct val="100000"/>
-              <a:buChar char="•"/>
-            </a:pPr>
-            <a:r>
-              <a:rPr lang="en-US" sz="1250" dirty="0">
-                <a:solidFill>
-                  <a:srgbClr val="33444F"/>
-                </a:solidFill>
-                <a:latin typeface="Calibri" pitchFamily="34" charset="0"/>
-                <a:ea typeface="Calibri" pitchFamily="34" charset="-122"/>
-                <a:cs typeface="Calibri" pitchFamily="34" charset="-120"/>
-              </a:rPr>
-              <a:t>CNS infections where rapid pathogen ID changes therapy.</a:t>
-            </a:r>
-            <a:endParaRPr lang="en-US" sz="1250" dirty="0"/>
-          </a:p>
-          <a:p>
-            <a:pPr algn="l" marL="177800" indent="-177800">
-              <a:spcAft>
-                <a:spcPts val="900"/>
-              </a:spcAft>
-              <a:buSzPct val="100000"/>
-              <a:buChar char="•"/>
-            </a:pPr>
-            <a:r>
-              <a:rPr lang="en-US" sz="1250" dirty="0">
-                <a:solidFill>
-                  <a:srgbClr val="33444F"/>
-                </a:solidFill>
-                <a:latin typeface="Calibri" pitchFamily="34" charset="0"/>
-                <a:ea typeface="Calibri" pitchFamily="34" charset="-122"/>
-                <a:cs typeface="Calibri" pitchFamily="34" charset="-120"/>
-              </a:rPr>
-              <a:t>Respiratory/GI outbreaks and immunocompromised hosts.</a:t>
-            </a:r>
-            <a:endParaRPr lang="en-US" sz="1250" dirty="0"/>
-          </a:p>
-          <a:p>
-            <a:pPr algn="l" marL="177800" indent="-177800">
-              <a:spcAft>
-                <a:spcPts val="900"/>
-              </a:spcAft>
-              <a:buSzPct val="100000"/>
-              <a:buChar char="•"/>
-            </a:pPr>
-            <a:r>
-              <a:rPr lang="en-US" sz="1250" dirty="0">
-                <a:solidFill>
-                  <a:srgbClr val="33444F"/>
-                </a:solidFill>
-                <a:latin typeface="Calibri" pitchFamily="34" charset="0"/>
-                <a:ea typeface="Calibri" pitchFamily="34" charset="-122"/>
-                <a:cs typeface="Calibri" pitchFamily="34" charset="-120"/>
-              </a:rPr>
-              <a:t>Detecting fastidious or non-culturable organisms.</a:t>
-            </a:r>
-            <a:endParaRPr lang="en-US" sz="1250" dirty="0"/>
-          </a:p>
-        </p:txBody>
-      </p:sp>
-      <p:sp>
-        <p:nvSpPr>
-          <p:cNvPr id="10" name="Text 8"/>
+            <a:pPr algn="ctr" indent="0" marL="0">
+              <a:buNone/>
+            </a:pPr>
+            <a:r>
+              <a:rPr lang="en-US" sz="1150" i="1" dirty="0">
+                <a:solidFill>
+                  <a:srgbClr val="6B7B8A"/>
+                </a:solidFill>
+                <a:latin typeface="Calibri" pitchFamily="34" charset="0"/>
+                <a:ea typeface="Calibri" pitchFamily="34" charset="-122"/>
+                <a:cs typeface="Calibri" pitchFamily="34" charset="-120"/>
+              </a:rPr>
+              <a:t>Original schematic. Molecular and MALDI methods dramatically shorten the path to organism and resistance identification.</a:t>
+            </a:r>
+            <a:endParaRPr lang="en-US" sz="1150" dirty="0"/>
+          </a:p>
+        </p:txBody>
+      </p:sp>
+      <p:sp>
+        <p:nvSpPr>
+          <p:cNvPr id="7" name="Text 4"/>
           <p:cNvSpPr/>
           <p:nvPr/>
         </p:nvSpPr>
@@ -11675,7 +14366,7 @@
       </p:sp>
       <p:sp>
         <p:nvSpPr>
-          <p:cNvPr id="11" name="Text 9"/>
+          <p:cNvPr id="8" name="Text 5"/>
           <p:cNvSpPr/>
           <p:nvPr/>
         </p:nvSpPr>
@@ -11751,6 +14442,570 @@
 <file path=ppt/slides/slide8.xml><?xml version="1.0" encoding="utf-8"?>
 <p:sld xmlns:a="http://schemas.openxmlformats.org/drawingml/2006/main" xmlns:r="http://schemas.openxmlformats.org/officeDocument/2006/relationships" xmlns:p="http://schemas.openxmlformats.org/presentationml/2006/main">
   <p:cSld name="Slide 8">
+    <p:bg>
+      <p:bgPr>
+        <a:solidFill>
+          <a:srgbClr val="FFFFFF"/>
+        </a:solidFill>
+      </p:bgPr>
+    </p:bg>
+    <p:spTree>
+      <p:nvGrpSpPr>
+        <p:cNvPr id="1" name=""/>
+        <p:cNvGrpSpPr/>
+        <p:nvPr/>
+      </p:nvGrpSpPr>
+      <p:grpSpPr>
+        <a:xfrm>
+          <a:off x="0" y="0"/>
+          <a:ext cx="0" cy="0"/>
+          <a:chOff x="0" y="0"/>
+          <a:chExt cx="0" cy="0"/>
+        </a:xfrm>
+      </p:grpSpPr>
+      <p:sp>
+        <p:nvSpPr>
+          <p:cNvPr id="2" name="Text 0"/>
+          <p:cNvSpPr/>
+          <p:nvPr/>
+        </p:nvSpPr>
+        <p:spPr>
+          <a:xfrm>
+            <a:off x="566928" y="329184"/>
+            <a:ext cx="10515600" cy="310896"/>
+          </a:xfrm>
+          <a:prstGeom prst="rect">
+            <a:avLst/>
+          </a:prstGeom>
+          <a:noFill/>
+          <a:ln/>
+        </p:spPr>
+        <p:txBody>
+          <a:bodyPr wrap="square" lIns="0" tIns="0" rIns="0" bIns="0" rtlCol="0" anchor="ctr"/>
+          <a:lstStyle/>
+          <a:p>
+            <a:pPr algn="l" indent="0" marL="0">
+              <a:buNone/>
+            </a:pPr>
+            <a:r>
+              <a:rPr lang="en-US" sz="1100" b="1" spc="150" kern="0" dirty="0">
+                <a:solidFill>
+                  <a:srgbClr val="2E7D32"/>
+                </a:solidFill>
+                <a:latin typeface="Calibri" pitchFamily="34" charset="0"/>
+                <a:ea typeface="Calibri" pitchFamily="34" charset="-122"/>
+                <a:cs typeface="Calibri" pitchFamily="34" charset="-120"/>
+              </a:rPr>
+              <a:t>MICROBIOLOGY   ·   METHODS</a:t>
+            </a:r>
+            <a:endParaRPr lang="en-US" sz="1100" dirty="0"/>
+          </a:p>
+        </p:txBody>
+      </p:sp>
+      <p:sp>
+        <p:nvSpPr>
+          <p:cNvPr id="3" name="Text 1"/>
+          <p:cNvSpPr/>
+          <p:nvPr/>
+        </p:nvSpPr>
+        <p:spPr>
+          <a:xfrm>
+            <a:off x="566928" y="713232"/>
+            <a:ext cx="11064240" cy="749808"/>
+          </a:xfrm>
+          <a:prstGeom prst="rect">
+            <a:avLst/>
+          </a:prstGeom>
+          <a:noFill/>
+          <a:ln/>
+        </p:spPr>
+        <p:txBody>
+          <a:bodyPr wrap="square" lIns="0" tIns="0" rIns="0" bIns="0" rtlCol="0" anchor="ctr"/>
+          <a:lstStyle/>
+          <a:p>
+            <a:pPr algn="l" indent="0" marL="0">
+              <a:buNone/>
+            </a:pPr>
+            <a:r>
+              <a:rPr lang="en-US" sz="3000" b="1" dirty="0">
+                <a:solidFill>
+                  <a:srgbClr val="0E3A5F"/>
+                </a:solidFill>
+                <a:latin typeface="Calibri" pitchFamily="34" charset="0"/>
+                <a:ea typeface="Calibri" pitchFamily="34" charset="-122"/>
+                <a:cs typeface="Calibri" pitchFamily="34" charset="-120"/>
+              </a:rPr>
+              <a:t>Antigen, NAAT &amp; Multiplex</a:t>
+            </a:r>
+            <a:endParaRPr lang="en-US" sz="3000" dirty="0"/>
+          </a:p>
+        </p:txBody>
+      </p:sp>
+      <p:sp>
+        <p:nvSpPr>
+          <p:cNvPr id="4" name="Shape 2"/>
+          <p:cNvSpPr/>
+          <p:nvPr/>
+        </p:nvSpPr>
+        <p:spPr>
+          <a:xfrm>
+            <a:off x="566928" y="1517904"/>
+            <a:ext cx="5346040" cy="4114800"/>
+          </a:xfrm>
+          <a:prstGeom prst="roundRect">
+            <a:avLst>
+              <a:gd name="adj" fmla="val 2000"/>
+            </a:avLst>
+          </a:prstGeom>
+          <a:solidFill>
+            <a:srgbClr val="E8F2E9"/>
+          </a:solidFill>
+          <a:ln/>
+          <a:effectLst>
+            <a:outerShdw sx="100000" sy="100000" kx="0" ky="0" algn="bl" rotWithShape="0" blurRad="88900" dist="25400" dir="5400000">
+              <a:srgbClr val="22303C">
+                <a:alpha val="12000"/>
+              </a:srgbClr>
+            </a:outerShdw>
+          </a:effectLst>
+        </p:spPr>
+      </p:sp>
+      <p:sp>
+        <p:nvSpPr>
+          <p:cNvPr id="5" name="Text 3"/>
+          <p:cNvSpPr/>
+          <p:nvPr/>
+        </p:nvSpPr>
+        <p:spPr>
+          <a:xfrm>
+            <a:off x="804672" y="1682496"/>
+            <a:ext cx="4888840" cy="274320"/>
+          </a:xfrm>
+          <a:prstGeom prst="rect">
+            <a:avLst/>
+          </a:prstGeom>
+          <a:noFill/>
+          <a:ln/>
+        </p:spPr>
+        <p:txBody>
+          <a:bodyPr wrap="square" lIns="0" tIns="0" rIns="0" bIns="0" rtlCol="0" anchor="ctr"/>
+          <a:lstStyle/>
+          <a:p>
+            <a:pPr indent="0" marL="0">
+              <a:buNone/>
+            </a:pPr>
+            <a:r>
+              <a:rPr lang="en-US" sz="1200" b="1" spc="100" kern="0" dirty="0">
+                <a:solidFill>
+                  <a:srgbClr val="1F5722"/>
+                </a:solidFill>
+                <a:latin typeface="Calibri" pitchFamily="34" charset="0"/>
+                <a:ea typeface="Calibri" pitchFamily="34" charset="-122"/>
+                <a:cs typeface="Calibri" pitchFamily="34" charset="-120"/>
+              </a:rPr>
+              <a:t>ANTIGEN TESTS</a:t>
+            </a:r>
+            <a:endParaRPr lang="en-US" sz="1200" dirty="0"/>
+          </a:p>
+        </p:txBody>
+      </p:sp>
+      <p:sp>
+        <p:nvSpPr>
+          <p:cNvPr id="6" name="Text 4"/>
+          <p:cNvSpPr/>
+          <p:nvPr/>
+        </p:nvSpPr>
+        <p:spPr>
+          <a:xfrm>
+            <a:off x="804672" y="2029968"/>
+            <a:ext cx="4870552" cy="3474720"/>
+          </a:xfrm>
+          <a:prstGeom prst="rect">
+            <a:avLst/>
+          </a:prstGeom>
+          <a:noFill/>
+          <a:ln/>
+        </p:spPr>
+        <p:txBody>
+          <a:bodyPr wrap="square" lIns="0" tIns="0" rIns="0" bIns="0" rtlCol="0" anchor="t"/>
+          <a:lstStyle/>
+          <a:p>
+            <a:pPr algn="l" marL="177800" indent="-177800">
+              <a:spcAft>
+                <a:spcPts val="900"/>
+              </a:spcAft>
+              <a:buSzPct val="100000"/>
+              <a:buChar char="•"/>
+            </a:pPr>
+            <a:r>
+              <a:rPr lang="en-US" sz="1250" b="1" dirty="0">
+                <a:solidFill>
+                  <a:srgbClr val="1B2A38"/>
+                </a:solidFill>
+                <a:latin typeface="Calibri" pitchFamily="34" charset="0"/>
+                <a:ea typeface="Calibri" pitchFamily="34" charset="-122"/>
+                <a:cs typeface="Calibri" pitchFamily="34" charset="-120"/>
+              </a:rPr>
+              <a:t>Detect microbial antigen rapidly (e.g., influenza, RSV, Strep A, Legionella/pneumococcal urine).</a:t>
+            </a:r>
+            <a:endParaRPr lang="en-US" sz="1250" dirty="0"/>
+          </a:p>
+          <a:p>
+            <a:pPr algn="l" marL="177800" indent="-177800">
+              <a:spcAft>
+                <a:spcPts val="900"/>
+              </a:spcAft>
+              <a:buSzPct val="100000"/>
+              <a:buChar char="•"/>
+            </a:pPr>
+            <a:r>
+              <a:rPr lang="en-US" sz="1250" dirty="0">
+                <a:solidFill>
+                  <a:srgbClr val="33444F"/>
+                </a:solidFill>
+                <a:latin typeface="Calibri" pitchFamily="34" charset="0"/>
+                <a:ea typeface="Calibri" pitchFamily="34" charset="-122"/>
+                <a:cs typeface="Calibri" pitchFamily="34" charset="-120"/>
+              </a:rPr>
+              <a:t>Fast and simple but generally less sensitive than NAAT.</a:t>
+            </a:r>
+            <a:endParaRPr lang="en-US" sz="1250" dirty="0"/>
+          </a:p>
+          <a:p>
+            <a:pPr algn="l" marL="177800" indent="-177800">
+              <a:spcAft>
+                <a:spcPts val="900"/>
+              </a:spcAft>
+              <a:buSzPct val="100000"/>
+              <a:buChar char="•"/>
+            </a:pPr>
+            <a:r>
+              <a:rPr lang="en-US" sz="1250" dirty="0">
+                <a:solidFill>
+                  <a:srgbClr val="33444F"/>
+                </a:solidFill>
+                <a:latin typeface="Calibri" pitchFamily="34" charset="0"/>
+                <a:ea typeface="Calibri" pitchFamily="34" charset="-122"/>
+                <a:cs typeface="Calibri" pitchFamily="34" charset="-120"/>
+              </a:rPr>
+              <a:t>A negative antigen test may need molecular confirmation.</a:t>
+            </a:r>
+            <a:endParaRPr lang="en-US" sz="1250" dirty="0"/>
+          </a:p>
+          <a:p>
+            <a:pPr algn="l" marL="177800" indent="-177800">
+              <a:spcAft>
+                <a:spcPts val="900"/>
+              </a:spcAft>
+              <a:buSzPct val="100000"/>
+              <a:buChar char="•"/>
+            </a:pPr>
+            <a:r>
+              <a:rPr lang="en-US" sz="1250" dirty="0">
+                <a:solidFill>
+                  <a:srgbClr val="33444F"/>
+                </a:solidFill>
+                <a:latin typeface="Calibri" pitchFamily="34" charset="0"/>
+                <a:ea typeface="Calibri" pitchFamily="34" charset="-122"/>
+                <a:cs typeface="Calibri" pitchFamily="34" charset="-120"/>
+              </a:rPr>
+              <a:t>Useful for point-of-care triage.</a:t>
+            </a:r>
+            <a:endParaRPr lang="en-US" sz="1250" dirty="0"/>
+          </a:p>
+        </p:txBody>
+      </p:sp>
+      <p:sp>
+        <p:nvSpPr>
+          <p:cNvPr id="7" name="Shape 5"/>
+          <p:cNvSpPr/>
+          <p:nvPr/>
+        </p:nvSpPr>
+        <p:spPr>
+          <a:xfrm>
+            <a:off x="6278728" y="1517904"/>
+            <a:ext cx="5346040" cy="4114800"/>
+          </a:xfrm>
+          <a:prstGeom prst="roundRect">
+            <a:avLst>
+              <a:gd name="adj" fmla="val 2000"/>
+            </a:avLst>
+          </a:prstGeom>
+          <a:solidFill>
+            <a:srgbClr val="E9F3EA"/>
+          </a:solidFill>
+          <a:ln/>
+          <a:effectLst>
+            <a:outerShdw sx="100000" sy="100000" kx="0" ky="0" algn="bl" rotWithShape="0" blurRad="88900" dist="25400" dir="5400000">
+              <a:srgbClr val="22303C">
+                <a:alpha val="12000"/>
+              </a:srgbClr>
+            </a:outerShdw>
+          </a:effectLst>
+        </p:spPr>
+      </p:sp>
+      <p:sp>
+        <p:nvSpPr>
+          <p:cNvPr id="8" name="Text 6"/>
+          <p:cNvSpPr/>
+          <p:nvPr/>
+        </p:nvSpPr>
+        <p:spPr>
+          <a:xfrm>
+            <a:off x="6516472" y="1682496"/>
+            <a:ext cx="4888840" cy="274320"/>
+          </a:xfrm>
+          <a:prstGeom prst="rect">
+            <a:avLst/>
+          </a:prstGeom>
+          <a:noFill/>
+          <a:ln/>
+        </p:spPr>
+        <p:txBody>
+          <a:bodyPr wrap="square" lIns="0" tIns="0" rIns="0" bIns="0" rtlCol="0" anchor="ctr"/>
+          <a:lstStyle/>
+          <a:p>
+            <a:pPr indent="0" marL="0">
+              <a:buNone/>
+            </a:pPr>
+            <a:r>
+              <a:rPr lang="en-US" sz="1200" b="1" spc="100" kern="0" dirty="0">
+                <a:solidFill>
+                  <a:srgbClr val="1F5722"/>
+                </a:solidFill>
+                <a:latin typeface="Calibri" pitchFamily="34" charset="0"/>
+                <a:ea typeface="Calibri" pitchFamily="34" charset="-122"/>
+                <a:cs typeface="Calibri" pitchFamily="34" charset="-120"/>
+              </a:rPr>
+              <a:t>NAAT &amp; SYNDROMIC PANELS</a:t>
+            </a:r>
+            <a:endParaRPr lang="en-US" sz="1200" dirty="0"/>
+          </a:p>
+        </p:txBody>
+      </p:sp>
+      <p:sp>
+        <p:nvSpPr>
+          <p:cNvPr id="9" name="Text 7"/>
+          <p:cNvSpPr/>
+          <p:nvPr/>
+        </p:nvSpPr>
+        <p:spPr>
+          <a:xfrm>
+            <a:off x="6516472" y="2029968"/>
+            <a:ext cx="4870552" cy="3474720"/>
+          </a:xfrm>
+          <a:prstGeom prst="rect">
+            <a:avLst/>
+          </a:prstGeom>
+          <a:noFill/>
+          <a:ln/>
+        </p:spPr>
+        <p:txBody>
+          <a:bodyPr wrap="square" lIns="0" tIns="0" rIns="0" bIns="0" rtlCol="0" anchor="t"/>
+          <a:lstStyle/>
+          <a:p>
+            <a:pPr algn="l" marL="177800" indent="-177800">
+              <a:spcAft>
+                <a:spcPts val="900"/>
+              </a:spcAft>
+              <a:buSzPct val="100000"/>
+              <a:buChar char="•"/>
+            </a:pPr>
+            <a:r>
+              <a:rPr lang="en-US" sz="1250" b="1" dirty="0">
+                <a:solidFill>
+                  <a:srgbClr val="1B2A38"/>
+                </a:solidFill>
+                <a:latin typeface="Calibri" pitchFamily="34" charset="0"/>
+                <a:ea typeface="Calibri" pitchFamily="34" charset="-122"/>
+                <a:cs typeface="Calibri" pitchFamily="34" charset="-120"/>
+              </a:rPr>
+              <a:t>NAAT amplifies nucleic acid — high sensitivity and specificity.</a:t>
+            </a:r>
+            <a:endParaRPr lang="en-US" sz="1250" dirty="0"/>
+          </a:p>
+          <a:p>
+            <a:pPr algn="l" marL="177800" indent="-177800">
+              <a:spcAft>
+                <a:spcPts val="900"/>
+              </a:spcAft>
+              <a:buSzPct val="100000"/>
+              <a:buChar char="•"/>
+            </a:pPr>
+            <a:r>
+              <a:rPr lang="en-US" sz="1250" dirty="0">
+                <a:solidFill>
+                  <a:srgbClr val="33444F"/>
+                </a:solidFill>
+                <a:latin typeface="Calibri" pitchFamily="34" charset="0"/>
+                <a:ea typeface="Calibri" pitchFamily="34" charset="-122"/>
+                <a:cs typeface="Calibri" pitchFamily="34" charset="-120"/>
+              </a:rPr>
+              <a:t>Syndromic panels test many targets at once (respiratory, GI, meningitis/encephalitis, blood).</a:t>
+            </a:r>
+            <a:endParaRPr lang="en-US" sz="1250" dirty="0"/>
+          </a:p>
+          <a:p>
+            <a:pPr algn="l" marL="177800" indent="-177800">
+              <a:spcAft>
+                <a:spcPts val="900"/>
+              </a:spcAft>
+              <a:buSzPct val="100000"/>
+              <a:buChar char="•"/>
+            </a:pPr>
+            <a:r>
+              <a:rPr lang="en-US" sz="1250" dirty="0">
+                <a:solidFill>
+                  <a:srgbClr val="33444F"/>
+                </a:solidFill>
+                <a:latin typeface="Calibri" pitchFamily="34" charset="0"/>
+                <a:ea typeface="Calibri" pitchFamily="34" charset="-122"/>
+                <a:cs typeface="Calibri" pitchFamily="34" charset="-120"/>
+              </a:rPr>
+              <a:t>Results in ~1–2 hours.</a:t>
+            </a:r>
+            <a:endParaRPr lang="en-US" sz="1250" dirty="0"/>
+          </a:p>
+          <a:p>
+            <a:pPr algn="l" marL="177800" indent="-177800">
+              <a:spcAft>
+                <a:spcPts val="900"/>
+              </a:spcAft>
+              <a:buSzPct val="100000"/>
+              <a:buChar char="•"/>
+            </a:pPr>
+            <a:r>
+              <a:rPr lang="en-US" sz="1250" dirty="0">
+                <a:solidFill>
+                  <a:srgbClr val="33444F"/>
+                </a:solidFill>
+                <a:latin typeface="Calibri" pitchFamily="34" charset="0"/>
+                <a:ea typeface="Calibri" pitchFamily="34" charset="-122"/>
+                <a:cs typeface="Calibri" pitchFamily="34" charset="-120"/>
+              </a:rPr>
+              <a:t>Higher cost; require thoughtful use.</a:t>
+            </a:r>
+            <a:endParaRPr lang="en-US" sz="1250" dirty="0"/>
+          </a:p>
+        </p:txBody>
+      </p:sp>
+      <p:sp>
+        <p:nvSpPr>
+          <p:cNvPr id="10" name="Text 8"/>
+          <p:cNvSpPr/>
+          <p:nvPr/>
+        </p:nvSpPr>
+        <p:spPr>
+          <a:xfrm>
+            <a:off x="566928" y="6473952"/>
+            <a:ext cx="7772400" cy="274320"/>
+          </a:xfrm>
+          <a:prstGeom prst="rect">
+            <a:avLst/>
+          </a:prstGeom>
+          <a:noFill/>
+          <a:ln/>
+        </p:spPr>
+        <p:txBody>
+          <a:bodyPr wrap="square" lIns="0" tIns="0" rIns="0" bIns="0" rtlCol="0" anchor="ctr"/>
+          <a:lstStyle/>
+          <a:p>
+            <a:pPr algn="l" indent="0" marL="0">
+              <a:buNone/>
+            </a:pPr>
+            <a:r>
+              <a:rPr lang="en-US" sz="850" dirty="0">
+                <a:solidFill>
+                  <a:srgbClr val="9AA8B4"/>
+                </a:solidFill>
+                <a:latin typeface="Calibri" pitchFamily="34" charset="0"/>
+                <a:ea typeface="Calibri" pitchFamily="34" charset="-122"/>
+                <a:cs typeface="Calibri" pitchFamily="34" charset="-120"/>
+              </a:rPr>
+              <a:t>Makassed General Hospital  ·  Department of Laboratory Medicine</a:t>
+            </a:r>
+            <a:endParaRPr lang="en-US" sz="850" dirty="0"/>
+          </a:p>
+        </p:txBody>
+      </p:sp>
+      <p:sp>
+        <p:nvSpPr>
+          <p:cNvPr id="11" name="Text 9"/>
+          <p:cNvSpPr/>
+          <p:nvPr/>
+        </p:nvSpPr>
+        <p:spPr>
+          <a:xfrm>
+            <a:off x="9814255" y="6473952"/>
+            <a:ext cx="1828800" cy="274320"/>
+          </a:xfrm>
+          <a:prstGeom prst="rect">
+            <a:avLst/>
+          </a:prstGeom>
+          <a:noFill/>
+          <a:ln/>
+        </p:spPr>
+        <p:txBody>
+          <a:bodyPr wrap="square" lIns="0" tIns="0" rIns="0" bIns="0" rtlCol="0" anchor="ctr"/>
+          <a:lstStyle/>
+          <a:p>
+            <a:pPr algn="r" indent="0" marL="0">
+              <a:buNone/>
+            </a:pPr>
+            <a:r>
+              <a:rPr lang="en-US" sz="850" dirty="0">
+                <a:solidFill>
+                  <a:srgbClr val="9AA8B4"/>
+                </a:solidFill>
+                <a:latin typeface="Calibri" pitchFamily="34" charset="0"/>
+                <a:ea typeface="Calibri" pitchFamily="34" charset="-122"/>
+                <a:cs typeface="Calibri" pitchFamily="34" charset="-120"/>
+              </a:rPr>
+              <a:t>CP Lecture Series</a:t>
+            </a:r>
+            <a:pPr algn="r" indent="0" marL="0">
+              <a:buNone/>
+            </a:pPr>
+            <a:r>
+              <a:rPr lang="en-US" sz="850" dirty="0">
+                <a:solidFill>
+                  <a:srgbClr val="DCE4EC"/>
+                </a:solidFill>
+                <a:latin typeface="Calibri" pitchFamily="34" charset="0"/>
+                <a:ea typeface="Calibri" pitchFamily="34" charset="-122"/>
+                <a:cs typeface="Calibri" pitchFamily="34" charset="-120"/>
+              </a:rPr>
+              <a:t>   ·   </a:t>
+            </a:r>
+            <a:pPr algn="r" indent="0" marL="0">
+              <a:buNone/>
+            </a:pPr>
+            <a:r>
+              <a:rPr lang="en-US" sz="850" b="1" dirty="0">
+                <a:solidFill>
+                  <a:srgbClr val="2E7D32"/>
+                </a:solidFill>
+                <a:latin typeface="Calibri" pitchFamily="34" charset="0"/>
+                <a:ea typeface="Calibri" pitchFamily="34" charset="-122"/>
+                <a:cs typeface="Calibri" pitchFamily="34" charset="-120"/>
+              </a:rPr>
+              <a:t>7</a:t>
+            </a:r>
+            <a:endParaRPr lang="en-US" sz="850" dirty="0"/>
+          </a:p>
+        </p:txBody>
+      </p:sp>
+    </p:spTree>
+  </p:cSld>
+  <p:clrMapOvr>
+    <a:masterClrMapping/>
+  </p:clrMapOvr>
+</p:sld>
+</file>
+
+<file path=ppt/slides/slide9.xml><?xml version="1.0" encoding="utf-8"?>
+<p:sld xmlns:a="http://schemas.openxmlformats.org/drawingml/2006/main" xmlns:r="http://schemas.openxmlformats.org/officeDocument/2006/relationships" xmlns:p="http://schemas.openxmlformats.org/presentationml/2006/main">
+  <p:cSld name="Slide 9">
     <p:bg>
       <p:bgPr>
         <a:solidFill>
@@ -11930,570 +15185,6 @@
               <a:t>Interpretation &amp; Stewardship</a:t>
             </a:r>
             <a:endParaRPr lang="en-US" sz="3800" dirty="0"/>
-          </a:p>
-        </p:txBody>
-      </p:sp>
-    </p:spTree>
-  </p:cSld>
-  <p:clrMapOvr>
-    <a:masterClrMapping/>
-  </p:clrMapOvr>
-</p:sld>
-</file>
-
-<file path=ppt/slides/slide9.xml><?xml version="1.0" encoding="utf-8"?>
-<p:sld xmlns:a="http://schemas.openxmlformats.org/drawingml/2006/main" xmlns:r="http://schemas.openxmlformats.org/officeDocument/2006/relationships" xmlns:p="http://schemas.openxmlformats.org/presentationml/2006/main">
-  <p:cSld name="Slide 9">
-    <p:bg>
-      <p:bgPr>
-        <a:solidFill>
-          <a:srgbClr val="FFFFFF"/>
-        </a:solidFill>
-      </p:bgPr>
-    </p:bg>
-    <p:spTree>
-      <p:nvGrpSpPr>
-        <p:cNvPr id="1" name=""/>
-        <p:cNvGrpSpPr/>
-        <p:nvPr/>
-      </p:nvGrpSpPr>
-      <p:grpSpPr>
-        <a:xfrm>
-          <a:off x="0" y="0"/>
-          <a:ext cx="0" cy="0"/>
-          <a:chOff x="0" y="0"/>
-          <a:chExt cx="0" cy="0"/>
-        </a:xfrm>
-      </p:grpSpPr>
-      <p:sp>
-        <p:nvSpPr>
-          <p:cNvPr id="2" name="Text 0"/>
-          <p:cNvSpPr/>
-          <p:nvPr/>
-        </p:nvSpPr>
-        <p:spPr>
-          <a:xfrm>
-            <a:off x="566928" y="329184"/>
-            <a:ext cx="10515600" cy="310896"/>
-          </a:xfrm>
-          <a:prstGeom prst="rect">
-            <a:avLst/>
-          </a:prstGeom>
-          <a:noFill/>
-          <a:ln/>
-        </p:spPr>
-        <p:txBody>
-          <a:bodyPr wrap="square" lIns="0" tIns="0" rIns="0" bIns="0" rtlCol="0" anchor="ctr"/>
-          <a:lstStyle/>
-          <a:p>
-            <a:pPr algn="l" indent="0" marL="0">
-              <a:buNone/>
-            </a:pPr>
-            <a:r>
-              <a:rPr lang="en-US" sz="1100" b="1" spc="150" kern="0" dirty="0">
-                <a:solidFill>
-                  <a:srgbClr val="2E7D32"/>
-                </a:solidFill>
-                <a:latin typeface="Calibri" pitchFamily="34" charset="0"/>
-                <a:ea typeface="Calibri" pitchFamily="34" charset="-122"/>
-                <a:cs typeface="Calibri" pitchFamily="34" charset="-120"/>
-              </a:rPr>
-              <a:t>MICROBIOLOGY   ·   INTERPRETATION</a:t>
-            </a:r>
-            <a:endParaRPr lang="en-US" sz="1100" dirty="0"/>
-          </a:p>
-        </p:txBody>
-      </p:sp>
-      <p:sp>
-        <p:nvSpPr>
-          <p:cNvPr id="3" name="Text 1"/>
-          <p:cNvSpPr/>
-          <p:nvPr/>
-        </p:nvSpPr>
-        <p:spPr>
-          <a:xfrm>
-            <a:off x="566928" y="713232"/>
-            <a:ext cx="11064240" cy="749808"/>
-          </a:xfrm>
-          <a:prstGeom prst="rect">
-            <a:avLst/>
-          </a:prstGeom>
-          <a:noFill/>
-          <a:ln/>
-        </p:spPr>
-        <p:txBody>
-          <a:bodyPr wrap="square" lIns="0" tIns="0" rIns="0" bIns="0" rtlCol="0" anchor="ctr"/>
-          <a:lstStyle/>
-          <a:p>
-            <a:pPr algn="l" indent="0" marL="0">
-              <a:buNone/>
-            </a:pPr>
-            <a:r>
-              <a:rPr lang="en-US" sz="3000" b="1" dirty="0">
-                <a:solidFill>
-                  <a:srgbClr val="0E3A5F"/>
-                </a:solidFill>
-                <a:latin typeface="Calibri" pitchFamily="34" charset="0"/>
-                <a:ea typeface="Calibri" pitchFamily="34" charset="-122"/>
-                <a:cs typeface="Calibri" pitchFamily="34" charset="-120"/>
-              </a:rPr>
-              <a:t>False Positives, False Negatives &amp; Meaning</a:t>
-            </a:r>
-            <a:endParaRPr lang="en-US" sz="3000" dirty="0"/>
-          </a:p>
-        </p:txBody>
-      </p:sp>
-      <p:sp>
-        <p:nvSpPr>
-          <p:cNvPr id="4" name="Shape 2"/>
-          <p:cNvSpPr/>
-          <p:nvPr/>
-        </p:nvSpPr>
-        <p:spPr>
-          <a:xfrm>
-            <a:off x="566928" y="1517904"/>
-            <a:ext cx="5346040" cy="4114800"/>
-          </a:xfrm>
-          <a:prstGeom prst="roundRect">
-            <a:avLst>
-              <a:gd name="adj" fmla="val 2000"/>
-            </a:avLst>
-          </a:prstGeom>
-          <a:solidFill>
-            <a:srgbClr val="E8F2E9"/>
-          </a:solidFill>
-          <a:ln/>
-          <a:effectLst>
-            <a:outerShdw sx="100000" sy="100000" kx="0" ky="0" algn="bl" rotWithShape="0" blurRad="88900" dist="25400" dir="5400000">
-              <a:srgbClr val="22303C">
-                <a:alpha val="12000"/>
-              </a:srgbClr>
-            </a:outerShdw>
-          </a:effectLst>
-        </p:spPr>
-      </p:sp>
-      <p:sp>
-        <p:nvSpPr>
-          <p:cNvPr id="5" name="Text 3"/>
-          <p:cNvSpPr/>
-          <p:nvPr/>
-        </p:nvSpPr>
-        <p:spPr>
-          <a:xfrm>
-            <a:off x="804672" y="1682496"/>
-            <a:ext cx="4888840" cy="274320"/>
-          </a:xfrm>
-          <a:prstGeom prst="rect">
-            <a:avLst/>
-          </a:prstGeom>
-          <a:noFill/>
-          <a:ln/>
-        </p:spPr>
-        <p:txBody>
-          <a:bodyPr wrap="square" lIns="0" tIns="0" rIns="0" bIns="0" rtlCol="0" anchor="ctr"/>
-          <a:lstStyle/>
-          <a:p>
-            <a:pPr indent="0" marL="0">
-              <a:buNone/>
-            </a:pPr>
-            <a:r>
-              <a:rPr lang="en-US" sz="1200" b="1" spc="100" kern="0" dirty="0">
-                <a:solidFill>
-                  <a:srgbClr val="1F5722"/>
-                </a:solidFill>
-                <a:latin typeface="Calibri" pitchFamily="34" charset="0"/>
-                <a:ea typeface="Calibri" pitchFamily="34" charset="-122"/>
-                <a:cs typeface="Calibri" pitchFamily="34" charset="-120"/>
-              </a:rPr>
-              <a:t>WHAT A RESULT DOES/DOESN’T MEAN</a:t>
-            </a:r>
-            <a:endParaRPr lang="en-US" sz="1200" dirty="0"/>
-          </a:p>
-        </p:txBody>
-      </p:sp>
-      <p:sp>
-        <p:nvSpPr>
-          <p:cNvPr id="6" name="Text 4"/>
-          <p:cNvSpPr/>
-          <p:nvPr/>
-        </p:nvSpPr>
-        <p:spPr>
-          <a:xfrm>
-            <a:off x="804672" y="2029968"/>
-            <a:ext cx="4870552" cy="3474720"/>
-          </a:xfrm>
-          <a:prstGeom prst="rect">
-            <a:avLst/>
-          </a:prstGeom>
-          <a:noFill/>
-          <a:ln/>
-        </p:spPr>
-        <p:txBody>
-          <a:bodyPr wrap="square" lIns="0" tIns="0" rIns="0" bIns="0" rtlCol="0" anchor="t"/>
-          <a:lstStyle/>
-          <a:p>
-            <a:pPr algn="l" marL="177800" indent="-177800">
-              <a:spcAft>
-                <a:spcPts val="900"/>
-              </a:spcAft>
-              <a:buSzPct val="100000"/>
-              <a:buChar char="•"/>
-            </a:pPr>
-            <a:r>
-              <a:rPr lang="en-US" sz="1250" b="1" dirty="0">
-                <a:solidFill>
-                  <a:srgbClr val="1B2A38"/>
-                </a:solidFill>
-                <a:latin typeface="Calibri" pitchFamily="34" charset="0"/>
-                <a:ea typeface="Calibri" pitchFamily="34" charset="-122"/>
-                <a:cs typeface="Calibri" pitchFamily="34" charset="-120"/>
-              </a:rPr>
-              <a:t>Detection ≠ viable organism — nucleic acid can persist after successful treatment.</a:t>
-            </a:r>
-            <a:endParaRPr lang="en-US" sz="1250" dirty="0"/>
-          </a:p>
-          <a:p>
-            <a:pPr algn="l" marL="177800" indent="-177800">
-              <a:spcAft>
-                <a:spcPts val="900"/>
-              </a:spcAft>
-              <a:buSzPct val="100000"/>
-              <a:buChar char="•"/>
-            </a:pPr>
-            <a:r>
-              <a:rPr lang="en-US" sz="1250" dirty="0">
-                <a:solidFill>
-                  <a:srgbClr val="33444F"/>
-                </a:solidFill>
-                <a:latin typeface="Calibri" pitchFamily="34" charset="0"/>
-                <a:ea typeface="Calibri" pitchFamily="34" charset="-122"/>
-                <a:cs typeface="Calibri" pitchFamily="34" charset="-120"/>
-              </a:rPr>
-              <a:t>Detection ≠ causation — colonizers and commensals can be amplified.</a:t>
-            </a:r>
-            <a:endParaRPr lang="en-US" sz="1250" dirty="0"/>
-          </a:p>
-          <a:p>
-            <a:pPr algn="l" marL="177800" indent="-177800">
-              <a:spcAft>
-                <a:spcPts val="900"/>
-              </a:spcAft>
-              <a:buSzPct val="100000"/>
-              <a:buChar char="•"/>
-            </a:pPr>
-            <a:r>
-              <a:rPr lang="en-US" sz="1250" dirty="0">
-                <a:solidFill>
-                  <a:srgbClr val="33444F"/>
-                </a:solidFill>
-                <a:latin typeface="Calibri" pitchFamily="34" charset="0"/>
-                <a:ea typeface="Calibri" pitchFamily="34" charset="-122"/>
-                <a:cs typeface="Calibri" pitchFamily="34" charset="-120"/>
-              </a:rPr>
-              <a:t>Panels test only fixed targets — a negative does not exclude off-panel pathogens.</a:t>
-            </a:r>
-            <a:endParaRPr lang="en-US" sz="1250" dirty="0"/>
-          </a:p>
-          <a:p>
-            <a:pPr algn="l" marL="177800" indent="-177800">
-              <a:spcAft>
-                <a:spcPts val="900"/>
-              </a:spcAft>
-              <a:buSzPct val="100000"/>
-              <a:buChar char="•"/>
-            </a:pPr>
-            <a:r>
-              <a:rPr lang="en-US" sz="1250" dirty="0">
-                <a:solidFill>
-                  <a:srgbClr val="33444F"/>
-                </a:solidFill>
-                <a:latin typeface="Calibri" pitchFamily="34" charset="0"/>
-                <a:ea typeface="Calibri" pitchFamily="34" charset="-122"/>
-                <a:cs typeface="Calibri" pitchFamily="34" charset="-120"/>
-              </a:rPr>
-              <a:t>Cycle-threshold values are semi-quantitative and assay-specific — interpret cautiously.</a:t>
-            </a:r>
-            <a:endParaRPr lang="en-US" sz="1250" dirty="0"/>
-          </a:p>
-        </p:txBody>
-      </p:sp>
-      <p:sp>
-        <p:nvSpPr>
-          <p:cNvPr id="7" name="Shape 5"/>
-          <p:cNvSpPr/>
-          <p:nvPr/>
-        </p:nvSpPr>
-        <p:spPr>
-          <a:xfrm>
-            <a:off x="6278728" y="1517904"/>
-            <a:ext cx="5346040" cy="4114800"/>
-          </a:xfrm>
-          <a:prstGeom prst="roundRect">
-            <a:avLst>
-              <a:gd name="adj" fmla="val 2000"/>
-            </a:avLst>
-          </a:prstGeom>
-          <a:solidFill>
-            <a:srgbClr val="E8F2E9"/>
-          </a:solidFill>
-          <a:ln/>
-          <a:effectLst>
-            <a:outerShdw sx="100000" sy="100000" kx="0" ky="0" algn="bl" rotWithShape="0" blurRad="88900" dist="25400" dir="5400000">
-              <a:srgbClr val="22303C">
-                <a:alpha val="12000"/>
-              </a:srgbClr>
-            </a:outerShdw>
-          </a:effectLst>
-        </p:spPr>
-      </p:sp>
-      <p:sp>
-        <p:nvSpPr>
-          <p:cNvPr id="8" name="Text 6"/>
-          <p:cNvSpPr/>
-          <p:nvPr/>
-        </p:nvSpPr>
-        <p:spPr>
-          <a:xfrm>
-            <a:off x="6516472" y="1682496"/>
-            <a:ext cx="4888840" cy="274320"/>
-          </a:xfrm>
-          <a:prstGeom prst="rect">
-            <a:avLst/>
-          </a:prstGeom>
-          <a:noFill/>
-          <a:ln/>
-        </p:spPr>
-        <p:txBody>
-          <a:bodyPr wrap="square" lIns="0" tIns="0" rIns="0" bIns="0" rtlCol="0" anchor="ctr"/>
-          <a:lstStyle/>
-          <a:p>
-            <a:pPr indent="0" marL="0">
-              <a:buNone/>
-            </a:pPr>
-            <a:r>
-              <a:rPr lang="en-US" sz="1200" b="1" spc="100" kern="0" dirty="0">
-                <a:solidFill>
-                  <a:srgbClr val="1F5722"/>
-                </a:solidFill>
-                <a:latin typeface="Calibri" pitchFamily="34" charset="0"/>
-                <a:ea typeface="Calibri" pitchFamily="34" charset="-122"/>
-                <a:cs typeface="Calibri" pitchFamily="34" charset="-120"/>
-              </a:rPr>
-              <a:t>SOURCES OF ERROR</a:t>
-            </a:r>
-            <a:endParaRPr lang="en-US" sz="1200" dirty="0"/>
-          </a:p>
-        </p:txBody>
-      </p:sp>
-      <p:sp>
-        <p:nvSpPr>
-          <p:cNvPr id="9" name="Text 7"/>
-          <p:cNvSpPr/>
-          <p:nvPr/>
-        </p:nvSpPr>
-        <p:spPr>
-          <a:xfrm>
-            <a:off x="6516472" y="2029968"/>
-            <a:ext cx="4870552" cy="3474720"/>
-          </a:xfrm>
-          <a:prstGeom prst="rect">
-            <a:avLst/>
-          </a:prstGeom>
-          <a:noFill/>
-          <a:ln/>
-        </p:spPr>
-        <p:txBody>
-          <a:bodyPr wrap="square" lIns="0" tIns="0" rIns="0" bIns="0" rtlCol="0" anchor="t"/>
-          <a:lstStyle/>
-          <a:p>
-            <a:pPr algn="l" marL="177800" indent="-177800">
-              <a:spcAft>
-                <a:spcPts val="900"/>
-              </a:spcAft>
-              <a:buSzPct val="100000"/>
-              <a:buChar char="•"/>
-            </a:pPr>
-            <a:r>
-              <a:rPr lang="en-US" sz="1250" b="1" dirty="0">
-                <a:solidFill>
-                  <a:srgbClr val="1B2A38"/>
-                </a:solidFill>
-                <a:latin typeface="Calibri" pitchFamily="34" charset="0"/>
-                <a:ea typeface="Calibri" pitchFamily="34" charset="-122"/>
-                <a:cs typeface="Calibri" pitchFamily="34" charset="-120"/>
-              </a:rPr>
-              <a:t>Contamination/carryover (false positive); inhibitors and low load (false negative).</a:t>
-            </a:r>
-            <a:endParaRPr lang="en-US" sz="1250" dirty="0"/>
-          </a:p>
-          <a:p>
-            <a:pPr algn="l" marL="177800" indent="-177800">
-              <a:spcAft>
-                <a:spcPts val="900"/>
-              </a:spcAft>
-              <a:buSzPct val="100000"/>
-              <a:buChar char="•"/>
-            </a:pPr>
-            <a:r>
-              <a:rPr lang="en-US" sz="1250" dirty="0">
-                <a:solidFill>
-                  <a:srgbClr val="33444F"/>
-                </a:solidFill>
-                <a:latin typeface="Calibri" pitchFamily="34" charset="0"/>
-                <a:ea typeface="Calibri" pitchFamily="34" charset="-122"/>
-                <a:cs typeface="Calibri" pitchFamily="34" charset="-120"/>
-              </a:rPr>
-              <a:t>Sampling timing and specimen adequacy.</a:t>
-            </a:r>
-            <a:endParaRPr lang="en-US" sz="1250" dirty="0"/>
-          </a:p>
-          <a:p>
-            <a:pPr algn="l" marL="177800" indent="-177800">
-              <a:spcAft>
-                <a:spcPts val="900"/>
-              </a:spcAft>
-              <a:buSzPct val="100000"/>
-              <a:buChar char="•"/>
-            </a:pPr>
-            <a:r>
-              <a:rPr lang="en-US" sz="1250" dirty="0">
-                <a:solidFill>
-                  <a:srgbClr val="33444F"/>
-                </a:solidFill>
-                <a:latin typeface="Calibri" pitchFamily="34" charset="0"/>
-                <a:ea typeface="Calibri" pitchFamily="34" charset="-122"/>
-                <a:cs typeface="Calibri" pitchFamily="34" charset="-120"/>
-              </a:rPr>
-              <a:t>Sequence variation can cause missed detection.</a:t>
-            </a:r>
-            <a:endParaRPr lang="en-US" sz="1250" dirty="0"/>
-          </a:p>
-          <a:p>
-            <a:pPr algn="l" marL="177800" indent="-177800">
-              <a:spcAft>
-                <a:spcPts val="900"/>
-              </a:spcAft>
-              <a:buSzPct val="100000"/>
-              <a:buChar char="•"/>
-            </a:pPr>
-            <a:r>
-              <a:rPr lang="en-US" sz="1250" dirty="0">
-                <a:solidFill>
-                  <a:srgbClr val="33444F"/>
-                </a:solidFill>
-                <a:latin typeface="Calibri" pitchFamily="34" charset="0"/>
-                <a:ea typeface="Calibri" pitchFamily="34" charset="-122"/>
-                <a:cs typeface="Calibri" pitchFamily="34" charset="-120"/>
-              </a:rPr>
-              <a:t>Always reconcile with the clinical picture and other tests.</a:t>
-            </a:r>
-            <a:endParaRPr lang="en-US" sz="1250" dirty="0"/>
-          </a:p>
-        </p:txBody>
-      </p:sp>
-      <p:sp>
-        <p:nvSpPr>
-          <p:cNvPr id="10" name="Text 8"/>
-          <p:cNvSpPr/>
-          <p:nvPr/>
-        </p:nvSpPr>
-        <p:spPr>
-          <a:xfrm>
-            <a:off x="566928" y="6473952"/>
-            <a:ext cx="7772400" cy="274320"/>
-          </a:xfrm>
-          <a:prstGeom prst="rect">
-            <a:avLst/>
-          </a:prstGeom>
-          <a:noFill/>
-          <a:ln/>
-        </p:spPr>
-        <p:txBody>
-          <a:bodyPr wrap="square" lIns="0" tIns="0" rIns="0" bIns="0" rtlCol="0" anchor="ctr"/>
-          <a:lstStyle/>
-          <a:p>
-            <a:pPr algn="l" indent="0" marL="0">
-              <a:buNone/>
-            </a:pPr>
-            <a:r>
-              <a:rPr lang="en-US" sz="850" dirty="0">
-                <a:solidFill>
-                  <a:srgbClr val="9AA8B4"/>
-                </a:solidFill>
-                <a:latin typeface="Calibri" pitchFamily="34" charset="0"/>
-                <a:ea typeface="Calibri" pitchFamily="34" charset="-122"/>
-                <a:cs typeface="Calibri" pitchFamily="34" charset="-120"/>
-              </a:rPr>
-              <a:t>Makassed General Hospital  ·  Department of Laboratory Medicine</a:t>
-            </a:r>
-            <a:endParaRPr lang="en-US" sz="850" dirty="0"/>
-          </a:p>
-        </p:txBody>
-      </p:sp>
-      <p:sp>
-        <p:nvSpPr>
-          <p:cNvPr id="11" name="Text 9"/>
-          <p:cNvSpPr/>
-          <p:nvPr/>
-        </p:nvSpPr>
-        <p:spPr>
-          <a:xfrm>
-            <a:off x="9814255" y="6473952"/>
-            <a:ext cx="1828800" cy="274320"/>
-          </a:xfrm>
-          <a:prstGeom prst="rect">
-            <a:avLst/>
-          </a:prstGeom>
-          <a:noFill/>
-          <a:ln/>
-        </p:spPr>
-        <p:txBody>
-          <a:bodyPr wrap="square" lIns="0" tIns="0" rIns="0" bIns="0" rtlCol="0" anchor="ctr"/>
-          <a:lstStyle/>
-          <a:p>
-            <a:pPr algn="r" indent="0" marL="0">
-              <a:buNone/>
-            </a:pPr>
-            <a:r>
-              <a:rPr lang="en-US" sz="850" dirty="0">
-                <a:solidFill>
-                  <a:srgbClr val="9AA8B4"/>
-                </a:solidFill>
-                <a:latin typeface="Calibri" pitchFamily="34" charset="0"/>
-                <a:ea typeface="Calibri" pitchFamily="34" charset="-122"/>
-                <a:cs typeface="Calibri" pitchFamily="34" charset="-120"/>
-              </a:rPr>
-              <a:t>CP Lecture Series</a:t>
-            </a:r>
-            <a:pPr algn="r" indent="0" marL="0">
-              <a:buNone/>
-            </a:pPr>
-            <a:r>
-              <a:rPr lang="en-US" sz="850" dirty="0">
-                <a:solidFill>
-                  <a:srgbClr val="DCE4EC"/>
-                </a:solidFill>
-                <a:latin typeface="Calibri" pitchFamily="34" charset="0"/>
-                <a:ea typeface="Calibri" pitchFamily="34" charset="-122"/>
-                <a:cs typeface="Calibri" pitchFamily="34" charset="-120"/>
-              </a:rPr>
-              <a:t>   ·   </a:t>
-            </a:r>
-            <a:pPr algn="r" indent="0" marL="0">
-              <a:buNone/>
-            </a:pPr>
-            <a:r>
-              <a:rPr lang="en-US" sz="850" b="1" dirty="0">
-                <a:solidFill>
-                  <a:srgbClr val="2E7D32"/>
-                </a:solidFill>
-                <a:latin typeface="Calibri" pitchFamily="34" charset="0"/>
-                <a:ea typeface="Calibri" pitchFamily="34" charset="-122"/>
-                <a:cs typeface="Calibri" pitchFamily="34" charset="-120"/>
-              </a:rPr>
-              <a:t>7</a:t>
-            </a:r>
-            <a:endParaRPr lang="en-US" sz="850" dirty="0"/>
           </a:p>
         </p:txBody>
       </p:sp>

--- a/decks/Micro_04_Rapid-Diagnostics-Molecular-Microbiology.pptx
+++ b/decks/Micro_04_Rapid-Diagnostics-Molecular-Microbiology.pptx
@@ -25,9 +25,13 @@
     <p:sldId id="273" r:id="rId19"/>
     <p:sldId id="274" r:id="rId20"/>
     <p:sldId id="275" r:id="rId21"/>
+    <p:sldId id="284" r:id="rId35"/>
     <p:sldId id="276" r:id="rId22"/>
+    <p:sldId id="283" r:id="rId34"/>
     <p:sldId id="277" r:id="rId23"/>
+    <p:sldId id="282" r:id="rId33"/>
     <p:sldId id="278" r:id="rId24"/>
+    <p:sldId id="281" r:id="rId32"/>
     <p:sldId id="279" r:id="rId25"/>
     <p:sldId id="280" r:id="rId26"/>
   </p:sldIdLst>
@@ -3032,6 +3036,10 @@
           </a:solidFill>
           <a:ln/>
         </p:spPr>
+        <p:txBody>
+          <a:bodyPr/>
+          <a:p/>
+        </p:txBody>
       </p:sp>
       <p:sp>
         <p:nvSpPr>
@@ -3054,6 +3062,10 @@
           </a:solidFill>
           <a:ln/>
         </p:spPr>
+        <p:txBody>
+          <a:bodyPr/>
+          <a:p/>
+        </p:txBody>
       </p:sp>
       <p:sp>
         <p:nvSpPr>
@@ -3076,6 +3088,10 @@
           </a:solidFill>
           <a:ln/>
         </p:spPr>
+        <p:txBody>
+          <a:bodyPr/>
+          <a:p/>
+        </p:txBody>
       </p:sp>
       <p:sp>
         <p:nvSpPr>
@@ -3098,6 +3114,10 @@
           </a:solidFill>
           <a:ln/>
         </p:spPr>
+        <p:txBody>
+          <a:bodyPr/>
+          <a:p/>
+        </p:txBody>
       </p:sp>
       <p:sp>
         <p:nvSpPr>
@@ -3514,6 +3534,10 @@
             </a:outerShdw>
           </a:effectLst>
         </p:spPr>
+        <p:txBody>
+          <a:bodyPr/>
+          <a:p/>
+        </p:txBody>
       </p:sp>
       <p:sp>
         <p:nvSpPr>
@@ -3688,6 +3712,10 @@
             </a:outerShdw>
           </a:effectLst>
         </p:spPr>
+        <p:txBody>
+          <a:bodyPr/>
+          <a:p/>
+        </p:txBody>
       </p:sp>
       <p:sp>
         <p:nvSpPr>
@@ -4078,6 +4106,10 @@
             </a:outerShdw>
           </a:effectLst>
         </p:spPr>
+        <p:txBody>
+          <a:bodyPr/>
+          <a:p/>
+        </p:txBody>
       </p:sp>
       <p:sp>
         <p:nvSpPr>
@@ -4252,6 +4284,10 @@
             </a:outerShdw>
           </a:effectLst>
         </p:spPr>
+        <p:txBody>
+          <a:bodyPr/>
+          <a:p/>
+        </p:txBody>
       </p:sp>
       <p:sp>
         <p:nvSpPr>
@@ -4642,6 +4678,10 @@
             </a:outerShdw>
           </a:effectLst>
         </p:spPr>
+        <p:txBody>
+          <a:bodyPr/>
+          <a:p/>
+        </p:txBody>
       </p:sp>
       <p:sp>
         <p:nvSpPr>
@@ -4816,6 +4856,10 @@
             </a:outerShdw>
           </a:effectLst>
         </p:spPr>
+        <p:txBody>
+          <a:bodyPr/>
+          <a:p/>
+        </p:txBody>
       </p:sp>
       <p:sp>
         <p:nvSpPr>
@@ -5121,6 +5165,10 @@
           </a:solidFill>
           <a:ln/>
         </p:spPr>
+        <p:txBody>
+          <a:bodyPr/>
+          <a:p/>
+        </p:txBody>
       </p:sp>
       <p:sp>
         <p:nvSpPr>
@@ -5143,6 +5191,10 @@
           </a:solidFill>
           <a:ln/>
         </p:spPr>
+        <p:txBody>
+          <a:bodyPr/>
+          <a:p/>
+        </p:txBody>
       </p:sp>
       <p:sp>
         <p:nvSpPr>
@@ -5399,6 +5451,10 @@
             </a:outerShdw>
           </a:effectLst>
         </p:spPr>
+        <p:txBody>
+          <a:bodyPr/>
+          <a:p/>
+        </p:txBody>
       </p:sp>
       <p:sp>
         <p:nvSpPr>
@@ -5509,6 +5565,10 @@
             </a:outerShdw>
           </a:effectLst>
         </p:spPr>
+        <p:txBody>
+          <a:bodyPr/>
+          <a:p/>
+        </p:txBody>
       </p:sp>
       <p:sp>
         <p:nvSpPr>
@@ -5938,6 +5998,10 @@
             </a:outerShdw>
           </a:effectLst>
         </p:spPr>
+        <p:txBody>
+          <a:bodyPr/>
+          <a:p/>
+        </p:txBody>
       </p:sp>
       <p:sp>
         <p:nvSpPr>
@@ -6264,6 +6328,10 @@
             </a:outerShdw>
           </a:effectLst>
         </p:spPr>
+        <p:txBody>
+          <a:bodyPr/>
+          <a:p/>
+        </p:txBody>
       </p:sp>
       <p:sp>
         <p:nvSpPr>
@@ -6374,6 +6442,10 @@
             </a:outerShdw>
           </a:effectLst>
         </p:spPr>
+        <p:txBody>
+          <a:bodyPr/>
+          <a:p/>
+        </p:txBody>
       </p:sp>
       <p:sp>
         <p:nvSpPr>
@@ -6803,6 +6875,10 @@
             </a:outerShdw>
           </a:effectLst>
         </p:spPr>
+        <p:txBody>
+          <a:bodyPr/>
+          <a:p/>
+        </p:txBody>
       </p:sp>
       <p:sp>
         <p:nvSpPr>
@@ -7129,6 +7205,10 @@
             </a:outerShdw>
           </a:effectLst>
         </p:spPr>
+        <p:txBody>
+          <a:bodyPr/>
+          <a:p/>
+        </p:txBody>
       </p:sp>
       <p:sp>
         <p:nvSpPr>
@@ -7239,6 +7319,10 @@
             </a:outerShdw>
           </a:effectLst>
         </p:spPr>
+        <p:txBody>
+          <a:bodyPr/>
+          <a:p/>
+        </p:txBody>
       </p:sp>
       <p:sp>
         <p:nvSpPr>
@@ -7668,6 +7752,10 @@
             </a:outerShdw>
           </a:effectLst>
         </p:spPr>
+        <p:txBody>
+          <a:bodyPr/>
+          <a:p/>
+        </p:txBody>
       </p:sp>
       <p:sp>
         <p:nvSpPr>
@@ -7994,6 +8082,10 @@
             </a:outerShdw>
           </a:effectLst>
         </p:spPr>
+        <p:txBody>
+          <a:bodyPr/>
+          <a:p/>
+        </p:txBody>
       </p:sp>
       <p:sp>
         <p:nvSpPr>
@@ -8101,6 +8193,10 @@
             </a:outerShdw>
           </a:effectLst>
         </p:spPr>
+        <p:txBody>
+          <a:bodyPr/>
+          <a:p/>
+        </p:txBody>
       </p:sp>
       <p:sp>
         <p:nvSpPr>
@@ -8208,6 +8304,10 @@
             </a:outerShdw>
           </a:effectLst>
         </p:spPr>
+        <p:txBody>
+          <a:bodyPr/>
+          <a:p/>
+        </p:txBody>
       </p:sp>
       <p:sp>
         <p:nvSpPr>
@@ -8315,6 +8415,10 @@
             </a:outerShdw>
           </a:effectLst>
         </p:spPr>
+        <p:txBody>
+          <a:bodyPr/>
+          <a:p/>
+        </p:txBody>
       </p:sp>
       <p:sp>
         <p:nvSpPr>
@@ -8707,9 +8811,9 @@
               <a:buNone/>
             </a:pPr>
             <a:r>
-              <a:rPr lang="en-US" sz="1350" b="1" dirty="0">
-                <a:solidFill>
-                  <a:srgbClr val="1F5722"/>
+              <a:rPr lang="en-US" sz="1350" b="0" dirty="0">
+                <a:solidFill>
+                  <a:srgbClr val="33444F"/>
                 </a:solidFill>
                 <a:latin typeface="Calibri" pitchFamily="34" charset="0"/>
                 <a:ea typeface="Calibri" pitchFamily="34" charset="-122"/>
@@ -8778,130 +8882,6 @@
               <a:t>E. Is quantitative</a:t>
             </a:r>
             <a:endParaRPr lang="en-US" sz="1350" dirty="0"/>
-          </a:p>
-        </p:txBody>
-      </p:sp>
-      <p:sp>
-        <p:nvSpPr>
-          <p:cNvPr id="6" name="Shape 4"/>
-          <p:cNvSpPr/>
-          <p:nvPr/>
-        </p:nvSpPr>
-        <p:spPr>
-          <a:xfrm>
-            <a:off x="7201632" y="2395728"/>
-            <a:ext cx="4423136" cy="3246120"/>
-          </a:xfrm>
-          <a:prstGeom prst="roundRect">
-            <a:avLst>
-              <a:gd name="adj" fmla="val 2535"/>
-            </a:avLst>
-          </a:prstGeom>
-          <a:solidFill>
-            <a:srgbClr val="E8F2E9"/>
-          </a:solidFill>
-          <a:ln/>
-          <a:effectLst>
-            <a:outerShdw sx="100000" sy="100000" kx="0" ky="0" algn="bl" rotWithShape="0" blurRad="88900" dist="25400" dir="5400000">
-              <a:srgbClr val="22303C">
-                <a:alpha val="12000"/>
-              </a:srgbClr>
-            </a:outerShdw>
-          </a:effectLst>
-        </p:spPr>
-      </p:sp>
-      <p:sp>
-        <p:nvSpPr>
-          <p:cNvPr id="7" name="Text 5"/>
-          <p:cNvSpPr/>
-          <p:nvPr/>
-        </p:nvSpPr>
-        <p:spPr>
-          <a:xfrm>
-            <a:off x="7439376" y="2578608"/>
-            <a:ext cx="3965936" cy="457200"/>
-          </a:xfrm>
-          <a:prstGeom prst="rect">
-            <a:avLst/>
-          </a:prstGeom>
-          <a:noFill/>
-          <a:ln/>
-        </p:spPr>
-        <p:txBody>
-          <a:bodyPr wrap="square" lIns="0" tIns="0" rIns="0" bIns="0" rtlCol="0" anchor="ctr"/>
-          <a:lstStyle/>
-          <a:p>
-            <a:pPr indent="0" marL="0">
-              <a:buNone/>
-            </a:pPr>
-            <a:r>
-              <a:rPr lang="en-US" sz="1500" b="1" dirty="0">
-                <a:solidFill>
-                  <a:srgbClr val="2E7D32"/>
-                </a:solidFill>
-                <a:latin typeface="Calibri" pitchFamily="34" charset="0"/>
-                <a:ea typeface="Calibri" pitchFamily="34" charset="-122"/>
-                <a:cs typeface="Calibri" pitchFamily="34" charset="-120"/>
-              </a:rPr>
-              <a:t>ANSWER  </a:t>
-            </a:r>
-            <a:pPr indent="0" marL="0">
-              <a:buNone/>
-            </a:pPr>
-            <a:r>
-              <a:rPr lang="en-US" sz="1500" b="1" dirty="0">
-                <a:solidFill>
-                  <a:srgbClr val="1B2A38"/>
-                </a:solidFill>
-                <a:latin typeface="Calibri" pitchFamily="34" charset="0"/>
-                <a:ea typeface="Calibri" pitchFamily="34" charset="-122"/>
-                <a:cs typeface="Calibri" pitchFamily="34" charset="-120"/>
-              </a:rPr>
-              <a:t>B — Detects gene; may reflect colonization</a:t>
-            </a:r>
-            <a:endParaRPr lang="en-US" sz="1500" dirty="0"/>
-          </a:p>
-        </p:txBody>
-      </p:sp>
-      <p:sp>
-        <p:nvSpPr>
-          <p:cNvPr id="8" name="Text 6"/>
-          <p:cNvSpPr/>
-          <p:nvPr/>
-        </p:nvSpPr>
-        <p:spPr>
-          <a:xfrm>
-            <a:off x="7439376" y="3127248"/>
-            <a:ext cx="3947648" cy="2377440"/>
-          </a:xfrm>
-          <a:prstGeom prst="rect">
-            <a:avLst/>
-          </a:prstGeom>
-          <a:noFill/>
-          <a:ln/>
-        </p:spPr>
-        <p:txBody>
-          <a:bodyPr wrap="square" lIns="0" tIns="0" rIns="0" bIns="0" rtlCol="0" anchor="t"/>
-          <a:lstStyle/>
-          <a:p>
-            <a:pPr algn="l" indent="0" marL="0">
-              <a:lnSpc>
-                <a:spcPct val="108000"/>
-              </a:lnSpc>
-              <a:buNone/>
-            </a:pPr>
-            <a:r>
-              <a:rPr lang="en-US" sz="1250" dirty="0">
-                <a:solidFill>
-                  <a:srgbClr val="33444F"/>
-                </a:solidFill>
-                <a:latin typeface="Calibri" pitchFamily="34" charset="0"/>
-                <a:ea typeface="Calibri" pitchFamily="34" charset="-122"/>
-                <a:cs typeface="Calibri" pitchFamily="34" charset="-120"/>
-              </a:rPr>
-              <a:t>NAAT detects the toxin gene; in patients without clinically significant diarrhea it may indicate carriage, leading to overtreatment.</a:t>
-            </a:r>
-            <a:endParaRPr lang="en-US" sz="1250" dirty="0"/>
           </a:p>
         </p:txBody>
       </p:sp>
@@ -9211,9 +9191,9 @@
               <a:buNone/>
             </a:pPr>
             <a:r>
-              <a:rPr lang="en-US" sz="1350" b="1" dirty="0">
-                <a:solidFill>
-                  <a:srgbClr val="1F5722"/>
+              <a:rPr lang="en-US" sz="1350" b="0" dirty="0">
+                <a:solidFill>
+                  <a:srgbClr val="33444F"/>
                 </a:solidFill>
                 <a:latin typeface="Calibri" pitchFamily="34" charset="0"/>
                 <a:ea typeface="Calibri" pitchFamily="34" charset="-122"/>
@@ -9282,130 +9262,6 @@
               <a:t>E. Slower</a:t>
             </a:r>
             <a:endParaRPr lang="en-US" sz="1350" dirty="0"/>
-          </a:p>
-        </p:txBody>
-      </p:sp>
-      <p:sp>
-        <p:nvSpPr>
-          <p:cNvPr id="6" name="Shape 4"/>
-          <p:cNvSpPr/>
-          <p:nvPr/>
-        </p:nvSpPr>
-        <p:spPr>
-          <a:xfrm>
-            <a:off x="7201632" y="2395728"/>
-            <a:ext cx="4423136" cy="3246120"/>
-          </a:xfrm>
-          <a:prstGeom prst="roundRect">
-            <a:avLst>
-              <a:gd name="adj" fmla="val 2535"/>
-            </a:avLst>
-          </a:prstGeom>
-          <a:solidFill>
-            <a:srgbClr val="E8F2E9"/>
-          </a:solidFill>
-          <a:ln/>
-          <a:effectLst>
-            <a:outerShdw sx="100000" sy="100000" kx="0" ky="0" algn="bl" rotWithShape="0" blurRad="88900" dist="25400" dir="5400000">
-              <a:srgbClr val="22303C">
-                <a:alpha val="12000"/>
-              </a:srgbClr>
-            </a:outerShdw>
-          </a:effectLst>
-        </p:spPr>
-      </p:sp>
-      <p:sp>
-        <p:nvSpPr>
-          <p:cNvPr id="7" name="Text 5"/>
-          <p:cNvSpPr/>
-          <p:nvPr/>
-        </p:nvSpPr>
-        <p:spPr>
-          <a:xfrm>
-            <a:off x="7439376" y="2578608"/>
-            <a:ext cx="3965936" cy="457200"/>
-          </a:xfrm>
-          <a:prstGeom prst="rect">
-            <a:avLst/>
-          </a:prstGeom>
-          <a:noFill/>
-          <a:ln/>
-        </p:spPr>
-        <p:txBody>
-          <a:bodyPr wrap="square" lIns="0" tIns="0" rIns="0" bIns="0" rtlCol="0" anchor="ctr"/>
-          <a:lstStyle/>
-          <a:p>
-            <a:pPr indent="0" marL="0">
-              <a:buNone/>
-            </a:pPr>
-            <a:r>
-              <a:rPr lang="en-US" sz="1500" b="1" dirty="0">
-                <a:solidFill>
-                  <a:srgbClr val="2E7D32"/>
-                </a:solidFill>
-                <a:latin typeface="Calibri" pitchFamily="34" charset="0"/>
-                <a:ea typeface="Calibri" pitchFamily="34" charset="-122"/>
-                <a:cs typeface="Calibri" pitchFamily="34" charset="-120"/>
-              </a:rPr>
-              <a:t>ANSWER  </a:t>
-            </a:r>
-            <a:pPr indent="0" marL="0">
-              <a:buNone/>
-            </a:pPr>
-            <a:r>
-              <a:rPr lang="en-US" sz="1500" b="1" dirty="0">
-                <a:solidFill>
-                  <a:srgbClr val="1B2A38"/>
-                </a:solidFill>
-                <a:latin typeface="Calibri" pitchFamily="34" charset="0"/>
-                <a:ea typeface="Calibri" pitchFamily="34" charset="-122"/>
-                <a:cs typeface="Calibri" pitchFamily="34" charset="-120"/>
-              </a:rPr>
-              <a:t>B — Less sensitive</a:t>
-            </a:r>
-            <a:endParaRPr lang="en-US" sz="1500" dirty="0"/>
-          </a:p>
-        </p:txBody>
-      </p:sp>
-      <p:sp>
-        <p:nvSpPr>
-          <p:cNvPr id="8" name="Text 6"/>
-          <p:cNvSpPr/>
-          <p:nvPr/>
-        </p:nvSpPr>
-        <p:spPr>
-          <a:xfrm>
-            <a:off x="7439376" y="3127248"/>
-            <a:ext cx="3947648" cy="2377440"/>
-          </a:xfrm>
-          <a:prstGeom prst="rect">
-            <a:avLst/>
-          </a:prstGeom>
-          <a:noFill/>
-          <a:ln/>
-        </p:spPr>
-        <p:txBody>
-          <a:bodyPr wrap="square" lIns="0" tIns="0" rIns="0" bIns="0" rtlCol="0" anchor="t"/>
-          <a:lstStyle/>
-          <a:p>
-            <a:pPr algn="l" indent="0" marL="0">
-              <a:lnSpc>
-                <a:spcPct val="108000"/>
-              </a:lnSpc>
-              <a:buNone/>
-            </a:pPr>
-            <a:r>
-              <a:rPr lang="en-US" sz="1250" dirty="0">
-                <a:solidFill>
-                  <a:srgbClr val="33444F"/>
-                </a:solidFill>
-                <a:latin typeface="Calibri" pitchFamily="34" charset="0"/>
-                <a:ea typeface="Calibri" pitchFamily="34" charset="-122"/>
-                <a:cs typeface="Calibri" pitchFamily="34" charset="-120"/>
-              </a:rPr>
-              <a:t>Antigen tests trade sensitivity for speed/simplicity; negatives often need molecular confirmation when prevalence or stakes are high.</a:t>
-            </a:r>
-            <a:endParaRPr lang="en-US" sz="1250" dirty="0"/>
           </a:p>
         </p:txBody>
       </p:sp>
@@ -9695,9 +9551,9 @@
               <a:buNone/>
             </a:pPr>
             <a:r>
-              <a:rPr lang="en-US" sz="1350" b="1" dirty="0">
-                <a:solidFill>
-                  <a:srgbClr val="1F5722"/>
+              <a:rPr lang="en-US" sz="1350" b="0" dirty="0">
+                <a:solidFill>
+                  <a:srgbClr val="33444F"/>
                 </a:solidFill>
                 <a:latin typeface="Calibri" pitchFamily="34" charset="0"/>
                 <a:ea typeface="Calibri" pitchFamily="34" charset="-122"/>
@@ -9786,130 +9642,6 @@
               <a:t>E. Provides full AST</a:t>
             </a:r>
             <a:endParaRPr lang="en-US" sz="1350" dirty="0"/>
-          </a:p>
-        </p:txBody>
-      </p:sp>
-      <p:sp>
-        <p:nvSpPr>
-          <p:cNvPr id="6" name="Shape 4"/>
-          <p:cNvSpPr/>
-          <p:nvPr/>
-        </p:nvSpPr>
-        <p:spPr>
-          <a:xfrm>
-            <a:off x="7201632" y="2395728"/>
-            <a:ext cx="4423136" cy="3246120"/>
-          </a:xfrm>
-          <a:prstGeom prst="roundRect">
-            <a:avLst>
-              <a:gd name="adj" fmla="val 2535"/>
-            </a:avLst>
-          </a:prstGeom>
-          <a:solidFill>
-            <a:srgbClr val="E8F2E9"/>
-          </a:solidFill>
-          <a:ln/>
-          <a:effectLst>
-            <a:outerShdw sx="100000" sy="100000" kx="0" ky="0" algn="bl" rotWithShape="0" blurRad="88900" dist="25400" dir="5400000">
-              <a:srgbClr val="22303C">
-                <a:alpha val="12000"/>
-              </a:srgbClr>
-            </a:outerShdw>
-          </a:effectLst>
-        </p:spPr>
-      </p:sp>
-      <p:sp>
-        <p:nvSpPr>
-          <p:cNvPr id="7" name="Text 5"/>
-          <p:cNvSpPr/>
-          <p:nvPr/>
-        </p:nvSpPr>
-        <p:spPr>
-          <a:xfrm>
-            <a:off x="7439376" y="2578608"/>
-            <a:ext cx="3965936" cy="457200"/>
-          </a:xfrm>
-          <a:prstGeom prst="rect">
-            <a:avLst/>
-          </a:prstGeom>
-          <a:noFill/>
-          <a:ln/>
-        </p:spPr>
-        <p:txBody>
-          <a:bodyPr wrap="square" lIns="0" tIns="0" rIns="0" bIns="0" rtlCol="0" anchor="ctr"/>
-          <a:lstStyle/>
-          <a:p>
-            <a:pPr indent="0" marL="0">
-              <a:buNone/>
-            </a:pPr>
-            <a:r>
-              <a:rPr lang="en-US" sz="1500" b="1" dirty="0">
-                <a:solidFill>
-                  <a:srgbClr val="2E7D32"/>
-                </a:solidFill>
-                <a:latin typeface="Calibri" pitchFamily="34" charset="0"/>
-                <a:ea typeface="Calibri" pitchFamily="34" charset="-122"/>
-                <a:cs typeface="Calibri" pitchFamily="34" charset="-120"/>
-              </a:rPr>
-              <a:t>ANSWER  </a:t>
-            </a:r>
-            <a:pPr indent="0" marL="0">
-              <a:buNone/>
-            </a:pPr>
-            <a:r>
-              <a:rPr lang="en-US" sz="1500" b="1" dirty="0">
-                <a:solidFill>
-                  <a:srgbClr val="1B2A38"/>
-                </a:solidFill>
-                <a:latin typeface="Calibri" pitchFamily="34" charset="0"/>
-                <a:ea typeface="Calibri" pitchFamily="34" charset="-122"/>
-                <a:cs typeface="Calibri" pitchFamily="34" charset="-120"/>
-              </a:rPr>
-              <a:t>A — Detects only designed targets</a:t>
-            </a:r>
-            <a:endParaRPr lang="en-US" sz="1500" dirty="0"/>
-          </a:p>
-        </p:txBody>
-      </p:sp>
-      <p:sp>
-        <p:nvSpPr>
-          <p:cNvPr id="8" name="Text 6"/>
-          <p:cNvSpPr/>
-          <p:nvPr/>
-        </p:nvSpPr>
-        <p:spPr>
-          <a:xfrm>
-            <a:off x="7439376" y="3127248"/>
-            <a:ext cx="3947648" cy="2377440"/>
-          </a:xfrm>
-          <a:prstGeom prst="rect">
-            <a:avLst/>
-          </a:prstGeom>
-          <a:noFill/>
-          <a:ln/>
-        </p:spPr>
-        <p:txBody>
-          <a:bodyPr wrap="square" lIns="0" tIns="0" rIns="0" bIns="0" rtlCol="0" anchor="t"/>
-          <a:lstStyle/>
-          <a:p>
-            <a:pPr algn="l" indent="0" marL="0">
-              <a:lnSpc>
-                <a:spcPct val="108000"/>
-              </a:lnSpc>
-              <a:buNone/>
-            </a:pPr>
-            <a:r>
-              <a:rPr lang="en-US" sz="1250" dirty="0">
-                <a:solidFill>
-                  <a:srgbClr val="33444F"/>
-                </a:solidFill>
-                <a:latin typeface="Calibri" pitchFamily="34" charset="0"/>
-                <a:ea typeface="Calibri" pitchFamily="34" charset="-122"/>
-                <a:cs typeface="Calibri" pitchFamily="34" charset="-120"/>
-              </a:rPr>
-              <a:t>A negative panel does not exclude off-panel pathogens, and culture is still needed for full susceptibility and novel resistance.</a:t>
-            </a:r>
-            <a:endParaRPr lang="en-US" sz="1250" dirty="0"/>
           </a:p>
         </p:txBody>
       </p:sp>
@@ -10219,9 +9951,9 @@
               <a:buNone/>
             </a:pPr>
             <a:r>
-              <a:rPr lang="en-US" sz="1350" b="1" dirty="0">
-                <a:solidFill>
-                  <a:srgbClr val="1F5722"/>
+              <a:rPr lang="en-US" sz="1350" b="0" dirty="0">
+                <a:solidFill>
+                  <a:srgbClr val="33444F"/>
                 </a:solidFill>
                 <a:latin typeface="Calibri" pitchFamily="34" charset="0"/>
                 <a:ea typeface="Calibri" pitchFamily="34" charset="-122"/>
@@ -10290,130 +10022,6 @@
               <a:t>E. A susceptibility measure</a:t>
             </a:r>
             <a:endParaRPr lang="en-US" sz="1350" dirty="0"/>
-          </a:p>
-        </p:txBody>
-      </p:sp>
-      <p:sp>
-        <p:nvSpPr>
-          <p:cNvPr id="6" name="Shape 4"/>
-          <p:cNvSpPr/>
-          <p:nvPr/>
-        </p:nvSpPr>
-        <p:spPr>
-          <a:xfrm>
-            <a:off x="7201632" y="2395728"/>
-            <a:ext cx="4423136" cy="3246120"/>
-          </a:xfrm>
-          <a:prstGeom prst="roundRect">
-            <a:avLst>
-              <a:gd name="adj" fmla="val 2535"/>
-            </a:avLst>
-          </a:prstGeom>
-          <a:solidFill>
-            <a:srgbClr val="E8F2E9"/>
-          </a:solidFill>
-          <a:ln/>
-          <a:effectLst>
-            <a:outerShdw sx="100000" sy="100000" kx="0" ky="0" algn="bl" rotWithShape="0" blurRad="88900" dist="25400" dir="5400000">
-              <a:srgbClr val="22303C">
-                <a:alpha val="12000"/>
-              </a:srgbClr>
-            </a:outerShdw>
-          </a:effectLst>
-        </p:spPr>
-      </p:sp>
-      <p:sp>
-        <p:nvSpPr>
-          <p:cNvPr id="7" name="Text 5"/>
-          <p:cNvSpPr/>
-          <p:nvPr/>
-        </p:nvSpPr>
-        <p:spPr>
-          <a:xfrm>
-            <a:off x="7439376" y="2578608"/>
-            <a:ext cx="3965936" cy="457200"/>
-          </a:xfrm>
-          <a:prstGeom prst="rect">
-            <a:avLst/>
-          </a:prstGeom>
-          <a:noFill/>
-          <a:ln/>
-        </p:spPr>
-        <p:txBody>
-          <a:bodyPr wrap="square" lIns="0" tIns="0" rIns="0" bIns="0" rtlCol="0" anchor="ctr"/>
-          <a:lstStyle/>
-          <a:p>
-            <a:pPr indent="0" marL="0">
-              <a:buNone/>
-            </a:pPr>
-            <a:r>
-              <a:rPr lang="en-US" sz="1500" b="1" dirty="0">
-                <a:solidFill>
-                  <a:srgbClr val="2E7D32"/>
-                </a:solidFill>
-                <a:latin typeface="Calibri" pitchFamily="34" charset="0"/>
-                <a:ea typeface="Calibri" pitchFamily="34" charset="-122"/>
-                <a:cs typeface="Calibri" pitchFamily="34" charset="-120"/>
-              </a:rPr>
-              <a:t>ANSWER  </a:t>
-            </a:r>
-            <a:pPr indent="0" marL="0">
-              <a:buNone/>
-            </a:pPr>
-            <a:r>
-              <a:rPr lang="en-US" sz="1500" b="1" dirty="0">
-                <a:solidFill>
-                  <a:srgbClr val="1B2A38"/>
-                </a:solidFill>
-                <a:latin typeface="Calibri" pitchFamily="34" charset="0"/>
-                <a:ea typeface="Calibri" pitchFamily="34" charset="-122"/>
-                <a:cs typeface="Calibri" pitchFamily="34" charset="-120"/>
-              </a:rPr>
-              <a:t>B — Inversely related, not standardized</a:t>
-            </a:r>
-            <a:endParaRPr lang="en-US" sz="1500" dirty="0"/>
-          </a:p>
-        </p:txBody>
-      </p:sp>
-      <p:sp>
-        <p:nvSpPr>
-          <p:cNvPr id="8" name="Text 6"/>
-          <p:cNvSpPr/>
-          <p:nvPr/>
-        </p:nvSpPr>
-        <p:spPr>
-          <a:xfrm>
-            <a:off x="7439376" y="3127248"/>
-            <a:ext cx="3947648" cy="2377440"/>
-          </a:xfrm>
-          <a:prstGeom prst="rect">
-            <a:avLst/>
-          </a:prstGeom>
-          <a:noFill/>
-          <a:ln/>
-        </p:spPr>
-        <p:txBody>
-          <a:bodyPr wrap="square" lIns="0" tIns="0" rIns="0" bIns="0" rtlCol="0" anchor="t"/>
-          <a:lstStyle/>
-          <a:p>
-            <a:pPr algn="l" indent="0" marL="0">
-              <a:lnSpc>
-                <a:spcPct val="108000"/>
-              </a:lnSpc>
-              <a:buNone/>
-            </a:pPr>
-            <a:r>
-              <a:rPr lang="en-US" sz="1250" dirty="0">
-                <a:solidFill>
-                  <a:srgbClr val="33444F"/>
-                </a:solidFill>
-                <a:latin typeface="Calibri" pitchFamily="34" charset="0"/>
-                <a:ea typeface="Calibri" pitchFamily="34" charset="-122"/>
-                <a:cs typeface="Calibri" pitchFamily="34" charset="-120"/>
-              </a:rPr>
-              <a:t>Ct inversely reflects target quantity but is affected by pre-analytic/assay factors and is not a validated quantitative viral load.</a:t>
-            </a:r>
-            <a:endParaRPr lang="en-US" sz="1250" dirty="0"/>
           </a:p>
         </p:txBody>
       </p:sp>
@@ -10654,6 +10262,10 @@
           </a:solidFill>
           <a:ln/>
         </p:spPr>
+        <p:txBody>
+          <a:bodyPr/>
+          <a:p/>
+        </p:txBody>
       </p:sp>
       <p:sp>
         <p:nvSpPr>
@@ -10681,6 +10293,10 @@
             </a:outerShdw>
           </a:effectLst>
         </p:spPr>
+        <p:txBody>
+          <a:bodyPr/>
+          <a:p/>
+        </p:txBody>
       </p:sp>
       <p:sp>
         <p:nvSpPr>
@@ -10781,6 +10397,10 @@
           </a:solidFill>
           <a:ln/>
         </p:spPr>
+        <p:txBody>
+          <a:bodyPr/>
+          <a:p/>
+        </p:txBody>
       </p:sp>
       <p:sp>
         <p:nvSpPr>
@@ -10808,6 +10428,10 @@
             </a:outerShdw>
           </a:effectLst>
         </p:spPr>
+        <p:txBody>
+          <a:bodyPr/>
+          <a:p/>
+        </p:txBody>
       </p:sp>
       <p:sp>
         <p:nvSpPr>
@@ -10908,6 +10532,10 @@
           </a:solidFill>
           <a:ln/>
         </p:spPr>
+        <p:txBody>
+          <a:bodyPr/>
+          <a:p/>
+        </p:txBody>
       </p:sp>
       <p:sp>
         <p:nvSpPr>
@@ -10935,6 +10563,10 @@
             </a:outerShdw>
           </a:effectLst>
         </p:spPr>
+        <p:txBody>
+          <a:bodyPr/>
+          <a:p/>
+        </p:txBody>
       </p:sp>
       <p:sp>
         <p:nvSpPr>
@@ -11035,6 +10667,10 @@
           </a:solidFill>
           <a:ln/>
         </p:spPr>
+        <p:txBody>
+          <a:bodyPr/>
+          <a:p/>
+        </p:txBody>
       </p:sp>
       <p:sp>
         <p:nvSpPr>
@@ -11062,6 +10698,10 @@
             </a:outerShdw>
           </a:effectLst>
         </p:spPr>
+        <p:txBody>
+          <a:bodyPr/>
+          <a:p/>
+        </p:txBody>
       </p:sp>
       <p:sp>
         <p:nvSpPr>
@@ -11162,6 +10802,10 @@
           </a:solidFill>
           <a:ln/>
         </p:spPr>
+        <p:txBody>
+          <a:bodyPr/>
+          <a:p/>
+        </p:txBody>
       </p:sp>
       <p:sp>
         <p:nvSpPr>
@@ -11189,6 +10833,10 @@
             </a:outerShdw>
           </a:effectLst>
         </p:spPr>
+        <p:txBody>
+          <a:bodyPr/>
+          <a:p/>
+        </p:txBody>
       </p:sp>
       <p:sp>
         <p:nvSpPr>
@@ -11672,6 +11320,1982 @@
 </p:sld>
 </file>
 
+<file path=ppt/slides/slide26.xml><?xml version="1.0" encoding="utf-8"?>
+<p:sld xmlns:a="http://schemas.openxmlformats.org/drawingml/2006/main" xmlns:p="http://schemas.openxmlformats.org/presentationml/2006/main" xmlns:r="http://schemas.openxmlformats.org/officeDocument/2006/relationships">
+  <p:cSld>
+    <p:spTree>
+      <p:nvGrpSpPr>
+        <p:cNvPr id="1" name=""/>
+        <p:cNvGrpSpPr/>
+        <p:nvPr/>
+      </p:nvGrpSpPr>
+      <p:grpSpPr/>
+      <p:sp>
+        <p:nvSpPr>
+          <p:cNvPr id="2" name="Text 0"/>
+          <p:cNvSpPr/>
+          <p:nvPr/>
+        </p:nvSpPr>
+        <p:spPr>
+          <a:xfrm>
+            <a:off x="566928" y="329184"/>
+            <a:ext cx="10515600" cy="310896"/>
+          </a:xfrm>
+          <a:prstGeom prst="rect">
+            <a:avLst/>
+          </a:prstGeom>
+          <a:noFill/>
+          <a:ln/>
+        </p:spPr>
+        <p:txBody>
+          <a:bodyPr wrap="square" lIns="0" tIns="0" rIns="0" bIns="0" rtlCol="0" anchor="ctr"/>
+          <a:lstStyle/>
+          <a:p>
+            <a:pPr algn="l" indent="0" marL="0">
+              <a:buNone/>
+            </a:pPr>
+            <a:r>
+              <a:rPr lang="en-US" sz="1100" b="1" spc="150" kern="0" dirty="0">
+                <a:solidFill>
+                  <a:srgbClr val="2E7D32"/>
+                </a:solidFill>
+                <a:latin typeface="Calibri" pitchFamily="34" charset="0"/>
+                <a:ea typeface="Calibri" pitchFamily="34" charset="-122"/>
+                <a:cs typeface="Calibri" pitchFamily="34" charset="-120"/>
+              </a:rPr>
+              <a:t>MICROBIOLOGY   ·   BOARD REVIEW  ·  Q4</a:t>
+            </a:r>
+            <a:endParaRPr lang="en-US" sz="1100" dirty="0"/>
+          </a:p>
+        </p:txBody>
+      </p:sp>
+      <p:sp>
+        <p:nvSpPr>
+          <p:cNvPr id="3" name="Text 1"/>
+          <p:cNvSpPr/>
+          <p:nvPr/>
+        </p:nvSpPr>
+        <p:spPr>
+          <a:xfrm>
+            <a:off x="566928" y="713232"/>
+            <a:ext cx="11064240" cy="749808"/>
+          </a:xfrm>
+          <a:prstGeom prst="rect">
+            <a:avLst/>
+          </a:prstGeom>
+          <a:noFill/>
+          <a:ln/>
+        </p:spPr>
+        <p:txBody>
+          <a:bodyPr wrap="square" lIns="0" tIns="0" rIns="0" bIns="0" rtlCol="0" anchor="ctr"/>
+          <a:lstStyle/>
+          <a:p>
+            <a:pPr algn="l" indent="0" marL="0">
+              <a:buNone/>
+            </a:pPr>
+            <a:r>
+              <a:rPr lang="en-US" sz="2600" b="1" dirty="0">
+                <a:solidFill>
+                  <a:srgbClr val="0E3A5F"/>
+                </a:solidFill>
+                <a:latin typeface="Calibri" pitchFamily="34" charset="0"/>
+                <a:ea typeface="Calibri" pitchFamily="34" charset="-122"/>
+                <a:cs typeface="Calibri" pitchFamily="34" charset="-120"/>
+              </a:rPr>
+              <a:t>Board-Style Review</a:t>
+            </a:r>
+            <a:endParaRPr lang="en-US" sz="2600" dirty="0"/>
+          </a:p>
+        </p:txBody>
+      </p:sp>
+      <p:sp>
+        <p:nvSpPr>
+          <p:cNvPr id="4" name="Text 2"/>
+          <p:cNvSpPr/>
+          <p:nvPr/>
+        </p:nvSpPr>
+        <p:spPr>
+          <a:xfrm>
+            <a:off x="566928" y="1417320"/>
+            <a:ext cx="11057839" cy="914400"/>
+          </a:xfrm>
+          <a:prstGeom prst="rect">
+            <a:avLst/>
+          </a:prstGeom>
+          <a:noFill/>
+          <a:ln/>
+        </p:spPr>
+        <p:txBody>
+          <a:bodyPr wrap="square" lIns="0" tIns="0" rIns="0" bIns="0" rtlCol="0" anchor="t"/>
+          <a:lstStyle/>
+          <a:p>
+            <a:pPr algn="l" indent="0" marL="0">
+              <a:lnSpc>
+                <a:spcPct val="105000"/>
+              </a:lnSpc>
+              <a:buNone/>
+            </a:pPr>
+            <a:r>
+              <a:rPr lang="en-US" sz="1450" b="1" dirty="0">
+                <a:solidFill>
+                  <a:srgbClr val="1B2A38"/>
+                </a:solidFill>
+                <a:latin typeface="Calibri" pitchFamily="34" charset="0"/>
+                <a:ea typeface="Calibri" pitchFamily="34" charset="-122"/>
+                <a:cs typeface="Calibri" pitchFamily="34" charset="-120"/>
+              </a:rPr>
+              <a:t>Cycle threshold (Ct) values should be interpreted as:</a:t>
+            </a:r>
+            <a:endParaRPr lang="en-US" sz="1450" dirty="0"/>
+          </a:p>
+        </p:txBody>
+      </p:sp>
+      <p:sp>
+        <p:nvSpPr>
+          <p:cNvPr id="5" name="Text 3"/>
+          <p:cNvSpPr/>
+          <p:nvPr/>
+        </p:nvSpPr>
+        <p:spPr>
+          <a:xfrm>
+            <a:off x="658368" y="2395728"/>
+            <a:ext cx="6192390" cy="3017520"/>
+          </a:xfrm>
+          <a:prstGeom prst="rect">
+            <a:avLst/>
+          </a:prstGeom>
+          <a:noFill/>
+          <a:ln/>
+        </p:spPr>
+        <p:txBody>
+          <a:bodyPr wrap="square" lIns="0" tIns="0" rIns="0" bIns="0" rtlCol="0" anchor="t"/>
+          <a:lstStyle/>
+          <a:p>
+            <a:pPr algn="l" indent="0" marL="0">
+              <a:spcAft>
+                <a:spcPts val="600"/>
+              </a:spcAft>
+              <a:buNone/>
+            </a:pPr>
+            <a:r>
+              <a:rPr lang="en-US" sz="1350" dirty="0">
+                <a:solidFill>
+                  <a:srgbClr val="33444F"/>
+                </a:solidFill>
+                <a:latin typeface="Calibri" pitchFamily="34" charset="0"/>
+                <a:ea typeface="Calibri" pitchFamily="34" charset="-122"/>
+                <a:cs typeface="Calibri" pitchFamily="34" charset="-120"/>
+              </a:rPr>
+              <a:t>A. A standardized viral load</a:t>
+            </a:r>
+            <a:endParaRPr lang="en-US" sz="1350" dirty="0"/>
+          </a:p>
+          <a:p>
+            <a:pPr algn="l" indent="0" marL="0">
+              <a:spcAft>
+                <a:spcPts val="600"/>
+              </a:spcAft>
+              <a:buNone/>
+            </a:pPr>
+            <a:r>
+              <a:rPr lang="en-US" sz="1350" b="1" dirty="0">
+                <a:solidFill>
+                  <a:srgbClr val="1F5722"/>
+                </a:solidFill>
+                <a:latin typeface="Calibri" pitchFamily="34" charset="0"/>
+                <a:ea typeface="Calibri" pitchFamily="34" charset="-122"/>
+                <a:cs typeface="Calibri" pitchFamily="34" charset="-120"/>
+              </a:rPr>
+              <a:t>B. Inversely related to target amount but not a standardized quantitation</a:t>
+            </a:r>
+            <a:endParaRPr lang="en-US" sz="1350" dirty="0"/>
+          </a:p>
+          <a:p>
+            <a:pPr algn="l" indent="0" marL="0">
+              <a:spcAft>
+                <a:spcPts val="600"/>
+              </a:spcAft>
+              <a:buNone/>
+            </a:pPr>
+            <a:r>
+              <a:rPr lang="en-US" sz="1350" dirty="0">
+                <a:solidFill>
+                  <a:srgbClr val="33444F"/>
+                </a:solidFill>
+                <a:latin typeface="Calibri" pitchFamily="34" charset="0"/>
+                <a:ea typeface="Calibri" pitchFamily="34" charset="-122"/>
+                <a:cs typeface="Calibri" pitchFamily="34" charset="-120"/>
+              </a:rPr>
+              <a:t>C. Directly proportional to target amount</a:t>
+            </a:r>
+            <a:endParaRPr lang="en-US" sz="1350" dirty="0"/>
+          </a:p>
+          <a:p>
+            <a:pPr algn="l" indent="0" marL="0">
+              <a:spcAft>
+                <a:spcPts val="600"/>
+              </a:spcAft>
+              <a:buNone/>
+            </a:pPr>
+            <a:r>
+              <a:rPr lang="en-US" sz="1350" dirty="0">
+                <a:solidFill>
+                  <a:srgbClr val="33444F"/>
+                </a:solidFill>
+                <a:latin typeface="Calibri" pitchFamily="34" charset="0"/>
+                <a:ea typeface="Calibri" pitchFamily="34" charset="-122"/>
+                <a:cs typeface="Calibri" pitchFamily="34" charset="-120"/>
+              </a:rPr>
+              <a:t>D. Irrelevant to target quantity</a:t>
+            </a:r>
+            <a:endParaRPr lang="en-US" sz="1350" dirty="0"/>
+          </a:p>
+          <a:p>
+            <a:pPr algn="l" indent="0" marL="0">
+              <a:spcAft>
+                <a:spcPts val="600"/>
+              </a:spcAft>
+              <a:buNone/>
+            </a:pPr>
+            <a:r>
+              <a:rPr lang="en-US" sz="1350" dirty="0">
+                <a:solidFill>
+                  <a:srgbClr val="33444F"/>
+                </a:solidFill>
+                <a:latin typeface="Calibri" pitchFamily="34" charset="0"/>
+                <a:ea typeface="Calibri" pitchFamily="34" charset="-122"/>
+                <a:cs typeface="Calibri" pitchFamily="34" charset="-120"/>
+              </a:rPr>
+              <a:t>E. A susceptibility measure</a:t>
+            </a:r>
+            <a:endParaRPr lang="en-US" sz="1350" dirty="0"/>
+          </a:p>
+        </p:txBody>
+      </p:sp>
+      <p:sp>
+        <p:nvSpPr>
+          <p:cNvPr id="6" name="Shape 4"/>
+          <p:cNvSpPr/>
+          <p:nvPr/>
+        </p:nvSpPr>
+        <p:spPr>
+          <a:xfrm>
+            <a:off x="7201632" y="2395728"/>
+            <a:ext cx="4423136" cy="3246120"/>
+          </a:xfrm>
+          <a:prstGeom prst="roundRect">
+            <a:avLst>
+              <a:gd name="adj" fmla="val 2535"/>
+            </a:avLst>
+          </a:prstGeom>
+          <a:solidFill>
+            <a:srgbClr val="E8F2E9"/>
+          </a:solidFill>
+          <a:ln/>
+          <a:effectLst>
+            <a:outerShdw sx="100000" sy="100000" kx="0" ky="0" algn="bl" rotWithShape="0" blurRad="88900" dist="25400" dir="5400000">
+              <a:srgbClr val="22303C">
+                <a:alpha val="12000"/>
+              </a:srgbClr>
+            </a:outerShdw>
+          </a:effectLst>
+        </p:spPr>
+        <p:txBody>
+          <a:bodyPr/>
+          <a:p/>
+        </p:txBody>
+      </p:sp>
+      <p:sp>
+        <p:nvSpPr>
+          <p:cNvPr id="7" name="Text 5"/>
+          <p:cNvSpPr/>
+          <p:nvPr/>
+        </p:nvSpPr>
+        <p:spPr>
+          <a:xfrm>
+            <a:off x="7439376" y="2578608"/>
+            <a:ext cx="3965936" cy="457200"/>
+          </a:xfrm>
+          <a:prstGeom prst="rect">
+            <a:avLst/>
+          </a:prstGeom>
+          <a:noFill/>
+          <a:ln/>
+        </p:spPr>
+        <p:txBody>
+          <a:bodyPr wrap="square" lIns="0" tIns="0" rIns="0" bIns="0" rtlCol="0" anchor="ctr"/>
+          <a:lstStyle/>
+          <a:p>
+            <a:pPr indent="0" marL="0">
+              <a:buNone/>
+            </a:pPr>
+            <a:r>
+              <a:rPr lang="en-US" sz="1500" b="1" dirty="0">
+                <a:solidFill>
+                  <a:srgbClr val="2E7D32"/>
+                </a:solidFill>
+                <a:latin typeface="Calibri" pitchFamily="34" charset="0"/>
+                <a:ea typeface="Calibri" pitchFamily="34" charset="-122"/>
+                <a:cs typeface="Calibri" pitchFamily="34" charset="-120"/>
+              </a:rPr>
+              <a:t>ANSWER  </a:t>
+            </a:r>
+            <a:pPr indent="0" marL="0">
+              <a:buNone/>
+            </a:pPr>
+            <a:r>
+              <a:rPr lang="en-US" sz="1500" b="1" dirty="0">
+                <a:solidFill>
+                  <a:srgbClr val="1B2A38"/>
+                </a:solidFill>
+                <a:latin typeface="Calibri" pitchFamily="34" charset="0"/>
+                <a:ea typeface="Calibri" pitchFamily="34" charset="-122"/>
+                <a:cs typeface="Calibri" pitchFamily="34" charset="-120"/>
+              </a:rPr>
+              <a:t>B — Inversely related, not standardized</a:t>
+            </a:r>
+            <a:endParaRPr lang="en-US" sz="1500" dirty="0"/>
+          </a:p>
+        </p:txBody>
+      </p:sp>
+      <p:sp>
+        <p:nvSpPr>
+          <p:cNvPr id="8" name="Text 6"/>
+          <p:cNvSpPr/>
+          <p:nvPr/>
+        </p:nvSpPr>
+        <p:spPr>
+          <a:xfrm>
+            <a:off x="7439376" y="3127248"/>
+            <a:ext cx="3947648" cy="2377440"/>
+          </a:xfrm>
+          <a:prstGeom prst="rect">
+            <a:avLst/>
+          </a:prstGeom>
+          <a:noFill/>
+          <a:ln/>
+        </p:spPr>
+        <p:txBody>
+          <a:bodyPr wrap="square" lIns="0" tIns="0" rIns="0" bIns="0" rtlCol="0" anchor="t"/>
+          <a:lstStyle/>
+          <a:p>
+            <a:pPr algn="l" indent="0" marL="0">
+              <a:lnSpc>
+                <a:spcPct val="108000"/>
+              </a:lnSpc>
+              <a:buNone/>
+            </a:pPr>
+            <a:r>
+              <a:rPr lang="en-US" sz="1250" dirty="0">
+                <a:solidFill>
+                  <a:srgbClr val="33444F"/>
+                </a:solidFill>
+                <a:latin typeface="Calibri" pitchFamily="34" charset="0"/>
+                <a:ea typeface="Calibri" pitchFamily="34" charset="-122"/>
+                <a:cs typeface="Calibri" pitchFamily="34" charset="-120"/>
+              </a:rPr>
+              <a:t>Ct inversely reflects target quantity but is affected by pre-analytic/assay factors and is not a validated quantitative viral load.</a:t>
+            </a:r>
+            <a:endParaRPr lang="en-US" sz="1250" dirty="0"/>
+          </a:p>
+        </p:txBody>
+      </p:sp>
+      <p:sp>
+        <p:nvSpPr>
+          <p:cNvPr id="9" name="Text 7"/>
+          <p:cNvSpPr/>
+          <p:nvPr/>
+        </p:nvSpPr>
+        <p:spPr>
+          <a:xfrm>
+            <a:off x="566928" y="6473952"/>
+            <a:ext cx="7772400" cy="274320"/>
+          </a:xfrm>
+          <a:prstGeom prst="rect">
+            <a:avLst/>
+          </a:prstGeom>
+          <a:noFill/>
+          <a:ln/>
+        </p:spPr>
+        <p:txBody>
+          <a:bodyPr wrap="square" lIns="0" tIns="0" rIns="0" bIns="0" rtlCol="0" anchor="ctr"/>
+          <a:lstStyle/>
+          <a:p>
+            <a:pPr algn="l" indent="0" marL="0">
+              <a:buNone/>
+            </a:pPr>
+            <a:r>
+              <a:rPr lang="en-US" sz="850" dirty="0">
+                <a:solidFill>
+                  <a:srgbClr val="9AA8B4"/>
+                </a:solidFill>
+                <a:latin typeface="Calibri" pitchFamily="34" charset="0"/>
+                <a:ea typeface="Calibri" pitchFamily="34" charset="-122"/>
+                <a:cs typeface="Calibri" pitchFamily="34" charset="-120"/>
+              </a:rPr>
+              <a:t>Makassed General Hospital  ·  Department of Laboratory Medicine</a:t>
+            </a:r>
+            <a:endParaRPr lang="en-US" sz="850" dirty="0"/>
+          </a:p>
+        </p:txBody>
+      </p:sp>
+      <p:sp>
+        <p:nvSpPr>
+          <p:cNvPr id="10" name="Text 8"/>
+          <p:cNvSpPr/>
+          <p:nvPr/>
+        </p:nvSpPr>
+        <p:spPr>
+          <a:xfrm>
+            <a:off x="9814255" y="6473952"/>
+            <a:ext cx="1828800" cy="274320"/>
+          </a:xfrm>
+          <a:prstGeom prst="rect">
+            <a:avLst/>
+          </a:prstGeom>
+          <a:noFill/>
+          <a:ln/>
+        </p:spPr>
+        <p:txBody>
+          <a:bodyPr wrap="square" lIns="0" tIns="0" rIns="0" bIns="0" rtlCol="0" anchor="ctr"/>
+          <a:lstStyle/>
+          <a:p>
+            <a:pPr algn="r" indent="0" marL="0">
+              <a:buNone/>
+            </a:pPr>
+            <a:r>
+              <a:rPr lang="en-US" sz="850" dirty="0">
+                <a:solidFill>
+                  <a:srgbClr val="9AA8B4"/>
+                </a:solidFill>
+                <a:latin typeface="Calibri" pitchFamily="34" charset="0"/>
+                <a:ea typeface="Calibri" pitchFamily="34" charset="-122"/>
+                <a:cs typeface="Calibri" pitchFamily="34" charset="-120"/>
+              </a:rPr>
+              <a:t>CP Lecture Series</a:t>
+            </a:r>
+            <a:pPr algn="r" indent="0" marL="0">
+              <a:buNone/>
+            </a:pPr>
+            <a:r>
+              <a:rPr lang="en-US" sz="850" dirty="0">
+                <a:solidFill>
+                  <a:srgbClr val="DCE4EC"/>
+                </a:solidFill>
+                <a:latin typeface="Calibri" pitchFamily="34" charset="0"/>
+                <a:ea typeface="Calibri" pitchFamily="34" charset="-122"/>
+                <a:cs typeface="Calibri" pitchFamily="34" charset="-120"/>
+              </a:rPr>
+              <a:t>   ·   </a:t>
+            </a:r>
+            <a:pPr algn="r" indent="0" marL="0">
+              <a:buNone/>
+            </a:pPr>
+            <a:r>
+              <a:rPr lang="en-US" sz="850" b="1" dirty="0">
+                <a:solidFill>
+                  <a:srgbClr val="2E7D32"/>
+                </a:solidFill>
+                <a:latin typeface="Calibri" pitchFamily="34" charset="0"/>
+                <a:ea typeface="Calibri" pitchFamily="34" charset="-122"/>
+                <a:cs typeface="Calibri" pitchFamily="34" charset="-120"/>
+              </a:rPr>
+              <a:t>20</a:t>
+            </a:r>
+            <a:endParaRPr lang="en-US" sz="850" dirty="0"/>
+          </a:p>
+        </p:txBody>
+      </p:sp>
+    </p:spTree>
+  </p:cSld>
+  <p:clrMapOvr>
+    <a:masterClrMapping/>
+  </p:clrMapOvr>
+</p:sld>
+</file>
+
+<file path=ppt/slides/slide27.xml><?xml version="1.0" encoding="utf-8"?>
+<p:sld xmlns:a="http://schemas.openxmlformats.org/drawingml/2006/main" xmlns:p="http://schemas.openxmlformats.org/presentationml/2006/main" xmlns:r="http://schemas.openxmlformats.org/officeDocument/2006/relationships">
+  <p:cSld>
+    <p:spTree>
+      <p:nvGrpSpPr>
+        <p:cNvPr id="1" name=""/>
+        <p:cNvGrpSpPr/>
+        <p:nvPr/>
+      </p:nvGrpSpPr>
+      <p:grpSpPr/>
+      <p:sp>
+        <p:nvSpPr>
+          <p:cNvPr id="2" name="Text 0"/>
+          <p:cNvSpPr/>
+          <p:nvPr/>
+        </p:nvSpPr>
+        <p:spPr>
+          <a:xfrm>
+            <a:off x="566928" y="329184"/>
+            <a:ext cx="10515600" cy="310896"/>
+          </a:xfrm>
+          <a:prstGeom prst="rect">
+            <a:avLst/>
+          </a:prstGeom>
+          <a:noFill/>
+          <a:ln/>
+        </p:spPr>
+        <p:txBody>
+          <a:bodyPr wrap="square" lIns="0" tIns="0" rIns="0" bIns="0" rtlCol="0" anchor="ctr"/>
+          <a:lstStyle/>
+          <a:p>
+            <a:pPr algn="l" indent="0" marL="0">
+              <a:buNone/>
+            </a:pPr>
+            <a:r>
+              <a:rPr lang="en-US" sz="1100" b="1" spc="150" kern="0" dirty="0">
+                <a:solidFill>
+                  <a:srgbClr val="2E7D32"/>
+                </a:solidFill>
+                <a:latin typeface="Calibri" pitchFamily="34" charset="0"/>
+                <a:ea typeface="Calibri" pitchFamily="34" charset="-122"/>
+                <a:cs typeface="Calibri" pitchFamily="34" charset="-120"/>
+              </a:rPr>
+              <a:t>MICROBIOLOGY   ·   BOARD REVIEW  ·  Q3</a:t>
+            </a:r>
+            <a:endParaRPr lang="en-US" sz="1100" dirty="0"/>
+          </a:p>
+        </p:txBody>
+      </p:sp>
+      <p:sp>
+        <p:nvSpPr>
+          <p:cNvPr id="3" name="Text 1"/>
+          <p:cNvSpPr/>
+          <p:nvPr/>
+        </p:nvSpPr>
+        <p:spPr>
+          <a:xfrm>
+            <a:off x="566928" y="713232"/>
+            <a:ext cx="11064240" cy="749808"/>
+          </a:xfrm>
+          <a:prstGeom prst="rect">
+            <a:avLst/>
+          </a:prstGeom>
+          <a:noFill/>
+          <a:ln/>
+        </p:spPr>
+        <p:txBody>
+          <a:bodyPr wrap="square" lIns="0" tIns="0" rIns="0" bIns="0" rtlCol="0" anchor="ctr"/>
+          <a:lstStyle/>
+          <a:p>
+            <a:pPr algn="l" indent="0" marL="0">
+              <a:buNone/>
+            </a:pPr>
+            <a:r>
+              <a:rPr lang="en-US" sz="2600" b="1" dirty="0">
+                <a:solidFill>
+                  <a:srgbClr val="0E3A5F"/>
+                </a:solidFill>
+                <a:latin typeface="Calibri" pitchFamily="34" charset="0"/>
+                <a:ea typeface="Calibri" pitchFamily="34" charset="-122"/>
+                <a:cs typeface="Calibri" pitchFamily="34" charset="-120"/>
+              </a:rPr>
+              <a:t>Board-Style Review</a:t>
+            </a:r>
+            <a:endParaRPr lang="en-US" sz="2600" dirty="0"/>
+          </a:p>
+        </p:txBody>
+      </p:sp>
+      <p:sp>
+        <p:nvSpPr>
+          <p:cNvPr id="4" name="Text 2"/>
+          <p:cNvSpPr/>
+          <p:nvPr/>
+        </p:nvSpPr>
+        <p:spPr>
+          <a:xfrm>
+            <a:off x="566928" y="1417320"/>
+            <a:ext cx="11057839" cy="914400"/>
+          </a:xfrm>
+          <a:prstGeom prst="rect">
+            <a:avLst/>
+          </a:prstGeom>
+          <a:noFill/>
+          <a:ln/>
+        </p:spPr>
+        <p:txBody>
+          <a:bodyPr wrap="square" lIns="0" tIns="0" rIns="0" bIns="0" rtlCol="0" anchor="t"/>
+          <a:lstStyle/>
+          <a:p>
+            <a:pPr algn="l" indent="0" marL="0">
+              <a:lnSpc>
+                <a:spcPct val="105000"/>
+              </a:lnSpc>
+              <a:buNone/>
+            </a:pPr>
+            <a:r>
+              <a:rPr lang="en-US" sz="1450" b="1" dirty="0">
+                <a:solidFill>
+                  <a:srgbClr val="1B2A38"/>
+                </a:solidFill>
+                <a:latin typeface="Calibri" pitchFamily="34" charset="0"/>
+                <a:ea typeface="Calibri" pitchFamily="34" charset="-122"/>
+                <a:cs typeface="Calibri" pitchFamily="34" charset="-120"/>
+              </a:rPr>
+              <a:t>A key limitation of any syndromic molecular panel is that it:</a:t>
+            </a:r>
+            <a:endParaRPr lang="en-US" sz="1450" dirty="0"/>
+          </a:p>
+        </p:txBody>
+      </p:sp>
+      <p:sp>
+        <p:nvSpPr>
+          <p:cNvPr id="5" name="Text 3"/>
+          <p:cNvSpPr/>
+          <p:nvPr/>
+        </p:nvSpPr>
+        <p:spPr>
+          <a:xfrm>
+            <a:off x="658368" y="2395728"/>
+            <a:ext cx="6192390" cy="3017520"/>
+          </a:xfrm>
+          <a:prstGeom prst="rect">
+            <a:avLst/>
+          </a:prstGeom>
+          <a:noFill/>
+          <a:ln/>
+        </p:spPr>
+        <p:txBody>
+          <a:bodyPr wrap="square" lIns="0" tIns="0" rIns="0" bIns="0" rtlCol="0" anchor="t"/>
+          <a:lstStyle/>
+          <a:p>
+            <a:pPr algn="l" indent="0" marL="0">
+              <a:spcAft>
+                <a:spcPts val="600"/>
+              </a:spcAft>
+              <a:buNone/>
+            </a:pPr>
+            <a:r>
+              <a:rPr lang="en-US" sz="1350" b="1" dirty="0">
+                <a:solidFill>
+                  <a:srgbClr val="1F5722"/>
+                </a:solidFill>
+                <a:latin typeface="Calibri" pitchFamily="34" charset="0"/>
+                <a:ea typeface="Calibri" pitchFamily="34" charset="-122"/>
+                <a:cs typeface="Calibri" pitchFamily="34" charset="-120"/>
+              </a:rPr>
+              <a:t>A. Detects only its designed targets</a:t>
+            </a:r>
+            <a:endParaRPr lang="en-US" sz="1350" dirty="0"/>
+          </a:p>
+          <a:p>
+            <a:pPr algn="l" indent="0" marL="0">
+              <a:spcAft>
+                <a:spcPts val="600"/>
+              </a:spcAft>
+              <a:buNone/>
+            </a:pPr>
+            <a:r>
+              <a:rPr lang="en-US" sz="1350" dirty="0">
+                <a:solidFill>
+                  <a:srgbClr val="33444F"/>
+                </a:solidFill>
+                <a:latin typeface="Calibri" pitchFamily="34" charset="0"/>
+                <a:ea typeface="Calibri" pitchFamily="34" charset="-122"/>
+                <a:cs typeface="Calibri" pitchFamily="34" charset="-120"/>
+              </a:rPr>
+              <a:t>B. Always overcalls disease</a:t>
+            </a:r>
+            <a:endParaRPr lang="en-US" sz="1350" dirty="0"/>
+          </a:p>
+          <a:p>
+            <a:pPr algn="l" indent="0" marL="0">
+              <a:spcAft>
+                <a:spcPts val="600"/>
+              </a:spcAft>
+              <a:buNone/>
+            </a:pPr>
+            <a:r>
+              <a:rPr lang="en-US" sz="1350" dirty="0">
+                <a:solidFill>
+                  <a:srgbClr val="33444F"/>
+                </a:solidFill>
+                <a:latin typeface="Calibri" pitchFamily="34" charset="0"/>
+                <a:ea typeface="Calibri" pitchFamily="34" charset="-122"/>
+                <a:cs typeface="Calibri" pitchFamily="34" charset="-120"/>
+              </a:rPr>
+              <a:t>C. Cannot detect resistance genes</a:t>
+            </a:r>
+            <a:endParaRPr lang="en-US" sz="1350" dirty="0"/>
+          </a:p>
+          <a:p>
+            <a:pPr algn="l" indent="0" marL="0">
+              <a:spcAft>
+                <a:spcPts val="600"/>
+              </a:spcAft>
+              <a:buNone/>
+            </a:pPr>
+            <a:r>
+              <a:rPr lang="en-US" sz="1350" dirty="0">
+                <a:solidFill>
+                  <a:srgbClr val="33444F"/>
+                </a:solidFill>
+                <a:latin typeface="Calibri" pitchFamily="34" charset="0"/>
+                <a:ea typeface="Calibri" pitchFamily="34" charset="-122"/>
+                <a:cs typeface="Calibri" pitchFamily="34" charset="-120"/>
+              </a:rPr>
+              <a:t>D. Replaces culture entirely</a:t>
+            </a:r>
+            <a:endParaRPr lang="en-US" sz="1350" dirty="0"/>
+          </a:p>
+          <a:p>
+            <a:pPr algn="l" indent="0" marL="0">
+              <a:spcAft>
+                <a:spcPts val="600"/>
+              </a:spcAft>
+              <a:buNone/>
+            </a:pPr>
+            <a:r>
+              <a:rPr lang="en-US" sz="1350" dirty="0">
+                <a:solidFill>
+                  <a:srgbClr val="33444F"/>
+                </a:solidFill>
+                <a:latin typeface="Calibri" pitchFamily="34" charset="0"/>
+                <a:ea typeface="Calibri" pitchFamily="34" charset="-122"/>
+                <a:cs typeface="Calibri" pitchFamily="34" charset="-120"/>
+              </a:rPr>
+              <a:t>E. Provides full AST</a:t>
+            </a:r>
+            <a:endParaRPr lang="en-US" sz="1350" dirty="0"/>
+          </a:p>
+        </p:txBody>
+      </p:sp>
+      <p:sp>
+        <p:nvSpPr>
+          <p:cNvPr id="6" name="Shape 4"/>
+          <p:cNvSpPr/>
+          <p:nvPr/>
+        </p:nvSpPr>
+        <p:spPr>
+          <a:xfrm>
+            <a:off x="7201632" y="2395728"/>
+            <a:ext cx="4423136" cy="3246120"/>
+          </a:xfrm>
+          <a:prstGeom prst="roundRect">
+            <a:avLst>
+              <a:gd name="adj" fmla="val 2535"/>
+            </a:avLst>
+          </a:prstGeom>
+          <a:solidFill>
+            <a:srgbClr val="E8F2E9"/>
+          </a:solidFill>
+          <a:ln/>
+          <a:effectLst>
+            <a:outerShdw sx="100000" sy="100000" kx="0" ky="0" algn="bl" rotWithShape="0" blurRad="88900" dist="25400" dir="5400000">
+              <a:srgbClr val="22303C">
+                <a:alpha val="12000"/>
+              </a:srgbClr>
+            </a:outerShdw>
+          </a:effectLst>
+        </p:spPr>
+        <p:txBody>
+          <a:bodyPr/>
+          <a:p/>
+        </p:txBody>
+      </p:sp>
+      <p:sp>
+        <p:nvSpPr>
+          <p:cNvPr id="7" name="Text 5"/>
+          <p:cNvSpPr/>
+          <p:nvPr/>
+        </p:nvSpPr>
+        <p:spPr>
+          <a:xfrm>
+            <a:off x="7439376" y="2578608"/>
+            <a:ext cx="3965936" cy="457200"/>
+          </a:xfrm>
+          <a:prstGeom prst="rect">
+            <a:avLst/>
+          </a:prstGeom>
+          <a:noFill/>
+          <a:ln/>
+        </p:spPr>
+        <p:txBody>
+          <a:bodyPr wrap="square" lIns="0" tIns="0" rIns="0" bIns="0" rtlCol="0" anchor="ctr"/>
+          <a:lstStyle/>
+          <a:p>
+            <a:pPr indent="0" marL="0">
+              <a:buNone/>
+            </a:pPr>
+            <a:r>
+              <a:rPr lang="en-US" sz="1500" b="1" dirty="0">
+                <a:solidFill>
+                  <a:srgbClr val="2E7D32"/>
+                </a:solidFill>
+                <a:latin typeface="Calibri" pitchFamily="34" charset="0"/>
+                <a:ea typeface="Calibri" pitchFamily="34" charset="-122"/>
+                <a:cs typeface="Calibri" pitchFamily="34" charset="-120"/>
+              </a:rPr>
+              <a:t>ANSWER  </a:t>
+            </a:r>
+            <a:pPr indent="0" marL="0">
+              <a:buNone/>
+            </a:pPr>
+            <a:r>
+              <a:rPr lang="en-US" sz="1500" b="1" dirty="0">
+                <a:solidFill>
+                  <a:srgbClr val="1B2A38"/>
+                </a:solidFill>
+                <a:latin typeface="Calibri" pitchFamily="34" charset="0"/>
+                <a:ea typeface="Calibri" pitchFamily="34" charset="-122"/>
+                <a:cs typeface="Calibri" pitchFamily="34" charset="-120"/>
+              </a:rPr>
+              <a:t>A — Detects only designed targets</a:t>
+            </a:r>
+            <a:endParaRPr lang="en-US" sz="1500" dirty="0"/>
+          </a:p>
+        </p:txBody>
+      </p:sp>
+      <p:sp>
+        <p:nvSpPr>
+          <p:cNvPr id="8" name="Text 6"/>
+          <p:cNvSpPr/>
+          <p:nvPr/>
+        </p:nvSpPr>
+        <p:spPr>
+          <a:xfrm>
+            <a:off x="7439376" y="3127248"/>
+            <a:ext cx="3947648" cy="2377440"/>
+          </a:xfrm>
+          <a:prstGeom prst="rect">
+            <a:avLst/>
+          </a:prstGeom>
+          <a:noFill/>
+          <a:ln/>
+        </p:spPr>
+        <p:txBody>
+          <a:bodyPr wrap="square" lIns="0" tIns="0" rIns="0" bIns="0" rtlCol="0" anchor="t"/>
+          <a:lstStyle/>
+          <a:p>
+            <a:pPr algn="l" indent="0" marL="0">
+              <a:lnSpc>
+                <a:spcPct val="108000"/>
+              </a:lnSpc>
+              <a:buNone/>
+            </a:pPr>
+            <a:r>
+              <a:rPr lang="en-US" sz="1250" dirty="0">
+                <a:solidFill>
+                  <a:srgbClr val="33444F"/>
+                </a:solidFill>
+                <a:latin typeface="Calibri" pitchFamily="34" charset="0"/>
+                <a:ea typeface="Calibri" pitchFamily="34" charset="-122"/>
+                <a:cs typeface="Calibri" pitchFamily="34" charset="-120"/>
+              </a:rPr>
+              <a:t>A negative panel does not exclude off-panel pathogens, and culture is still needed for full susceptibility and novel resistance.</a:t>
+            </a:r>
+            <a:endParaRPr lang="en-US" sz="1250" dirty="0"/>
+          </a:p>
+        </p:txBody>
+      </p:sp>
+      <p:sp>
+        <p:nvSpPr>
+          <p:cNvPr id="9" name="Text 7"/>
+          <p:cNvSpPr/>
+          <p:nvPr/>
+        </p:nvSpPr>
+        <p:spPr>
+          <a:xfrm>
+            <a:off x="566928" y="6473952"/>
+            <a:ext cx="7772400" cy="274320"/>
+          </a:xfrm>
+          <a:prstGeom prst="rect">
+            <a:avLst/>
+          </a:prstGeom>
+          <a:noFill/>
+          <a:ln/>
+        </p:spPr>
+        <p:txBody>
+          <a:bodyPr wrap="square" lIns="0" tIns="0" rIns="0" bIns="0" rtlCol="0" anchor="ctr"/>
+          <a:lstStyle/>
+          <a:p>
+            <a:pPr algn="l" indent="0" marL="0">
+              <a:buNone/>
+            </a:pPr>
+            <a:r>
+              <a:rPr lang="en-US" sz="850" dirty="0">
+                <a:solidFill>
+                  <a:srgbClr val="9AA8B4"/>
+                </a:solidFill>
+                <a:latin typeface="Calibri" pitchFamily="34" charset="0"/>
+                <a:ea typeface="Calibri" pitchFamily="34" charset="-122"/>
+                <a:cs typeface="Calibri" pitchFamily="34" charset="-120"/>
+              </a:rPr>
+              <a:t>Makassed General Hospital  ·  Department of Laboratory Medicine</a:t>
+            </a:r>
+            <a:endParaRPr lang="en-US" sz="850" dirty="0"/>
+          </a:p>
+        </p:txBody>
+      </p:sp>
+      <p:sp>
+        <p:nvSpPr>
+          <p:cNvPr id="10" name="Text 8"/>
+          <p:cNvSpPr/>
+          <p:nvPr/>
+        </p:nvSpPr>
+        <p:spPr>
+          <a:xfrm>
+            <a:off x="9814255" y="6473952"/>
+            <a:ext cx="1828800" cy="274320"/>
+          </a:xfrm>
+          <a:prstGeom prst="rect">
+            <a:avLst/>
+          </a:prstGeom>
+          <a:noFill/>
+          <a:ln/>
+        </p:spPr>
+        <p:txBody>
+          <a:bodyPr wrap="square" lIns="0" tIns="0" rIns="0" bIns="0" rtlCol="0" anchor="ctr"/>
+          <a:lstStyle/>
+          <a:p>
+            <a:pPr algn="r" indent="0" marL="0">
+              <a:buNone/>
+            </a:pPr>
+            <a:r>
+              <a:rPr lang="en-US" sz="850" dirty="0">
+                <a:solidFill>
+                  <a:srgbClr val="9AA8B4"/>
+                </a:solidFill>
+                <a:latin typeface="Calibri" pitchFamily="34" charset="0"/>
+                <a:ea typeface="Calibri" pitchFamily="34" charset="-122"/>
+                <a:cs typeface="Calibri" pitchFamily="34" charset="-120"/>
+              </a:rPr>
+              <a:t>CP Lecture Series</a:t>
+            </a:r>
+            <a:pPr algn="r" indent="0" marL="0">
+              <a:buNone/>
+            </a:pPr>
+            <a:r>
+              <a:rPr lang="en-US" sz="850" dirty="0">
+                <a:solidFill>
+                  <a:srgbClr val="DCE4EC"/>
+                </a:solidFill>
+                <a:latin typeface="Calibri" pitchFamily="34" charset="0"/>
+                <a:ea typeface="Calibri" pitchFamily="34" charset="-122"/>
+                <a:cs typeface="Calibri" pitchFamily="34" charset="-120"/>
+              </a:rPr>
+              <a:t>   ·   </a:t>
+            </a:r>
+            <a:pPr algn="r" indent="0" marL="0">
+              <a:buNone/>
+            </a:pPr>
+            <a:r>
+              <a:rPr lang="en-US" sz="850" b="1" dirty="0">
+                <a:solidFill>
+                  <a:srgbClr val="2E7D32"/>
+                </a:solidFill>
+                <a:latin typeface="Calibri" pitchFamily="34" charset="0"/>
+                <a:ea typeface="Calibri" pitchFamily="34" charset="-122"/>
+                <a:cs typeface="Calibri" pitchFamily="34" charset="-120"/>
+              </a:rPr>
+              <a:t>19</a:t>
+            </a:r>
+            <a:endParaRPr lang="en-US" sz="850" dirty="0"/>
+          </a:p>
+        </p:txBody>
+      </p:sp>
+    </p:spTree>
+  </p:cSld>
+  <p:clrMapOvr>
+    <a:masterClrMapping/>
+  </p:clrMapOvr>
+</p:sld>
+</file>
+
+<file path=ppt/slides/slide28.xml><?xml version="1.0" encoding="utf-8"?>
+<p:sld xmlns:a="http://schemas.openxmlformats.org/drawingml/2006/main" xmlns:p="http://schemas.openxmlformats.org/presentationml/2006/main" xmlns:r="http://schemas.openxmlformats.org/officeDocument/2006/relationships">
+  <p:cSld>
+    <p:spTree>
+      <p:nvGrpSpPr>
+        <p:cNvPr id="1" name=""/>
+        <p:cNvGrpSpPr/>
+        <p:nvPr/>
+      </p:nvGrpSpPr>
+      <p:grpSpPr/>
+      <p:sp>
+        <p:nvSpPr>
+          <p:cNvPr id="2" name="Text 0"/>
+          <p:cNvSpPr/>
+          <p:nvPr/>
+        </p:nvSpPr>
+        <p:spPr>
+          <a:xfrm>
+            <a:off x="566928" y="329184"/>
+            <a:ext cx="10515600" cy="310896"/>
+          </a:xfrm>
+          <a:prstGeom prst="rect">
+            <a:avLst/>
+          </a:prstGeom>
+          <a:noFill/>
+          <a:ln/>
+        </p:spPr>
+        <p:txBody>
+          <a:bodyPr wrap="square" lIns="0" tIns="0" rIns="0" bIns="0" rtlCol="0" anchor="ctr"/>
+          <a:lstStyle/>
+          <a:p>
+            <a:pPr algn="l" indent="0" marL="0">
+              <a:buNone/>
+            </a:pPr>
+            <a:r>
+              <a:rPr lang="en-US" sz="1100" b="1" spc="150" kern="0" dirty="0">
+                <a:solidFill>
+                  <a:srgbClr val="2E7D32"/>
+                </a:solidFill>
+                <a:latin typeface="Calibri" pitchFamily="34" charset="0"/>
+                <a:ea typeface="Calibri" pitchFamily="34" charset="-122"/>
+                <a:cs typeface="Calibri" pitchFamily="34" charset="-120"/>
+              </a:rPr>
+              <a:t>MICROBIOLOGY   ·   BOARD REVIEW  ·  Q2</a:t>
+            </a:r>
+            <a:endParaRPr lang="en-US" sz="1100" dirty="0"/>
+          </a:p>
+        </p:txBody>
+      </p:sp>
+      <p:sp>
+        <p:nvSpPr>
+          <p:cNvPr id="3" name="Text 1"/>
+          <p:cNvSpPr/>
+          <p:nvPr/>
+        </p:nvSpPr>
+        <p:spPr>
+          <a:xfrm>
+            <a:off x="566928" y="713232"/>
+            <a:ext cx="11064240" cy="749808"/>
+          </a:xfrm>
+          <a:prstGeom prst="rect">
+            <a:avLst/>
+          </a:prstGeom>
+          <a:noFill/>
+          <a:ln/>
+        </p:spPr>
+        <p:txBody>
+          <a:bodyPr wrap="square" lIns="0" tIns="0" rIns="0" bIns="0" rtlCol="0" anchor="ctr"/>
+          <a:lstStyle/>
+          <a:p>
+            <a:pPr algn="l" indent="0" marL="0">
+              <a:buNone/>
+            </a:pPr>
+            <a:r>
+              <a:rPr lang="en-US" sz="2600" b="1" dirty="0">
+                <a:solidFill>
+                  <a:srgbClr val="0E3A5F"/>
+                </a:solidFill>
+                <a:latin typeface="Calibri" pitchFamily="34" charset="0"/>
+                <a:ea typeface="Calibri" pitchFamily="34" charset="-122"/>
+                <a:cs typeface="Calibri" pitchFamily="34" charset="-120"/>
+              </a:rPr>
+              <a:t>Board-Style Review</a:t>
+            </a:r>
+            <a:endParaRPr lang="en-US" sz="2600" dirty="0"/>
+          </a:p>
+        </p:txBody>
+      </p:sp>
+      <p:sp>
+        <p:nvSpPr>
+          <p:cNvPr id="4" name="Text 2"/>
+          <p:cNvSpPr/>
+          <p:nvPr/>
+        </p:nvSpPr>
+        <p:spPr>
+          <a:xfrm>
+            <a:off x="566928" y="1417320"/>
+            <a:ext cx="11057839" cy="914400"/>
+          </a:xfrm>
+          <a:prstGeom prst="rect">
+            <a:avLst/>
+          </a:prstGeom>
+          <a:noFill/>
+          <a:ln/>
+        </p:spPr>
+        <p:txBody>
+          <a:bodyPr wrap="square" lIns="0" tIns="0" rIns="0" bIns="0" rtlCol="0" anchor="t"/>
+          <a:lstStyle/>
+          <a:p>
+            <a:pPr algn="l" indent="0" marL="0">
+              <a:lnSpc>
+                <a:spcPct val="105000"/>
+              </a:lnSpc>
+              <a:buNone/>
+            </a:pPr>
+            <a:r>
+              <a:rPr lang="en-US" sz="1450" b="1" dirty="0">
+                <a:solidFill>
+                  <a:srgbClr val="1B2A38"/>
+                </a:solidFill>
+                <a:latin typeface="Calibri" pitchFamily="34" charset="0"/>
+                <a:ea typeface="Calibri" pitchFamily="34" charset="-122"/>
+                <a:cs typeface="Calibri" pitchFamily="34" charset="-120"/>
+              </a:rPr>
+              <a:t>Compared with NAAT, rapid antigen tests are generally:</a:t>
+            </a:r>
+            <a:endParaRPr lang="en-US" sz="1450" dirty="0"/>
+          </a:p>
+        </p:txBody>
+      </p:sp>
+      <p:sp>
+        <p:nvSpPr>
+          <p:cNvPr id="5" name="Text 3"/>
+          <p:cNvSpPr/>
+          <p:nvPr/>
+        </p:nvSpPr>
+        <p:spPr>
+          <a:xfrm>
+            <a:off x="658368" y="2395728"/>
+            <a:ext cx="6192390" cy="3017520"/>
+          </a:xfrm>
+          <a:prstGeom prst="rect">
+            <a:avLst/>
+          </a:prstGeom>
+          <a:noFill/>
+          <a:ln/>
+        </p:spPr>
+        <p:txBody>
+          <a:bodyPr wrap="square" lIns="0" tIns="0" rIns="0" bIns="0" rtlCol="0" anchor="t"/>
+          <a:lstStyle/>
+          <a:p>
+            <a:pPr algn="l" indent="0" marL="0">
+              <a:spcAft>
+                <a:spcPts val="600"/>
+              </a:spcAft>
+              <a:buNone/>
+            </a:pPr>
+            <a:r>
+              <a:rPr lang="en-US" sz="1350" dirty="0">
+                <a:solidFill>
+                  <a:srgbClr val="33444F"/>
+                </a:solidFill>
+                <a:latin typeface="Calibri" pitchFamily="34" charset="0"/>
+                <a:ea typeface="Calibri" pitchFamily="34" charset="-122"/>
+                <a:cs typeface="Calibri" pitchFamily="34" charset="-120"/>
+              </a:rPr>
+              <a:t>A. More sensitive</a:t>
+            </a:r>
+            <a:endParaRPr lang="en-US" sz="1350" dirty="0"/>
+          </a:p>
+          <a:p>
+            <a:pPr algn="l" indent="0" marL="0">
+              <a:spcAft>
+                <a:spcPts val="600"/>
+              </a:spcAft>
+              <a:buNone/>
+            </a:pPr>
+            <a:r>
+              <a:rPr lang="en-US" sz="1350" b="1" dirty="0">
+                <a:solidFill>
+                  <a:srgbClr val="1F5722"/>
+                </a:solidFill>
+                <a:latin typeface="Calibri" pitchFamily="34" charset="0"/>
+                <a:ea typeface="Calibri" pitchFamily="34" charset="-122"/>
+                <a:cs typeface="Calibri" pitchFamily="34" charset="-120"/>
+              </a:rPr>
+              <a:t>B. Less sensitive</a:t>
+            </a:r>
+            <a:endParaRPr lang="en-US" sz="1350" dirty="0"/>
+          </a:p>
+          <a:p>
+            <a:pPr algn="l" indent="0" marL="0">
+              <a:spcAft>
+                <a:spcPts val="600"/>
+              </a:spcAft>
+              <a:buNone/>
+            </a:pPr>
+            <a:r>
+              <a:rPr lang="en-US" sz="1350" dirty="0">
+                <a:solidFill>
+                  <a:srgbClr val="33444F"/>
+                </a:solidFill>
+                <a:latin typeface="Calibri" pitchFamily="34" charset="0"/>
+                <a:ea typeface="Calibri" pitchFamily="34" charset="-122"/>
+                <a:cs typeface="Calibri" pitchFamily="34" charset="-120"/>
+              </a:rPr>
+              <a:t>C. Equally sensitive</a:t>
+            </a:r>
+            <a:endParaRPr lang="en-US" sz="1350" dirty="0"/>
+          </a:p>
+          <a:p>
+            <a:pPr algn="l" indent="0" marL="0">
+              <a:spcAft>
+                <a:spcPts val="600"/>
+              </a:spcAft>
+              <a:buNone/>
+            </a:pPr>
+            <a:r>
+              <a:rPr lang="en-US" sz="1350" dirty="0">
+                <a:solidFill>
+                  <a:srgbClr val="33444F"/>
+                </a:solidFill>
+                <a:latin typeface="Calibri" pitchFamily="34" charset="0"/>
+                <a:ea typeface="Calibri" pitchFamily="34" charset="-122"/>
+                <a:cs typeface="Calibri" pitchFamily="34" charset="-120"/>
+              </a:rPr>
+              <a:t>D. Quantitative</a:t>
+            </a:r>
+            <a:endParaRPr lang="en-US" sz="1350" dirty="0"/>
+          </a:p>
+          <a:p>
+            <a:pPr algn="l" indent="0" marL="0">
+              <a:spcAft>
+                <a:spcPts val="600"/>
+              </a:spcAft>
+              <a:buNone/>
+            </a:pPr>
+            <a:r>
+              <a:rPr lang="en-US" sz="1350" dirty="0">
+                <a:solidFill>
+                  <a:srgbClr val="33444F"/>
+                </a:solidFill>
+                <a:latin typeface="Calibri" pitchFamily="34" charset="0"/>
+                <a:ea typeface="Calibri" pitchFamily="34" charset="-122"/>
+                <a:cs typeface="Calibri" pitchFamily="34" charset="-120"/>
+              </a:rPr>
+              <a:t>E. Slower</a:t>
+            </a:r>
+            <a:endParaRPr lang="en-US" sz="1350" dirty="0"/>
+          </a:p>
+        </p:txBody>
+      </p:sp>
+      <p:sp>
+        <p:nvSpPr>
+          <p:cNvPr id="6" name="Shape 4"/>
+          <p:cNvSpPr/>
+          <p:nvPr/>
+        </p:nvSpPr>
+        <p:spPr>
+          <a:xfrm>
+            <a:off x="7201632" y="2395728"/>
+            <a:ext cx="4423136" cy="3246120"/>
+          </a:xfrm>
+          <a:prstGeom prst="roundRect">
+            <a:avLst>
+              <a:gd name="adj" fmla="val 2535"/>
+            </a:avLst>
+          </a:prstGeom>
+          <a:solidFill>
+            <a:srgbClr val="E8F2E9"/>
+          </a:solidFill>
+          <a:ln/>
+          <a:effectLst>
+            <a:outerShdw sx="100000" sy="100000" kx="0" ky="0" algn="bl" rotWithShape="0" blurRad="88900" dist="25400" dir="5400000">
+              <a:srgbClr val="22303C">
+                <a:alpha val="12000"/>
+              </a:srgbClr>
+            </a:outerShdw>
+          </a:effectLst>
+        </p:spPr>
+        <p:txBody>
+          <a:bodyPr/>
+          <a:p/>
+        </p:txBody>
+      </p:sp>
+      <p:sp>
+        <p:nvSpPr>
+          <p:cNvPr id="7" name="Text 5"/>
+          <p:cNvSpPr/>
+          <p:nvPr/>
+        </p:nvSpPr>
+        <p:spPr>
+          <a:xfrm>
+            <a:off x="7439376" y="2578608"/>
+            <a:ext cx="3965936" cy="457200"/>
+          </a:xfrm>
+          <a:prstGeom prst="rect">
+            <a:avLst/>
+          </a:prstGeom>
+          <a:noFill/>
+          <a:ln/>
+        </p:spPr>
+        <p:txBody>
+          <a:bodyPr wrap="square" lIns="0" tIns="0" rIns="0" bIns="0" rtlCol="0" anchor="ctr"/>
+          <a:lstStyle/>
+          <a:p>
+            <a:pPr indent="0" marL="0">
+              <a:buNone/>
+            </a:pPr>
+            <a:r>
+              <a:rPr lang="en-US" sz="1500" b="1" dirty="0">
+                <a:solidFill>
+                  <a:srgbClr val="2E7D32"/>
+                </a:solidFill>
+                <a:latin typeface="Calibri" pitchFamily="34" charset="0"/>
+                <a:ea typeface="Calibri" pitchFamily="34" charset="-122"/>
+                <a:cs typeface="Calibri" pitchFamily="34" charset="-120"/>
+              </a:rPr>
+              <a:t>ANSWER  </a:t>
+            </a:r>
+            <a:pPr indent="0" marL="0">
+              <a:buNone/>
+            </a:pPr>
+            <a:r>
+              <a:rPr lang="en-US" sz="1500" b="1" dirty="0">
+                <a:solidFill>
+                  <a:srgbClr val="1B2A38"/>
+                </a:solidFill>
+                <a:latin typeface="Calibri" pitchFamily="34" charset="0"/>
+                <a:ea typeface="Calibri" pitchFamily="34" charset="-122"/>
+                <a:cs typeface="Calibri" pitchFamily="34" charset="-120"/>
+              </a:rPr>
+              <a:t>B — Less sensitive</a:t>
+            </a:r>
+            <a:endParaRPr lang="en-US" sz="1500" dirty="0"/>
+          </a:p>
+        </p:txBody>
+      </p:sp>
+      <p:sp>
+        <p:nvSpPr>
+          <p:cNvPr id="8" name="Text 6"/>
+          <p:cNvSpPr/>
+          <p:nvPr/>
+        </p:nvSpPr>
+        <p:spPr>
+          <a:xfrm>
+            <a:off x="7439376" y="3127248"/>
+            <a:ext cx="3947648" cy="2377440"/>
+          </a:xfrm>
+          <a:prstGeom prst="rect">
+            <a:avLst/>
+          </a:prstGeom>
+          <a:noFill/>
+          <a:ln/>
+        </p:spPr>
+        <p:txBody>
+          <a:bodyPr wrap="square" lIns="0" tIns="0" rIns="0" bIns="0" rtlCol="0" anchor="t"/>
+          <a:lstStyle/>
+          <a:p>
+            <a:pPr algn="l" indent="0" marL="0">
+              <a:lnSpc>
+                <a:spcPct val="108000"/>
+              </a:lnSpc>
+              <a:buNone/>
+            </a:pPr>
+            <a:r>
+              <a:rPr lang="en-US" sz="1250" dirty="0">
+                <a:solidFill>
+                  <a:srgbClr val="33444F"/>
+                </a:solidFill>
+                <a:latin typeface="Calibri" pitchFamily="34" charset="0"/>
+                <a:ea typeface="Calibri" pitchFamily="34" charset="-122"/>
+                <a:cs typeface="Calibri" pitchFamily="34" charset="-120"/>
+              </a:rPr>
+              <a:t>Antigen tests trade sensitivity for speed/simplicity; negatives often need molecular confirmation when prevalence or stakes are high.</a:t>
+            </a:r>
+            <a:endParaRPr lang="en-US" sz="1250" dirty="0"/>
+          </a:p>
+        </p:txBody>
+      </p:sp>
+      <p:sp>
+        <p:nvSpPr>
+          <p:cNvPr id="9" name="Text 7"/>
+          <p:cNvSpPr/>
+          <p:nvPr/>
+        </p:nvSpPr>
+        <p:spPr>
+          <a:xfrm>
+            <a:off x="566928" y="6473952"/>
+            <a:ext cx="7772400" cy="274320"/>
+          </a:xfrm>
+          <a:prstGeom prst="rect">
+            <a:avLst/>
+          </a:prstGeom>
+          <a:noFill/>
+          <a:ln/>
+        </p:spPr>
+        <p:txBody>
+          <a:bodyPr wrap="square" lIns="0" tIns="0" rIns="0" bIns="0" rtlCol="0" anchor="ctr"/>
+          <a:lstStyle/>
+          <a:p>
+            <a:pPr algn="l" indent="0" marL="0">
+              <a:buNone/>
+            </a:pPr>
+            <a:r>
+              <a:rPr lang="en-US" sz="850" dirty="0">
+                <a:solidFill>
+                  <a:srgbClr val="9AA8B4"/>
+                </a:solidFill>
+                <a:latin typeface="Calibri" pitchFamily="34" charset="0"/>
+                <a:ea typeface="Calibri" pitchFamily="34" charset="-122"/>
+                <a:cs typeface="Calibri" pitchFamily="34" charset="-120"/>
+              </a:rPr>
+              <a:t>Makassed General Hospital  ·  Department of Laboratory Medicine</a:t>
+            </a:r>
+            <a:endParaRPr lang="en-US" sz="850" dirty="0"/>
+          </a:p>
+        </p:txBody>
+      </p:sp>
+      <p:sp>
+        <p:nvSpPr>
+          <p:cNvPr id="10" name="Text 8"/>
+          <p:cNvSpPr/>
+          <p:nvPr/>
+        </p:nvSpPr>
+        <p:spPr>
+          <a:xfrm>
+            <a:off x="9814255" y="6473952"/>
+            <a:ext cx="1828800" cy="274320"/>
+          </a:xfrm>
+          <a:prstGeom prst="rect">
+            <a:avLst/>
+          </a:prstGeom>
+          <a:noFill/>
+          <a:ln/>
+        </p:spPr>
+        <p:txBody>
+          <a:bodyPr wrap="square" lIns="0" tIns="0" rIns="0" bIns="0" rtlCol="0" anchor="ctr"/>
+          <a:lstStyle/>
+          <a:p>
+            <a:pPr algn="r" indent="0" marL="0">
+              <a:buNone/>
+            </a:pPr>
+            <a:r>
+              <a:rPr lang="en-US" sz="850" dirty="0">
+                <a:solidFill>
+                  <a:srgbClr val="9AA8B4"/>
+                </a:solidFill>
+                <a:latin typeface="Calibri" pitchFamily="34" charset="0"/>
+                <a:ea typeface="Calibri" pitchFamily="34" charset="-122"/>
+                <a:cs typeface="Calibri" pitchFamily="34" charset="-120"/>
+              </a:rPr>
+              <a:t>CP Lecture Series</a:t>
+            </a:r>
+            <a:pPr algn="r" indent="0" marL="0">
+              <a:buNone/>
+            </a:pPr>
+            <a:r>
+              <a:rPr lang="en-US" sz="850" dirty="0">
+                <a:solidFill>
+                  <a:srgbClr val="DCE4EC"/>
+                </a:solidFill>
+                <a:latin typeface="Calibri" pitchFamily="34" charset="0"/>
+                <a:ea typeface="Calibri" pitchFamily="34" charset="-122"/>
+                <a:cs typeface="Calibri" pitchFamily="34" charset="-120"/>
+              </a:rPr>
+              <a:t>   ·   </a:t>
+            </a:r>
+            <a:pPr algn="r" indent="0" marL="0">
+              <a:buNone/>
+            </a:pPr>
+            <a:r>
+              <a:rPr lang="en-US" sz="850" b="1" dirty="0">
+                <a:solidFill>
+                  <a:srgbClr val="2E7D32"/>
+                </a:solidFill>
+                <a:latin typeface="Calibri" pitchFamily="34" charset="0"/>
+                <a:ea typeface="Calibri" pitchFamily="34" charset="-122"/>
+                <a:cs typeface="Calibri" pitchFamily="34" charset="-120"/>
+              </a:rPr>
+              <a:t>18</a:t>
+            </a:r>
+            <a:endParaRPr lang="en-US" sz="850" dirty="0"/>
+          </a:p>
+        </p:txBody>
+      </p:sp>
+    </p:spTree>
+  </p:cSld>
+  <p:clrMapOvr>
+    <a:masterClrMapping/>
+  </p:clrMapOvr>
+</p:sld>
+</file>
+
+<file path=ppt/slides/slide29.xml><?xml version="1.0" encoding="utf-8"?>
+<p:sld xmlns:a="http://schemas.openxmlformats.org/drawingml/2006/main" xmlns:p="http://schemas.openxmlformats.org/presentationml/2006/main" xmlns:r="http://schemas.openxmlformats.org/officeDocument/2006/relationships">
+  <p:cSld>
+    <p:spTree>
+      <p:nvGrpSpPr>
+        <p:cNvPr id="1" name=""/>
+        <p:cNvGrpSpPr/>
+        <p:nvPr/>
+      </p:nvGrpSpPr>
+      <p:grpSpPr/>
+      <p:sp>
+        <p:nvSpPr>
+          <p:cNvPr id="2" name="Text 0"/>
+          <p:cNvSpPr/>
+          <p:nvPr/>
+        </p:nvSpPr>
+        <p:spPr>
+          <a:xfrm>
+            <a:off x="566928" y="329184"/>
+            <a:ext cx="10515600" cy="310896"/>
+          </a:xfrm>
+          <a:prstGeom prst="rect">
+            <a:avLst/>
+          </a:prstGeom>
+          <a:noFill/>
+          <a:ln/>
+        </p:spPr>
+        <p:txBody>
+          <a:bodyPr wrap="square" lIns="0" tIns="0" rIns="0" bIns="0" rtlCol="0" anchor="ctr"/>
+          <a:lstStyle/>
+          <a:p>
+            <a:pPr algn="l" indent="0" marL="0">
+              <a:buNone/>
+            </a:pPr>
+            <a:r>
+              <a:rPr lang="en-US" sz="1100" b="1" spc="150" kern="0" dirty="0">
+                <a:solidFill>
+                  <a:srgbClr val="2E7D32"/>
+                </a:solidFill>
+                <a:latin typeface="Calibri" pitchFamily="34" charset="0"/>
+                <a:ea typeface="Calibri" pitchFamily="34" charset="-122"/>
+                <a:cs typeface="Calibri" pitchFamily="34" charset="-120"/>
+              </a:rPr>
+              <a:t>MICROBIOLOGY   ·   BOARD REVIEW  ·  Q1</a:t>
+            </a:r>
+            <a:endParaRPr lang="en-US" sz="1100" dirty="0"/>
+          </a:p>
+        </p:txBody>
+      </p:sp>
+      <p:sp>
+        <p:nvSpPr>
+          <p:cNvPr id="3" name="Text 1"/>
+          <p:cNvSpPr/>
+          <p:nvPr/>
+        </p:nvSpPr>
+        <p:spPr>
+          <a:xfrm>
+            <a:off x="566928" y="713232"/>
+            <a:ext cx="11064240" cy="749808"/>
+          </a:xfrm>
+          <a:prstGeom prst="rect">
+            <a:avLst/>
+          </a:prstGeom>
+          <a:noFill/>
+          <a:ln/>
+        </p:spPr>
+        <p:txBody>
+          <a:bodyPr wrap="square" lIns="0" tIns="0" rIns="0" bIns="0" rtlCol="0" anchor="ctr"/>
+          <a:lstStyle/>
+          <a:p>
+            <a:pPr algn="l" indent="0" marL="0">
+              <a:buNone/>
+            </a:pPr>
+            <a:r>
+              <a:rPr lang="en-US" sz="2600" b="1" dirty="0">
+                <a:solidFill>
+                  <a:srgbClr val="0E3A5F"/>
+                </a:solidFill>
+                <a:latin typeface="Calibri" pitchFamily="34" charset="0"/>
+                <a:ea typeface="Calibri" pitchFamily="34" charset="-122"/>
+                <a:cs typeface="Calibri" pitchFamily="34" charset="-120"/>
+              </a:rPr>
+              <a:t>Board-Style Review</a:t>
+            </a:r>
+            <a:endParaRPr lang="en-US" sz="2600" dirty="0"/>
+          </a:p>
+        </p:txBody>
+      </p:sp>
+      <p:sp>
+        <p:nvSpPr>
+          <p:cNvPr id="4" name="Text 2"/>
+          <p:cNvSpPr/>
+          <p:nvPr/>
+        </p:nvSpPr>
+        <p:spPr>
+          <a:xfrm>
+            <a:off x="566928" y="1417320"/>
+            <a:ext cx="11057839" cy="914400"/>
+          </a:xfrm>
+          <a:prstGeom prst="rect">
+            <a:avLst/>
+          </a:prstGeom>
+          <a:noFill/>
+          <a:ln/>
+        </p:spPr>
+        <p:txBody>
+          <a:bodyPr wrap="square" lIns="0" tIns="0" rIns="0" bIns="0" rtlCol="0" anchor="t"/>
+          <a:lstStyle/>
+          <a:p>
+            <a:pPr algn="l" indent="0" marL="0">
+              <a:lnSpc>
+                <a:spcPct val="105000"/>
+              </a:lnSpc>
+              <a:buNone/>
+            </a:pPr>
+            <a:r>
+              <a:rPr lang="en-US" sz="1450" b="1" dirty="0">
+                <a:solidFill>
+                  <a:srgbClr val="1B2A38"/>
+                </a:solidFill>
+                <a:latin typeface="Calibri" pitchFamily="34" charset="0"/>
+                <a:ea typeface="Calibri" pitchFamily="34" charset="-122"/>
+                <a:cs typeface="Calibri" pitchFamily="34" charset="-120"/>
+              </a:rPr>
+              <a:t>The main interpretive caution with a positive C. difficile NAAT is that it:</a:t>
+            </a:r>
+            <a:endParaRPr lang="en-US" sz="1450" dirty="0"/>
+          </a:p>
+        </p:txBody>
+      </p:sp>
+      <p:sp>
+        <p:nvSpPr>
+          <p:cNvPr id="5" name="Text 3"/>
+          <p:cNvSpPr/>
+          <p:nvPr/>
+        </p:nvSpPr>
+        <p:spPr>
+          <a:xfrm>
+            <a:off x="658368" y="2395728"/>
+            <a:ext cx="6192390" cy="3017520"/>
+          </a:xfrm>
+          <a:prstGeom prst="rect">
+            <a:avLst/>
+          </a:prstGeom>
+          <a:noFill/>
+          <a:ln/>
+        </p:spPr>
+        <p:txBody>
+          <a:bodyPr wrap="square" lIns="0" tIns="0" rIns="0" bIns="0" rtlCol="0" anchor="t"/>
+          <a:lstStyle/>
+          <a:p>
+            <a:pPr algn="l" indent="0" marL="0">
+              <a:spcAft>
+                <a:spcPts val="600"/>
+              </a:spcAft>
+              <a:buNone/>
+            </a:pPr>
+            <a:r>
+              <a:rPr lang="en-US" sz="1350" dirty="0">
+                <a:solidFill>
+                  <a:srgbClr val="33444F"/>
+                </a:solidFill>
+                <a:latin typeface="Calibri" pitchFamily="34" charset="0"/>
+                <a:ea typeface="Calibri" pitchFamily="34" charset="-122"/>
+                <a:cs typeface="Calibri" pitchFamily="34" charset="-120"/>
+              </a:rPr>
+              <a:t>A. Is highly insensitive</a:t>
+            </a:r>
+            <a:endParaRPr lang="en-US" sz="1350" dirty="0"/>
+          </a:p>
+          <a:p>
+            <a:pPr algn="l" indent="0" marL="0">
+              <a:spcAft>
+                <a:spcPts val="600"/>
+              </a:spcAft>
+              <a:buNone/>
+            </a:pPr>
+            <a:r>
+              <a:rPr lang="en-US" sz="1350" b="1" dirty="0">
+                <a:solidFill>
+                  <a:srgbClr val="1F5722"/>
+                </a:solidFill>
+                <a:latin typeface="Calibri" pitchFamily="34" charset="0"/>
+                <a:ea typeface="Calibri" pitchFamily="34" charset="-122"/>
+                <a:cs typeface="Calibri" pitchFamily="34" charset="-120"/>
+              </a:rPr>
+              <a:t>B. Detects the toxin gene and may reflect colonization</a:t>
+            </a:r>
+            <a:endParaRPr lang="en-US" sz="1350" dirty="0"/>
+          </a:p>
+          <a:p>
+            <a:pPr algn="l" indent="0" marL="0">
+              <a:spcAft>
+                <a:spcPts val="600"/>
+              </a:spcAft>
+              <a:buNone/>
+            </a:pPr>
+            <a:r>
+              <a:rPr lang="en-US" sz="1350" dirty="0">
+                <a:solidFill>
+                  <a:srgbClr val="33444F"/>
+                </a:solidFill>
+                <a:latin typeface="Calibri" pitchFamily="34" charset="0"/>
+                <a:ea typeface="Calibri" pitchFamily="34" charset="-122"/>
+                <a:cs typeface="Calibri" pitchFamily="34" charset="-120"/>
+              </a:rPr>
+              <a:t>C. Cannot detect toxigenic strains</a:t>
+            </a:r>
+            <a:endParaRPr lang="en-US" sz="1350" dirty="0"/>
+          </a:p>
+          <a:p>
+            <a:pPr algn="l" indent="0" marL="0">
+              <a:spcAft>
+                <a:spcPts val="600"/>
+              </a:spcAft>
+              <a:buNone/>
+            </a:pPr>
+            <a:r>
+              <a:rPr lang="en-US" sz="1350" dirty="0">
+                <a:solidFill>
+                  <a:srgbClr val="33444F"/>
+                </a:solidFill>
+                <a:latin typeface="Calibri" pitchFamily="34" charset="0"/>
+                <a:ea typeface="Calibri" pitchFamily="34" charset="-122"/>
+                <a:cs typeface="Calibri" pitchFamily="34" charset="-120"/>
+              </a:rPr>
+              <a:t>D. Requires culture confirmation always</a:t>
+            </a:r>
+            <a:endParaRPr lang="en-US" sz="1350" dirty="0"/>
+          </a:p>
+          <a:p>
+            <a:pPr algn="l" indent="0" marL="0">
+              <a:spcAft>
+                <a:spcPts val="600"/>
+              </a:spcAft>
+              <a:buNone/>
+            </a:pPr>
+            <a:r>
+              <a:rPr lang="en-US" sz="1350" dirty="0">
+                <a:solidFill>
+                  <a:srgbClr val="33444F"/>
+                </a:solidFill>
+                <a:latin typeface="Calibri" pitchFamily="34" charset="0"/>
+                <a:ea typeface="Calibri" pitchFamily="34" charset="-122"/>
+                <a:cs typeface="Calibri" pitchFamily="34" charset="-120"/>
+              </a:rPr>
+              <a:t>E. Is quantitative</a:t>
+            </a:r>
+            <a:endParaRPr lang="en-US" sz="1350" dirty="0"/>
+          </a:p>
+        </p:txBody>
+      </p:sp>
+      <p:sp>
+        <p:nvSpPr>
+          <p:cNvPr id="6" name="Shape 4"/>
+          <p:cNvSpPr/>
+          <p:nvPr/>
+        </p:nvSpPr>
+        <p:spPr>
+          <a:xfrm>
+            <a:off x="7201632" y="2395728"/>
+            <a:ext cx="4423136" cy="3246120"/>
+          </a:xfrm>
+          <a:prstGeom prst="roundRect">
+            <a:avLst>
+              <a:gd name="adj" fmla="val 2535"/>
+            </a:avLst>
+          </a:prstGeom>
+          <a:solidFill>
+            <a:srgbClr val="E8F2E9"/>
+          </a:solidFill>
+          <a:ln/>
+          <a:effectLst>
+            <a:outerShdw sx="100000" sy="100000" kx="0" ky="0" algn="bl" rotWithShape="0" blurRad="88900" dist="25400" dir="5400000">
+              <a:srgbClr val="22303C">
+                <a:alpha val="12000"/>
+              </a:srgbClr>
+            </a:outerShdw>
+          </a:effectLst>
+        </p:spPr>
+        <p:txBody>
+          <a:bodyPr/>
+          <a:p/>
+        </p:txBody>
+      </p:sp>
+      <p:sp>
+        <p:nvSpPr>
+          <p:cNvPr id="7" name="Text 5"/>
+          <p:cNvSpPr/>
+          <p:nvPr/>
+        </p:nvSpPr>
+        <p:spPr>
+          <a:xfrm>
+            <a:off x="7439376" y="2578608"/>
+            <a:ext cx="3965936" cy="457200"/>
+          </a:xfrm>
+          <a:prstGeom prst="rect">
+            <a:avLst/>
+          </a:prstGeom>
+          <a:noFill/>
+          <a:ln/>
+        </p:spPr>
+        <p:txBody>
+          <a:bodyPr wrap="square" lIns="0" tIns="0" rIns="0" bIns="0" rtlCol="0" anchor="ctr"/>
+          <a:lstStyle/>
+          <a:p>
+            <a:pPr indent="0" marL="0">
+              <a:buNone/>
+            </a:pPr>
+            <a:r>
+              <a:rPr lang="en-US" sz="1500" b="1" dirty="0">
+                <a:solidFill>
+                  <a:srgbClr val="2E7D32"/>
+                </a:solidFill>
+                <a:latin typeface="Calibri" pitchFamily="34" charset="0"/>
+                <a:ea typeface="Calibri" pitchFamily="34" charset="-122"/>
+                <a:cs typeface="Calibri" pitchFamily="34" charset="-120"/>
+              </a:rPr>
+              <a:t>ANSWER  </a:t>
+            </a:r>
+            <a:pPr indent="0" marL="0">
+              <a:buNone/>
+            </a:pPr>
+            <a:r>
+              <a:rPr lang="en-US" sz="1500" b="1" dirty="0">
+                <a:solidFill>
+                  <a:srgbClr val="1B2A38"/>
+                </a:solidFill>
+                <a:latin typeface="Calibri" pitchFamily="34" charset="0"/>
+                <a:ea typeface="Calibri" pitchFamily="34" charset="-122"/>
+                <a:cs typeface="Calibri" pitchFamily="34" charset="-120"/>
+              </a:rPr>
+              <a:t>B — Detects gene; may reflect colonization</a:t>
+            </a:r>
+            <a:endParaRPr lang="en-US" sz="1500" dirty="0"/>
+          </a:p>
+        </p:txBody>
+      </p:sp>
+      <p:sp>
+        <p:nvSpPr>
+          <p:cNvPr id="8" name="Text 6"/>
+          <p:cNvSpPr/>
+          <p:nvPr/>
+        </p:nvSpPr>
+        <p:spPr>
+          <a:xfrm>
+            <a:off x="7439376" y="3127248"/>
+            <a:ext cx="3947648" cy="2377440"/>
+          </a:xfrm>
+          <a:prstGeom prst="rect">
+            <a:avLst/>
+          </a:prstGeom>
+          <a:noFill/>
+          <a:ln/>
+        </p:spPr>
+        <p:txBody>
+          <a:bodyPr wrap="square" lIns="0" tIns="0" rIns="0" bIns="0" rtlCol="0" anchor="t"/>
+          <a:lstStyle/>
+          <a:p>
+            <a:pPr algn="l" indent="0" marL="0">
+              <a:lnSpc>
+                <a:spcPct val="108000"/>
+              </a:lnSpc>
+              <a:buNone/>
+            </a:pPr>
+            <a:r>
+              <a:rPr lang="en-US" sz="1250" dirty="0">
+                <a:solidFill>
+                  <a:srgbClr val="33444F"/>
+                </a:solidFill>
+                <a:latin typeface="Calibri" pitchFamily="34" charset="0"/>
+                <a:ea typeface="Calibri" pitchFamily="34" charset="-122"/>
+                <a:cs typeface="Calibri" pitchFamily="34" charset="-120"/>
+              </a:rPr>
+              <a:t>NAAT detects the toxin gene; in patients without clinically significant diarrhea it may indicate carriage, leading to overtreatment.</a:t>
+            </a:r>
+            <a:endParaRPr lang="en-US" sz="1250" dirty="0"/>
+          </a:p>
+        </p:txBody>
+      </p:sp>
+      <p:sp>
+        <p:nvSpPr>
+          <p:cNvPr id="9" name="Text 7"/>
+          <p:cNvSpPr/>
+          <p:nvPr/>
+        </p:nvSpPr>
+        <p:spPr>
+          <a:xfrm>
+            <a:off x="566928" y="6473952"/>
+            <a:ext cx="7772400" cy="274320"/>
+          </a:xfrm>
+          <a:prstGeom prst="rect">
+            <a:avLst/>
+          </a:prstGeom>
+          <a:noFill/>
+          <a:ln/>
+        </p:spPr>
+        <p:txBody>
+          <a:bodyPr wrap="square" lIns="0" tIns="0" rIns="0" bIns="0" rtlCol="0" anchor="ctr"/>
+          <a:lstStyle/>
+          <a:p>
+            <a:pPr algn="l" indent="0" marL="0">
+              <a:buNone/>
+            </a:pPr>
+            <a:r>
+              <a:rPr lang="en-US" sz="850" dirty="0">
+                <a:solidFill>
+                  <a:srgbClr val="9AA8B4"/>
+                </a:solidFill>
+                <a:latin typeface="Calibri" pitchFamily="34" charset="0"/>
+                <a:ea typeface="Calibri" pitchFamily="34" charset="-122"/>
+                <a:cs typeface="Calibri" pitchFamily="34" charset="-120"/>
+              </a:rPr>
+              <a:t>Makassed General Hospital  ·  Department of Laboratory Medicine</a:t>
+            </a:r>
+            <a:endParaRPr lang="en-US" sz="850" dirty="0"/>
+          </a:p>
+        </p:txBody>
+      </p:sp>
+      <p:sp>
+        <p:nvSpPr>
+          <p:cNvPr id="10" name="Text 8"/>
+          <p:cNvSpPr/>
+          <p:nvPr/>
+        </p:nvSpPr>
+        <p:spPr>
+          <a:xfrm>
+            <a:off x="9814255" y="6473952"/>
+            <a:ext cx="1828800" cy="274320"/>
+          </a:xfrm>
+          <a:prstGeom prst="rect">
+            <a:avLst/>
+          </a:prstGeom>
+          <a:noFill/>
+          <a:ln/>
+        </p:spPr>
+        <p:txBody>
+          <a:bodyPr wrap="square" lIns="0" tIns="0" rIns="0" bIns="0" rtlCol="0" anchor="ctr"/>
+          <a:lstStyle/>
+          <a:p>
+            <a:pPr algn="r" indent="0" marL="0">
+              <a:buNone/>
+            </a:pPr>
+            <a:r>
+              <a:rPr lang="en-US" sz="850" dirty="0">
+                <a:solidFill>
+                  <a:srgbClr val="9AA8B4"/>
+                </a:solidFill>
+                <a:latin typeface="Calibri" pitchFamily="34" charset="0"/>
+                <a:ea typeface="Calibri" pitchFamily="34" charset="-122"/>
+                <a:cs typeface="Calibri" pitchFamily="34" charset="-120"/>
+              </a:rPr>
+              <a:t>CP Lecture Series</a:t>
+            </a:r>
+            <a:pPr algn="r" indent="0" marL="0">
+              <a:buNone/>
+            </a:pPr>
+            <a:r>
+              <a:rPr lang="en-US" sz="850" dirty="0">
+                <a:solidFill>
+                  <a:srgbClr val="DCE4EC"/>
+                </a:solidFill>
+                <a:latin typeface="Calibri" pitchFamily="34" charset="0"/>
+                <a:ea typeface="Calibri" pitchFamily="34" charset="-122"/>
+                <a:cs typeface="Calibri" pitchFamily="34" charset="-120"/>
+              </a:rPr>
+              <a:t>   ·   </a:t>
+            </a:r>
+            <a:pPr algn="r" indent="0" marL="0">
+              <a:buNone/>
+            </a:pPr>
+            <a:r>
+              <a:rPr lang="en-US" sz="850" b="1" dirty="0">
+                <a:solidFill>
+                  <a:srgbClr val="2E7D32"/>
+                </a:solidFill>
+                <a:latin typeface="Calibri" pitchFamily="34" charset="0"/>
+                <a:ea typeface="Calibri" pitchFamily="34" charset="-122"/>
+                <a:cs typeface="Calibri" pitchFamily="34" charset="-120"/>
+              </a:rPr>
+              <a:t>17</a:t>
+            </a:r>
+            <a:endParaRPr lang="en-US" sz="850" dirty="0"/>
+          </a:p>
+        </p:txBody>
+      </p:sp>
+    </p:spTree>
+  </p:cSld>
+  <p:clrMapOvr>
+    <a:masterClrMapping/>
+  </p:clrMapOvr>
+</p:sld>
+</file>
+
 <file path=ppt/slides/slide3.xml><?xml version="1.0" encoding="utf-8"?>
 <p:sld xmlns:a="http://schemas.openxmlformats.org/drawingml/2006/main" xmlns:r="http://schemas.openxmlformats.org/officeDocument/2006/relationships" xmlns:p="http://schemas.openxmlformats.org/presentationml/2006/main">
   <p:cSld name="Slide 3">
@@ -11802,6 +13426,10 @@
             </a:outerShdw>
           </a:effectLst>
         </p:spPr>
+        <p:txBody>
+          <a:bodyPr/>
+          <a:p/>
+        </p:txBody>
       </p:sp>
       <p:sp>
         <p:nvSpPr>
@@ -11829,6 +13457,10 @@
             </a:outerShdw>
           </a:effectLst>
         </p:spPr>
+        <p:txBody>
+          <a:bodyPr/>
+          <a:p/>
+        </p:txBody>
       </p:sp>
       <p:sp>
         <p:nvSpPr>
@@ -11936,6 +13568,10 @@
             </a:outerShdw>
           </a:effectLst>
         </p:spPr>
+        <p:txBody>
+          <a:bodyPr/>
+          <a:p/>
+        </p:txBody>
       </p:sp>
       <p:sp>
         <p:nvSpPr>
@@ -11963,6 +13599,10 @@
             </a:outerShdw>
           </a:effectLst>
         </p:spPr>
+        <p:txBody>
+          <a:bodyPr/>
+          <a:p/>
+        </p:txBody>
       </p:sp>
       <p:sp>
         <p:nvSpPr>
@@ -12070,6 +13710,10 @@
             </a:outerShdw>
           </a:effectLst>
         </p:spPr>
+        <p:txBody>
+          <a:bodyPr/>
+          <a:p/>
+        </p:txBody>
       </p:sp>
       <p:sp>
         <p:nvSpPr>
@@ -12097,6 +13741,10 @@
             </a:outerShdw>
           </a:effectLst>
         </p:spPr>
+        <p:txBody>
+          <a:bodyPr/>
+          <a:p/>
+        </p:txBody>
       </p:sp>
       <p:sp>
         <p:nvSpPr>
@@ -12204,6 +13852,10 @@
             </a:outerShdw>
           </a:effectLst>
         </p:spPr>
+        <p:txBody>
+          <a:bodyPr/>
+          <a:p/>
+        </p:txBody>
       </p:sp>
       <p:sp>
         <p:nvSpPr>
@@ -12231,6 +13883,10 @@
             </a:outerShdw>
           </a:effectLst>
         </p:spPr>
+        <p:txBody>
+          <a:bodyPr/>
+          <a:p/>
+        </p:txBody>
       </p:sp>
       <p:sp>
         <p:nvSpPr>
@@ -12338,6 +13994,10 @@
             </a:outerShdw>
           </a:effectLst>
         </p:spPr>
+        <p:txBody>
+          <a:bodyPr/>
+          <a:p/>
+        </p:txBody>
       </p:sp>
       <p:sp>
         <p:nvSpPr>
@@ -12365,6 +14025,10 @@
             </a:outerShdw>
           </a:effectLst>
         </p:spPr>
+        <p:txBody>
+          <a:bodyPr/>
+          <a:p/>
+        </p:txBody>
       </p:sp>
       <p:sp>
         <p:nvSpPr>
@@ -12472,6 +14136,10 @@
             </a:outerShdw>
           </a:effectLst>
         </p:spPr>
+        <p:txBody>
+          <a:bodyPr/>
+          <a:p/>
+        </p:txBody>
       </p:sp>
       <p:sp>
         <p:nvSpPr>
@@ -12499,6 +14167,10 @@
             </a:outerShdw>
           </a:effectLst>
         </p:spPr>
+        <p:txBody>
+          <a:bodyPr/>
+          <a:p/>
+        </p:txBody>
       </p:sp>
       <p:sp>
         <p:nvSpPr>
@@ -12822,6 +14494,10 @@
             </a:outerShdw>
           </a:effectLst>
         </p:spPr>
+        <p:txBody>
+          <a:bodyPr/>
+          <a:p/>
+        </p:txBody>
       </p:sp>
       <p:sp>
         <p:nvSpPr>
@@ -12849,6 +14525,10 @@
             </a:outerShdw>
           </a:effectLst>
         </p:spPr>
+        <p:txBody>
+          <a:bodyPr/>
+          <a:p/>
+        </p:txBody>
       </p:sp>
       <p:sp>
         <p:nvSpPr>
@@ -12963,6 +14643,10 @@
           </a:solidFill>
           <a:ln/>
         </p:spPr>
+        <p:txBody>
+          <a:bodyPr/>
+          <a:p/>
+        </p:txBody>
       </p:sp>
       <p:sp>
         <p:nvSpPr>
@@ -12990,6 +14674,10 @@
             </a:outerShdw>
           </a:effectLst>
         </p:spPr>
+        <p:txBody>
+          <a:bodyPr/>
+          <a:p/>
+        </p:txBody>
       </p:sp>
       <p:sp>
         <p:nvSpPr>
@@ -13111,6 +14799,10 @@
             </a:outerShdw>
           </a:effectLst>
         </p:spPr>
+        <p:txBody>
+          <a:bodyPr/>
+          <a:p/>
+        </p:txBody>
       </p:sp>
       <p:sp>
         <p:nvSpPr>
@@ -13138,6 +14830,10 @@
             </a:outerShdw>
           </a:effectLst>
         </p:spPr>
+        <p:txBody>
+          <a:bodyPr/>
+          <a:p/>
+        </p:txBody>
       </p:sp>
       <p:sp>
         <p:nvSpPr>
@@ -13252,6 +14948,10 @@
           </a:solidFill>
           <a:ln/>
         </p:spPr>
+        <p:txBody>
+          <a:bodyPr/>
+          <a:p/>
+        </p:txBody>
       </p:sp>
       <p:sp>
         <p:nvSpPr>
@@ -13279,6 +14979,10 @@
             </a:outerShdw>
           </a:effectLst>
         </p:spPr>
+        <p:txBody>
+          <a:bodyPr/>
+          <a:p/>
+        </p:txBody>
       </p:sp>
       <p:sp>
         <p:nvSpPr>
@@ -13400,6 +15104,10 @@
             </a:outerShdw>
           </a:effectLst>
         </p:spPr>
+        <p:txBody>
+          <a:bodyPr/>
+          <a:p/>
+        </p:txBody>
       </p:sp>
       <p:sp>
         <p:nvSpPr>
@@ -13427,6 +15135,10 @@
             </a:outerShdw>
           </a:effectLst>
         </p:spPr>
+        <p:txBody>
+          <a:bodyPr/>
+          <a:p/>
+        </p:txBody>
       </p:sp>
       <p:sp>
         <p:nvSpPr>
@@ -13665,6 +15377,10 @@
           </a:solidFill>
           <a:ln/>
         </p:spPr>
+        <p:txBody>
+          <a:bodyPr/>
+          <a:p/>
+        </p:txBody>
       </p:sp>
       <p:sp>
         <p:nvSpPr>
@@ -13687,6 +15403,10 @@
           </a:solidFill>
           <a:ln/>
         </p:spPr>
+        <p:txBody>
+          <a:bodyPr/>
+          <a:p/>
+        </p:txBody>
       </p:sp>
       <p:sp>
         <p:nvSpPr>
@@ -13948,6 +15668,10 @@
             </a:outerShdw>
           </a:effectLst>
         </p:spPr>
+        <p:txBody>
+          <a:bodyPr/>
+          <a:p/>
+        </p:txBody>
       </p:sp>
       <p:pic>
         <p:nvPicPr>
@@ -14261,6 +15985,10 @@
             </a:outerShdw>
           </a:effectLst>
         </p:spPr>
+        <p:txBody>
+          <a:bodyPr/>
+          <a:p/>
+        </p:txBody>
       </p:sp>
       <p:pic>
         <p:nvPicPr>
@@ -14569,6 +16297,10 @@
             </a:outerShdw>
           </a:effectLst>
         </p:spPr>
+        <p:txBody>
+          <a:bodyPr/>
+          <a:p/>
+        </p:txBody>
       </p:sp>
       <p:sp>
         <p:nvSpPr>
@@ -14743,6 +16475,10 @@
             </a:outerShdw>
           </a:effectLst>
         </p:spPr>
+        <p:txBody>
+          <a:bodyPr/>
+          <a:p/>
+        </p:txBody>
       </p:sp>
       <p:sp>
         <p:nvSpPr>
@@ -15048,6 +16784,10 @@
           </a:solidFill>
           <a:ln/>
         </p:spPr>
+        <p:txBody>
+          <a:bodyPr/>
+          <a:p/>
+        </p:txBody>
       </p:sp>
       <p:sp>
         <p:nvSpPr>
@@ -15070,6 +16810,10 @@
           </a:solidFill>
           <a:ln/>
         </p:spPr>
+        <p:txBody>
+          <a:bodyPr/>
+          <a:p/>
+        </p:txBody>
       </p:sp>
       <p:sp>
         <p:nvSpPr>
